--- a/slides/datasets-in-10-minutes-ccpm.pptx
+++ b/slides/datasets-in-10-minutes-ccpm.pptx
@@ -22,16 +22,12 @@
     <p:sldId id="270" r:id="rId20"/>
     <p:sldId id="271" r:id="rId21"/>
     <p:sldId id="272" r:id="rId22"/>
-    <p:sldId id="273" r:id="rId23"/>
     <p:sldId id="274" r:id="rId24"/>
     <p:sldId id="275" r:id="rId25"/>
     <p:sldId id="276" r:id="rId26"/>
     <p:sldId id="277" r:id="rId27"/>
-    <p:sldId id="278" r:id="rId28"/>
     <p:sldId id="279" r:id="rId29"/>
     <p:sldId id="280" r:id="rId30"/>
-    <p:sldId id="281" r:id="rId31"/>
-    <p:sldId id="282" r:id="rId32"/>
     <p:sldId id="283" r:id="rId33"/>
     <p:sldId id="284" r:id="rId34"/>
     <p:sldId id="285" r:id="rId35"/>
@@ -48,9 +44,7 @@
     <p:sldId id="296" r:id="rId46"/>
     <p:sldId id="297" r:id="rId47"/>
     <p:sldId id="298" r:id="rId48"/>
-    <p:sldId id="299" r:id="rId49"/>
     <p:sldId id="300" r:id="rId50"/>
-    <p:sldId id="301" r:id="rId51"/>
     <p:sldId id="302" r:id="rId52"/>
     <p:sldId id="303" r:id="rId53"/>
     <p:sldId id="304" r:id="rId54"/>
@@ -58,7 +52,6 @@
     <p:sldId id="306" r:id="rId56"/>
     <p:sldId id="307" r:id="rId57"/>
     <p:sldId id="308" r:id="rId58"/>
-    <p:sldId id="309" r:id="rId59"/>
   </p:sldIdLst>
   <p:sldSz cx="9144000" cy="5143500" type="screen16x9"/>
   <p:notesSz cx="6858000" cy="9144000"/>
@@ -7581,742 +7574,6 @@
       </p:sp>
       <p:sp>
         <p:nvSpPr>
-          <p:cNvPr id="4" name="Rounded Rectangle 3"/>
-          <p:cNvSpPr/>
-          <p:nvPr/>
-        </p:nvSpPr>
-        <p:spPr>
-          <a:xfrm>
-            <a:off x="548640" y="1737360"/>
-            <a:ext cx="1874519" cy="1097280"/>
-          </a:xfrm>
-          <a:prstGeom prst="roundRect">
-            <a:avLst/>
-          </a:prstGeom>
-          <a:solidFill>
-            <a:srgbClr val="EBEDEB"/>
-          </a:solidFill>
-          <a:ln>
-            <a:solidFill>
-              <a:srgbClr val="626669"/>
-            </a:solidFill>
-          </a:ln>
-        </p:spPr>
-        <p:style>
-          <a:lnRef idx="1">
-            <a:schemeClr val="accent1"/>
-          </a:lnRef>
-          <a:fillRef idx="3">
-            <a:schemeClr val="accent1"/>
-          </a:fillRef>
-          <a:effectRef idx="2">
-            <a:schemeClr val="accent1"/>
-          </a:effectRef>
-          <a:fontRef idx="minor">
-            <a:schemeClr val="lt1"/>
-          </a:fontRef>
-        </p:style>
-        <p:txBody>
-          <a:bodyPr rtlCol="0" anchor="ctr"/>
-          <a:lstStyle/>
-          <a:p>
-            <a:pPr algn="ctr"/>
-          </a:p>
-        </p:txBody>
-      </p:sp>
-      <p:sp>
-        <p:nvSpPr>
-          <p:cNvPr id="5" name="TextBox 4"/>
-          <p:cNvSpPr txBox="1"/>
-          <p:nvPr/>
-        </p:nvSpPr>
-        <p:spPr>
-          <a:xfrm>
-            <a:off x="658368" y="1847088"/>
-            <a:ext cx="1655063" cy="877824"/>
-          </a:xfrm>
-          <a:prstGeom prst="rect">
-            <a:avLst/>
-          </a:prstGeom>
-          <a:noFill/>
-        </p:spPr>
-        <p:txBody>
-          <a:bodyPr wrap="square" lIns="0" rIns="0" tIns="0" bIns="0">
-            <a:noAutofit/>
-          </a:bodyPr>
-          <a:lstStyle/>
-          <a:p>
-            <a:pPr algn="l">
-              <a:lnSpc>
-                <a:spcPts val="1989"/>
-              </a:lnSpc>
-              <a:spcBef>
-                <a:spcPts val="0"/>
-              </a:spcBef>
-              <a:spcAft>
-                <a:spcPts val="0"/>
-              </a:spcAft>
-              <a:buNone/>
-              <a:defRPr sz="1700" b="0">
-                <a:solidFill>
-                  <a:srgbClr val="303437"/>
-                </a:solidFill>
-                <a:latin typeface="Noto Sans"/>
-              </a:defRPr>
-            </a:pPr>
-            <a:r>
-              <a:rPr sz="1700" b="0" lang="ja-JP" altLang="en-US">
-                <a:solidFill>
-                  <a:srgbClr val="303437"/>
-                </a:solidFill>
-                <a:latin typeface="Noto Sans"/>
-                <a:ea typeface="Noto Sans CJK JP"/>
-                <a:cs typeface="Noto Sans"/>
-              </a:rPr>
-              <a:t>Webの古典文と</a:t>
-            </a:r>
-          </a:p>
-          <a:p>
-            <a:pPr algn="l">
-              <a:lnSpc>
-                <a:spcPts val="1989"/>
-              </a:lnSpc>
-              <a:spcBef>
-                <a:spcPts val="0"/>
-              </a:spcBef>
-              <a:spcAft>
-                <a:spcPts val="0"/>
-              </a:spcAft>
-              <a:buNone/>
-              <a:defRPr sz="1700" b="0">
-                <a:solidFill>
-                  <a:srgbClr val="303437"/>
-                </a:solidFill>
-                <a:latin typeface="Noto Sans"/>
-              </a:defRPr>
-            </a:pPr>
-            <a:r>
-              <a:rPr sz="1700" b="0" lang="ja-JP" altLang="en-US">
-                <a:solidFill>
-                  <a:srgbClr val="303437"/>
-                </a:solidFill>
-                <a:latin typeface="Noto Sans"/>
-                <a:ea typeface="Noto Sans CJK JP"/>
-                <a:cs typeface="Noto Sans"/>
-              </a:rPr>
-              <a:t>現代語訳を収集</a:t>
-            </a:r>
-          </a:p>
-        </p:txBody>
-      </p:sp>
-      <p:sp>
-        <p:nvSpPr>
-          <p:cNvPr id="6" name="TextBox 5"/>
-          <p:cNvSpPr txBox="1"/>
-          <p:nvPr/>
-        </p:nvSpPr>
-        <p:spPr>
-          <a:xfrm>
-            <a:off x="2432304" y="2029968"/>
-            <a:ext cx="182880" cy="274320"/>
-          </a:xfrm>
-          <a:prstGeom prst="rect">
-            <a:avLst/>
-          </a:prstGeom>
-          <a:noFill/>
-        </p:spPr>
-        <p:txBody>
-          <a:bodyPr wrap="square" lIns="0" rIns="0" tIns="0" bIns="0">
-            <a:noAutofit/>
-          </a:bodyPr>
-          <a:lstStyle/>
-          <a:p>
-            <a:pPr algn="l">
-              <a:lnSpc>
-                <a:spcPts val="2106"/>
-              </a:lnSpc>
-              <a:spcBef>
-                <a:spcPts val="0"/>
-              </a:spcBef>
-              <a:spcAft>
-                <a:spcPts val="0"/>
-              </a:spcAft>
-              <a:buNone/>
-              <a:defRPr sz="1800" b="0">
-                <a:solidFill>
-                  <a:srgbClr val="303437"/>
-                </a:solidFill>
-                <a:latin typeface="Noto Sans"/>
-              </a:defRPr>
-            </a:pPr>
-            <a:r>
-              <a:rPr sz="1800" b="0" lang="ja-JP" altLang="en-US">
-                <a:solidFill>
-                  <a:srgbClr val="303437"/>
-                </a:solidFill>
-                <a:latin typeface="Noto Sans"/>
-                <a:ea typeface="Noto Sans CJK JP"/>
-                <a:cs typeface="Noto Sans"/>
-              </a:rPr>
-              <a:t>→</a:t>
-            </a:r>
-          </a:p>
-        </p:txBody>
-      </p:sp>
-      <p:sp>
-        <p:nvSpPr>
-          <p:cNvPr id="7" name="Rounded Rectangle 6"/>
-          <p:cNvSpPr/>
-          <p:nvPr/>
-        </p:nvSpPr>
-        <p:spPr>
-          <a:xfrm>
-            <a:off x="2606040" y="1737360"/>
-            <a:ext cx="1874519" cy="1097280"/>
-          </a:xfrm>
-          <a:prstGeom prst="roundRect">
-            <a:avLst/>
-          </a:prstGeom>
-          <a:solidFill>
-            <a:srgbClr val="EBEDEB"/>
-          </a:solidFill>
-          <a:ln>
-            <a:solidFill>
-              <a:srgbClr val="626669"/>
-            </a:solidFill>
-          </a:ln>
-        </p:spPr>
-        <p:style>
-          <a:lnRef idx="1">
-            <a:schemeClr val="accent1"/>
-          </a:lnRef>
-          <a:fillRef idx="3">
-            <a:schemeClr val="accent1"/>
-          </a:fillRef>
-          <a:effectRef idx="2">
-            <a:schemeClr val="accent1"/>
-          </a:effectRef>
-          <a:fontRef idx="minor">
-            <a:schemeClr val="lt1"/>
-          </a:fontRef>
-        </p:style>
-        <p:txBody>
-          <a:bodyPr rtlCol="0" anchor="ctr"/>
-          <a:lstStyle/>
-          <a:p>
-            <a:pPr algn="ctr"/>
-          </a:p>
-        </p:txBody>
-      </p:sp>
-      <p:sp>
-        <p:nvSpPr>
-          <p:cNvPr id="8" name="TextBox 7"/>
-          <p:cNvSpPr txBox="1"/>
-          <p:nvPr/>
-        </p:nvSpPr>
-        <p:spPr>
-          <a:xfrm>
-            <a:off x="2715768" y="1847088"/>
-            <a:ext cx="1655063" cy="877824"/>
-          </a:xfrm>
-          <a:prstGeom prst="rect">
-            <a:avLst/>
-          </a:prstGeom>
-          <a:noFill/>
-        </p:spPr>
-        <p:txBody>
-          <a:bodyPr wrap="square" lIns="0" rIns="0" tIns="0" bIns="0">
-            <a:noAutofit/>
-          </a:bodyPr>
-          <a:lstStyle/>
-          <a:p>
-            <a:pPr algn="l">
-              <a:lnSpc>
-                <a:spcPts val="1989"/>
-              </a:lnSpc>
-              <a:spcBef>
-                <a:spcPts val="0"/>
-              </a:spcBef>
-              <a:spcAft>
-                <a:spcPts val="0"/>
-              </a:spcAft>
-              <a:buNone/>
-              <a:defRPr sz="1700" b="0">
-                <a:solidFill>
-                  <a:srgbClr val="303437"/>
-                </a:solidFill>
-                <a:latin typeface="Noto Sans"/>
-              </a:defRPr>
-            </a:pPr>
-            <a:r>
-              <a:rPr sz="1700" b="0" lang="ja-JP" altLang="en-US">
-                <a:solidFill>
-                  <a:srgbClr val="303437"/>
-                </a:solidFill>
-                <a:latin typeface="Noto Sans"/>
-                <a:ea typeface="Noto Sans CJK JP"/>
-                <a:cs typeface="Noto Sans"/>
-              </a:rPr>
-              <a:t>行ごとに分割し</a:t>
-            </a:r>
-          </a:p>
-          <a:p>
-            <a:pPr algn="l">
-              <a:lnSpc>
-                <a:spcPts val="1989"/>
-              </a:lnSpc>
-              <a:spcBef>
-                <a:spcPts val="0"/>
-              </a:spcBef>
-              <a:spcAft>
-                <a:spcPts val="0"/>
-              </a:spcAft>
-              <a:buNone/>
-              <a:defRPr sz="1700" b="0">
-                <a:solidFill>
-                  <a:srgbClr val="303437"/>
-                </a:solidFill>
-                <a:latin typeface="Noto Sans"/>
-              </a:defRPr>
-            </a:pPr>
-            <a:r>
-              <a:rPr sz="1700" b="0" lang="ja-JP" altLang="en-US">
-                <a:solidFill>
-                  <a:srgbClr val="303437"/>
-                </a:solidFill>
-                <a:latin typeface="Noto Sans"/>
-                <a:ea typeface="Noto Sans CJK JP"/>
-                <a:cs typeface="Noto Sans"/>
-              </a:rPr>
-              <a:t>詩型で絞り込む</a:t>
-            </a:r>
-          </a:p>
-        </p:txBody>
-      </p:sp>
-      <p:sp>
-        <p:nvSpPr>
-          <p:cNvPr id="9" name="TextBox 8"/>
-          <p:cNvSpPr txBox="1"/>
-          <p:nvPr/>
-        </p:nvSpPr>
-        <p:spPr>
-          <a:xfrm>
-            <a:off x="4489704" y="2029968"/>
-            <a:ext cx="182880" cy="274320"/>
-          </a:xfrm>
-          <a:prstGeom prst="rect">
-            <a:avLst/>
-          </a:prstGeom>
-          <a:noFill/>
-        </p:spPr>
-        <p:txBody>
-          <a:bodyPr wrap="square" lIns="0" rIns="0" tIns="0" bIns="0">
-            <a:noAutofit/>
-          </a:bodyPr>
-          <a:lstStyle/>
-          <a:p>
-            <a:pPr algn="l">
-              <a:lnSpc>
-                <a:spcPts val="2106"/>
-              </a:lnSpc>
-              <a:spcBef>
-                <a:spcPts val="0"/>
-              </a:spcBef>
-              <a:spcAft>
-                <a:spcPts val="0"/>
-              </a:spcAft>
-              <a:buNone/>
-              <a:defRPr sz="1800" b="0">
-                <a:solidFill>
-                  <a:srgbClr val="303437"/>
-                </a:solidFill>
-                <a:latin typeface="Noto Sans"/>
-              </a:defRPr>
-            </a:pPr>
-            <a:r>
-              <a:rPr sz="1800" b="0" lang="ja-JP" altLang="en-US">
-                <a:solidFill>
-                  <a:srgbClr val="303437"/>
-                </a:solidFill>
-                <a:latin typeface="Noto Sans"/>
-                <a:ea typeface="Noto Sans CJK JP"/>
-                <a:cs typeface="Noto Sans"/>
-              </a:rPr>
-              <a:t>→</a:t>
-            </a:r>
-          </a:p>
-        </p:txBody>
-      </p:sp>
-      <p:sp>
-        <p:nvSpPr>
-          <p:cNvPr id="10" name="Rounded Rectangle 9"/>
-          <p:cNvSpPr/>
-          <p:nvPr/>
-        </p:nvSpPr>
-        <p:spPr>
-          <a:xfrm>
-            <a:off x="4663440" y="1737360"/>
-            <a:ext cx="1874519" cy="1097280"/>
-          </a:xfrm>
-          <a:prstGeom prst="roundRect">
-            <a:avLst/>
-          </a:prstGeom>
-          <a:solidFill>
-            <a:srgbClr val="EBEDEB"/>
-          </a:solidFill>
-          <a:ln>
-            <a:solidFill>
-              <a:srgbClr val="626669"/>
-            </a:solidFill>
-          </a:ln>
-        </p:spPr>
-        <p:style>
-          <a:lnRef idx="1">
-            <a:schemeClr val="accent1"/>
-          </a:lnRef>
-          <a:fillRef idx="3">
-            <a:schemeClr val="accent1"/>
-          </a:fillRef>
-          <a:effectRef idx="2">
-            <a:schemeClr val="accent1"/>
-          </a:effectRef>
-          <a:fontRef idx="minor">
-            <a:schemeClr val="lt1"/>
-          </a:fontRef>
-        </p:style>
-        <p:txBody>
-          <a:bodyPr rtlCol="0" anchor="ctr"/>
-          <a:lstStyle/>
-          <a:p>
-            <a:pPr algn="ctr"/>
-          </a:p>
-        </p:txBody>
-      </p:sp>
-      <p:sp>
-        <p:nvSpPr>
-          <p:cNvPr id="11" name="TextBox 10"/>
-          <p:cNvSpPr txBox="1"/>
-          <p:nvPr/>
-        </p:nvSpPr>
-        <p:spPr>
-          <a:xfrm>
-            <a:off x="4773168" y="1847088"/>
-            <a:ext cx="1655063" cy="877824"/>
-          </a:xfrm>
-          <a:prstGeom prst="rect">
-            <a:avLst/>
-          </a:prstGeom>
-          <a:noFill/>
-        </p:spPr>
-        <p:txBody>
-          <a:bodyPr wrap="square" lIns="0" rIns="0" tIns="0" bIns="0">
-            <a:noAutofit/>
-          </a:bodyPr>
-          <a:lstStyle/>
-          <a:p>
-            <a:pPr algn="l">
-              <a:lnSpc>
-                <a:spcPts val="1989"/>
-              </a:lnSpc>
-              <a:spcBef>
-                <a:spcPts val="0"/>
-              </a:spcBef>
-              <a:spcAft>
-                <a:spcPts val="0"/>
-              </a:spcAft>
-              <a:buNone/>
-              <a:defRPr sz="1700" b="0">
-                <a:solidFill>
-                  <a:srgbClr val="303437"/>
-                </a:solidFill>
-                <a:latin typeface="Noto Sans"/>
-              </a:defRPr>
-            </a:pPr>
-            <a:r>
-              <a:rPr sz="1700" b="0" lang="ja-JP" altLang="en-US">
-                <a:solidFill>
-                  <a:srgbClr val="303437"/>
-                </a:solidFill>
-                <a:latin typeface="Noto Sans"/>
-                <a:ea typeface="Noto Sans CJK JP"/>
-                <a:cs typeface="Noto Sans"/>
-              </a:rPr>
-              <a:t>似た詩句から</a:t>
-            </a:r>
-          </a:p>
-          <a:p>
-            <a:pPr algn="l">
-              <a:lnSpc>
-                <a:spcPts val="1989"/>
-              </a:lnSpc>
-              <a:spcBef>
-                <a:spcPts val="0"/>
-              </a:spcBef>
-              <a:spcAft>
-                <a:spcPts val="0"/>
-              </a:spcAft>
-              <a:buNone/>
-              <a:defRPr sz="1700" b="0">
-                <a:solidFill>
-                  <a:srgbClr val="303437"/>
-                </a:solidFill>
-                <a:latin typeface="Noto Sans"/>
-              </a:defRPr>
-            </a:pPr>
-            <a:r>
-              <a:rPr sz="1700" b="0" lang="ja-JP" altLang="en-US">
-                <a:solidFill>
-                  <a:srgbClr val="303437"/>
-                </a:solidFill>
-                <a:latin typeface="Noto Sans"/>
-                <a:ea typeface="Noto Sans CJK JP"/>
-                <a:cs typeface="Noto Sans"/>
-              </a:rPr>
-              <a:t>負例を三つ選ぶ</a:t>
-            </a:r>
-          </a:p>
-        </p:txBody>
-      </p:sp>
-      <p:sp>
-        <p:nvSpPr>
-          <p:cNvPr id="12" name="TextBox 11"/>
-          <p:cNvSpPr txBox="1"/>
-          <p:nvPr/>
-        </p:nvSpPr>
-        <p:spPr>
-          <a:xfrm>
-            <a:off x="6547104" y="2029968"/>
-            <a:ext cx="182880" cy="274320"/>
-          </a:xfrm>
-          <a:prstGeom prst="rect">
-            <a:avLst/>
-          </a:prstGeom>
-          <a:noFill/>
-        </p:spPr>
-        <p:txBody>
-          <a:bodyPr wrap="square" lIns="0" rIns="0" tIns="0" bIns="0">
-            <a:noAutofit/>
-          </a:bodyPr>
-          <a:lstStyle/>
-          <a:p>
-            <a:pPr algn="l">
-              <a:lnSpc>
-                <a:spcPts val="2106"/>
-              </a:lnSpc>
-              <a:spcBef>
-                <a:spcPts val="0"/>
-              </a:spcBef>
-              <a:spcAft>
-                <a:spcPts val="0"/>
-              </a:spcAft>
-              <a:buNone/>
-              <a:defRPr sz="1800" b="0">
-                <a:solidFill>
-                  <a:srgbClr val="303437"/>
-                </a:solidFill>
-                <a:latin typeface="Noto Sans"/>
-              </a:defRPr>
-            </a:pPr>
-            <a:r>
-              <a:rPr sz="1800" b="0" lang="ja-JP" altLang="en-US">
-                <a:solidFill>
-                  <a:srgbClr val="303437"/>
-                </a:solidFill>
-                <a:latin typeface="Noto Sans"/>
-                <a:ea typeface="Noto Sans CJK JP"/>
-                <a:cs typeface="Noto Sans"/>
-              </a:rPr>
-              <a:t>→</a:t>
-            </a:r>
-          </a:p>
-        </p:txBody>
-      </p:sp>
-      <p:sp>
-        <p:nvSpPr>
-          <p:cNvPr id="13" name="Rounded Rectangle 12"/>
-          <p:cNvSpPr/>
-          <p:nvPr/>
-        </p:nvSpPr>
-        <p:spPr>
-          <a:xfrm>
-            <a:off x="6720840" y="1737360"/>
-            <a:ext cx="1874519" cy="1097280"/>
-          </a:xfrm>
-          <a:prstGeom prst="roundRect">
-            <a:avLst/>
-          </a:prstGeom>
-          <a:solidFill>
-            <a:srgbClr val="EBEDEB"/>
-          </a:solidFill>
-          <a:ln>
-            <a:solidFill>
-              <a:srgbClr val="626669"/>
-            </a:solidFill>
-          </a:ln>
-        </p:spPr>
-        <p:style>
-          <a:lnRef idx="1">
-            <a:schemeClr val="accent1"/>
-          </a:lnRef>
-          <a:fillRef idx="3">
-            <a:schemeClr val="accent1"/>
-          </a:fillRef>
-          <a:effectRef idx="2">
-            <a:schemeClr val="accent1"/>
-          </a:effectRef>
-          <a:fontRef idx="minor">
-            <a:schemeClr val="lt1"/>
-          </a:fontRef>
-        </p:style>
-        <p:txBody>
-          <a:bodyPr rtlCol="0" anchor="ctr"/>
-          <a:lstStyle/>
-          <a:p>
-            <a:pPr algn="ctr"/>
-          </a:p>
-        </p:txBody>
-      </p:sp>
-      <p:sp>
-        <p:nvSpPr>
-          <p:cNvPr id="14" name="TextBox 13"/>
-          <p:cNvSpPr txBox="1"/>
-          <p:nvPr/>
-        </p:nvSpPr>
-        <p:spPr>
-          <a:xfrm>
-            <a:off x="6830568" y="1847088"/>
-            <a:ext cx="1655063" cy="877824"/>
-          </a:xfrm>
-          <a:prstGeom prst="rect">
-            <a:avLst/>
-          </a:prstGeom>
-          <a:noFill/>
-        </p:spPr>
-        <p:txBody>
-          <a:bodyPr wrap="square" lIns="0" rIns="0" tIns="0" bIns="0">
-            <a:noAutofit/>
-          </a:bodyPr>
-          <a:lstStyle/>
-          <a:p>
-            <a:pPr algn="l">
-              <a:lnSpc>
-                <a:spcPts val="1989"/>
-              </a:lnSpc>
-              <a:spcBef>
-                <a:spcPts val="0"/>
-              </a:spcBef>
-              <a:spcAft>
-                <a:spcPts val="0"/>
-              </a:spcAft>
-              <a:buNone/>
-              <a:defRPr sz="1700" b="0">
-                <a:solidFill>
-                  <a:srgbClr val="303437"/>
-                </a:solidFill>
-                <a:latin typeface="Noto Sans"/>
-              </a:defRPr>
-            </a:pPr>
-            <a:r>
-              <a:rPr sz="1700" b="0" lang="ja-JP" altLang="en-US">
-                <a:solidFill>
-                  <a:srgbClr val="303437"/>
-                </a:solidFill>
-                <a:latin typeface="Noto Sans"/>
-                <a:ea typeface="Noto Sans CJK JP"/>
-                <a:cs typeface="Noto Sans"/>
-              </a:rPr>
-              <a:t>正解と混ぜて</a:t>
-            </a:r>
-          </a:p>
-          <a:p>
-            <a:pPr algn="l">
-              <a:lnSpc>
-                <a:spcPts val="1989"/>
-              </a:lnSpc>
-              <a:spcBef>
-                <a:spcPts val="0"/>
-              </a:spcBef>
-              <a:spcAft>
-                <a:spcPts val="0"/>
-              </a:spcAft>
-              <a:buNone/>
-              <a:defRPr sz="1700" b="0">
-                <a:solidFill>
-                  <a:srgbClr val="303437"/>
-                </a:solidFill>
-                <a:latin typeface="Noto Sans"/>
-              </a:defRPr>
-            </a:pPr>
-            <a:r>
-              <a:rPr sz="1700" b="0" lang="ja-JP" altLang="en-US">
-                <a:solidFill>
-                  <a:srgbClr val="303437"/>
-                </a:solidFill>
-                <a:latin typeface="Noto Sans"/>
-                <a:ea typeface="Noto Sans CJK JP"/>
-                <a:cs typeface="Noto Sans"/>
-              </a:rPr>
-              <a:t>四択問題にする</a:t>
-            </a:r>
-          </a:p>
-        </p:txBody>
-      </p:sp>
-      <p:sp>
-        <p:nvSpPr>
-          <p:cNvPr id="15" name="TextBox 14"/>
-          <p:cNvSpPr txBox="1"/>
-          <p:nvPr/>
-        </p:nvSpPr>
-        <p:spPr>
-          <a:xfrm>
-            <a:off x="640080" y="3337560"/>
-            <a:ext cx="7863840" cy="777240"/>
-          </a:xfrm>
-          <a:prstGeom prst="rect">
-            <a:avLst/>
-          </a:prstGeom>
-          <a:noFill/>
-        </p:spPr>
-        <p:txBody>
-          <a:bodyPr wrap="square" lIns="0" rIns="0" tIns="0" bIns="0">
-            <a:noAutofit/>
-          </a:bodyPr>
-          <a:lstStyle/>
-          <a:p>
-            <a:pPr algn="l">
-              <a:lnSpc>
-                <a:spcPts val="2222"/>
-              </a:lnSpc>
-              <a:spcBef>
-                <a:spcPts val="0"/>
-              </a:spcBef>
-              <a:spcAft>
-                <a:spcPts val="0"/>
-              </a:spcAft>
-              <a:buNone/>
-              <a:defRPr sz="1900" b="0">
-                <a:solidFill>
-                  <a:srgbClr val="303437"/>
-                </a:solidFill>
-                <a:latin typeface="Noto Sans"/>
-              </a:defRPr>
-            </a:pPr>
-            <a:r>
-              <a:rPr sz="1900" b="0" lang="ja-JP" altLang="en-US">
-                <a:solidFill>
-                  <a:srgbClr val="303437"/>
-                </a:solidFill>
-                <a:latin typeface="Noto Sans"/>
-                <a:ea typeface="Noto Sans CJK JP"/>
-                <a:cs typeface="Noto Sans"/>
-              </a:rPr>
-              <a:t>約6,000段落の古典文と現代語訳から始め、分割・形式の絞り込みを経て、27,218の対訳にした。句読点やWeb上の行境界で区切り、一行に分けきれない二行の対も残した。</a:t>
-            </a:r>
-          </a:p>
-        </p:txBody>
-      </p:sp>
-      <p:sp>
-        <p:nvSpPr>
           <p:cNvPr id="16" name="sources"/>
           <p:cNvSpPr txBox="1"/>
           <p:nvPr/>
@@ -8388,6 +7645,77 @@
                 <a:hlinkClick r:id="rId2"/>
               </a:rPr>
               <a:t>https://arxiv.org/abs/2106.01979</a:t>
+            </a:r>
+          </a:p>
+        </p:txBody>
+      </p:sp>
+      <p:sp>
+        <p:nvSpPr>
+          <p:cNvPr id="17" name="TextBox 16"/>
+          <p:cNvSpPr txBox="1"/>
+          <p:nvPr/>
+        </p:nvSpPr>
+        <p:spPr>
+          <a:xfrm>
+            <a:off x="640080" y="1508760"/>
+            <a:ext cx="7863840" cy="2880360"/>
+          </a:xfrm>
+          <a:prstGeom prst="rect">
+            <a:avLst/>
+          </a:prstGeom>
+          <a:noFill/>
+        </p:spPr>
+        <p:txBody>
+          <a:bodyPr wrap="square">
+            <a:spAutoFit/>
+          </a:bodyPr>
+          <a:lstStyle/>
+          <a:p>
+            <a:pPr>
+              <a:lnSpc>
+                <a:spcPct val="119000"/>
+              </a:lnSpc>
+              <a:spcAft>
+                <a:spcPts val="1400"/>
+              </a:spcAft>
+              <a:defRPr sz="2100">
+                <a:latin typeface="Noto Sans CJK JP"/>
+              </a:defRPr>
+            </a:pPr>
+            <a:r>
+              <a:t>約6,000段落の古典文と現代語訳をWebから収集する。</a:t>
+            </a:r>
+          </a:p>
+          <a:p>
+            <a:pPr>
+              <a:lnSpc>
+                <a:spcPct val="119000"/>
+              </a:lnSpc>
+              <a:spcAft>
+                <a:spcPts val="1400"/>
+              </a:spcAft>
+              <a:defRPr sz="2100">
+                <a:latin typeface="Noto Sans CJK JP"/>
+              </a:defRPr>
+            </a:pPr>
+            <a:r>
+              <a:t>句読点やWeb上の行境界で分割し、五言・七言の詩型に合う27,218の対訳を残す。二行の対も含む。</a:t>
+            </a:r>
+          </a:p>
+          <a:p>
+            <a:pPr>
+              <a:lnSpc>
+                <a:spcPct val="119000"/>
+              </a:lnSpc>
+              <a:spcAft>
+                <a:spcPts val="1400"/>
+              </a:spcAft>
+              <a:defRPr sz="2100">
+                <a:latin typeface="Noto Sans CJK JP"/>
+              </a:defRPr>
+            </a:pPr>
+            <a:r>
+              <a:t>正解に似た別の詩句を三つ選び、正解と混ぜて四択問題にする。</a:t>
             </a:r>
           </a:p>
         </p:txBody>
@@ -8536,7 +7864,7 @@
                 <a:ea typeface="Noto Sans CJK JP"/>
                 <a:cs typeface="Noto Sans"/>
               </a:rPr>
-              <a:t>二行で連続した意味を持つ対は、そのまま二行単位で扱う。ここでいう27,218件は問題数であり、詩の作品数や作者数ではない。</a:t>
+              <a:t>二行で連続した意味を持つ対は、そのまま二行単位で扱う。</a:t>
             </a:r>
           </a:p>
         </p:txBody>
@@ -10213,7 +9541,7 @@
                 <a:ea typeface="Noto Sans CJK JP"/>
                 <a:cs typeface="Noto Sans"/>
               </a:rPr>
-              <a:t>件数は配布ファイルの全行と一致。論文のテスト正解率と、公開テストの正解なし配布を区別する。</a:t>
+              <a:t>学習・検証には正解が付く。公開テストの正解は非公開。</a:t>
             </a:r>
           </a:p>
         </p:txBody>
@@ -10267,7 +9595,7 @@
                 <a:ea typeface="Noto Sans CJK JP"/>
                 <a:cs typeface="Noto Sans"/>
               </a:rPr>
-              <a:t>[1] Li, Qi, Sun, Yi &amp; Zhang (2021). CCPM: A Chinese Classical Poetry Matching Dataset. arXiv:2106.01979v1.</a:t>
+              <a:t>[1] Li, Qi, Sun, Yi &amp; Zhang (2021). CCPM: A Chinese Classical Poetry Matching Dataset. arXiv:2106.01979v1.  </a:t>
             </a:r>
             <a:r>
               <a:rPr sz="810" b="0" lang="ja-JP" altLang="en-US">
@@ -10277,9 +9605,27 @@
                 <a:latin typeface="Noto Sans"/>
                 <a:ea typeface="Noto Sans CJK JP"/>
                 <a:cs typeface="Noto Sans"/>
-              </a:rPr>
-              <a:t>  </a:t>
-            </a:r>
+                <a:hlinkClick r:id="rId2"/>
+              </a:rPr>
+              <a:t>https://arxiv.org/abs/2106.01979</a:t>
+            </a:r>
+          </a:p>
+          <a:p>
+            <a:pPr>
+              <a:lnSpc>
+                <a:spcPts val="940"/>
+              </a:lnSpc>
+              <a:spcAft>
+                <a:spcPts val="140"/>
+              </a:spcAft>
+              <a:buNone/>
+              <a:defRPr sz="810" b="0">
+                <a:solidFill>
+                  <a:srgbClr val="303437"/>
+                </a:solidFill>
+                <a:latin typeface="Noto Sans"/>
+              </a:defRPr>
+            </a:pPr>
             <a:r>
               <a:rPr sz="810" b="0" lang="ja-JP" altLang="en-US">
                 <a:solidFill>
@@ -10288,48 +9634,8 @@
                 <a:latin typeface="Noto Sans"/>
                 <a:ea typeface="Noto Sans CJK JP"/>
                 <a:cs typeface="Noto Sans"/>
-                <a:hlinkClick r:id="rId2"/>
-              </a:rPr>
-              <a:t>https://arxiv.org/abs/2106.01979</a:t>
-            </a:r>
-          </a:p>
-          <a:p>
-            <a:pPr>
-              <a:lnSpc>
-                <a:spcPts val="940"/>
-              </a:lnSpc>
-              <a:spcAft>
-                <a:spcPts val="140"/>
-              </a:spcAft>
-              <a:buNone/>
-              <a:defRPr sz="810" b="0">
-                <a:solidFill>
-                  <a:srgbClr val="303437"/>
-                </a:solidFill>
-                <a:latin typeface="Noto Sans"/>
-              </a:defRPr>
-            </a:pPr>
-            <a:r>
-              <a:rPr sz="810" b="0" lang="ja-JP" altLang="en-US">
-                <a:solidFill>
-                  <a:srgbClr val="626669"/>
-                </a:solidFill>
-                <a:latin typeface="Noto Sans"/>
-                <a:ea typeface="Noto Sans CJK JP"/>
-                <a:cs typeface="Noto Sans"/>
-              </a:rPr>
-              <a:t>[2] THUNLP-AIPoet. CCPM. 公式配布、commit e7db1a0dc1ac1ffdd0ec91f74793c29ae9c8efa5、2026-10-18参照。</a:t>
-            </a:r>
-            <a:r>
-              <a:rPr sz="810" b="0" lang="ja-JP" altLang="en-US">
-                <a:solidFill>
-                  <a:srgbClr val="626669"/>
-                </a:solidFill>
-                <a:latin typeface="Noto Sans"/>
-                <a:ea typeface="Noto Sans CJK JP"/>
-                <a:cs typeface="Noto Sans"/>
-              </a:rPr>
-              <a:t>  </a:t>
+              </a:rPr>
+              <a:t>[2] THUNLP-AIPoet (2021). CCPM.  </a:t>
             </a:r>
             <a:r>
               <a:rPr sz="810" b="0" lang="ja-JP" altLang="en-US">
@@ -11330,7 +10636,7 @@
                 <a:ea typeface="Noto Sans CJK JP"/>
                 <a:cs typeface="Noto Sans"/>
               </a:rPr>
-              <a:t>全27,218問。形式別の件数は構築時の集計。配布文字列には特殊な表記を含む少数の例もある。</a:t>
+              <a:t>全27,218問。形式別の件数は、データ構築時の集計。</a:t>
             </a:r>
           </a:p>
         </p:txBody>
@@ -11802,7 +11108,7 @@
                 <a:ea typeface="Noto Sans CJK JP"/>
                 <a:cs typeface="Noto Sans"/>
               </a:rPr>
-              <a:t>answerは0始まりの位置。表示上のA/B/C/Dは、元の候補順へ対応させる。元JSONLには問題ID・詩題・作者の欄はない。</a:t>
+              <a:t>translationが問題文、choicesが四候補。answer=0は先頭の候補Aを指す。</a:t>
             </a:r>
           </a:p>
         </p:txBody>
@@ -11856,1145 +11162,7 @@
                 <a:ea typeface="Noto Sans CJK JP"/>
                 <a:cs typeface="Noto Sans"/>
               </a:rPr>
-              <a:t>[1] THUNLP-AIPoet. CCPM. 公式配布、commit e7db1a0dc1ac1ffdd0ec91f74793c29ae9c8efa5、2026-10-18参照。</a:t>
-            </a:r>
-            <a:r>
-              <a:rPr sz="810" b="0" lang="ja-JP" altLang="en-US">
-                <a:solidFill>
-                  <a:srgbClr val="626669"/>
-                </a:solidFill>
-                <a:latin typeface="Noto Sans"/>
-                <a:ea typeface="Noto Sans CJK JP"/>
-                <a:cs typeface="Noto Sans"/>
-              </a:rPr>
-              <a:t>  </a:t>
-            </a:r>
-            <a:r>
-              <a:rPr sz="810" b="0" lang="ja-JP" altLang="en-US">
-                <a:solidFill>
-                  <a:srgbClr val="626669"/>
-                </a:solidFill>
-                <a:latin typeface="Noto Sans"/>
-                <a:ea typeface="Noto Sans CJK JP"/>
-                <a:cs typeface="Noto Sans"/>
-                <a:hlinkClick r:id="rId2"/>
-              </a:rPr>
-              <a:t>https://github.com/THUNLP-AIPoet/CCPM</a:t>
-            </a:r>
-          </a:p>
-        </p:txBody>
-      </p:sp>
-    </p:spTree>
-  </p:cSld>
-  <p:clrMapOvr>
-    <a:masterClrMapping/>
-  </p:clrMapOvr>
-</p:sld>
-</file>
-
-<file path=ppt/slides/slide18.xml><?xml version="1.0" encoding="utf-8"?>
-<p:sld xmlns:a="http://schemas.openxmlformats.org/drawingml/2006/main" xmlns:p="http://schemas.openxmlformats.org/presentationml/2006/main" xmlns:r="http://schemas.openxmlformats.org/officeDocument/2006/relationships">
-  <p:cSld>
-    <p:spTree>
-      <p:nvGrpSpPr>
-        <p:cNvPr id="1" name=""/>
-        <p:cNvGrpSpPr/>
-        <p:nvPr/>
-      </p:nvGrpSpPr>
-      <p:grpSpPr/>
-      <p:sp>
-        <p:nvSpPr>
-          <p:cNvPr id="2" name="Title 1"/>
-          <p:cNvSpPr>
-            <a:spLocks noGrp="1"/>
-          </p:cNvSpPr>
-          <p:nvPr>
-            <p:ph type="title"/>
-          </p:nvPr>
-        </p:nvSpPr>
-        <p:spPr>
-          <a:xfrm>
-            <a:off x="468172" y="650138"/>
-            <a:ext cx="8206740" cy="616305"/>
-          </a:xfrm>
-        </p:spPr>
-        <p:txBody>
-          <a:bodyPr wrap="square" lIns="0" rIns="0" tIns="0" bIns="0">
-            <a:noAutofit/>
-          </a:bodyPr>
-          <a:lstStyle/>
-          <a:p>
-            <a:pPr algn="l">
-              <a:lnSpc>
-                <a:spcPct val="110000"/>
-              </a:lnSpc>
-              <a:buNone/>
-              <a:defRPr sz="2800" b="0">
-                <a:solidFill>
-                  <a:srgbClr val="303437"/>
-                </a:solidFill>
-                <a:latin typeface="Noto Sans"/>
-              </a:defRPr>
-            </a:pPr>
-            <a:r>
-              <a:rPr sz="2800" b="1" lang="ja-JP" altLang="en-US">
-                <a:solidFill>
-                  <a:srgbClr val="303437"/>
-                </a:solidFill>
-                <a:latin typeface="Noto Sans"/>
-                <a:ea typeface="Noto Sans CJK JP"/>
-                <a:cs typeface="Noto Sans"/>
-              </a:rPr>
-              <a:t>説明文だけでは、問題を一意に特定できない</a:t>
-            </a:r>
-          </a:p>
-        </p:txBody>
-      </p:sp>
-      <p:sp>
-        <p:nvSpPr>
-          <p:cNvPr id="3" name="Title 2"/>
-          <p:cNvSpPr>
-            <a:spLocks noGrp="1"/>
-          </p:cNvSpPr>
-          <p:nvPr>
-            <p:ph type="title" idx="2"/>
-          </p:nvPr>
-        </p:nvSpPr>
-        <p:spPr>
-          <a:xfrm>
-            <a:off x="75895" y="0"/>
-            <a:ext cx="8115300" cy="480060"/>
-          </a:xfrm>
-        </p:spPr>
-        <p:txBody>
-          <a:bodyPr wrap="square" lIns="0" rIns="0" tIns="0" bIns="0" anchor="ctr">
-            <a:noAutofit/>
-          </a:bodyPr>
-          <a:lstStyle/>
-          <a:p>
-            <a:pPr algn="l">
-              <a:lnSpc>
-                <a:spcPct val="110000"/>
-              </a:lnSpc>
-              <a:buNone/>
-              <a:defRPr sz="1400" b="0">
-                <a:solidFill>
-                  <a:srgbClr val="303437"/>
-                </a:solidFill>
-                <a:latin typeface="Noto Sans"/>
-              </a:defRPr>
-            </a:pPr>
-            <a:r>
-              <a:rPr sz="1400" b="1" lang="ja-JP" altLang="en-US">
-                <a:solidFill>
-                  <a:srgbClr val="FFFEF8"/>
-                </a:solidFill>
-                <a:latin typeface="Noto Sans"/>
-                <a:ea typeface="Noto Sans CJK JP"/>
-                <a:cs typeface="Noto Sans"/>
-              </a:rPr>
-              <a:t>2. 対訳と似た詩句から問題を作る</a:t>
-            </a:r>
-          </a:p>
-        </p:txBody>
-      </p:sp>
-      <p:graphicFrame>
-        <p:nvGraphicFramePr>
-          <p:cNvPr id="4" name="Table 3"/>
-          <p:cNvGraphicFramePr>
-            <a:graphicFrameLocks noGrp="1"/>
-          </p:cNvGraphicFramePr>
-          <p:nvPr/>
-        </p:nvGraphicFramePr>
-        <p:xfrm>
-          <a:off x="548640" y="1508760"/>
-          <a:ext cx="8046720" cy="1682496"/>
-        </p:xfrm>
-        <a:graphic>
-          <a:graphicData uri="http://schemas.openxmlformats.org/drawingml/2006/table">
-            <a:tbl>
-              <a:tblPr firstRow="0" bandRow="0"/>
-              <a:tblGrid>
-                <a:gridCol w="3108960"/>
-                <a:gridCol w="1645920"/>
-                <a:gridCol w="1645920"/>
-                <a:gridCol w="1645920"/>
-              </a:tblGrid>
-              <a:tr h="420624">
-                <a:tc>
-                  <a:txBody>
-                    <a:bodyPr wrap="square">
-                      <a:noAutofit/>
-                    </a:bodyPr>
-                    <a:lstStyle/>
-                    <a:p>
-                      <a:pPr algn="l">
-                        <a:lnSpc>
-                          <a:spcPts val="2070"/>
-                        </a:lnSpc>
-                        <a:buNone/>
-                        <a:defRPr sz="1800" b="0">
-                          <a:solidFill>
-                            <a:srgbClr val="303437"/>
-                          </a:solidFill>
-                          <a:latin typeface="Noto Sans"/>
-                        </a:defRPr>
-                      </a:pPr>
-                      <a:r>
-                        <a:rPr sz="1800" b="0" lang="ja-JP" altLang="en-US">
-                          <a:solidFill>
-                            <a:srgbClr val="303437"/>
-                          </a:solidFill>
-                          <a:latin typeface="Noto Sans"/>
-                          <a:ea typeface="Noto Sans CJK JP"/>
-                          <a:cs typeface="Noto Sans"/>
-                        </a:rPr>
-                        <a:t>比較する単位</a:t>
-                      </a:r>
-                    </a:p>
-                  </a:txBody>
-                  <a:tcPr marL="63500" marR="63500" marT="38100" marB="38100" anchor="ctr">
-                    <a:lnL w="7620">
-                      <a:noFill/>
-                    </a:lnL>
-                    <a:lnR w="7620">
-                      <a:noFill/>
-                    </a:lnR>
-                    <a:lnT w="15240">
-                      <a:solidFill>
-                        <a:srgbClr val="626669"/>
-                      </a:solidFill>
-                      <a:prstDash val="solid"/>
-                    </a:lnT>
-                    <a:lnB w="7620">
-                      <a:solidFill>
-                        <a:srgbClr val="626669"/>
-                      </a:solidFill>
-                      <a:prstDash val="solid"/>
-                    </a:lnB>
-                    <a:solidFill>
-                      <a:srgbClr val="FFFEF8"/>
-                    </a:solidFill>
-                  </a:tcPr>
-                </a:tc>
-                <a:tc>
-                  <a:txBody>
-                    <a:bodyPr wrap="square">
-                      <a:noAutofit/>
-                    </a:bodyPr>
-                    <a:lstStyle/>
-                    <a:p>
-                      <a:pPr algn="r">
-                        <a:lnSpc>
-                          <a:spcPts val="2070"/>
-                        </a:lnSpc>
-                        <a:buNone/>
-                        <a:defRPr sz="1800" b="0">
-                          <a:solidFill>
-                            <a:srgbClr val="303437"/>
-                          </a:solidFill>
-                          <a:latin typeface="Noto Sans"/>
-                        </a:defRPr>
-                      </a:pPr>
-                      <a:r>
-                        <a:rPr sz="1800" b="0" lang="ja-JP" altLang="en-US">
-                          <a:solidFill>
-                            <a:srgbClr val="303437"/>
-                          </a:solidFill>
-                          <a:latin typeface="Noto Sans"/>
-                          <a:ea typeface="Noto Sans CJK JP"/>
-                          <a:cs typeface="Noto Sans"/>
-                        </a:rPr>
-                        <a:t>学習</a:t>
-                      </a:r>
-                    </a:p>
-                  </a:txBody>
-                  <a:tcPr marL="63500" marR="63500" marT="38100" marB="38100" anchor="ctr">
-                    <a:lnL w="7620">
-                      <a:noFill/>
-                    </a:lnL>
-                    <a:lnR w="7620">
-                      <a:noFill/>
-                    </a:lnR>
-                    <a:lnT w="15240">
-                      <a:solidFill>
-                        <a:srgbClr val="626669"/>
-                      </a:solidFill>
-                      <a:prstDash val="solid"/>
-                    </a:lnT>
-                    <a:lnB w="7620">
-                      <a:solidFill>
-                        <a:srgbClr val="626669"/>
-                      </a:solidFill>
-                      <a:prstDash val="solid"/>
-                    </a:lnB>
-                    <a:solidFill>
-                      <a:srgbClr val="FFFEF8"/>
-                    </a:solidFill>
-                  </a:tcPr>
-                </a:tc>
-                <a:tc>
-                  <a:txBody>
-                    <a:bodyPr wrap="square">
-                      <a:noAutofit/>
-                    </a:bodyPr>
-                    <a:lstStyle/>
-                    <a:p>
-                      <a:pPr algn="r">
-                        <a:lnSpc>
-                          <a:spcPts val="2070"/>
-                        </a:lnSpc>
-                        <a:buNone/>
-                        <a:defRPr sz="1800" b="0">
-                          <a:solidFill>
-                            <a:srgbClr val="303437"/>
-                          </a:solidFill>
-                          <a:latin typeface="Noto Sans"/>
-                        </a:defRPr>
-                      </a:pPr>
-                      <a:r>
-                        <a:rPr sz="1800" b="0" lang="ja-JP" altLang="en-US">
-                          <a:solidFill>
-                            <a:srgbClr val="303437"/>
-                          </a:solidFill>
-                          <a:latin typeface="Noto Sans"/>
-                          <a:ea typeface="Noto Sans CJK JP"/>
-                          <a:cs typeface="Noto Sans"/>
-                        </a:rPr>
-                        <a:t>検証</a:t>
-                      </a:r>
-                    </a:p>
-                  </a:txBody>
-                  <a:tcPr marL="63500" marR="63500" marT="38100" marB="38100" anchor="ctr">
-                    <a:lnL w="7620">
-                      <a:noFill/>
-                    </a:lnL>
-                    <a:lnR w="7620">
-                      <a:noFill/>
-                    </a:lnR>
-                    <a:lnT w="15240">
-                      <a:solidFill>
-                        <a:srgbClr val="626669"/>
-                      </a:solidFill>
-                      <a:prstDash val="solid"/>
-                    </a:lnT>
-                    <a:lnB w="7620">
-                      <a:solidFill>
-                        <a:srgbClr val="626669"/>
-                      </a:solidFill>
-                      <a:prstDash val="solid"/>
-                    </a:lnB>
-                    <a:solidFill>
-                      <a:srgbClr val="FFFEF8"/>
-                    </a:solidFill>
-                  </a:tcPr>
-                </a:tc>
-                <a:tc>
-                  <a:txBody>
-                    <a:bodyPr wrap="square">
-                      <a:noAutofit/>
-                    </a:bodyPr>
-                    <a:lstStyle/>
-                    <a:p>
-                      <a:pPr algn="r">
-                        <a:lnSpc>
-                          <a:spcPts val="2070"/>
-                        </a:lnSpc>
-                        <a:buNone/>
-                        <a:defRPr sz="1800" b="0">
-                          <a:solidFill>
-                            <a:srgbClr val="303437"/>
-                          </a:solidFill>
-                          <a:latin typeface="Noto Sans"/>
-                        </a:defRPr>
-                      </a:pPr>
-                      <a:r>
-                        <a:rPr sz="1800" b="0" lang="ja-JP" altLang="en-US">
-                          <a:solidFill>
-                            <a:srgbClr val="303437"/>
-                          </a:solidFill>
-                          <a:latin typeface="Noto Sans"/>
-                          <a:ea typeface="Noto Sans CJK JP"/>
-                          <a:cs typeface="Noto Sans"/>
-                        </a:rPr>
-                        <a:t>公開テスト</a:t>
-                      </a:r>
-                    </a:p>
-                  </a:txBody>
-                  <a:tcPr marL="63500" marR="63500" marT="38100" marB="38100" anchor="ctr">
-                    <a:lnL w="7620">
-                      <a:noFill/>
-                    </a:lnL>
-                    <a:lnR w="7620">
-                      <a:noFill/>
-                    </a:lnR>
-                    <a:lnT w="15240">
-                      <a:solidFill>
-                        <a:srgbClr val="626669"/>
-                      </a:solidFill>
-                      <a:prstDash val="solid"/>
-                    </a:lnT>
-                    <a:lnB w="7620">
-                      <a:solidFill>
-                        <a:srgbClr val="626669"/>
-                      </a:solidFill>
-                      <a:prstDash val="solid"/>
-                    </a:lnB>
-                    <a:solidFill>
-                      <a:srgbClr val="FFFEF8"/>
-                    </a:solidFill>
-                  </a:tcPr>
-                </a:tc>
-              </a:tr>
-              <a:tr h="420624">
-                <a:tc>
-                  <a:txBody>
-                    <a:bodyPr wrap="square">
-                      <a:noAutofit/>
-                    </a:bodyPr>
-                    <a:lstStyle/>
-                    <a:p>
-                      <a:pPr algn="l">
-                        <a:lnSpc>
-                          <a:spcPts val="2070"/>
-                        </a:lnSpc>
-                        <a:buNone/>
-                        <a:defRPr sz="1800" b="0">
-                          <a:solidFill>
-                            <a:srgbClr val="303437"/>
-                          </a:solidFill>
-                          <a:latin typeface="Noto Sans"/>
-                        </a:defRPr>
-                      </a:pPr>
-                      <a:r>
-                        <a:rPr sz="1800" b="0" lang="ja-JP" altLang="en-US">
-                          <a:solidFill>
-                            <a:srgbClr val="303437"/>
-                          </a:solidFill>
-                          <a:latin typeface="Noto Sans"/>
-                          <a:ea typeface="Noto Sans CJK JP"/>
-                          <a:cs typeface="Noto Sans"/>
-                        </a:rPr>
-                        <a:t>レコード数</a:t>
-                      </a:r>
-                    </a:p>
-                  </a:txBody>
-                  <a:tcPr marL="63500" marR="63500" marT="38100" marB="38100" anchor="ctr">
-                    <a:lnL w="7620">
-                      <a:noFill/>
-                    </a:lnL>
-                    <a:lnR w="7620">
-                      <a:noFill/>
-                    </a:lnR>
-                    <a:lnT w="7620">
-                      <a:solidFill>
-                        <a:srgbClr val="626669"/>
-                      </a:solidFill>
-                      <a:prstDash val="solid"/>
-                    </a:lnT>
-                    <a:lnB w="7620">
-                      <a:noFill/>
-                    </a:lnB>
-                    <a:solidFill>
-                      <a:srgbClr val="FFFEF8"/>
-                    </a:solidFill>
-                  </a:tcPr>
-                </a:tc>
-                <a:tc>
-                  <a:txBody>
-                    <a:bodyPr wrap="square">
-                      <a:noAutofit/>
-                    </a:bodyPr>
-                    <a:lstStyle/>
-                    <a:p>
-                      <a:pPr algn="r">
-                        <a:lnSpc>
-                          <a:spcPts val="2070"/>
-                        </a:lnSpc>
-                        <a:buNone/>
-                        <a:defRPr sz="1800" b="0">
-                          <a:solidFill>
-                            <a:srgbClr val="303437"/>
-                          </a:solidFill>
-                          <a:latin typeface="Noto Sans"/>
-                        </a:defRPr>
-                      </a:pPr>
-                      <a:r>
-                        <a:rPr sz="1800" b="0" lang="ja-JP" altLang="en-US">
-                          <a:solidFill>
-                            <a:srgbClr val="303437"/>
-                          </a:solidFill>
-                          <a:latin typeface="Noto Sans"/>
-                          <a:ea typeface="Noto Sans CJK JP"/>
-                          <a:cs typeface="Noto Sans"/>
-                        </a:rPr>
-                        <a:t>21,778</a:t>
-                      </a:r>
-                    </a:p>
-                  </a:txBody>
-                  <a:tcPr marL="63500" marR="63500" marT="38100" marB="38100" anchor="ctr">
-                    <a:lnL w="7620">
-                      <a:noFill/>
-                    </a:lnL>
-                    <a:lnR w="7620">
-                      <a:noFill/>
-                    </a:lnR>
-                    <a:lnT w="7620">
-                      <a:solidFill>
-                        <a:srgbClr val="626669"/>
-                      </a:solidFill>
-                      <a:prstDash val="solid"/>
-                    </a:lnT>
-                    <a:lnB w="7620">
-                      <a:noFill/>
-                    </a:lnB>
-                    <a:solidFill>
-                      <a:srgbClr val="FFFEF8"/>
-                    </a:solidFill>
-                  </a:tcPr>
-                </a:tc>
-                <a:tc>
-                  <a:txBody>
-                    <a:bodyPr wrap="square">
-                      <a:noAutofit/>
-                    </a:bodyPr>
-                    <a:lstStyle/>
-                    <a:p>
-                      <a:pPr algn="r">
-                        <a:lnSpc>
-                          <a:spcPts val="2070"/>
-                        </a:lnSpc>
-                        <a:buNone/>
-                        <a:defRPr sz="1800" b="0">
-                          <a:solidFill>
-                            <a:srgbClr val="303437"/>
-                          </a:solidFill>
-                          <a:latin typeface="Noto Sans"/>
-                        </a:defRPr>
-                      </a:pPr>
-                      <a:r>
-                        <a:rPr sz="1800" b="0" lang="ja-JP" altLang="en-US">
-                          <a:solidFill>
-                            <a:srgbClr val="303437"/>
-                          </a:solidFill>
-                          <a:latin typeface="Noto Sans"/>
-                          <a:ea typeface="Noto Sans CJK JP"/>
-                          <a:cs typeface="Noto Sans"/>
-                        </a:rPr>
-                        <a:t>2,720</a:t>
-                      </a:r>
-                    </a:p>
-                  </a:txBody>
-                  <a:tcPr marL="63500" marR="63500" marT="38100" marB="38100" anchor="ctr">
-                    <a:lnL w="7620">
-                      <a:noFill/>
-                    </a:lnL>
-                    <a:lnR w="7620">
-                      <a:noFill/>
-                    </a:lnR>
-                    <a:lnT w="7620">
-                      <a:solidFill>
-                        <a:srgbClr val="626669"/>
-                      </a:solidFill>
-                      <a:prstDash val="solid"/>
-                    </a:lnT>
-                    <a:lnB w="7620">
-                      <a:noFill/>
-                    </a:lnB>
-                    <a:solidFill>
-                      <a:srgbClr val="FFFEF8"/>
-                    </a:solidFill>
-                  </a:tcPr>
-                </a:tc>
-                <a:tc>
-                  <a:txBody>
-                    <a:bodyPr wrap="square">
-                      <a:noAutofit/>
-                    </a:bodyPr>
-                    <a:lstStyle/>
-                    <a:p>
-                      <a:pPr algn="r">
-                        <a:lnSpc>
-                          <a:spcPts val="2070"/>
-                        </a:lnSpc>
-                        <a:buNone/>
-                        <a:defRPr sz="1800" b="0">
-                          <a:solidFill>
-                            <a:srgbClr val="303437"/>
-                          </a:solidFill>
-                          <a:latin typeface="Noto Sans"/>
-                        </a:defRPr>
-                      </a:pPr>
-                      <a:r>
-                        <a:rPr sz="1800" b="0" lang="ja-JP" altLang="en-US">
-                          <a:solidFill>
-                            <a:srgbClr val="303437"/>
-                          </a:solidFill>
-                          <a:latin typeface="Noto Sans"/>
-                          <a:ea typeface="Noto Sans CJK JP"/>
-                          <a:cs typeface="Noto Sans"/>
-                        </a:rPr>
-                        <a:t>2,720</a:t>
-                      </a:r>
-                    </a:p>
-                  </a:txBody>
-                  <a:tcPr marL="63500" marR="63500" marT="38100" marB="38100" anchor="ctr">
-                    <a:lnL w="7620">
-                      <a:noFill/>
-                    </a:lnL>
-                    <a:lnR w="7620">
-                      <a:noFill/>
-                    </a:lnR>
-                    <a:lnT w="7620">
-                      <a:solidFill>
-                        <a:srgbClr val="626669"/>
-                      </a:solidFill>
-                      <a:prstDash val="solid"/>
-                    </a:lnT>
-                    <a:lnB w="7620">
-                      <a:noFill/>
-                    </a:lnB>
-                    <a:solidFill>
-                      <a:srgbClr val="FFFEF8"/>
-                    </a:solidFill>
-                  </a:tcPr>
-                </a:tc>
-              </a:tr>
-              <a:tr h="420624">
-                <a:tc>
-                  <a:txBody>
-                    <a:bodyPr wrap="square">
-                      <a:noAutofit/>
-                    </a:bodyPr>
-                    <a:lstStyle/>
-                    <a:p>
-                      <a:pPr algn="l">
-                        <a:lnSpc>
-                          <a:spcPts val="2070"/>
-                        </a:lnSpc>
-                        <a:buNone/>
-                        <a:defRPr sz="1800" b="0">
-                          <a:solidFill>
-                            <a:srgbClr val="303437"/>
-                          </a:solidFill>
-                          <a:latin typeface="Noto Sans"/>
-                        </a:defRPr>
-                      </a:pPr>
-                      <a:r>
-                        <a:rPr sz="1800" b="0" lang="ja-JP" altLang="en-US">
-                          <a:solidFill>
-                            <a:srgbClr val="303437"/>
-                          </a:solidFill>
-                          <a:latin typeface="Noto Sans"/>
-                          <a:ea typeface="Noto Sans CJK JP"/>
-                          <a:cs typeface="Noto Sans"/>
-                        </a:rPr>
-                        <a:t>説明文の種類</a:t>
-                      </a:r>
-                    </a:p>
-                  </a:txBody>
-                  <a:tcPr marL="63500" marR="63500" marT="38100" marB="38100" anchor="ctr">
-                    <a:lnL w="7620">
-                      <a:noFill/>
-                    </a:lnL>
-                    <a:lnR w="7620">
-                      <a:noFill/>
-                    </a:lnR>
-                    <a:lnT w="7620">
-                      <a:noFill/>
-                    </a:lnT>
-                    <a:lnB w="7620">
-                      <a:noFill/>
-                    </a:lnB>
-                    <a:solidFill>
-                      <a:srgbClr val="FFFEF8"/>
-                    </a:solidFill>
-                  </a:tcPr>
-                </a:tc>
-                <a:tc>
-                  <a:txBody>
-                    <a:bodyPr wrap="square">
-                      <a:noAutofit/>
-                    </a:bodyPr>
-                    <a:lstStyle/>
-                    <a:p>
-                      <a:pPr algn="r">
-                        <a:lnSpc>
-                          <a:spcPts val="2070"/>
-                        </a:lnSpc>
-                        <a:buNone/>
-                        <a:defRPr sz="1800" b="0">
-                          <a:solidFill>
-                            <a:srgbClr val="303437"/>
-                          </a:solidFill>
-                          <a:latin typeface="Noto Sans"/>
-                        </a:defRPr>
-                      </a:pPr>
-                      <a:r>
-                        <a:rPr sz="1800" b="0" lang="ja-JP" altLang="en-US">
-                          <a:solidFill>
-                            <a:srgbClr val="303437"/>
-                          </a:solidFill>
-                          <a:latin typeface="Noto Sans"/>
-                          <a:ea typeface="Noto Sans CJK JP"/>
-                          <a:cs typeface="Noto Sans"/>
-                        </a:rPr>
-                        <a:t>21,483</a:t>
-                      </a:r>
-                    </a:p>
-                  </a:txBody>
-                  <a:tcPr marL="63500" marR="63500" marT="38100" marB="38100" anchor="ctr">
-                    <a:lnL w="7620">
-                      <a:noFill/>
-                    </a:lnL>
-                    <a:lnR w="7620">
-                      <a:noFill/>
-                    </a:lnR>
-                    <a:lnT w="7620">
-                      <a:noFill/>
-                    </a:lnT>
-                    <a:lnB w="7620">
-                      <a:noFill/>
-                    </a:lnB>
-                    <a:solidFill>
-                      <a:srgbClr val="FFFEF8"/>
-                    </a:solidFill>
-                  </a:tcPr>
-                </a:tc>
-                <a:tc>
-                  <a:txBody>
-                    <a:bodyPr wrap="square">
-                      <a:noAutofit/>
-                    </a:bodyPr>
-                    <a:lstStyle/>
-                    <a:p>
-                      <a:pPr algn="r">
-                        <a:lnSpc>
-                          <a:spcPts val="2070"/>
-                        </a:lnSpc>
-                        <a:buNone/>
-                        <a:defRPr sz="1800" b="0">
-                          <a:solidFill>
-                            <a:srgbClr val="303437"/>
-                          </a:solidFill>
-                          <a:latin typeface="Noto Sans"/>
-                        </a:defRPr>
-                      </a:pPr>
-                      <a:r>
-                        <a:rPr sz="1800" b="0" lang="ja-JP" altLang="en-US">
-                          <a:solidFill>
-                            <a:srgbClr val="303437"/>
-                          </a:solidFill>
-                          <a:latin typeface="Noto Sans"/>
-                          <a:ea typeface="Noto Sans CJK JP"/>
-                          <a:cs typeface="Noto Sans"/>
-                        </a:rPr>
-                        <a:t>2,710</a:t>
-                      </a:r>
-                    </a:p>
-                  </a:txBody>
-                  <a:tcPr marL="63500" marR="63500" marT="38100" marB="38100" anchor="ctr">
-                    <a:lnL w="7620">
-                      <a:noFill/>
-                    </a:lnL>
-                    <a:lnR w="7620">
-                      <a:noFill/>
-                    </a:lnR>
-                    <a:lnT w="7620">
-                      <a:noFill/>
-                    </a:lnT>
-                    <a:lnB w="7620">
-                      <a:noFill/>
-                    </a:lnB>
-                    <a:solidFill>
-                      <a:srgbClr val="FFFEF8"/>
-                    </a:solidFill>
-                  </a:tcPr>
-                </a:tc>
-                <a:tc>
-                  <a:txBody>
-                    <a:bodyPr wrap="square">
-                      <a:noAutofit/>
-                    </a:bodyPr>
-                    <a:lstStyle/>
-                    <a:p>
-                      <a:pPr algn="r">
-                        <a:lnSpc>
-                          <a:spcPts val="2070"/>
-                        </a:lnSpc>
-                        <a:buNone/>
-                        <a:defRPr sz="1800" b="0">
-                          <a:solidFill>
-                            <a:srgbClr val="303437"/>
-                          </a:solidFill>
-                          <a:latin typeface="Noto Sans"/>
-                        </a:defRPr>
-                      </a:pPr>
-                      <a:r>
-                        <a:rPr sz="1800" b="0" lang="ja-JP" altLang="en-US">
-                          <a:solidFill>
-                            <a:srgbClr val="303437"/>
-                          </a:solidFill>
-                          <a:latin typeface="Noto Sans"/>
-                          <a:ea typeface="Noto Sans CJK JP"/>
-                          <a:cs typeface="Noto Sans"/>
-                        </a:rPr>
-                        <a:t>2,716</a:t>
-                      </a:r>
-                    </a:p>
-                  </a:txBody>
-                  <a:tcPr marL="63500" marR="63500" marT="38100" marB="38100" anchor="ctr">
-                    <a:lnL w="7620">
-                      <a:noFill/>
-                    </a:lnL>
-                    <a:lnR w="7620">
-                      <a:noFill/>
-                    </a:lnR>
-                    <a:lnT w="7620">
-                      <a:noFill/>
-                    </a:lnT>
-                    <a:lnB w="7620">
-                      <a:noFill/>
-                    </a:lnB>
-                    <a:solidFill>
-                      <a:srgbClr val="FFFEF8"/>
-                    </a:solidFill>
-                  </a:tcPr>
-                </a:tc>
-              </a:tr>
-              <a:tr h="420624">
-                <a:tc>
-                  <a:txBody>
-                    <a:bodyPr wrap="square">
-                      <a:noAutofit/>
-                    </a:bodyPr>
-                    <a:lstStyle/>
-                    <a:p>
-                      <a:pPr algn="l">
-                        <a:lnSpc>
-                          <a:spcPts val="2070"/>
-                        </a:lnSpc>
-                        <a:buNone/>
-                        <a:defRPr sz="1800" b="0">
-                          <a:solidFill>
-                            <a:srgbClr val="303437"/>
-                          </a:solidFill>
-                          <a:latin typeface="Noto Sans"/>
-                        </a:defRPr>
-                      </a:pPr>
-                      <a:r>
-                        <a:rPr sz="1800" b="0" lang="ja-JP" altLang="en-US">
-                          <a:solidFill>
-                            <a:srgbClr val="303437"/>
-                          </a:solidFill>
-                          <a:latin typeface="Noto Sans"/>
-                          <a:ea typeface="Noto Sans CJK JP"/>
-                          <a:cs typeface="Noto Sans"/>
-                        </a:rPr>
-                        <a:t>説明＋四候補の種類</a:t>
-                      </a:r>
-                    </a:p>
-                  </a:txBody>
-                  <a:tcPr marL="63500" marR="63500" marT="38100" marB="38100" anchor="ctr">
-                    <a:lnL w="7620">
-                      <a:noFill/>
-                    </a:lnL>
-                    <a:lnR w="7620">
-                      <a:noFill/>
-                    </a:lnR>
-                    <a:lnT w="7620">
-                      <a:noFill/>
-                    </a:lnT>
-                    <a:lnB w="15240">
-                      <a:solidFill>
-                        <a:srgbClr val="626669"/>
-                      </a:solidFill>
-                      <a:prstDash val="solid"/>
-                    </a:lnB>
-                    <a:solidFill>
-                      <a:srgbClr val="FFFEF8"/>
-                    </a:solidFill>
-                  </a:tcPr>
-                </a:tc>
-                <a:tc>
-                  <a:txBody>
-                    <a:bodyPr wrap="square">
-                      <a:noAutofit/>
-                    </a:bodyPr>
-                    <a:lstStyle/>
-                    <a:p>
-                      <a:pPr algn="r">
-                        <a:lnSpc>
-                          <a:spcPts val="2070"/>
-                        </a:lnSpc>
-                        <a:buNone/>
-                        <a:defRPr sz="1800" b="0">
-                          <a:solidFill>
-                            <a:srgbClr val="303437"/>
-                          </a:solidFill>
-                          <a:latin typeface="Noto Sans"/>
-                        </a:defRPr>
-                      </a:pPr>
-                      <a:r>
-                        <a:rPr sz="1800" b="0" lang="ja-JP" altLang="en-US">
-                          <a:solidFill>
-                            <a:srgbClr val="303437"/>
-                          </a:solidFill>
-                          <a:latin typeface="Noto Sans"/>
-                          <a:ea typeface="Noto Sans CJK JP"/>
-                          <a:cs typeface="Noto Sans"/>
-                        </a:rPr>
-                        <a:t>21,778</a:t>
-                      </a:r>
-                    </a:p>
-                  </a:txBody>
-                  <a:tcPr marL="63500" marR="63500" marT="38100" marB="38100" anchor="ctr">
-                    <a:lnL w="7620">
-                      <a:noFill/>
-                    </a:lnL>
-                    <a:lnR w="7620">
-                      <a:noFill/>
-                    </a:lnR>
-                    <a:lnT w="7620">
-                      <a:noFill/>
-                    </a:lnT>
-                    <a:lnB w="15240">
-                      <a:solidFill>
-                        <a:srgbClr val="626669"/>
-                      </a:solidFill>
-                      <a:prstDash val="solid"/>
-                    </a:lnB>
-                    <a:solidFill>
-                      <a:srgbClr val="FFFEF8"/>
-                    </a:solidFill>
-                  </a:tcPr>
-                </a:tc>
-                <a:tc>
-                  <a:txBody>
-                    <a:bodyPr wrap="square">
-                      <a:noAutofit/>
-                    </a:bodyPr>
-                    <a:lstStyle/>
-                    <a:p>
-                      <a:pPr algn="r">
-                        <a:lnSpc>
-                          <a:spcPts val="2070"/>
-                        </a:lnSpc>
-                        <a:buNone/>
-                        <a:defRPr sz="1800" b="0">
-                          <a:solidFill>
-                            <a:srgbClr val="303437"/>
-                          </a:solidFill>
-                          <a:latin typeface="Noto Sans"/>
-                        </a:defRPr>
-                      </a:pPr>
-                      <a:r>
-                        <a:rPr sz="1800" b="0" lang="ja-JP" altLang="en-US">
-                          <a:solidFill>
-                            <a:srgbClr val="303437"/>
-                          </a:solidFill>
-                          <a:latin typeface="Noto Sans"/>
-                          <a:ea typeface="Noto Sans CJK JP"/>
-                          <a:cs typeface="Noto Sans"/>
-                        </a:rPr>
-                        <a:t>2,720</a:t>
-                      </a:r>
-                    </a:p>
-                  </a:txBody>
-                  <a:tcPr marL="63500" marR="63500" marT="38100" marB="38100" anchor="ctr">
-                    <a:lnL w="7620">
-                      <a:noFill/>
-                    </a:lnL>
-                    <a:lnR w="7620">
-                      <a:noFill/>
-                    </a:lnR>
-                    <a:lnT w="7620">
-                      <a:noFill/>
-                    </a:lnT>
-                    <a:lnB w="15240">
-                      <a:solidFill>
-                        <a:srgbClr val="626669"/>
-                      </a:solidFill>
-                      <a:prstDash val="solid"/>
-                    </a:lnB>
-                    <a:solidFill>
-                      <a:srgbClr val="FFFEF8"/>
-                    </a:solidFill>
-                  </a:tcPr>
-                </a:tc>
-                <a:tc>
-                  <a:txBody>
-                    <a:bodyPr wrap="square">
-                      <a:noAutofit/>
-                    </a:bodyPr>
-                    <a:lstStyle/>
-                    <a:p>
-                      <a:pPr algn="r">
-                        <a:lnSpc>
-                          <a:spcPts val="2070"/>
-                        </a:lnSpc>
-                        <a:buNone/>
-                        <a:defRPr sz="1800" b="0">
-                          <a:solidFill>
-                            <a:srgbClr val="303437"/>
-                          </a:solidFill>
-                          <a:latin typeface="Noto Sans"/>
-                        </a:defRPr>
-                      </a:pPr>
-                      <a:r>
-                        <a:rPr sz="1800" b="0" lang="ja-JP" altLang="en-US">
-                          <a:solidFill>
-                            <a:srgbClr val="303437"/>
-                          </a:solidFill>
-                          <a:latin typeface="Noto Sans"/>
-                          <a:ea typeface="Noto Sans CJK JP"/>
-                          <a:cs typeface="Noto Sans"/>
-                        </a:rPr>
-                        <a:t>2,720</a:t>
-                      </a:r>
-                    </a:p>
-                  </a:txBody>
-                  <a:tcPr marL="63500" marR="63500" marT="38100" marB="38100" anchor="ctr">
-                    <a:lnL w="7620">
-                      <a:noFill/>
-                    </a:lnL>
-                    <a:lnR w="7620">
-                      <a:noFill/>
-                    </a:lnR>
-                    <a:lnT w="7620">
-                      <a:noFill/>
-                    </a:lnT>
-                    <a:lnB w="15240">
-                      <a:solidFill>
-                        <a:srgbClr val="626669"/>
-                      </a:solidFill>
-                      <a:prstDash val="solid"/>
-                    </a:lnB>
-                    <a:solidFill>
-                      <a:srgbClr val="FFFEF8"/>
-                    </a:solidFill>
-                  </a:tcPr>
-                </a:tc>
-              </a:tr>
-            </a:tbl>
-          </a:graphicData>
-        </a:graphic>
-      </p:graphicFrame>
-      <p:sp>
-        <p:nvSpPr>
-          <p:cNvPr id="5" name="TextBox 4"/>
-          <p:cNvSpPr txBox="1"/>
-          <p:nvPr/>
-        </p:nvSpPr>
-        <p:spPr>
-          <a:xfrm>
-            <a:off x="594360" y="3392424"/>
-            <a:ext cx="7955279" cy="658368"/>
-          </a:xfrm>
-          <a:prstGeom prst="rect">
-            <a:avLst/>
-          </a:prstGeom>
-          <a:noFill/>
-        </p:spPr>
-        <p:txBody>
-          <a:bodyPr wrap="square" lIns="0" rIns="0" tIns="0" bIns="0">
-            <a:noAutofit/>
-          </a:bodyPr>
-          <a:lstStyle/>
-          <a:p>
-            <a:pPr algn="l">
-              <a:lnSpc>
-                <a:spcPts val="2047"/>
-              </a:lnSpc>
-              <a:spcBef>
-                <a:spcPts val="0"/>
-              </a:spcBef>
-              <a:spcAft>
-                <a:spcPts val="0"/>
-              </a:spcAft>
-              <a:buNone/>
-              <a:defRPr sz="1750" b="0">
-                <a:solidFill>
-                  <a:srgbClr val="303437"/>
-                </a:solidFill>
-                <a:latin typeface="Noto Sans"/>
-              </a:defRPr>
-            </a:pPr>
-            <a:r>
-              <a:rPr sz="1750" b="0" lang="ja-JP" altLang="en-US">
-                <a:solidFill>
-                  <a:srgbClr val="303437"/>
-                </a:solidFill>
-                <a:latin typeface="Noto Sans"/>
-                <a:ea typeface="Noto Sans CJK JP"/>
-                <a:cs typeface="Noto Sans"/>
-              </a:rPr>
-              <a:t>2026-10-18、配布全件の文字列を加工せず集計。学習と公開テストには、説明と四候補が同じ問題が1件ある。</a:t>
-            </a:r>
-          </a:p>
-        </p:txBody>
-      </p:sp>
-      <p:sp>
-        <p:nvSpPr>
-          <p:cNvPr id="6" name="sources"/>
-          <p:cNvSpPr txBox="1"/>
-          <p:nvPr/>
-        </p:nvSpPr>
-        <p:spPr>
-          <a:xfrm>
-            <a:off x="502920" y="4700016"/>
-            <a:ext cx="8183879" cy="530352"/>
-          </a:xfrm>
-          <a:prstGeom prst="rect">
-            <a:avLst/>
-          </a:prstGeom>
-          <a:noFill/>
-        </p:spPr>
-        <p:txBody>
-          <a:bodyPr wrap="square" lIns="0" rIns="0" tIns="0" bIns="0">
-            <a:noAutofit/>
-          </a:bodyPr>
-          <a:lstStyle/>
-          <a:p>
-            <a:pPr algn="l">
-              <a:lnSpc>
-                <a:spcPts val="940"/>
-              </a:lnSpc>
-              <a:spcBef>
-                <a:spcPts val="0"/>
-              </a:spcBef>
-              <a:spcAft>
-                <a:spcPts val="140"/>
-              </a:spcAft>
-              <a:buNone/>
-              <a:defRPr sz="810" b="0">
-                <a:solidFill>
-                  <a:srgbClr val="303437"/>
-                </a:solidFill>
-                <a:latin typeface="Noto Sans"/>
-              </a:defRPr>
-            </a:pPr>
-            <a:r>
-              <a:rPr sz="810" b="0" lang="ja-JP" altLang="en-US">
-                <a:solidFill>
-                  <a:srgbClr val="626669"/>
-                </a:solidFill>
-                <a:latin typeface="Noto Sans"/>
-                <a:ea typeface="Noto Sans CJK JP"/>
-                <a:cs typeface="Noto Sans"/>
-              </a:rPr>
-              <a:t>[1] THUNLP-AIPoet. CCPM. 公式配布、commit e7db1a0dc1ac1ffdd0ec91f74793c29ae9c8efa5、2026-10-18参照。</a:t>
-            </a:r>
-            <a:r>
-              <a:rPr sz="810" b="0" lang="ja-JP" altLang="en-US">
-                <a:solidFill>
-                  <a:srgbClr val="626669"/>
-                </a:solidFill>
-                <a:latin typeface="Noto Sans"/>
-                <a:ea typeface="Noto Sans CJK JP"/>
-                <a:cs typeface="Noto Sans"/>
-              </a:rPr>
-              <a:t>  </a:t>
+              <a:t>[1] THUNLP-AIPoet (2021). CCPM.  </a:t>
             </a:r>
             <a:r>
               <a:rPr sz="810" b="0" lang="ja-JP" altLang="en-US">
@@ -13312,18 +11480,7 @@
                 <a:ea typeface="Noto Sans CJK JP"/>
                 <a:cs typeface="Noto Sans"/>
               </a:rPr>
-              <a:t>[1] THUNLP-AIPoet. CCPM. 公式配布、commit e7db1a0dc1ac1ffdd0ec91f74793c29ae9c8efa5、2026-10-18参照。</a:t>
-            </a:r>
-            <a:r>
-              <a:rPr sz="810" b="0" lang="ja-JP" altLang="en-US">
-                <a:solidFill>
-                  <a:srgbClr val="626669"/>
-                </a:solidFill>
-                <a:latin typeface="Noto Sans"/>
-                <a:ea typeface="Noto Sans CJK JP"/>
-                <a:cs typeface="Noto Sans"/>
-              </a:rPr>
-              <a:t>  </a:t>
+              <a:t>[1] THUNLP-AIPoet (2021). CCPM.  </a:t>
             </a:r>
             <a:r>
               <a:rPr sz="810" b="0" lang="ja-JP" altLang="en-US">
@@ -13454,7 +11611,7 @@
                 <a:ea typeface="Noto Sans CJK JP"/>
                 <a:cs typeface="Noto Sans"/>
               </a:rPr>
-              <a:t>指標はAccuracy（正解率）。各問題で予測した選択肢が元のanswerと一致したかを数え、評価した問題数で割る。四つの候補から一つを選ぶため、各問の正誤は0か1になる。</a:t>
+              <a:t>選んだ候補が正解と一致した問題の割合を、Accuracy（正解率）で評価する。</a:t>
             </a:r>
           </a:p>
           <a:p>
@@ -13484,7 +11641,7 @@
                 <a:ea typeface="Noto Sans CJK JP"/>
                 <a:cs typeface="Noto Sans"/>
               </a:rPr>
-              <a:t>2021年の実験は、学習分割でBERTを微調整し、テスト分割で評価した。公開テストの正解は非公開で、比較表には2021年の報告値を示す。</a:t>
+              <a:t>2021年の実験では、学習21,778問でBERTを微調整し、テスト2,720問で評価した。</a:t>
             </a:r>
           </a:p>
         </p:txBody>
@@ -14131,7 +12288,7 @@
                 <a:ea typeface="Noto Sans CJK JP"/>
                 <a:cs typeface="Noto Sans"/>
               </a:rPr>
-              <a:t>CCPMの同じテスト2,720問を対象とする、構築時の報告値。BERTの基盤はbert-base-chinese。</a:t>
+              <a:t>2021年の報告値。同じテスト2,720問で評価。両方式の基盤はbert-base-chinese。</a:t>
             </a:r>
           </a:p>
         </p:txBody>
@@ -14974,809 +13131,6 @@
 </p:sld>
 </file>
 
-<file path=ppt/slides/slide23.xml><?xml version="1.0" encoding="utf-8"?>
-<p:sld xmlns:a="http://schemas.openxmlformats.org/drawingml/2006/main" xmlns:p="http://schemas.openxmlformats.org/presentationml/2006/main" xmlns:r="http://schemas.openxmlformats.org/officeDocument/2006/relationships">
-  <p:cSld>
-    <p:spTree>
-      <p:nvGrpSpPr>
-        <p:cNvPr id="1" name=""/>
-        <p:cNvGrpSpPr/>
-        <p:nvPr/>
-      </p:nvGrpSpPr>
-      <p:grpSpPr/>
-      <p:sp>
-        <p:nvSpPr>
-          <p:cNvPr id="2" name="Title 1"/>
-          <p:cNvSpPr>
-            <a:spLocks noGrp="1"/>
-          </p:cNvSpPr>
-          <p:nvPr>
-            <p:ph type="title"/>
-          </p:nvPr>
-        </p:nvSpPr>
-        <p:spPr>
-          <a:xfrm>
-            <a:off x="468172" y="650138"/>
-            <a:ext cx="8206740" cy="616305"/>
-          </a:xfrm>
-        </p:spPr>
-        <p:txBody>
-          <a:bodyPr wrap="square" lIns="0" rIns="0" tIns="0" bIns="0">
-            <a:noAutofit/>
-          </a:bodyPr>
-          <a:lstStyle/>
-          <a:p>
-            <a:pPr algn="l">
-              <a:lnSpc>
-                <a:spcPct val="110000"/>
-              </a:lnSpc>
-              <a:buNone/>
-              <a:defRPr sz="2800" b="0">
-                <a:solidFill>
-                  <a:srgbClr val="303437"/>
-                </a:solidFill>
-                <a:latin typeface="Noto Sans"/>
-              </a:defRPr>
-            </a:pPr>
-            <a:r>
-              <a:rPr sz="2800" b="1" lang="ja-JP" altLang="en-US">
-                <a:solidFill>
-                  <a:srgbClr val="303437"/>
-                </a:solidFill>
-                <a:latin typeface="Noto Sans"/>
-                <a:ea typeface="Noto Sans CJK JP"/>
-                <a:cs typeface="Noto Sans"/>
-              </a:rPr>
-              <a:t>両方式を同じ学習設定で微調整した</a:t>
-            </a:r>
-          </a:p>
-        </p:txBody>
-      </p:sp>
-      <p:sp>
-        <p:nvSpPr>
-          <p:cNvPr id="3" name="Title 2"/>
-          <p:cNvSpPr>
-            <a:spLocks noGrp="1"/>
-          </p:cNvSpPr>
-          <p:nvPr>
-            <p:ph type="title" idx="2"/>
-          </p:nvPr>
-        </p:nvSpPr>
-        <p:spPr>
-          <a:xfrm>
-            <a:off x="75895" y="0"/>
-            <a:ext cx="8115300" cy="480060"/>
-          </a:xfrm>
-        </p:spPr>
-        <p:txBody>
-          <a:bodyPr wrap="square" lIns="0" rIns="0" tIns="0" bIns="0" anchor="ctr">
-            <a:noAutofit/>
-          </a:bodyPr>
-          <a:lstStyle/>
-          <a:p>
-            <a:pPr algn="l">
-              <a:lnSpc>
-                <a:spcPct val="110000"/>
-              </a:lnSpc>
-              <a:buNone/>
-              <a:defRPr sz="1400" b="0">
-                <a:solidFill>
-                  <a:srgbClr val="303437"/>
-                </a:solidFill>
-                <a:latin typeface="Noto Sans"/>
-              </a:defRPr>
-            </a:pPr>
-            <a:r>
-              <a:rPr sz="1400" b="1" lang="ja-JP" altLang="en-US">
-                <a:solidFill>
-                  <a:srgbClr val="FFFEF8"/>
-                </a:solidFill>
-                <a:latin typeface="Noto Sans"/>
-                <a:ea typeface="Noto Sans CJK JP"/>
-                <a:cs typeface="Noto Sans"/>
-              </a:rPr>
-              <a:t>3. 正解率で意味の対応を評価する</a:t>
-            </a:r>
-          </a:p>
-        </p:txBody>
-      </p:sp>
-      <p:graphicFrame>
-        <p:nvGraphicFramePr>
-          <p:cNvPr id="4" name="Table 3"/>
-          <p:cNvGraphicFramePr>
-            <a:graphicFrameLocks noGrp="1"/>
-          </p:cNvGraphicFramePr>
-          <p:nvPr/>
-        </p:nvGraphicFramePr>
-        <p:xfrm>
-          <a:off x="548640" y="1508760"/>
-          <a:ext cx="8046720" cy="2286000"/>
-        </p:xfrm>
-        <a:graphic>
-          <a:graphicData uri="http://schemas.openxmlformats.org/drawingml/2006/table">
-            <a:tbl>
-              <a:tblPr firstRow="0" bandRow="0"/>
-              <a:tblGrid>
-                <a:gridCol w="2926080"/>
-                <a:gridCol w="5120640"/>
-              </a:tblGrid>
-              <a:tr h="457200">
-                <a:tc>
-                  <a:txBody>
-                    <a:bodyPr wrap="square">
-                      <a:noAutofit/>
-                    </a:bodyPr>
-                    <a:lstStyle/>
-                    <a:p>
-                      <a:pPr algn="l">
-                        <a:lnSpc>
-                          <a:spcPts val="2300"/>
-                        </a:lnSpc>
-                        <a:buNone/>
-                        <a:defRPr sz="2000" b="0">
-                          <a:solidFill>
-                            <a:srgbClr val="303437"/>
-                          </a:solidFill>
-                          <a:latin typeface="Noto Sans"/>
-                        </a:defRPr>
-                      </a:pPr>
-                      <a:r>
-                        <a:rPr sz="2000" b="0" lang="ja-JP" altLang="en-US">
-                          <a:solidFill>
-                            <a:srgbClr val="303437"/>
-                          </a:solidFill>
-                          <a:latin typeface="Noto Sans"/>
-                          <a:ea typeface="Noto Sans CJK JP"/>
-                          <a:cs typeface="Noto Sans"/>
-                        </a:rPr>
-                        <a:t>項目</a:t>
-                      </a:r>
-                    </a:p>
-                  </a:txBody>
-                  <a:tcPr marL="63500" marR="63500" marT="38100" marB="38100" anchor="ctr">
-                    <a:lnL w="7620">
-                      <a:noFill/>
-                    </a:lnL>
-                    <a:lnR w="7620">
-                      <a:noFill/>
-                    </a:lnR>
-                    <a:lnT w="15240">
-                      <a:solidFill>
-                        <a:srgbClr val="626669"/>
-                      </a:solidFill>
-                      <a:prstDash val="solid"/>
-                    </a:lnT>
-                    <a:lnB w="7620">
-                      <a:solidFill>
-                        <a:srgbClr val="626669"/>
-                      </a:solidFill>
-                      <a:prstDash val="solid"/>
-                    </a:lnB>
-                    <a:solidFill>
-                      <a:srgbClr val="FFFEF8"/>
-                    </a:solidFill>
-                  </a:tcPr>
-                </a:tc>
-                <a:tc>
-                  <a:txBody>
-                    <a:bodyPr wrap="square">
-                      <a:noAutofit/>
-                    </a:bodyPr>
-                    <a:lstStyle/>
-                    <a:p>
-                      <a:pPr algn="l">
-                        <a:lnSpc>
-                          <a:spcPts val="2300"/>
-                        </a:lnSpc>
-                        <a:buNone/>
-                        <a:defRPr sz="2000" b="0">
-                          <a:solidFill>
-                            <a:srgbClr val="303437"/>
-                          </a:solidFill>
-                          <a:latin typeface="Noto Sans"/>
-                        </a:defRPr>
-                      </a:pPr>
-                      <a:r>
-                        <a:rPr sz="2000" b="0" lang="ja-JP" altLang="en-US">
-                          <a:solidFill>
-                            <a:srgbClr val="303437"/>
-                          </a:solidFill>
-                          <a:latin typeface="Noto Sans"/>
-                          <a:ea typeface="Noto Sans CJK JP"/>
-                          <a:cs typeface="Noto Sans"/>
-                        </a:rPr>
-                        <a:t>設定</a:t>
-                      </a:r>
-                    </a:p>
-                  </a:txBody>
-                  <a:tcPr marL="63500" marR="63500" marT="38100" marB="38100" anchor="ctr">
-                    <a:lnL w="7620">
-                      <a:noFill/>
-                    </a:lnL>
-                    <a:lnR w="7620">
-                      <a:noFill/>
-                    </a:lnR>
-                    <a:lnT w="15240">
-                      <a:solidFill>
-                        <a:srgbClr val="626669"/>
-                      </a:solidFill>
-                      <a:prstDash val="solid"/>
-                    </a:lnT>
-                    <a:lnB w="7620">
-                      <a:solidFill>
-                        <a:srgbClr val="626669"/>
-                      </a:solidFill>
-                      <a:prstDash val="solid"/>
-                    </a:lnB>
-                    <a:solidFill>
-                      <a:srgbClr val="FFFEF8"/>
-                    </a:solidFill>
-                  </a:tcPr>
-                </a:tc>
-              </a:tr>
-              <a:tr h="457200">
-                <a:tc>
-                  <a:txBody>
-                    <a:bodyPr wrap="square">
-                      <a:noAutofit/>
-                    </a:bodyPr>
-                    <a:lstStyle/>
-                    <a:p>
-                      <a:pPr algn="l">
-                        <a:lnSpc>
-                          <a:spcPts val="2300"/>
-                        </a:lnSpc>
-                        <a:buNone/>
-                        <a:defRPr sz="2000" b="0">
-                          <a:solidFill>
-                            <a:srgbClr val="303437"/>
-                          </a:solidFill>
-                          <a:latin typeface="Noto Sans"/>
-                        </a:defRPr>
-                      </a:pPr>
-                      <a:r>
-                        <a:rPr sz="2000" b="0" lang="ja-JP" altLang="en-US">
-                          <a:solidFill>
-                            <a:srgbClr val="303437"/>
-                          </a:solidFill>
-                          <a:latin typeface="Noto Sans"/>
-                          <a:ea typeface="Noto Sans CJK JP"/>
-                          <a:cs typeface="Noto Sans"/>
-                        </a:rPr>
-                        <a:t>文の符号化器</a:t>
-                      </a:r>
-                    </a:p>
-                  </a:txBody>
-                  <a:tcPr marL="63500" marR="63500" marT="38100" marB="38100" anchor="ctr">
-                    <a:lnL w="7620">
-                      <a:noFill/>
-                    </a:lnL>
-                    <a:lnR w="7620">
-                      <a:noFill/>
-                    </a:lnR>
-                    <a:lnT w="7620">
-                      <a:solidFill>
-                        <a:srgbClr val="626669"/>
-                      </a:solidFill>
-                      <a:prstDash val="solid"/>
-                    </a:lnT>
-                    <a:lnB w="7620">
-                      <a:noFill/>
-                    </a:lnB>
-                    <a:solidFill>
-                      <a:srgbClr val="FFFEF8"/>
-                    </a:solidFill>
-                  </a:tcPr>
-                </a:tc>
-                <a:tc>
-                  <a:txBody>
-                    <a:bodyPr wrap="square">
-                      <a:noAutofit/>
-                    </a:bodyPr>
-                    <a:lstStyle/>
-                    <a:p>
-                      <a:pPr algn="l">
-                        <a:lnSpc>
-                          <a:spcPts val="2300"/>
-                        </a:lnSpc>
-                        <a:buNone/>
-                        <a:defRPr sz="2000" b="0">
-                          <a:solidFill>
-                            <a:srgbClr val="303437"/>
-                          </a:solidFill>
-                          <a:latin typeface="Noto Sans"/>
-                        </a:defRPr>
-                      </a:pPr>
-                      <a:r>
-                        <a:rPr sz="2000" b="0" lang="ja-JP" altLang="en-US">
-                          <a:solidFill>
-                            <a:srgbClr val="303437"/>
-                          </a:solidFill>
-                          <a:latin typeface="Noto Sans"/>
-                          <a:ea typeface="Noto Sans CJK JP"/>
-                          <a:cs typeface="Noto Sans"/>
-                        </a:rPr>
-                        <a:t>bert-base-chinese</a:t>
-                      </a:r>
-                    </a:p>
-                  </a:txBody>
-                  <a:tcPr marL="63500" marR="63500" marT="38100" marB="38100" anchor="ctr">
-                    <a:lnL w="7620">
-                      <a:noFill/>
-                    </a:lnL>
-                    <a:lnR w="7620">
-                      <a:noFill/>
-                    </a:lnR>
-                    <a:lnT w="7620">
-                      <a:solidFill>
-                        <a:srgbClr val="626669"/>
-                      </a:solidFill>
-                      <a:prstDash val="solid"/>
-                    </a:lnT>
-                    <a:lnB w="7620">
-                      <a:noFill/>
-                    </a:lnB>
-                    <a:solidFill>
-                      <a:srgbClr val="FFFEF8"/>
-                    </a:solidFill>
-                  </a:tcPr>
-                </a:tc>
-              </a:tr>
-              <a:tr h="457200">
-                <a:tc>
-                  <a:txBody>
-                    <a:bodyPr wrap="square">
-                      <a:noAutofit/>
-                    </a:bodyPr>
-                    <a:lstStyle/>
-                    <a:p>
-                      <a:pPr algn="l">
-                        <a:lnSpc>
-                          <a:spcPts val="2300"/>
-                        </a:lnSpc>
-                        <a:buNone/>
-                        <a:defRPr sz="2000" b="0">
-                          <a:solidFill>
-                            <a:srgbClr val="303437"/>
-                          </a:solidFill>
-                          <a:latin typeface="Noto Sans"/>
-                        </a:defRPr>
-                      </a:pPr>
-                      <a:r>
-                        <a:rPr sz="2000" b="0" lang="ja-JP" altLang="en-US">
-                          <a:solidFill>
-                            <a:srgbClr val="303437"/>
-                          </a:solidFill>
-                          <a:latin typeface="Noto Sans"/>
-                          <a:ea typeface="Noto Sans CJK JP"/>
-                          <a:cs typeface="Noto Sans"/>
-                        </a:rPr>
-                        <a:t>最適化手法</a:t>
-                      </a:r>
-                    </a:p>
-                  </a:txBody>
-                  <a:tcPr marL="63500" marR="63500" marT="38100" marB="38100" anchor="ctr">
-                    <a:lnL w="7620">
-                      <a:noFill/>
-                    </a:lnL>
-                    <a:lnR w="7620">
-                      <a:noFill/>
-                    </a:lnR>
-                    <a:lnT w="7620">
-                      <a:noFill/>
-                    </a:lnT>
-                    <a:lnB w="7620">
-                      <a:noFill/>
-                    </a:lnB>
-                    <a:solidFill>
-                      <a:srgbClr val="FFFEF8"/>
-                    </a:solidFill>
-                  </a:tcPr>
-                </a:tc>
-                <a:tc>
-                  <a:txBody>
-                    <a:bodyPr wrap="square">
-                      <a:noAutofit/>
-                    </a:bodyPr>
-                    <a:lstStyle/>
-                    <a:p>
-                      <a:pPr algn="l">
-                        <a:lnSpc>
-                          <a:spcPts val="2300"/>
-                        </a:lnSpc>
-                        <a:buNone/>
-                        <a:defRPr sz="2000" b="0">
-                          <a:solidFill>
-                            <a:srgbClr val="303437"/>
-                          </a:solidFill>
-                          <a:latin typeface="Noto Sans"/>
-                        </a:defRPr>
-                      </a:pPr>
-                      <a:r>
-                        <a:rPr sz="2000" b="0" lang="ja-JP" altLang="en-US">
-                          <a:solidFill>
-                            <a:srgbClr val="303437"/>
-                          </a:solidFill>
-                          <a:latin typeface="Noto Sans"/>
-                          <a:ea typeface="Noto Sans CJK JP"/>
-                          <a:cs typeface="Noto Sans"/>
-                        </a:rPr>
-                        <a:t>Adam</a:t>
-                      </a:r>
-                    </a:p>
-                  </a:txBody>
-                  <a:tcPr marL="63500" marR="63500" marT="38100" marB="38100" anchor="ctr">
-                    <a:lnL w="7620">
-                      <a:noFill/>
-                    </a:lnL>
-                    <a:lnR w="7620">
-                      <a:noFill/>
-                    </a:lnR>
-                    <a:lnT w="7620">
-                      <a:noFill/>
-                    </a:lnT>
-                    <a:lnB w="7620">
-                      <a:noFill/>
-                    </a:lnB>
-                    <a:solidFill>
-                      <a:srgbClr val="FFFEF8"/>
-                    </a:solidFill>
-                  </a:tcPr>
-                </a:tc>
-              </a:tr>
-              <a:tr h="457200">
-                <a:tc>
-                  <a:txBody>
-                    <a:bodyPr wrap="square">
-                      <a:noAutofit/>
-                    </a:bodyPr>
-                    <a:lstStyle/>
-                    <a:p>
-                      <a:pPr algn="l">
-                        <a:lnSpc>
-                          <a:spcPts val="2300"/>
-                        </a:lnSpc>
-                        <a:buNone/>
-                        <a:defRPr sz="2000" b="0">
-                          <a:solidFill>
-                            <a:srgbClr val="303437"/>
-                          </a:solidFill>
-                          <a:latin typeface="Noto Sans"/>
-                        </a:defRPr>
-                      </a:pPr>
-                      <a:r>
-                        <a:rPr sz="2000" b="0" lang="ja-JP" altLang="en-US">
-                          <a:solidFill>
-                            <a:srgbClr val="303437"/>
-                          </a:solidFill>
-                          <a:latin typeface="Noto Sans"/>
-                          <a:ea typeface="Noto Sans CJK JP"/>
-                          <a:cs typeface="Noto Sans"/>
-                        </a:rPr>
-                        <a:t>初期学習率</a:t>
-                      </a:r>
-                    </a:p>
-                  </a:txBody>
-                  <a:tcPr marL="63500" marR="63500" marT="38100" marB="38100" anchor="ctr">
-                    <a:lnL w="7620">
-                      <a:noFill/>
-                    </a:lnL>
-                    <a:lnR w="7620">
-                      <a:noFill/>
-                    </a:lnR>
-                    <a:lnT w="7620">
-                      <a:noFill/>
-                    </a:lnT>
-                    <a:lnB w="7620">
-                      <a:noFill/>
-                    </a:lnB>
-                    <a:solidFill>
-                      <a:srgbClr val="FFFEF8"/>
-                    </a:solidFill>
-                  </a:tcPr>
-                </a:tc>
-                <a:tc>
-                  <a:txBody>
-                    <a:bodyPr wrap="square">
-                      <a:noAutofit/>
-                    </a:bodyPr>
-                    <a:lstStyle/>
-                    <a:p>
-                      <a:pPr algn="l">
-                        <a:lnSpc>
-                          <a:spcPts val="2300"/>
-                        </a:lnSpc>
-                        <a:buNone/>
-                        <a:defRPr sz="2000" b="0">
-                          <a:solidFill>
-                            <a:srgbClr val="303437"/>
-                          </a:solidFill>
-                          <a:latin typeface="Noto Sans"/>
-                        </a:defRPr>
-                      </a:pPr>
-                      <a:r>
-                        <a:rPr sz="2000" b="0" lang="ja-JP" altLang="en-US">
-                          <a:solidFill>
-                            <a:srgbClr val="303437"/>
-                          </a:solidFill>
-                          <a:latin typeface="Noto Sans"/>
-                          <a:ea typeface="Noto Sans CJK JP"/>
-                          <a:cs typeface="Noto Sans"/>
-                        </a:rPr>
-                        <a:t>2×10⁻⁵、線形に減衰</a:t>
-                      </a:r>
-                    </a:p>
-                  </a:txBody>
-                  <a:tcPr marL="63500" marR="63500" marT="38100" marB="38100" anchor="ctr">
-                    <a:lnL w="7620">
-                      <a:noFill/>
-                    </a:lnL>
-                    <a:lnR w="7620">
-                      <a:noFill/>
-                    </a:lnR>
-                    <a:lnT w="7620">
-                      <a:noFill/>
-                    </a:lnT>
-                    <a:lnB w="7620">
-                      <a:noFill/>
-                    </a:lnB>
-                    <a:solidFill>
-                      <a:srgbClr val="FFFEF8"/>
-                    </a:solidFill>
-                  </a:tcPr>
-                </a:tc>
-              </a:tr>
-              <a:tr h="457200">
-                <a:tc>
-                  <a:txBody>
-                    <a:bodyPr wrap="square">
-                      <a:noAutofit/>
-                    </a:bodyPr>
-                    <a:lstStyle/>
-                    <a:p>
-                      <a:pPr algn="l">
-                        <a:lnSpc>
-                          <a:spcPts val="2300"/>
-                        </a:lnSpc>
-                        <a:buNone/>
-                        <a:defRPr sz="2000" b="0">
-                          <a:solidFill>
-                            <a:srgbClr val="303437"/>
-                          </a:solidFill>
-                          <a:latin typeface="Noto Sans"/>
-                        </a:defRPr>
-                      </a:pPr>
-                      <a:r>
-                        <a:rPr sz="2000" b="0" lang="ja-JP" altLang="en-US">
-                          <a:solidFill>
-                            <a:srgbClr val="303437"/>
-                          </a:solidFill>
-                          <a:latin typeface="Noto Sans"/>
-                          <a:ea typeface="Noto Sans CJK JP"/>
-                          <a:cs typeface="Noto Sans"/>
-                        </a:rPr>
-                        <a:t>学習回数</a:t>
-                      </a:r>
-                    </a:p>
-                  </a:txBody>
-                  <a:tcPr marL="63500" marR="63500" marT="38100" marB="38100" anchor="ctr">
-                    <a:lnL w="7620">
-                      <a:noFill/>
-                    </a:lnL>
-                    <a:lnR w="7620">
-                      <a:noFill/>
-                    </a:lnR>
-                    <a:lnT w="7620">
-                      <a:noFill/>
-                    </a:lnT>
-                    <a:lnB w="15240">
-                      <a:solidFill>
-                        <a:srgbClr val="626669"/>
-                      </a:solidFill>
-                      <a:prstDash val="solid"/>
-                    </a:lnB>
-                    <a:solidFill>
-                      <a:srgbClr val="FFFEF8"/>
-                    </a:solidFill>
-                  </a:tcPr>
-                </a:tc>
-                <a:tc>
-                  <a:txBody>
-                    <a:bodyPr wrap="square">
-                      <a:noAutofit/>
-                    </a:bodyPr>
-                    <a:lstStyle/>
-                    <a:p>
-                      <a:pPr algn="l">
-                        <a:lnSpc>
-                          <a:spcPts val="2300"/>
-                        </a:lnSpc>
-                        <a:buNone/>
-                        <a:defRPr sz="2000" b="0">
-                          <a:solidFill>
-                            <a:srgbClr val="303437"/>
-                          </a:solidFill>
-                          <a:latin typeface="Noto Sans"/>
-                        </a:defRPr>
-                      </a:pPr>
-                      <a:r>
-                        <a:rPr sz="2000" b="0" lang="ja-JP" altLang="en-US">
-                          <a:solidFill>
-                            <a:srgbClr val="303437"/>
-                          </a:solidFill>
-                          <a:latin typeface="Noto Sans"/>
-                          <a:ea typeface="Noto Sans CJK JP"/>
-                          <a:cs typeface="Noto Sans"/>
-                        </a:rPr>
-                        <a:t>4 epochs</a:t>
-                      </a:r>
-                    </a:p>
-                  </a:txBody>
-                  <a:tcPr marL="63500" marR="63500" marT="38100" marB="38100" anchor="ctr">
-                    <a:lnL w="7620">
-                      <a:noFill/>
-                    </a:lnL>
-                    <a:lnR w="7620">
-                      <a:noFill/>
-                    </a:lnR>
-                    <a:lnT w="7620">
-                      <a:noFill/>
-                    </a:lnT>
-                    <a:lnB w="15240">
-                      <a:solidFill>
-                        <a:srgbClr val="626669"/>
-                      </a:solidFill>
-                      <a:prstDash val="solid"/>
-                    </a:lnB>
-                    <a:solidFill>
-                      <a:srgbClr val="FFFEF8"/>
-                    </a:solidFill>
-                  </a:tcPr>
-                </a:tc>
-              </a:tr>
-            </a:tbl>
-          </a:graphicData>
-        </a:graphic>
-      </p:graphicFrame>
-      <p:sp>
-        <p:nvSpPr>
-          <p:cNvPr id="5" name="TextBox 4"/>
-          <p:cNvSpPr txBox="1"/>
-          <p:nvPr/>
-        </p:nvSpPr>
-        <p:spPr>
-          <a:xfrm>
-            <a:off x="594360" y="3995928"/>
-            <a:ext cx="7955279" cy="658368"/>
-          </a:xfrm>
-          <a:prstGeom prst="rect">
-            <a:avLst/>
-          </a:prstGeom>
-          <a:noFill/>
-        </p:spPr>
-        <p:txBody>
-          <a:bodyPr wrap="square" lIns="0" rIns="0" tIns="0" bIns="0">
-            <a:noAutofit/>
-          </a:bodyPr>
-          <a:lstStyle/>
-          <a:p>
-            <a:pPr algn="l">
-              <a:lnSpc>
-                <a:spcPts val="2047"/>
-              </a:lnSpc>
-              <a:spcBef>
-                <a:spcPts val="0"/>
-              </a:spcBef>
-              <a:spcAft>
-                <a:spcPts val="0"/>
-              </a:spcAft>
-              <a:buNone/>
-              <a:defRPr sz="1750" b="0">
-                <a:solidFill>
-                  <a:srgbClr val="303437"/>
-                </a:solidFill>
-                <a:latin typeface="Noto Sans"/>
-              </a:defRPr>
-            </a:pPr>
-            <a:r>
-              <a:rPr sz="1750" b="0" lang="ja-JP" altLang="en-US">
-                <a:solidFill>
-                  <a:srgbClr val="303437"/>
-                </a:solidFill>
-                <a:latin typeface="Noto Sans"/>
-                <a:ea typeface="Noto Sans CJK JP"/>
-                <a:cs typeface="Noto Sans"/>
-              </a:rPr>
-              <a:t>BERT-CCPoemは負例の検索に使うモデルで、ここで評価した二方式の基盤とは区別する。</a:t>
-            </a:r>
-          </a:p>
-        </p:txBody>
-      </p:sp>
-      <p:sp>
-        <p:nvSpPr>
-          <p:cNvPr id="6" name="sources"/>
-          <p:cNvSpPr txBox="1"/>
-          <p:nvPr/>
-        </p:nvSpPr>
-        <p:spPr>
-          <a:xfrm>
-            <a:off x="502920" y="4700016"/>
-            <a:ext cx="8183879" cy="530352"/>
-          </a:xfrm>
-          <a:prstGeom prst="rect">
-            <a:avLst/>
-          </a:prstGeom>
-          <a:noFill/>
-        </p:spPr>
-        <p:txBody>
-          <a:bodyPr wrap="square" lIns="0" rIns="0" tIns="0" bIns="0">
-            <a:noAutofit/>
-          </a:bodyPr>
-          <a:lstStyle/>
-          <a:p>
-            <a:pPr algn="l">
-              <a:lnSpc>
-                <a:spcPts val="940"/>
-              </a:lnSpc>
-              <a:spcBef>
-                <a:spcPts val="0"/>
-              </a:spcBef>
-              <a:spcAft>
-                <a:spcPts val="140"/>
-              </a:spcAft>
-              <a:buNone/>
-              <a:defRPr sz="810" b="0">
-                <a:solidFill>
-                  <a:srgbClr val="303437"/>
-                </a:solidFill>
-                <a:latin typeface="Noto Sans"/>
-              </a:defRPr>
-            </a:pPr>
-            <a:r>
-              <a:rPr sz="810" b="0" lang="ja-JP" altLang="en-US">
-                <a:solidFill>
-                  <a:srgbClr val="626669"/>
-                </a:solidFill>
-                <a:latin typeface="Noto Sans"/>
-                <a:ea typeface="Noto Sans CJK JP"/>
-                <a:cs typeface="Noto Sans"/>
-              </a:rPr>
-              <a:t>[1] Li, Qi, Sun, Yi &amp; Zhang (2021). CCPM: A Chinese Classical Poetry Matching Dataset. arXiv:2106.01979v1.</a:t>
-            </a:r>
-            <a:r>
-              <a:rPr sz="810" b="0" lang="ja-JP" altLang="en-US">
-                <a:solidFill>
-                  <a:srgbClr val="626669"/>
-                </a:solidFill>
-                <a:latin typeface="Noto Sans"/>
-                <a:ea typeface="Noto Sans CJK JP"/>
-                <a:cs typeface="Noto Sans"/>
-              </a:rPr>
-              <a:t>  </a:t>
-            </a:r>
-            <a:r>
-              <a:rPr sz="810" b="0" lang="ja-JP" altLang="en-US">
-                <a:solidFill>
-                  <a:srgbClr val="626669"/>
-                </a:solidFill>
-                <a:latin typeface="Noto Sans"/>
-                <a:ea typeface="Noto Sans CJK JP"/>
-                <a:cs typeface="Noto Sans"/>
-                <a:hlinkClick r:id="rId2"/>
-              </a:rPr>
-              <a:t>https://arxiv.org/abs/2106.01979</a:t>
-            </a:r>
-          </a:p>
-        </p:txBody>
-      </p:sp>
-    </p:spTree>
-  </p:cSld>
-  <p:clrMapOvr>
-    <a:masterClrMapping/>
-  </p:clrMapOvr>
-</p:sld>
-</file>
-
 <file path=ppt/slides/slide24.xml><?xml version="1.0" encoding="utf-8"?>
 <p:sld xmlns:a="http://schemas.openxmlformats.org/drawingml/2006/main" xmlns:p="http://schemas.openxmlformats.org/presentationml/2006/main" xmlns:r="http://schemas.openxmlformats.org/officeDocument/2006/relationships">
   <p:cSld>
@@ -15997,7 +13351,7 @@
                 <a:ea typeface="Noto Sans CJK JP"/>
                 <a:cs typeface="Noto Sans"/>
               </a:rPr>
-              <a:t>2023年のCLEVAは、中国語モデルを多様な課題で評価するプラットフォーム。古典中国語理解の課題としてCCPMから四択問題を抽出し、現代語と古典候補の意味の対応を正解率で評価する。</a:t>
+              <a:t>2023年のCLEVAは、中国語モデルを多様な課題で評価するプラットフォーム。CCPMの四択問題を、古典中国語理解の評価に用いる。</a:t>
             </a:r>
           </a:p>
           <a:p>
@@ -16027,7 +13381,37 @@
                 <a:ea typeface="Noto Sans CJK JP"/>
                 <a:cs typeface="Noto Sans"/>
               </a:rPr>
-              <a:t>掲載例は実例2の「山間の雨が晴れ始める」問題で、公式trainの18,823行と四候補・正解Dが一致する。同じ説明文に別候補が付く問題もある。</a:t>
+              <a:t>現代語の説明と四候補を提示し、選んだ候補の正誤を正解率で評価する。実例2の雨の問題は、CLEVA論文にも掲載されている。</a:t>
+            </a:r>
+          </a:p>
+          <a:p>
+            <a:pPr marL="457200" indent="-355600">
+              <a:lnSpc>
+                <a:spcPts val="2379"/>
+              </a:lnSpc>
+              <a:spcAft>
+                <a:spcPts val="0"/>
+              </a:spcAft>
+              <a:buSzPct val="66500"/>
+              <a:buFont typeface="Noto Sans CJK JP"/>
+              <a:buChar char="●"/>
+              <a:defRPr sz="2000" b="0">
+                <a:solidFill>
+                  <a:srgbClr val="303437"/>
+                </a:solidFill>
+                <a:latin typeface="Noto Sans"/>
+              </a:defRPr>
+            </a:pPr>
+            <a:r>
+              <a:rPr sz="2000" b="0" lang="ja-JP" altLang="en-US">
+                <a:solidFill>
+                  <a:srgbClr val="303437"/>
+                </a:solidFill>
+                <a:latin typeface="Noto Sans"/>
+                <a:ea typeface="Noto Sans CJK JP"/>
+                <a:cs typeface="Noto Sans"/>
+              </a:rPr>
+              <a:t>HELMにも同課題の評価実装が公開されている。CLEVAで評価した問題の総数は、公開説明には記されていない。</a:t>
             </a:r>
           </a:p>
         </p:txBody>
@@ -16153,1086 +13537,6 @@
                 <a:hlinkClick r:id="rId2"/>
               </a:rPr>
               <a:t>https://aclanthology.org/2023.emnlp-demo.17/</a:t>
-            </a:r>
-          </a:p>
-        </p:txBody>
-      </p:sp>
-    </p:spTree>
-  </p:cSld>
-  <p:clrMapOvr>
-    <a:masterClrMapping/>
-  </p:clrMapOvr>
-</p:sld>
-</file>
-
-<file path=ppt/slides/slide26.xml><?xml version="1.0" encoding="utf-8"?>
-<p:sld xmlns:a="http://schemas.openxmlformats.org/drawingml/2006/main" xmlns:p="http://schemas.openxmlformats.org/presentationml/2006/main" xmlns:r="http://schemas.openxmlformats.org/officeDocument/2006/relationships">
-  <p:cSld>
-    <p:spTree>
-      <p:nvGrpSpPr>
-        <p:cNvPr id="1" name=""/>
-        <p:cNvGrpSpPr/>
-        <p:nvPr/>
-      </p:nvGrpSpPr>
-      <p:grpSpPr/>
-      <p:sp>
-        <p:nvSpPr>
-          <p:cNvPr id="2" name="Title 1"/>
-          <p:cNvSpPr>
-            <a:spLocks noGrp="1"/>
-          </p:cNvSpPr>
-          <p:nvPr>
-            <p:ph type="title"/>
-          </p:nvPr>
-        </p:nvSpPr>
-        <p:spPr>
-          <a:xfrm>
-            <a:off x="468172" y="650138"/>
-            <a:ext cx="8206740" cy="616305"/>
-          </a:xfrm>
-        </p:spPr>
-        <p:txBody>
-          <a:bodyPr wrap="square" lIns="0" rIns="0" tIns="0" bIns="0">
-            <a:noAutofit/>
-          </a:bodyPr>
-          <a:lstStyle/>
-          <a:p>
-            <a:pPr algn="l">
-              <a:lnSpc>
-                <a:spcPct val="110000"/>
-              </a:lnSpc>
-              <a:buNone/>
-              <a:defRPr sz="2800" b="0">
-                <a:solidFill>
-                  <a:srgbClr val="303437"/>
-                </a:solidFill>
-                <a:latin typeface="Noto Sans"/>
-              </a:defRPr>
-            </a:pPr>
-            <a:r>
-              <a:rPr sz="2800" b="1" lang="ja-JP" altLang="en-US">
-                <a:solidFill>
-                  <a:srgbClr val="303437"/>
-                </a:solidFill>
-                <a:latin typeface="Noto Sans"/>
-                <a:ea typeface="Noto Sans CJK JP"/>
-                <a:cs typeface="Noto Sans"/>
-              </a:rPr>
-              <a:t>HELMにも課題の実装があり、公開実行は0件</a:t>
-            </a:r>
-          </a:p>
-        </p:txBody>
-      </p:sp>
-      <p:sp>
-        <p:nvSpPr>
-          <p:cNvPr id="3" name="Text Placeholder 2"/>
-          <p:cNvSpPr>
-            <a:spLocks noGrp="1"/>
-          </p:cNvSpPr>
-          <p:nvPr>
-            <p:ph type="body" idx="1"/>
-          </p:nvPr>
-        </p:nvSpPr>
-        <p:spPr>
-          <a:xfrm>
-            <a:off x="594360" y="1463040"/>
-            <a:ext cx="7955279" cy="3044952"/>
-          </a:xfrm>
-        </p:spPr>
-        <p:txBody>
-          <a:bodyPr wrap="square" tIns="91440" bIns="91440">
-            <a:noAutofit/>
-          </a:bodyPr>
-          <a:lstStyle/>
-          <a:p>
-            <a:pPr marL="457200" indent="-355600">
-              <a:lnSpc>
-                <a:spcPts val="2379"/>
-              </a:lnSpc>
-              <a:spcAft>
-                <a:spcPts val="700"/>
-              </a:spcAft>
-              <a:buSzPct val="66500"/>
-              <a:buFont typeface="Noto Sans CJK JP"/>
-              <a:buChar char="●"/>
-              <a:defRPr sz="2000" b="0">
-                <a:solidFill>
-                  <a:srgbClr val="303437"/>
-                </a:solidFill>
-                <a:latin typeface="Noto Sans"/>
-              </a:defRPr>
-            </a:pPr>
-            <a:r>
-              <a:rPr sz="2000" b="0" lang="ja-JP" altLang="en-US">
-                <a:solidFill>
-                  <a:srgbClr val="303437"/>
-                </a:solidFill>
-                <a:latin typeface="Noto Sans"/>
-                <a:ea typeface="Noto Sans CJK JP"/>
-                <a:cs typeface="Noto Sans"/>
-              </a:rPr>
-              <a:t>HELM v0.4.0にはCLEVAClassicalChineseUnderstandingScenarioがあり、実例1と同じ説明・候補・正解Aを記す。データとテンプレートを外部ZIPから読み、候補の番号を正解参照へ変換する。</a:t>
-            </a:r>
-          </a:p>
-          <a:p>
-            <a:pPr marL="457200" indent="-355600">
-              <a:lnSpc>
-                <a:spcPts val="2379"/>
-              </a:lnSpc>
-              <a:spcAft>
-                <a:spcPts val="0"/>
-              </a:spcAft>
-              <a:buSzPct val="66500"/>
-              <a:buFont typeface="Noto Sans CJK JP"/>
-              <a:buChar char="●"/>
-              <a:defRPr sz="2000" b="0">
-                <a:solidFill>
-                  <a:srgbClr val="303437"/>
-                </a:solidFill>
-                <a:latin typeface="Noto Sans"/>
-              </a:defRPr>
-            </a:pPr>
-            <a:r>
-              <a:rPr sz="2000" b="0" lang="ja-JP" altLang="en-US">
-                <a:solidFill>
-                  <a:srgbClr val="303437"/>
-                </a:solidFill>
-                <a:latin typeface="Noto Sans"/>
-                <a:ea typeface="Noto Sans CJK JP"/>
-                <a:cs typeface="Noto Sans"/>
-              </a:rPr>
-              <a:t>Classic v0.4.0の公開run_specs全8,526件にはCLEVA実行がない。CLEVA用評価ZIPも取得できていないため、HELMでの得点、実際の学習例数や生成条件は示さない。</a:t>
-            </a:r>
-          </a:p>
-        </p:txBody>
-      </p:sp>
-      <p:sp>
-        <p:nvSpPr>
-          <p:cNvPr id="4" name="Title 3"/>
-          <p:cNvSpPr>
-            <a:spLocks noGrp="1"/>
-          </p:cNvSpPr>
-          <p:nvPr>
-            <p:ph type="title" idx="2"/>
-          </p:nvPr>
-        </p:nvSpPr>
-        <p:spPr>
-          <a:xfrm>
-            <a:off x="75895" y="0"/>
-            <a:ext cx="8115300" cy="480060"/>
-          </a:xfrm>
-        </p:spPr>
-        <p:txBody>
-          <a:bodyPr wrap="square" lIns="0" rIns="0" tIns="0" bIns="0" anchor="ctr">
-            <a:noAutofit/>
-          </a:bodyPr>
-          <a:lstStyle/>
-          <a:p>
-            <a:pPr algn="l">
-              <a:lnSpc>
-                <a:spcPct val="110000"/>
-              </a:lnSpc>
-              <a:buNone/>
-              <a:defRPr sz="1400" b="0">
-                <a:solidFill>
-                  <a:srgbClr val="303437"/>
-                </a:solidFill>
-                <a:latin typeface="Noto Sans"/>
-              </a:defRPr>
-            </a:pPr>
-            <a:r>
-              <a:rPr sz="1400" b="1" lang="ja-JP" altLang="en-US">
-                <a:solidFill>
-                  <a:srgbClr val="FFFEF8"/>
-                </a:solidFill>
-                <a:latin typeface="Noto Sans"/>
-                <a:ea typeface="Noto Sans CJK JP"/>
-                <a:cs typeface="Noto Sans"/>
-              </a:rPr>
-              <a:t>4. CLEVAでの後利用と公開配布</a:t>
-            </a:r>
-          </a:p>
-        </p:txBody>
-      </p:sp>
-      <p:sp>
-        <p:nvSpPr>
-          <p:cNvPr id="5" name="sources"/>
-          <p:cNvSpPr txBox="1"/>
-          <p:nvPr/>
-        </p:nvSpPr>
-        <p:spPr>
-          <a:xfrm>
-            <a:off x="502920" y="4700016"/>
-            <a:ext cx="8183879" cy="530352"/>
-          </a:xfrm>
-          <a:prstGeom prst="rect">
-            <a:avLst/>
-          </a:prstGeom>
-          <a:noFill/>
-        </p:spPr>
-        <p:txBody>
-          <a:bodyPr wrap="square" lIns="0" rIns="0" tIns="0" bIns="0">
-            <a:noAutofit/>
-          </a:bodyPr>
-          <a:lstStyle/>
-          <a:p>
-            <a:pPr algn="l">
-              <a:lnSpc>
-                <a:spcPts val="940"/>
-              </a:lnSpc>
-              <a:spcBef>
-                <a:spcPts val="0"/>
-              </a:spcBef>
-              <a:spcAft>
-                <a:spcPts val="140"/>
-              </a:spcAft>
-              <a:buNone/>
-              <a:defRPr sz="810" b="0">
-                <a:solidFill>
-                  <a:srgbClr val="303437"/>
-                </a:solidFill>
-                <a:latin typeface="Noto Sans"/>
-              </a:defRPr>
-            </a:pPr>
-            <a:r>
-              <a:rPr sz="810" b="0" lang="ja-JP" altLang="en-US">
-                <a:solidFill>
-                  <a:srgbClr val="626669"/>
-                </a:solidFill>
-                <a:latin typeface="Noto Sans"/>
-                <a:ea typeface="Noto Sans CJK JP"/>
-                <a:cs typeface="Noto Sans"/>
-              </a:rPr>
-              <a:t>[1] Stanford CRFM. CLEVAClassicalChineseUnderstandingScenario / Converter. HELM v0.4.0.</a:t>
-            </a:r>
-          </a:p>
-          <a:p>
-            <a:pPr>
-              <a:lnSpc>
-                <a:spcPts val="940"/>
-              </a:lnSpc>
-              <a:buNone/>
-              <a:defRPr sz="810" b="0">
-                <a:solidFill>
-                  <a:srgbClr val="303437"/>
-                </a:solidFill>
-                <a:latin typeface="Noto Sans"/>
-              </a:defRPr>
-            </a:pPr>
-            <a:r>
-              <a:rPr sz="810" b="0" lang="ja-JP" altLang="en-US">
-                <a:solidFill>
-                  <a:srgbClr val="626669"/>
-                </a:solidFill>
-                <a:latin typeface="Noto Sans"/>
-                <a:ea typeface="Noto Sans CJK JP"/>
-                <a:cs typeface="Noto Sans"/>
-                <a:hlinkClick r:id="rId2"/>
-              </a:rPr>
-              <a:t>https://github.com/stanford-crfm/helm/blob/v0.4.0/src/helm/benchmark/scenarios/cleva_scenario.py</a:t>
-            </a:r>
-          </a:p>
-        </p:txBody>
-      </p:sp>
-    </p:spTree>
-  </p:cSld>
-  <p:clrMapOvr>
-    <a:masterClrMapping/>
-  </p:clrMapOvr>
-</p:sld>
-</file>
-
-<file path=ppt/slides/slide27.xml><?xml version="1.0" encoding="utf-8"?>
-<p:sld xmlns:a="http://schemas.openxmlformats.org/drawingml/2006/main" xmlns:p="http://schemas.openxmlformats.org/presentationml/2006/main" xmlns:r="http://schemas.openxmlformats.org/officeDocument/2006/relationships">
-  <p:cSld>
-    <p:spTree>
-      <p:nvGrpSpPr>
-        <p:cNvPr id="1" name=""/>
-        <p:cNvGrpSpPr/>
-        <p:nvPr/>
-      </p:nvGrpSpPr>
-      <p:grpSpPr/>
-      <p:sp>
-        <p:nvSpPr>
-          <p:cNvPr id="2" name="Title 1"/>
-          <p:cNvSpPr>
-            <a:spLocks noGrp="1"/>
-          </p:cNvSpPr>
-          <p:nvPr>
-            <p:ph type="title"/>
-          </p:nvPr>
-        </p:nvSpPr>
-        <p:spPr>
-          <a:xfrm>
-            <a:off x="468172" y="650138"/>
-            <a:ext cx="8206740" cy="616305"/>
-          </a:xfrm>
-        </p:spPr>
-        <p:txBody>
-          <a:bodyPr wrap="square" lIns="0" rIns="0" tIns="0" bIns="0">
-            <a:noAutofit/>
-          </a:bodyPr>
-          <a:lstStyle/>
-          <a:p>
-            <a:pPr algn="l">
-              <a:lnSpc>
-                <a:spcPct val="110000"/>
-              </a:lnSpc>
-              <a:buNone/>
-              <a:defRPr sz="2800" b="0">
-                <a:solidFill>
-                  <a:srgbClr val="303437"/>
-                </a:solidFill>
-                <a:latin typeface="Noto Sans"/>
-              </a:defRPr>
-            </a:pPr>
-            <a:r>
-              <a:rPr sz="2800" b="1" lang="ja-JP" altLang="en-US">
-                <a:solidFill>
-                  <a:srgbClr val="303437"/>
-                </a:solidFill>
-                <a:latin typeface="Noto Sans"/>
-                <a:ea typeface="Noto Sans CJK JP"/>
-                <a:cs typeface="Noto Sans"/>
-              </a:rPr>
-              <a:t>元のCCPM配布と、後利用の集合を区別する</a:t>
-            </a:r>
-          </a:p>
-        </p:txBody>
-      </p:sp>
-      <p:sp>
-        <p:nvSpPr>
-          <p:cNvPr id="3" name="Title 2"/>
-          <p:cNvSpPr>
-            <a:spLocks noGrp="1"/>
-          </p:cNvSpPr>
-          <p:nvPr>
-            <p:ph type="title" idx="2"/>
-          </p:nvPr>
-        </p:nvSpPr>
-        <p:spPr>
-          <a:xfrm>
-            <a:off x="75895" y="0"/>
-            <a:ext cx="8115300" cy="480060"/>
-          </a:xfrm>
-        </p:spPr>
-        <p:txBody>
-          <a:bodyPr wrap="square" lIns="0" rIns="0" tIns="0" bIns="0" anchor="ctr">
-            <a:noAutofit/>
-          </a:bodyPr>
-          <a:lstStyle/>
-          <a:p>
-            <a:pPr algn="l">
-              <a:lnSpc>
-                <a:spcPct val="110000"/>
-              </a:lnSpc>
-              <a:buNone/>
-              <a:defRPr sz="1400" b="0">
-                <a:solidFill>
-                  <a:srgbClr val="303437"/>
-                </a:solidFill>
-                <a:latin typeface="Noto Sans"/>
-              </a:defRPr>
-            </a:pPr>
-            <a:r>
-              <a:rPr sz="1400" b="1" lang="ja-JP" altLang="en-US">
-                <a:solidFill>
-                  <a:srgbClr val="FFFEF8"/>
-                </a:solidFill>
-                <a:latin typeface="Noto Sans"/>
-                <a:ea typeface="Noto Sans CJK JP"/>
-                <a:cs typeface="Noto Sans"/>
-              </a:rPr>
-              <a:t>4. CLEVAでの後利用と公開配布</a:t>
-            </a:r>
-          </a:p>
-        </p:txBody>
-      </p:sp>
-      <p:graphicFrame>
-        <p:nvGraphicFramePr>
-          <p:cNvPr id="4" name="Table 3"/>
-          <p:cNvGraphicFramePr>
-            <a:graphicFrameLocks noGrp="1"/>
-          </p:cNvGraphicFramePr>
-          <p:nvPr/>
-        </p:nvGraphicFramePr>
-        <p:xfrm>
-          <a:off x="548640" y="1508760"/>
-          <a:ext cx="8046720" cy="2103120"/>
-        </p:xfrm>
-        <a:graphic>
-          <a:graphicData uri="http://schemas.openxmlformats.org/drawingml/2006/table">
-            <a:tbl>
-              <a:tblPr firstRow="0" bandRow="0"/>
-              <a:tblGrid>
-                <a:gridCol w="2331720"/>
-                <a:gridCol w="5715000"/>
-              </a:tblGrid>
-              <a:tr h="420624">
-                <a:tc>
-                  <a:txBody>
-                    <a:bodyPr wrap="square">
-                      <a:noAutofit/>
-                    </a:bodyPr>
-                    <a:lstStyle/>
-                    <a:p>
-                      <a:pPr algn="l">
-                        <a:lnSpc>
-                          <a:spcPts val="2012"/>
-                        </a:lnSpc>
-                        <a:buNone/>
-                        <a:defRPr sz="1750" b="0">
-                          <a:solidFill>
-                            <a:srgbClr val="303437"/>
-                          </a:solidFill>
-                          <a:latin typeface="Noto Sans"/>
-                        </a:defRPr>
-                      </a:pPr>
-                      <a:r>
-                        <a:rPr sz="1750" b="0" lang="ja-JP" altLang="en-US">
-                          <a:solidFill>
-                            <a:srgbClr val="303437"/>
-                          </a:solidFill>
-                          <a:latin typeface="Noto Sans"/>
-                          <a:ea typeface="Noto Sans CJK JP"/>
-                          <a:cs typeface="Noto Sans"/>
-                        </a:rPr>
-                        <a:t>対象</a:t>
-                      </a:r>
-                    </a:p>
-                  </a:txBody>
-                  <a:tcPr marL="63500" marR="63500" marT="38100" marB="38100" anchor="ctr">
-                    <a:lnL w="7620">
-                      <a:noFill/>
-                    </a:lnL>
-                    <a:lnR w="7620">
-                      <a:noFill/>
-                    </a:lnR>
-                    <a:lnT w="15240">
-                      <a:solidFill>
-                        <a:srgbClr val="626669"/>
-                      </a:solidFill>
-                      <a:prstDash val="solid"/>
-                    </a:lnT>
-                    <a:lnB w="7620">
-                      <a:solidFill>
-                        <a:srgbClr val="626669"/>
-                      </a:solidFill>
-                      <a:prstDash val="solid"/>
-                    </a:lnB>
-                    <a:solidFill>
-                      <a:srgbClr val="FFFEF8"/>
-                    </a:solidFill>
-                  </a:tcPr>
-                </a:tc>
-                <a:tc>
-                  <a:txBody>
-                    <a:bodyPr wrap="square">
-                      <a:noAutofit/>
-                    </a:bodyPr>
-                    <a:lstStyle/>
-                    <a:p>
-                      <a:pPr algn="l">
-                        <a:lnSpc>
-                          <a:spcPts val="2012"/>
-                        </a:lnSpc>
-                        <a:buNone/>
-                        <a:defRPr sz="1750" b="0">
-                          <a:solidFill>
-                            <a:srgbClr val="303437"/>
-                          </a:solidFill>
-                          <a:latin typeface="Noto Sans"/>
-                        </a:defRPr>
-                      </a:pPr>
-                      <a:r>
-                        <a:rPr sz="1750" b="0" lang="ja-JP" altLang="en-US">
-                          <a:solidFill>
-                            <a:srgbClr val="303437"/>
-                          </a:solidFill>
-                          <a:latin typeface="Noto Sans"/>
-                          <a:ea typeface="Noto Sans CJK JP"/>
-                          <a:cs typeface="Noto Sans"/>
-                        </a:rPr>
-                        <a:t>確認できた内容</a:t>
-                      </a:r>
-                    </a:p>
-                  </a:txBody>
-                  <a:tcPr marL="63500" marR="63500" marT="38100" marB="38100" anchor="ctr">
-                    <a:lnL w="7620">
-                      <a:noFill/>
-                    </a:lnL>
-                    <a:lnR w="7620">
-                      <a:noFill/>
-                    </a:lnR>
-                    <a:lnT w="15240">
-                      <a:solidFill>
-                        <a:srgbClr val="626669"/>
-                      </a:solidFill>
-                      <a:prstDash val="solid"/>
-                    </a:lnT>
-                    <a:lnB w="7620">
-                      <a:solidFill>
-                        <a:srgbClr val="626669"/>
-                      </a:solidFill>
-                      <a:prstDash val="solid"/>
-                    </a:lnB>
-                    <a:solidFill>
-                      <a:srgbClr val="FFFEF8"/>
-                    </a:solidFill>
-                  </a:tcPr>
-                </a:tc>
-              </a:tr>
-              <a:tr h="420624">
-                <a:tc>
-                  <a:txBody>
-                    <a:bodyPr wrap="square">
-                      <a:noAutofit/>
-                    </a:bodyPr>
-                    <a:lstStyle/>
-                    <a:p>
-                      <a:pPr algn="l">
-                        <a:lnSpc>
-                          <a:spcPts val="2012"/>
-                        </a:lnSpc>
-                        <a:buNone/>
-                        <a:defRPr sz="1750" b="0">
-                          <a:solidFill>
-                            <a:srgbClr val="303437"/>
-                          </a:solidFill>
-                          <a:latin typeface="Noto Sans"/>
-                        </a:defRPr>
-                      </a:pPr>
-                      <a:r>
-                        <a:rPr sz="1750" b="0" lang="ja-JP" altLang="en-US">
-                          <a:solidFill>
-                            <a:srgbClr val="303437"/>
-                          </a:solidFill>
-                          <a:latin typeface="Noto Sans"/>
-                          <a:ea typeface="Noto Sans CJK JP"/>
-                          <a:cs typeface="Noto Sans"/>
-                        </a:rPr>
-                        <a:t>CCPM公式配布</a:t>
-                      </a:r>
-                    </a:p>
-                  </a:txBody>
-                  <a:tcPr marL="63500" marR="63500" marT="38100" marB="38100" anchor="ctr">
-                    <a:lnL w="7620">
-                      <a:noFill/>
-                    </a:lnL>
-                    <a:lnR w="7620">
-                      <a:noFill/>
-                    </a:lnR>
-                    <a:lnT w="7620">
-                      <a:solidFill>
-                        <a:srgbClr val="626669"/>
-                      </a:solidFill>
-                      <a:prstDash val="solid"/>
-                    </a:lnT>
-                    <a:lnB w="7620">
-                      <a:noFill/>
-                    </a:lnB>
-                    <a:solidFill>
-                      <a:srgbClr val="FFFEF8"/>
-                    </a:solidFill>
-                  </a:tcPr>
-                </a:tc>
-                <a:tc>
-                  <a:txBody>
-                    <a:bodyPr wrap="square">
-                      <a:noAutofit/>
-                    </a:bodyPr>
-                    <a:lstStyle/>
-                    <a:p>
-                      <a:pPr algn="l">
-                        <a:lnSpc>
-                          <a:spcPts val="2012"/>
-                        </a:lnSpc>
-                        <a:buNone/>
-                        <a:defRPr sz="1750" b="0">
-                          <a:solidFill>
-                            <a:srgbClr val="303437"/>
-                          </a:solidFill>
-                          <a:latin typeface="Noto Sans"/>
-                        </a:defRPr>
-                      </a:pPr>
-                      <a:r>
-                        <a:rPr sz="1750" b="0" lang="ja-JP" altLang="en-US">
-                          <a:solidFill>
-                            <a:srgbClr val="303437"/>
-                          </a:solidFill>
-                          <a:latin typeface="Noto Sans"/>
-                          <a:ea typeface="Noto Sans CJK JP"/>
-                          <a:cs typeface="Noto Sans"/>
-                        </a:rPr>
-                        <a:t>全27,218問、train/valid正解、test_public正解なし</a:t>
-                      </a:r>
-                    </a:p>
-                  </a:txBody>
-                  <a:tcPr marL="63500" marR="63500" marT="38100" marB="38100" anchor="ctr">
-                    <a:lnL w="7620">
-                      <a:noFill/>
-                    </a:lnL>
-                    <a:lnR w="7620">
-                      <a:noFill/>
-                    </a:lnR>
-                    <a:lnT w="7620">
-                      <a:solidFill>
-                        <a:srgbClr val="626669"/>
-                      </a:solidFill>
-                      <a:prstDash val="solid"/>
-                    </a:lnT>
-                    <a:lnB w="7620">
-                      <a:noFill/>
-                    </a:lnB>
-                    <a:solidFill>
-                      <a:srgbClr val="FFFEF8"/>
-                    </a:solidFill>
-                  </a:tcPr>
-                </a:tc>
-              </a:tr>
-              <a:tr h="420624">
-                <a:tc>
-                  <a:txBody>
-                    <a:bodyPr wrap="square">
-                      <a:noAutofit/>
-                    </a:bodyPr>
-                    <a:lstStyle/>
-                    <a:p>
-                      <a:pPr algn="l">
-                        <a:lnSpc>
-                          <a:spcPts val="2012"/>
-                        </a:lnSpc>
-                        <a:buNone/>
-                        <a:defRPr sz="1750" b="0">
-                          <a:solidFill>
-                            <a:srgbClr val="303437"/>
-                          </a:solidFill>
-                          <a:latin typeface="Noto Sans"/>
-                        </a:defRPr>
-                      </a:pPr>
-                      <a:r>
-                        <a:rPr sz="1750" b="0" lang="ja-JP" altLang="en-US">
-                          <a:solidFill>
-                            <a:srgbClr val="303437"/>
-                          </a:solidFill>
-                          <a:latin typeface="Noto Sans"/>
-                          <a:ea typeface="Noto Sans CJK JP"/>
-                          <a:cs typeface="Noto Sans"/>
-                        </a:rPr>
-                        <a:t>CLEVA論文</a:t>
-                      </a:r>
-                    </a:p>
-                  </a:txBody>
-                  <a:tcPr marL="63500" marR="63500" marT="38100" marB="38100" anchor="ctr">
-                    <a:lnL w="7620">
-                      <a:noFill/>
-                    </a:lnL>
-                    <a:lnR w="7620">
-                      <a:noFill/>
-                    </a:lnR>
-                    <a:lnT w="7620">
-                      <a:noFill/>
-                    </a:lnT>
-                    <a:lnB w="7620">
-                      <a:noFill/>
-                    </a:lnB>
-                    <a:solidFill>
-                      <a:srgbClr val="FFFEF8"/>
-                    </a:solidFill>
-                  </a:tcPr>
-                </a:tc>
-                <a:tc>
-                  <a:txBody>
-                    <a:bodyPr wrap="square">
-                      <a:noAutofit/>
-                    </a:bodyPr>
-                    <a:lstStyle/>
-                    <a:p>
-                      <a:pPr algn="l">
-                        <a:lnSpc>
-                          <a:spcPts val="2012"/>
-                        </a:lnSpc>
-                        <a:buNone/>
-                        <a:defRPr sz="1750" b="0">
-                          <a:solidFill>
-                            <a:srgbClr val="303437"/>
-                          </a:solidFill>
-                          <a:latin typeface="Noto Sans"/>
-                        </a:defRPr>
-                      </a:pPr>
-                      <a:r>
-                        <a:rPr sz="1750" b="0" lang="ja-JP" altLang="en-US">
-                          <a:solidFill>
-                            <a:srgbClr val="303437"/>
-                          </a:solidFill>
-                          <a:latin typeface="Noto Sans"/>
-                          <a:ea typeface="Noto Sans CJK JP"/>
-                          <a:cs typeface="Noto Sans"/>
-                        </a:rPr>
-                        <a:t>CCPMから抽出する課題と、候補まで一致した掲載例</a:t>
-                      </a:r>
-                    </a:p>
-                  </a:txBody>
-                  <a:tcPr marL="63500" marR="63500" marT="38100" marB="38100" anchor="ctr">
-                    <a:lnL w="7620">
-                      <a:noFill/>
-                    </a:lnL>
-                    <a:lnR w="7620">
-                      <a:noFill/>
-                    </a:lnR>
-                    <a:lnT w="7620">
-                      <a:noFill/>
-                    </a:lnT>
-                    <a:lnB w="7620">
-                      <a:noFill/>
-                    </a:lnB>
-                    <a:solidFill>
-                      <a:srgbClr val="FFFEF8"/>
-                    </a:solidFill>
-                  </a:tcPr>
-                </a:tc>
-              </a:tr>
-              <a:tr h="420624">
-                <a:tc>
-                  <a:txBody>
-                    <a:bodyPr wrap="square">
-                      <a:noAutofit/>
-                    </a:bodyPr>
-                    <a:lstStyle/>
-                    <a:p>
-                      <a:pPr algn="l">
-                        <a:lnSpc>
-                          <a:spcPts val="2012"/>
-                        </a:lnSpc>
-                        <a:buNone/>
-                        <a:defRPr sz="1750" b="0">
-                          <a:solidFill>
-                            <a:srgbClr val="303437"/>
-                          </a:solidFill>
-                          <a:latin typeface="Noto Sans"/>
-                        </a:defRPr>
-                      </a:pPr>
-                      <a:r>
-                        <a:rPr sz="1750" b="0" lang="ja-JP" altLang="en-US">
-                          <a:solidFill>
-                            <a:srgbClr val="303437"/>
-                          </a:solidFill>
-                          <a:latin typeface="Noto Sans"/>
-                          <a:ea typeface="Noto Sans CJK JP"/>
-                          <a:cs typeface="Noto Sans"/>
-                        </a:rPr>
-                        <a:t>HELM実装・設定</a:t>
-                      </a:r>
-                    </a:p>
-                  </a:txBody>
-                  <a:tcPr marL="63500" marR="63500" marT="38100" marB="38100" anchor="ctr">
-                    <a:lnL w="7620">
-                      <a:noFill/>
-                    </a:lnL>
-                    <a:lnR w="7620">
-                      <a:noFill/>
-                    </a:lnR>
-                    <a:lnT w="7620">
-                      <a:noFill/>
-                    </a:lnT>
-                    <a:lnB w="7620">
-                      <a:noFill/>
-                    </a:lnB>
-                    <a:solidFill>
-                      <a:srgbClr val="FFFEF8"/>
-                    </a:solidFill>
-                  </a:tcPr>
-                </a:tc>
-                <a:tc>
-                  <a:txBody>
-                    <a:bodyPr wrap="square">
-                      <a:noAutofit/>
-                    </a:bodyPr>
-                    <a:lstStyle/>
-                    <a:p>
-                      <a:pPr algn="l">
-                        <a:lnSpc>
-                          <a:spcPts val="2012"/>
-                        </a:lnSpc>
-                        <a:buNone/>
-                        <a:defRPr sz="1750" b="0">
-                          <a:solidFill>
-                            <a:srgbClr val="303437"/>
-                          </a:solidFill>
-                          <a:latin typeface="Noto Sans"/>
-                        </a:defRPr>
-                      </a:pPr>
-                      <a:r>
-                        <a:rPr sz="1750" b="0" lang="ja-JP" altLang="en-US">
-                          <a:solidFill>
-                            <a:srgbClr val="303437"/>
-                          </a:solidFill>
-                          <a:latin typeface="Noto Sans"/>
-                          <a:ea typeface="Noto Sans CJK JP"/>
-                          <a:cs typeface="Noto Sans"/>
-                        </a:rPr>
-                        <a:t>同課題のクラス、外部データ読込、6テンプレートID</a:t>
-                      </a:r>
-                    </a:p>
-                  </a:txBody>
-                  <a:tcPr marL="63500" marR="63500" marT="38100" marB="38100" anchor="ctr">
-                    <a:lnL w="7620">
-                      <a:noFill/>
-                    </a:lnL>
-                    <a:lnR w="7620">
-                      <a:noFill/>
-                    </a:lnR>
-                    <a:lnT w="7620">
-                      <a:noFill/>
-                    </a:lnT>
-                    <a:lnB w="7620">
-                      <a:noFill/>
-                    </a:lnB>
-                    <a:solidFill>
-                      <a:srgbClr val="FFFEF8"/>
-                    </a:solidFill>
-                  </a:tcPr>
-                </a:tc>
-              </a:tr>
-              <a:tr h="420624">
-                <a:tc>
-                  <a:txBody>
-                    <a:bodyPr wrap="square">
-                      <a:noAutofit/>
-                    </a:bodyPr>
-                    <a:lstStyle/>
-                    <a:p>
-                      <a:pPr algn="l">
-                        <a:lnSpc>
-                          <a:spcPts val="2012"/>
-                        </a:lnSpc>
-                        <a:buNone/>
-                        <a:defRPr sz="1750" b="0">
-                          <a:solidFill>
-                            <a:srgbClr val="303437"/>
-                          </a:solidFill>
-                          <a:latin typeface="Noto Sans"/>
-                        </a:defRPr>
-                      </a:pPr>
-                      <a:r>
-                        <a:rPr sz="1750" b="0" lang="ja-JP" altLang="en-US">
-                          <a:solidFill>
-                            <a:srgbClr val="303437"/>
-                          </a:solidFill>
-                          <a:latin typeface="Noto Sans"/>
-                          <a:ea typeface="Noto Sans CJK JP"/>
-                          <a:cs typeface="Noto Sans"/>
-                        </a:rPr>
-                        <a:t>HELM公開実行</a:t>
-                      </a:r>
-                    </a:p>
-                  </a:txBody>
-                  <a:tcPr marL="63500" marR="63500" marT="38100" marB="38100" anchor="ctr">
-                    <a:lnL w="7620">
-                      <a:noFill/>
-                    </a:lnL>
-                    <a:lnR w="7620">
-                      <a:noFill/>
-                    </a:lnR>
-                    <a:lnT w="7620">
-                      <a:noFill/>
-                    </a:lnT>
-                    <a:lnB w="15240">
-                      <a:solidFill>
-                        <a:srgbClr val="626669"/>
-                      </a:solidFill>
-                      <a:prstDash val="solid"/>
-                    </a:lnB>
-                    <a:solidFill>
-                      <a:srgbClr val="FFFEF8"/>
-                    </a:solidFill>
-                  </a:tcPr>
-                </a:tc>
-                <a:tc>
-                  <a:txBody>
-                    <a:bodyPr wrap="square">
-                      <a:noAutofit/>
-                    </a:bodyPr>
-                    <a:lstStyle/>
-                    <a:p>
-                      <a:pPr algn="l">
-                        <a:lnSpc>
-                          <a:spcPts val="2012"/>
-                        </a:lnSpc>
-                        <a:buNone/>
-                        <a:defRPr sz="1750" b="0">
-                          <a:solidFill>
-                            <a:srgbClr val="303437"/>
-                          </a:solidFill>
-                          <a:latin typeface="Noto Sans"/>
-                        </a:defRPr>
-                      </a:pPr>
-                      <a:r>
-                        <a:rPr sz="1750" b="0" lang="ja-JP" altLang="en-US">
-                          <a:solidFill>
-                            <a:srgbClr val="303437"/>
-                          </a:solidFill>
-                          <a:latin typeface="Noto Sans"/>
-                          <a:ea typeface="Noto Sans CJK JP"/>
-                          <a:cs typeface="Noto Sans"/>
-                        </a:rPr>
-                        <a:t>0件。CLEVA評価集合・保存requestは未取得</a:t>
-                      </a:r>
-                    </a:p>
-                  </a:txBody>
-                  <a:tcPr marL="63500" marR="63500" marT="38100" marB="38100" anchor="ctr">
-                    <a:lnL w="7620">
-                      <a:noFill/>
-                    </a:lnL>
-                    <a:lnR w="7620">
-                      <a:noFill/>
-                    </a:lnR>
-                    <a:lnT w="7620">
-                      <a:noFill/>
-                    </a:lnT>
-                    <a:lnB w="15240">
-                      <a:solidFill>
-                        <a:srgbClr val="626669"/>
-                      </a:solidFill>
-                      <a:prstDash val="solid"/>
-                    </a:lnB>
-                    <a:solidFill>
-                      <a:srgbClr val="FFFEF8"/>
-                    </a:solidFill>
-                  </a:tcPr>
-                </a:tc>
-              </a:tr>
-            </a:tbl>
-          </a:graphicData>
-        </a:graphic>
-      </p:graphicFrame>
-      <p:sp>
-        <p:nvSpPr>
-          <p:cNvPr id="5" name="sources"/>
-          <p:cNvSpPr txBox="1"/>
-          <p:nvPr/>
-        </p:nvSpPr>
-        <p:spPr>
-          <a:xfrm>
-            <a:off x="502920" y="4517136"/>
-            <a:ext cx="8183879" cy="530352"/>
-          </a:xfrm>
-          <a:prstGeom prst="rect">
-            <a:avLst/>
-          </a:prstGeom>
-          <a:noFill/>
-        </p:spPr>
-        <p:txBody>
-          <a:bodyPr wrap="square" lIns="0" rIns="0" tIns="0" bIns="0">
-            <a:noAutofit/>
-          </a:bodyPr>
-          <a:lstStyle/>
-          <a:p>
-            <a:pPr algn="l">
-              <a:lnSpc>
-                <a:spcPts val="940"/>
-              </a:lnSpc>
-              <a:spcBef>
-                <a:spcPts val="0"/>
-              </a:spcBef>
-              <a:spcAft>
-                <a:spcPts val="140"/>
-              </a:spcAft>
-              <a:buNone/>
-              <a:defRPr sz="810" b="0">
-                <a:solidFill>
-                  <a:srgbClr val="303437"/>
-                </a:solidFill>
-                <a:latin typeface="Noto Sans"/>
-              </a:defRPr>
-            </a:pPr>
-            <a:r>
-              <a:rPr sz="810" b="0" lang="ja-JP" altLang="en-US">
-                <a:solidFill>
-                  <a:srgbClr val="626669"/>
-                </a:solidFill>
-                <a:latin typeface="Noto Sans"/>
-                <a:ea typeface="Noto Sans CJK JP"/>
-                <a:cs typeface="Noto Sans"/>
-              </a:rPr>
-              <a:t>[1] Li et al. (2023). CLEVA: Chinese Language Models EVAluation Platform. EMNLP 2023: System Demonstrations.</a:t>
-            </a:r>
-            <a:r>
-              <a:rPr sz="810" b="0" lang="ja-JP" altLang="en-US">
-                <a:solidFill>
-                  <a:srgbClr val="626669"/>
-                </a:solidFill>
-                <a:latin typeface="Noto Sans"/>
-                <a:ea typeface="Noto Sans CJK JP"/>
-                <a:cs typeface="Noto Sans"/>
-              </a:rPr>
-              <a:t>  </a:t>
-            </a:r>
-            <a:r>
-              <a:rPr sz="810" b="0" lang="ja-JP" altLang="en-US">
-                <a:solidFill>
-                  <a:srgbClr val="626669"/>
-                </a:solidFill>
-                <a:latin typeface="Noto Sans"/>
-                <a:ea typeface="Noto Sans CJK JP"/>
-                <a:cs typeface="Noto Sans"/>
-                <a:hlinkClick r:id="rId2"/>
-              </a:rPr>
-              <a:t>https://aclanthology.org/2023.emnlp-demo.17/</a:t>
-            </a:r>
-          </a:p>
-          <a:p>
-            <a:pPr>
-              <a:lnSpc>
-                <a:spcPts val="940"/>
-              </a:lnSpc>
-              <a:spcAft>
-                <a:spcPts val="140"/>
-              </a:spcAft>
-              <a:buNone/>
-              <a:defRPr sz="810" b="0">
-                <a:solidFill>
-                  <a:srgbClr val="303437"/>
-                </a:solidFill>
-                <a:latin typeface="Noto Sans"/>
-              </a:defRPr>
-            </a:pPr>
-            <a:r>
-              <a:rPr sz="810" b="0" lang="ja-JP" altLang="en-US">
-                <a:solidFill>
-                  <a:srgbClr val="626669"/>
-                </a:solidFill>
-                <a:latin typeface="Noto Sans"/>
-                <a:ea typeface="Noto Sans CJK JP"/>
-                <a:cs typeface="Noto Sans"/>
-              </a:rPr>
-              <a:t>[2] Stanford CRFM. CLEVAClassicalChineseUnderstandingScenario / Converter. HELM v0.4.0.</a:t>
-            </a:r>
-          </a:p>
-          <a:p>
-            <a:pPr>
-              <a:lnSpc>
-                <a:spcPts val="940"/>
-              </a:lnSpc>
-              <a:buNone/>
-              <a:defRPr sz="810" b="0">
-                <a:solidFill>
-                  <a:srgbClr val="303437"/>
-                </a:solidFill>
-                <a:latin typeface="Noto Sans"/>
-              </a:defRPr>
-            </a:pPr>
-            <a:r>
-              <a:rPr sz="810" b="0" lang="ja-JP" altLang="en-US">
-                <a:solidFill>
-                  <a:srgbClr val="626669"/>
-                </a:solidFill>
-                <a:latin typeface="Noto Sans"/>
-                <a:ea typeface="Noto Sans CJK JP"/>
-                <a:cs typeface="Noto Sans"/>
-                <a:hlinkClick r:id="rId3"/>
-              </a:rPr>
-              <a:t>https://github.com/stanford-crfm/helm/blob/v0.4.0/src/helm/benchmark/scenarios/cleva_scenario.py</a:t>
             </a:r>
           </a:p>
         </p:txBody>
@@ -17298,7 +13602,7 @@
                 <a:ea typeface="Noto Sans CJK JP"/>
                 <a:cs typeface="Noto Sans"/>
               </a:rPr>
-              <a:t>公式JSONLを取得でき、再利用条件は確認が必要</a:t>
+              <a:t>公式GitHubで問題と技術報告を公開する</a:t>
             </a:r>
           </a:p>
         </p:txBody>
@@ -17351,7 +13655,7 @@
                 <a:ea typeface="Noto Sans CJK JP"/>
                 <a:cs typeface="Noto Sans"/>
               </a:rPr>
-              <a:t>公式GitHubはtrain.jsonl、valid.jsonl、test_public.jsonlと技術報告を公開し、利用時にはCCPMの引用を求める。2021年8月21日の更新版には、これらを含む五つのファイルがある。</a:t>
+              <a:t>公式GitHubは、学習・検証・公開テストのJSONLと技術報告を公開している。利用時にはCCPMの論文を引用する。</a:t>
             </a:r>
           </a:p>
           <a:p>
@@ -17381,7 +13685,7 @@
                 <a:ea typeface="Noto Sans CJK JP"/>
                 <a:cs typeface="Noto Sans"/>
               </a:rPr>
-              <a:t>取得したリポジトリにはライセンスファイルがなく、元Web素材の個別出所・作者も各レコードには含まれない。古典詩の原句、現代語説明、収集データの利用条件を同じものとして推定せず、配布元を確認して利用する。</a:t>
+              <a:t>リポジトリにはライセンスが明示されていない。再利用・再配布の条件は、配布元へ確認する。</a:t>
             </a:r>
           </a:p>
         </p:txBody>
@@ -17483,18 +13787,7 @@
                 <a:ea typeface="Noto Sans CJK JP"/>
                 <a:cs typeface="Noto Sans"/>
               </a:rPr>
-              <a:t>[1] THUNLP-AIPoet. CCPM. 公式配布、commit e7db1a0dc1ac1ffdd0ec91f74793c29ae9c8efa5、2026-10-18参照。</a:t>
-            </a:r>
-            <a:r>
-              <a:rPr sz="810" b="0" lang="ja-JP" altLang="en-US">
-                <a:solidFill>
-                  <a:srgbClr val="626669"/>
-                </a:solidFill>
-                <a:latin typeface="Noto Sans"/>
-                <a:ea typeface="Noto Sans CJK JP"/>
-                <a:cs typeface="Noto Sans"/>
-              </a:rPr>
-              <a:t>  </a:t>
+              <a:t>[1] THUNLP-AIPoet (2021). CCPM.  </a:t>
             </a:r>
             <a:r>
               <a:rPr sz="810" b="0" lang="ja-JP" altLang="en-US">
@@ -17625,7 +13918,7 @@
                 <a:ea typeface="Noto Sans CJK JP"/>
                 <a:cs typeface="Noto Sans"/>
               </a:rPr>
-              <a:t>CCPMは現代中国語の説明と古典詩句の対応を問う27,218問の四択データ。正解との対訳に、似た詩句を検索した三つの負例を組み合わせる。</a:t>
+              <a:t>CCPMは、現代中国語の説明と古典詩句の対応を問う27,218問の四択データ。正解との対訳に、似た詩句を検索した三つの負例を組み合わせる。</a:t>
             </a:r>
           </a:p>
           <a:p>
@@ -17655,7 +13948,7 @@
                 <a:ea typeface="Noto Sans CJK JP"/>
                 <a:cs typeface="Noto Sans"/>
               </a:rPr>
-              <a:t>2021年のBERT二方式はテスト正解率84.96%と82.60%。後にCLEVAの古典中国語理解へ採用された。公開元データ・掲載例・未取得の後利用集合を対応させて読む。</a:t>
+              <a:t>2021年のBERT二方式は、テストで84.96%と82.60%の正解率を示した。後にCLEVAの古典中国語理解にも採用され、中国語モデルの意味理解を調べる課題となった。</a:t>
             </a:r>
           </a:p>
         </p:txBody>
@@ -18351,7 +14644,7 @@
                 <a:ea typeface="Noto Sans CJK JP"/>
                 <a:cs typeface="Noto Sans"/>
               </a:rPr>
-              <a:t>分割・重複・入力形式の補足</a:t>
+              <a:t>入力形式と詩句の読み方</a:t>
             </a:r>
           </a:p>
           <a:p>
@@ -19155,22 +15448,8 @@
                 <a:ea typeface="Noto Sans CJK JP"/>
                 <a:cs typeface="Noto Sans"/>
               </a:rPr>
-              <a:t>[1] THUNLP-AIPoet. CCPM. 公式配布、commit e7db1a0dc1ac1ffdd0ec91f74793c29ae9c8efa5、2026-10-18参照。 valid.jsonl:1行 / answer=3</a:t>
-            </a:r>
-          </a:p>
-          <a:p>
-            <a:pPr>
-              <a:lnSpc>
-                <a:spcPts val="940"/>
-              </a:lnSpc>
-              <a:buNone/>
-              <a:defRPr sz="810" b="0">
-                <a:solidFill>
-                  <a:srgbClr val="303437"/>
-                </a:solidFill>
-                <a:latin typeface="Noto Sans"/>
-              </a:defRPr>
-            </a:pPr>
+              <a:t>[1] THUNLP-AIPoet (2021). CCPM.  </a:t>
+            </a:r>
             <a:r>
               <a:rPr sz="810" b="0" lang="ja-JP" altLang="en-US">
                 <a:solidFill>
@@ -19907,22 +16186,8 @@
                 <a:ea typeface="Noto Sans CJK JP"/>
                 <a:cs typeface="Noto Sans"/>
               </a:rPr>
-              <a:t>[1] THUNLP-AIPoet. CCPM. 公式配布、commit e7db1a0dc1ac1ffdd0ec91f74793c29ae9c8efa5、2026-10-18参照。 valid.jsonl:5行 / answer=2</a:t>
-            </a:r>
-          </a:p>
-          <a:p>
-            <a:pPr>
-              <a:lnSpc>
-                <a:spcPts val="940"/>
-              </a:lnSpc>
-              <a:buNone/>
-              <a:defRPr sz="810" b="0">
-                <a:solidFill>
-                  <a:srgbClr val="303437"/>
-                </a:solidFill>
-                <a:latin typeface="Noto Sans"/>
-              </a:defRPr>
-            </a:pPr>
+              <a:t>[1] THUNLP-AIPoet (2021). CCPM.  </a:t>
+            </a:r>
             <a:r>
               <a:rPr sz="810" b="0" lang="ja-JP" altLang="en-US">
                 <a:solidFill>
@@ -20659,22 +16924,8 @@
                 <a:ea typeface="Noto Sans CJK JP"/>
                 <a:cs typeface="Noto Sans"/>
               </a:rPr>
-              <a:t>[1] THUNLP-AIPoet. CCPM. 公式配布、commit e7db1a0dc1ac1ffdd0ec91f74793c29ae9c8efa5、2026-10-18参照。 valid.jsonl:14行 / answer=1</a:t>
-            </a:r>
-          </a:p>
-          <a:p>
-            <a:pPr>
-              <a:lnSpc>
-                <a:spcPts val="940"/>
-              </a:lnSpc>
-              <a:buNone/>
-              <a:defRPr sz="810" b="0">
-                <a:solidFill>
-                  <a:srgbClr val="303437"/>
-                </a:solidFill>
-                <a:latin typeface="Noto Sans"/>
-              </a:defRPr>
-            </a:pPr>
+              <a:t>[1] THUNLP-AIPoet (2021). CCPM.  </a:t>
+            </a:r>
             <a:r>
               <a:rPr sz="810" b="0" lang="ja-JP" altLang="en-US">
                 <a:solidFill>
@@ -21303,7 +17554,7 @@
                 <a:ea typeface="Noto Sans CJK JP"/>
                 <a:cs typeface="Noto Sans"/>
               </a:rPr>
-              <a:t>D. かすみが遠くの眺めを覆い、もの寂しい様子が寒々しい音を送る。</a:t>
+              <a:t>D. かすみが遠くの眺めを覆い、寒々しい物音がもの寂しく響く。</a:t>
             </a:r>
           </a:p>
         </p:txBody>
@@ -21411,22 +17662,8 @@
                 <a:ea typeface="Noto Sans CJK JP"/>
                 <a:cs typeface="Noto Sans"/>
               </a:rPr>
-              <a:t>[1] THUNLP-AIPoet. CCPM. 公式配布、commit e7db1a0dc1ac1ffdd0ec91f74793c29ae9c8efa5、2026-10-18参照。 valid.jsonl:24行 / answer=1</a:t>
-            </a:r>
-          </a:p>
-          <a:p>
-            <a:pPr>
-              <a:lnSpc>
-                <a:spcPts val="940"/>
-              </a:lnSpc>
-              <a:buNone/>
-              <a:defRPr sz="810" b="0">
-                <a:solidFill>
-                  <a:srgbClr val="303437"/>
-                </a:solidFill>
-                <a:latin typeface="Noto Sans"/>
-              </a:defRPr>
-            </a:pPr>
+              <a:t>[1] THUNLP-AIPoet (2021). CCPM.  </a:t>
+            </a:r>
             <a:r>
               <a:rPr sz="810" b="0" lang="ja-JP" altLang="en-US">
                 <a:solidFill>
@@ -22163,22 +18400,8 @@
                 <a:ea typeface="Noto Sans CJK JP"/>
                 <a:cs typeface="Noto Sans"/>
               </a:rPr>
-              <a:t>[1] THUNLP-AIPoet. CCPM. 公式配布、commit e7db1a0dc1ac1ffdd0ec91f74793c29ae9c8efa5、2026-10-18参照。 valid.jsonl:25行 / answer=0</a:t>
-            </a:r>
-          </a:p>
-          <a:p>
-            <a:pPr>
-              <a:lnSpc>
-                <a:spcPts val="940"/>
-              </a:lnSpc>
-              <a:buNone/>
-              <a:defRPr sz="810" b="0">
-                <a:solidFill>
-                  <a:srgbClr val="303437"/>
-                </a:solidFill>
-                <a:latin typeface="Noto Sans"/>
-              </a:defRPr>
-            </a:pPr>
+              <a:t>[1] THUNLP-AIPoet (2021). CCPM.  </a:t>
+            </a:r>
             <a:r>
               <a:rPr sz="810" b="0" lang="ja-JP" altLang="en-US">
                 <a:solidFill>
@@ -22915,22 +19138,8 @@
                 <a:ea typeface="Noto Sans CJK JP"/>
                 <a:cs typeface="Noto Sans"/>
               </a:rPr>
-              <a:t>[1] THUNLP-AIPoet. CCPM. 公式配布、commit e7db1a0dc1ac1ffdd0ec91f74793c29ae9c8efa5、2026-10-18参照。 valid.jsonl:35行 / answer=0</a:t>
-            </a:r>
-          </a:p>
-          <a:p>
-            <a:pPr>
-              <a:lnSpc>
-                <a:spcPts val="940"/>
-              </a:lnSpc>
-              <a:buNone/>
-              <a:defRPr sz="810" b="0">
-                <a:solidFill>
-                  <a:srgbClr val="303437"/>
-                </a:solidFill>
-                <a:latin typeface="Noto Sans"/>
-              </a:defRPr>
-            </a:pPr>
+              <a:t>[1] THUNLP-AIPoet (2021). CCPM.  </a:t>
+            </a:r>
             <a:r>
               <a:rPr sz="810" b="0" lang="ja-JP" altLang="en-US">
                 <a:solidFill>
@@ -23667,22 +19876,8 @@
                 <a:ea typeface="Noto Sans CJK JP"/>
                 <a:cs typeface="Noto Sans"/>
               </a:rPr>
-              <a:t>[1] THUNLP-AIPoet. CCPM. 公式配布、commit e7db1a0dc1ac1ffdd0ec91f74793c29ae9c8efa5、2026-10-18参照。 valid.jsonl:47行 / answer=1</a:t>
-            </a:r>
-          </a:p>
-          <a:p>
-            <a:pPr>
-              <a:lnSpc>
-                <a:spcPts val="940"/>
-              </a:lnSpc>
-              <a:buNone/>
-              <a:defRPr sz="810" b="0">
-                <a:solidFill>
-                  <a:srgbClr val="303437"/>
-                </a:solidFill>
-                <a:latin typeface="Noto Sans"/>
-              </a:defRPr>
-            </a:pPr>
+              <a:t>[1] THUNLP-AIPoet (2021). CCPM.  </a:t>
+            </a:r>
             <a:r>
               <a:rPr sz="810" b="0" lang="ja-JP" altLang="en-US">
                 <a:solidFill>
@@ -24419,22 +20614,8 @@
                 <a:ea typeface="Noto Sans CJK JP"/>
                 <a:cs typeface="Noto Sans"/>
               </a:rPr>
-              <a:t>[1] THUNLP-AIPoet. CCPM. 公式配布、commit e7db1a0dc1ac1ffdd0ec91f74793c29ae9c8efa5、2026-10-18参照。 valid.jsonl:52行 / answer=3</a:t>
-            </a:r>
-          </a:p>
-          <a:p>
-            <a:pPr>
-              <a:lnSpc>
-                <a:spcPts val="940"/>
-              </a:lnSpc>
-              <a:buNone/>
-              <a:defRPr sz="810" b="0">
-                <a:solidFill>
-                  <a:srgbClr val="303437"/>
-                </a:solidFill>
-                <a:latin typeface="Noto Sans"/>
-              </a:defRPr>
-            </a:pPr>
+              <a:t>[1] THUNLP-AIPoet (2021). CCPM.  </a:t>
+            </a:r>
             <a:r>
               <a:rPr sz="810" b="0" lang="ja-JP" altLang="en-US">
                 <a:solidFill>
@@ -25053,7 +21234,7 @@
                 <a:ea typeface="Noto Sans CJK JP"/>
                 <a:cs typeface="Noto Sans"/>
               </a:rPr>
-              <a:t>現代語：初秋の寒蝉が、野の朝風の中で、声をからして鳴いている。</a:t>
+              <a:t>現代語：初秋の蝉が、野の朝風の中で、声をからして鳴いている。</a:t>
             </a:r>
           </a:p>
           <a:p>
@@ -25285,22 +21466,8 @@
                 <a:ea typeface="Noto Sans CJK JP"/>
                 <a:cs typeface="Noto Sans"/>
               </a:rPr>
-              <a:t>[1] THUNLP-AIPoet. CCPM. 公式配布、commit e7db1a0dc1ac1ffdd0ec91f74793c29ae9c8efa5、2026-10-18参照。 valid.jsonl:60行 / answer=2</a:t>
-            </a:r>
-          </a:p>
-          <a:p>
-            <a:pPr>
-              <a:lnSpc>
-                <a:spcPts val="940"/>
-              </a:lnSpc>
-              <a:buNone/>
-              <a:defRPr sz="810" b="0">
-                <a:solidFill>
-                  <a:srgbClr val="303437"/>
-                </a:solidFill>
-                <a:latin typeface="Noto Sans"/>
-              </a:defRPr>
-            </a:pPr>
+              <a:t>[1] THUNLP-AIPoet (2021). CCPM.  </a:t>
+            </a:r>
             <a:r>
               <a:rPr sz="810" b="0" lang="ja-JP" altLang="en-US">
                 <a:solidFill>
@@ -26037,22 +22204,8 @@
                 <a:ea typeface="Noto Sans CJK JP"/>
                 <a:cs typeface="Noto Sans"/>
               </a:rPr>
-              <a:t>[1] THUNLP-AIPoet. CCPM. 公式配布、commit e7db1a0dc1ac1ffdd0ec91f74793c29ae9c8efa5、2026-10-18参照。 valid.jsonl:65行 / answer=3</a:t>
-            </a:r>
-          </a:p>
-          <a:p>
-            <a:pPr>
-              <a:lnSpc>
-                <a:spcPts val="940"/>
-              </a:lnSpc>
-              <a:buNone/>
-              <a:defRPr sz="810" b="0">
-                <a:solidFill>
-                  <a:srgbClr val="303437"/>
-                </a:solidFill>
-                <a:latin typeface="Noto Sans"/>
-              </a:defRPr>
-            </a:pPr>
+              <a:t>[1] THUNLP-AIPoet (2021). CCPM.  </a:t>
+            </a:r>
             <a:r>
               <a:rPr sz="810" b="0" lang="ja-JP" altLang="en-US">
                 <a:solidFill>
@@ -26129,7 +22282,7 @@
                 <a:ea typeface="Noto Sans CJK JP"/>
                 <a:cs typeface="Noto Sans"/>
               </a:rPr>
-              <a:t>分割・重複・入力形式の補足</a:t>
+              <a:t>入力形式と詩句の読み方</a:t>
             </a:r>
           </a:p>
         </p:txBody>
@@ -26177,7 +22330,7 @@
                 <a:ea typeface="Noto Sans CJK JP"/>
                 <a:cs typeface="Noto Sans"/>
               </a:rPr>
-              <a:t>Appendix: 2. 分割・重複・入力形式の補足</a:t>
+              <a:t>Appendix: 2. 入力形式と詩句の読み方</a:t>
             </a:r>
           </a:p>
         </p:txBody>
@@ -26243,7 +22396,7 @@
                 <a:ea typeface="Noto Sans CJK JP"/>
                 <a:cs typeface="Noto Sans"/>
               </a:rPr>
-              <a:t>同じ雨の説明でも、候補と正解位置が変わる</a:t>
+              <a:t>同じ説明に、異なる候補の組が付く</a:t>
             </a:r>
           </a:p>
         </p:txBody>
@@ -26291,7 +22444,7 @@
                 <a:ea typeface="Noto Sans CJK JP"/>
                 <a:cs typeface="Noto Sans"/>
               </a:rPr>
-              <a:t>Appendix: 2. 分割・重複・入力形式の補足</a:t>
+              <a:t>Appendix: 2. 入力形式と詩句の読み方</a:t>
             </a:r>
           </a:p>
         </p:txBody>
@@ -26402,7 +22555,7 @@
                           <a:ea typeface="Noto Sans CJK JP"/>
                           <a:cs typeface="Noto Sans"/>
                         </a:rPr>
-                        <a:t>train 18,823行</a:t>
+                        <a:t>候補の組1</a:t>
                       </a:r>
                     </a:p>
                   </a:txBody>
@@ -26458,7 +22611,7 @@
                           <a:ea typeface="Noto Sans CJK JP"/>
                           <a:cs typeface="Noto Sans"/>
                         </a:rPr>
-                        <a:t>train 21,287行</a:t>
+                        <a:t>候補の組2</a:t>
                       </a:r>
                     </a:p>
                   </a:txBody>
@@ -27186,7 +23339,7 @@
                           <a:ea typeface="Noto Sans CJK JP"/>
                           <a:cs typeface="Noto Sans"/>
                         </a:rPr>
-                        <a:t>D（answer=3）</a:t>
+                        <a:t>D</a:t>
                       </a:r>
                     </a:p>
                   </a:txBody>
@@ -27239,7 +23392,7 @@
                           <a:ea typeface="Noto Sans CJK JP"/>
                           <a:cs typeface="Noto Sans"/>
                         </a:rPr>
-                        <a:t>A（answer=0）</a:t>
+                        <a:t>A</a:t>
                       </a:r>
                     </a:p>
                   </a:txBody>
@@ -27318,7 +23471,38 @@
                 <a:ea typeface="Noto Sans CJK JP"/>
                 <a:cs typeface="Noto Sans"/>
               </a:rPr>
-              <a:t>両方の説明は「山间连绵阴雨刚刚有了一点停止的意思。」。CLEVA掲載例は18,823行。</a:t>
+              <a:t>共通の説明：「山间连绵阴雨刚刚有了一点停止的意思。」</a:t>
+            </a:r>
+          </a:p>
+          <a:p>
+            <a:pPr algn="l">
+              <a:lnSpc>
+                <a:spcPts val="2047"/>
+              </a:lnSpc>
+              <a:spcBef>
+                <a:spcPts val="0"/>
+              </a:spcBef>
+              <a:spcAft>
+                <a:spcPts val="0"/>
+              </a:spcAft>
+              <a:buNone/>
+              <a:defRPr sz="1750" b="0">
+                <a:solidFill>
+                  <a:srgbClr val="303437"/>
+                </a:solidFill>
+                <a:latin typeface="Noto Sans"/>
+              </a:defRPr>
+            </a:pPr>
+            <a:r>
+              <a:rPr sz="1750" b="0" lang="ja-JP" altLang="en-US">
+                <a:solidFill>
+                  <a:srgbClr val="303437"/>
+                </a:solidFill>
+                <a:latin typeface="Noto Sans"/>
+                <a:ea typeface="Noto Sans CJK JP"/>
+                <a:cs typeface="Noto Sans"/>
+              </a:rPr>
+              <a:t>候補の組1が、実例2とCLEVA論文に掲載された問題。</a:t>
             </a:r>
           </a:p>
         </p:txBody>
@@ -27372,7 +23556,7 @@
                 <a:ea typeface="Noto Sans CJK JP"/>
                 <a:cs typeface="Noto Sans"/>
               </a:rPr>
-              <a:t>[1] THUNLP-AIPoet. CCPM. 公式配布、commit e7db1a0dc1ac1ffdd0ec91f74793c29ae9c8efa5、2026-10-18参照。</a:t>
+              <a:t>[1] THUNLP-AIPoet (2021). CCPM.  </a:t>
             </a:r>
             <a:r>
               <a:rPr sz="810" b="0" lang="ja-JP" altLang="en-US">
@@ -27382,1810 +23566,9 @@
                 <a:latin typeface="Noto Sans"/>
                 <a:ea typeface="Noto Sans CJK JP"/>
                 <a:cs typeface="Noto Sans"/>
-              </a:rPr>
-              <a:t>  </a:t>
-            </a:r>
-            <a:r>
-              <a:rPr sz="810" b="0" lang="ja-JP" altLang="en-US">
-                <a:solidFill>
-                  <a:srgbClr val="626669"/>
-                </a:solidFill>
-                <a:latin typeface="Noto Sans"/>
-                <a:ea typeface="Noto Sans CJK JP"/>
-                <a:cs typeface="Noto Sans"/>
                 <a:hlinkClick r:id="rId2"/>
               </a:rPr>
               <a:t>https://github.com/THUNLP-AIPoet/CCPM</a:t>
-            </a:r>
-          </a:p>
-        </p:txBody>
-      </p:sp>
-    </p:spTree>
-  </p:cSld>
-  <p:clrMapOvr>
-    <a:masterClrMapping/>
-  </p:clrMapOvr>
-</p:sld>
-</file>
-
-<file path=ppt/slides/slide44.xml><?xml version="1.0" encoding="utf-8"?>
-<p:sld xmlns:a="http://schemas.openxmlformats.org/drawingml/2006/main" xmlns:p="http://schemas.openxmlformats.org/presentationml/2006/main" xmlns:r="http://schemas.openxmlformats.org/officeDocument/2006/relationships">
-  <p:cSld>
-    <p:spTree>
-      <p:nvGrpSpPr>
-        <p:cNvPr id="1" name=""/>
-        <p:cNvGrpSpPr/>
-        <p:nvPr/>
-      </p:nvGrpSpPr>
-      <p:grpSpPr/>
-      <p:sp>
-        <p:nvSpPr>
-          <p:cNvPr id="2" name="Title 1"/>
-          <p:cNvSpPr>
-            <a:spLocks noGrp="1"/>
-          </p:cNvSpPr>
-          <p:nvPr>
-            <p:ph type="title"/>
-          </p:nvPr>
-        </p:nvSpPr>
-        <p:spPr>
-          <a:xfrm>
-            <a:off x="468172" y="650138"/>
-            <a:ext cx="8206740" cy="616305"/>
-          </a:xfrm>
-        </p:spPr>
-        <p:txBody>
-          <a:bodyPr wrap="square" lIns="0" rIns="0" tIns="0" bIns="0">
-            <a:noAutofit/>
-          </a:bodyPr>
-          <a:lstStyle/>
-          <a:p>
-            <a:pPr algn="l">
-              <a:lnSpc>
-                <a:spcPct val="110000"/>
-              </a:lnSpc>
-              <a:buNone/>
-              <a:defRPr sz="2800" b="0">
-                <a:solidFill>
-                  <a:srgbClr val="303437"/>
-                </a:solidFill>
-                <a:latin typeface="Noto Sans"/>
-              </a:defRPr>
-            </a:pPr>
-            <a:r>
-              <a:rPr sz="2800" b="1" lang="ja-JP" altLang="en-US">
-                <a:solidFill>
-                  <a:srgbClr val="303437"/>
-                </a:solidFill>
-                <a:latin typeface="Noto Sans"/>
-                <a:ea typeface="Noto Sans CJK JP"/>
-                <a:cs typeface="Noto Sans"/>
-              </a:rPr>
-              <a:t>形式別件数の内訳</a:t>
-            </a:r>
-          </a:p>
-        </p:txBody>
-      </p:sp>
-      <p:sp>
-        <p:nvSpPr>
-          <p:cNvPr id="3" name="Title 2"/>
-          <p:cNvSpPr>
-            <a:spLocks noGrp="1"/>
-          </p:cNvSpPr>
-          <p:nvPr>
-            <p:ph type="title" idx="2"/>
-          </p:nvPr>
-        </p:nvSpPr>
-        <p:spPr>
-          <a:xfrm>
-            <a:off x="75895" y="0"/>
-            <a:ext cx="8115300" cy="480060"/>
-          </a:xfrm>
-        </p:spPr>
-        <p:txBody>
-          <a:bodyPr wrap="square" lIns="0" rIns="0" tIns="0" bIns="0" anchor="ctr">
-            <a:noAutofit/>
-          </a:bodyPr>
-          <a:lstStyle/>
-          <a:p>
-            <a:pPr algn="l">
-              <a:lnSpc>
-                <a:spcPct val="110000"/>
-              </a:lnSpc>
-              <a:buNone/>
-              <a:defRPr sz="1400" b="0">
-                <a:solidFill>
-                  <a:srgbClr val="303437"/>
-                </a:solidFill>
-                <a:latin typeface="Noto Sans"/>
-              </a:defRPr>
-            </a:pPr>
-            <a:r>
-              <a:rPr sz="1400" b="1" lang="ja-JP" altLang="en-US">
-                <a:solidFill>
-                  <a:srgbClr val="FFFEF8"/>
-                </a:solidFill>
-                <a:latin typeface="Noto Sans"/>
-                <a:ea typeface="Noto Sans CJK JP"/>
-                <a:cs typeface="Noto Sans"/>
-              </a:rPr>
-              <a:t>Appendix: 2. 分割・重複・入力形式の補足</a:t>
-            </a:r>
-          </a:p>
-        </p:txBody>
-      </p:sp>
-      <p:graphicFrame>
-        <p:nvGraphicFramePr>
-          <p:cNvPr id="4" name="Table 3"/>
-          <p:cNvGraphicFramePr>
-            <a:graphicFrameLocks noGrp="1"/>
-          </p:cNvGraphicFramePr>
-          <p:nvPr/>
-        </p:nvGraphicFramePr>
-        <p:xfrm>
-          <a:off x="548640" y="1508760"/>
-          <a:ext cx="8046720" cy="2523744"/>
-        </p:xfrm>
-        <a:graphic>
-          <a:graphicData uri="http://schemas.openxmlformats.org/drawingml/2006/table">
-            <a:tbl>
-              <a:tblPr firstRow="0" bandRow="0"/>
-              <a:tblGrid>
-                <a:gridCol w="2194560"/>
-                <a:gridCol w="1463040"/>
-                <a:gridCol w="1463040"/>
-                <a:gridCol w="1463040"/>
-                <a:gridCol w="1463040"/>
-              </a:tblGrid>
-              <a:tr h="420624">
-                <a:tc>
-                  <a:txBody>
-                    <a:bodyPr wrap="square">
-                      <a:noAutofit/>
-                    </a:bodyPr>
-                    <a:lstStyle/>
-                    <a:p>
-                      <a:pPr algn="l">
-                        <a:lnSpc>
-                          <a:spcPts val="2070"/>
-                        </a:lnSpc>
-                        <a:buNone/>
-                        <a:defRPr sz="1800" b="0">
-                          <a:solidFill>
-                            <a:srgbClr val="303437"/>
-                          </a:solidFill>
-                          <a:latin typeface="Noto Sans"/>
-                        </a:defRPr>
-                      </a:pPr>
-                      <a:r>
-                        <a:rPr sz="1800" b="0" lang="ja-JP" altLang="en-US">
-                          <a:solidFill>
-                            <a:srgbClr val="303437"/>
-                          </a:solidFill>
-                          <a:latin typeface="Noto Sans"/>
-                          <a:ea typeface="Noto Sans CJK JP"/>
-                          <a:cs typeface="Noto Sans"/>
-                        </a:rPr>
-                        <a:t>形式</a:t>
-                      </a:r>
-                    </a:p>
-                  </a:txBody>
-                  <a:tcPr marL="63500" marR="63500" marT="38100" marB="38100" anchor="ctr">
-                    <a:lnL w="7620">
-                      <a:noFill/>
-                    </a:lnL>
-                    <a:lnR w="7620">
-                      <a:noFill/>
-                    </a:lnR>
-                    <a:lnT w="15240">
-                      <a:solidFill>
-                        <a:srgbClr val="626669"/>
-                      </a:solidFill>
-                      <a:prstDash val="solid"/>
-                    </a:lnT>
-                    <a:lnB w="7620">
-                      <a:solidFill>
-                        <a:srgbClr val="626669"/>
-                      </a:solidFill>
-                      <a:prstDash val="solid"/>
-                    </a:lnB>
-                    <a:solidFill>
-                      <a:srgbClr val="FFFEF8"/>
-                    </a:solidFill>
-                  </a:tcPr>
-                </a:tc>
-                <a:tc>
-                  <a:txBody>
-                    <a:bodyPr wrap="square">
-                      <a:noAutofit/>
-                    </a:bodyPr>
-                    <a:lstStyle/>
-                    <a:p>
-                      <a:pPr algn="r">
-                        <a:lnSpc>
-                          <a:spcPts val="2070"/>
-                        </a:lnSpc>
-                        <a:buNone/>
-                        <a:defRPr sz="1800" b="0">
-                          <a:solidFill>
-                            <a:srgbClr val="303437"/>
-                          </a:solidFill>
-                          <a:latin typeface="Noto Sans"/>
-                        </a:defRPr>
-                      </a:pPr>
-                      <a:r>
-                        <a:rPr sz="1800" b="0" lang="ja-JP" altLang="en-US">
-                          <a:solidFill>
-                            <a:srgbClr val="303437"/>
-                          </a:solidFill>
-                          <a:latin typeface="Noto Sans"/>
-                          <a:ea typeface="Noto Sans CJK JP"/>
-                          <a:cs typeface="Noto Sans"/>
-                        </a:rPr>
-                        <a:t>学習</a:t>
-                      </a:r>
-                    </a:p>
-                  </a:txBody>
-                  <a:tcPr marL="63500" marR="63500" marT="38100" marB="38100" anchor="ctr">
-                    <a:lnL w="7620">
-                      <a:noFill/>
-                    </a:lnL>
-                    <a:lnR w="7620">
-                      <a:noFill/>
-                    </a:lnR>
-                    <a:lnT w="15240">
-                      <a:solidFill>
-                        <a:srgbClr val="626669"/>
-                      </a:solidFill>
-                      <a:prstDash val="solid"/>
-                    </a:lnT>
-                    <a:lnB w="7620">
-                      <a:solidFill>
-                        <a:srgbClr val="626669"/>
-                      </a:solidFill>
-                      <a:prstDash val="solid"/>
-                    </a:lnB>
-                    <a:solidFill>
-                      <a:srgbClr val="FFFEF8"/>
-                    </a:solidFill>
-                  </a:tcPr>
-                </a:tc>
-                <a:tc>
-                  <a:txBody>
-                    <a:bodyPr wrap="square">
-                      <a:noAutofit/>
-                    </a:bodyPr>
-                    <a:lstStyle/>
-                    <a:p>
-                      <a:pPr algn="r">
-                        <a:lnSpc>
-                          <a:spcPts val="2070"/>
-                        </a:lnSpc>
-                        <a:buNone/>
-                        <a:defRPr sz="1800" b="0">
-                          <a:solidFill>
-                            <a:srgbClr val="303437"/>
-                          </a:solidFill>
-                          <a:latin typeface="Noto Sans"/>
-                        </a:defRPr>
-                      </a:pPr>
-                      <a:r>
-                        <a:rPr sz="1800" b="0" lang="ja-JP" altLang="en-US">
-                          <a:solidFill>
-                            <a:srgbClr val="303437"/>
-                          </a:solidFill>
-                          <a:latin typeface="Noto Sans"/>
-                          <a:ea typeface="Noto Sans CJK JP"/>
-                          <a:cs typeface="Noto Sans"/>
-                        </a:rPr>
-                        <a:t>検証</a:t>
-                      </a:r>
-                    </a:p>
-                  </a:txBody>
-                  <a:tcPr marL="63500" marR="63500" marT="38100" marB="38100" anchor="ctr">
-                    <a:lnL w="7620">
-                      <a:noFill/>
-                    </a:lnL>
-                    <a:lnR w="7620">
-                      <a:noFill/>
-                    </a:lnR>
-                    <a:lnT w="15240">
-                      <a:solidFill>
-                        <a:srgbClr val="626669"/>
-                      </a:solidFill>
-                      <a:prstDash val="solid"/>
-                    </a:lnT>
-                    <a:lnB w="7620">
-                      <a:solidFill>
-                        <a:srgbClr val="626669"/>
-                      </a:solidFill>
-                      <a:prstDash val="solid"/>
-                    </a:lnB>
-                    <a:solidFill>
-                      <a:srgbClr val="FFFEF8"/>
-                    </a:solidFill>
-                  </a:tcPr>
-                </a:tc>
-                <a:tc>
-                  <a:txBody>
-                    <a:bodyPr wrap="square">
-                      <a:noAutofit/>
-                    </a:bodyPr>
-                    <a:lstStyle/>
-                    <a:p>
-                      <a:pPr algn="r">
-                        <a:lnSpc>
-                          <a:spcPts val="2070"/>
-                        </a:lnSpc>
-                        <a:buNone/>
-                        <a:defRPr sz="1800" b="0">
-                          <a:solidFill>
-                            <a:srgbClr val="303437"/>
-                          </a:solidFill>
-                          <a:latin typeface="Noto Sans"/>
-                        </a:defRPr>
-                      </a:pPr>
-                      <a:r>
-                        <a:rPr sz="1800" b="0" lang="ja-JP" altLang="en-US">
-                          <a:solidFill>
-                            <a:srgbClr val="303437"/>
-                          </a:solidFill>
-                          <a:latin typeface="Noto Sans"/>
-                          <a:ea typeface="Noto Sans CJK JP"/>
-                          <a:cs typeface="Noto Sans"/>
-                        </a:rPr>
-                        <a:t>テスト</a:t>
-                      </a:r>
-                    </a:p>
-                  </a:txBody>
-                  <a:tcPr marL="63500" marR="63500" marT="38100" marB="38100" anchor="ctr">
-                    <a:lnL w="7620">
-                      <a:noFill/>
-                    </a:lnL>
-                    <a:lnR w="7620">
-                      <a:noFill/>
-                    </a:lnR>
-                    <a:lnT w="15240">
-                      <a:solidFill>
-                        <a:srgbClr val="626669"/>
-                      </a:solidFill>
-                      <a:prstDash val="solid"/>
-                    </a:lnT>
-                    <a:lnB w="7620">
-                      <a:solidFill>
-                        <a:srgbClr val="626669"/>
-                      </a:solidFill>
-                      <a:prstDash val="solid"/>
-                    </a:lnB>
-                    <a:solidFill>
-                      <a:srgbClr val="FFFEF8"/>
-                    </a:solidFill>
-                  </a:tcPr>
-                </a:tc>
-                <a:tc>
-                  <a:txBody>
-                    <a:bodyPr wrap="square">
-                      <a:noAutofit/>
-                    </a:bodyPr>
-                    <a:lstStyle/>
-                    <a:p>
-                      <a:pPr algn="r">
-                        <a:lnSpc>
-                          <a:spcPts val="2070"/>
-                        </a:lnSpc>
-                        <a:buNone/>
-                        <a:defRPr sz="1800" b="0">
-                          <a:solidFill>
-                            <a:srgbClr val="303437"/>
-                          </a:solidFill>
-                          <a:latin typeface="Noto Sans"/>
-                        </a:defRPr>
-                      </a:pPr>
-                      <a:r>
-                        <a:rPr sz="1800" b="0" lang="ja-JP" altLang="en-US">
-                          <a:solidFill>
-                            <a:srgbClr val="303437"/>
-                          </a:solidFill>
-                          <a:latin typeface="Noto Sans"/>
-                          <a:ea typeface="Noto Sans CJK JP"/>
-                          <a:cs typeface="Noto Sans"/>
-                        </a:rPr>
-                        <a:t>合計</a:t>
-                      </a:r>
-                    </a:p>
-                  </a:txBody>
-                  <a:tcPr marL="63500" marR="63500" marT="38100" marB="38100" anchor="ctr">
-                    <a:lnL w="7620">
-                      <a:noFill/>
-                    </a:lnL>
-                    <a:lnR w="7620">
-                      <a:noFill/>
-                    </a:lnR>
-                    <a:lnT w="15240">
-                      <a:solidFill>
-                        <a:srgbClr val="626669"/>
-                      </a:solidFill>
-                      <a:prstDash val="solid"/>
-                    </a:lnT>
-                    <a:lnB w="7620">
-                      <a:solidFill>
-                        <a:srgbClr val="626669"/>
-                      </a:solidFill>
-                      <a:prstDash val="solid"/>
-                    </a:lnB>
-                    <a:solidFill>
-                      <a:srgbClr val="FFFEF8"/>
-                    </a:solidFill>
-                  </a:tcPr>
-                </a:tc>
-              </a:tr>
-              <a:tr h="420624">
-                <a:tc>
-                  <a:txBody>
-                    <a:bodyPr wrap="square">
-                      <a:noAutofit/>
-                    </a:bodyPr>
-                    <a:lstStyle/>
-                    <a:p>
-                      <a:pPr algn="l">
-                        <a:lnSpc>
-                          <a:spcPts val="2070"/>
-                        </a:lnSpc>
-                        <a:buNone/>
-                        <a:defRPr sz="1800" b="0">
-                          <a:solidFill>
-                            <a:srgbClr val="303437"/>
-                          </a:solidFill>
-                          <a:latin typeface="Noto Sans"/>
-                        </a:defRPr>
-                      </a:pPr>
-                      <a:r>
-                        <a:rPr sz="1800" b="0" lang="ja-JP" altLang="en-US">
-                          <a:solidFill>
-                            <a:srgbClr val="303437"/>
-                          </a:solidFill>
-                          <a:latin typeface="Noto Sans"/>
-                          <a:ea typeface="Noto Sans CJK JP"/>
-                          <a:cs typeface="Noto Sans"/>
-                        </a:rPr>
-                        <a:t>五言・一行</a:t>
-                      </a:r>
-                    </a:p>
-                  </a:txBody>
-                  <a:tcPr marL="63500" marR="63500" marT="38100" marB="38100" anchor="ctr">
-                    <a:lnL w="7620">
-                      <a:noFill/>
-                    </a:lnL>
-                    <a:lnR w="7620">
-                      <a:noFill/>
-                    </a:lnR>
-                    <a:lnT w="7620">
-                      <a:solidFill>
-                        <a:srgbClr val="626669"/>
-                      </a:solidFill>
-                      <a:prstDash val="solid"/>
-                    </a:lnT>
-                    <a:lnB w="7620">
-                      <a:noFill/>
-                    </a:lnB>
-                    <a:solidFill>
-                      <a:srgbClr val="FFFEF8"/>
-                    </a:solidFill>
-                  </a:tcPr>
-                </a:tc>
-                <a:tc>
-                  <a:txBody>
-                    <a:bodyPr wrap="square">
-                      <a:noAutofit/>
-                    </a:bodyPr>
-                    <a:lstStyle/>
-                    <a:p>
-                      <a:pPr algn="r">
-                        <a:lnSpc>
-                          <a:spcPts val="2070"/>
-                        </a:lnSpc>
-                        <a:buNone/>
-                        <a:defRPr sz="1800" b="0">
-                          <a:solidFill>
-                            <a:srgbClr val="303437"/>
-                          </a:solidFill>
-                          <a:latin typeface="Noto Sans"/>
-                        </a:defRPr>
-                      </a:pPr>
-                      <a:r>
-                        <a:rPr sz="1800" b="0" lang="ja-JP" altLang="en-US">
-                          <a:solidFill>
-                            <a:srgbClr val="303437"/>
-                          </a:solidFill>
-                          <a:latin typeface="Noto Sans"/>
-                          <a:ea typeface="Noto Sans CJK JP"/>
-                          <a:cs typeface="Noto Sans"/>
-                        </a:rPr>
-                        <a:t>10,166</a:t>
-                      </a:r>
-                    </a:p>
-                  </a:txBody>
-                  <a:tcPr marL="63500" marR="63500" marT="38100" marB="38100" anchor="ctr">
-                    <a:lnL w="7620">
-                      <a:noFill/>
-                    </a:lnL>
-                    <a:lnR w="7620">
-                      <a:noFill/>
-                    </a:lnR>
-                    <a:lnT w="7620">
-                      <a:solidFill>
-                        <a:srgbClr val="626669"/>
-                      </a:solidFill>
-                      <a:prstDash val="solid"/>
-                    </a:lnT>
-                    <a:lnB w="7620">
-                      <a:noFill/>
-                    </a:lnB>
-                    <a:solidFill>
-                      <a:srgbClr val="FFFEF8"/>
-                    </a:solidFill>
-                  </a:tcPr>
-                </a:tc>
-                <a:tc>
-                  <a:txBody>
-                    <a:bodyPr wrap="square">
-                      <a:noAutofit/>
-                    </a:bodyPr>
-                    <a:lstStyle/>
-                    <a:p>
-                      <a:pPr algn="r">
-                        <a:lnSpc>
-                          <a:spcPts val="2070"/>
-                        </a:lnSpc>
-                        <a:buNone/>
-                        <a:defRPr sz="1800" b="0">
-                          <a:solidFill>
-                            <a:srgbClr val="303437"/>
-                          </a:solidFill>
-                          <a:latin typeface="Noto Sans"/>
-                        </a:defRPr>
-                      </a:pPr>
-                      <a:r>
-                        <a:rPr sz="1800" b="0" lang="ja-JP" altLang="en-US">
-                          <a:solidFill>
-                            <a:srgbClr val="303437"/>
-                          </a:solidFill>
-                          <a:latin typeface="Noto Sans"/>
-                          <a:ea typeface="Noto Sans CJK JP"/>
-                          <a:cs typeface="Noto Sans"/>
-                        </a:rPr>
-                        <a:t>1,270</a:t>
-                      </a:r>
-                    </a:p>
-                  </a:txBody>
-                  <a:tcPr marL="63500" marR="63500" marT="38100" marB="38100" anchor="ctr">
-                    <a:lnL w="7620">
-                      <a:noFill/>
-                    </a:lnL>
-                    <a:lnR w="7620">
-                      <a:noFill/>
-                    </a:lnR>
-                    <a:lnT w="7620">
-                      <a:solidFill>
-                        <a:srgbClr val="626669"/>
-                      </a:solidFill>
-                      <a:prstDash val="solid"/>
-                    </a:lnT>
-                    <a:lnB w="7620">
-                      <a:noFill/>
-                    </a:lnB>
-                    <a:solidFill>
-                      <a:srgbClr val="FFFEF8"/>
-                    </a:solidFill>
-                  </a:tcPr>
-                </a:tc>
-                <a:tc>
-                  <a:txBody>
-                    <a:bodyPr wrap="square">
-                      <a:noAutofit/>
-                    </a:bodyPr>
-                    <a:lstStyle/>
-                    <a:p>
-                      <a:pPr algn="r">
-                        <a:lnSpc>
-                          <a:spcPts val="2070"/>
-                        </a:lnSpc>
-                        <a:buNone/>
-                        <a:defRPr sz="1800" b="0">
-                          <a:solidFill>
-                            <a:srgbClr val="303437"/>
-                          </a:solidFill>
-                          <a:latin typeface="Noto Sans"/>
-                        </a:defRPr>
-                      </a:pPr>
-                      <a:r>
-                        <a:rPr sz="1800" b="0" lang="ja-JP" altLang="en-US">
-                          <a:solidFill>
-                            <a:srgbClr val="303437"/>
-                          </a:solidFill>
-                          <a:latin typeface="Noto Sans"/>
-                          <a:ea typeface="Noto Sans CJK JP"/>
-                          <a:cs typeface="Noto Sans"/>
-                        </a:rPr>
-                        <a:t>1,270</a:t>
-                      </a:r>
-                    </a:p>
-                  </a:txBody>
-                  <a:tcPr marL="63500" marR="63500" marT="38100" marB="38100" anchor="ctr">
-                    <a:lnL w="7620">
-                      <a:noFill/>
-                    </a:lnL>
-                    <a:lnR w="7620">
-                      <a:noFill/>
-                    </a:lnR>
-                    <a:lnT w="7620">
-                      <a:solidFill>
-                        <a:srgbClr val="626669"/>
-                      </a:solidFill>
-                      <a:prstDash val="solid"/>
-                    </a:lnT>
-                    <a:lnB w="7620">
-                      <a:noFill/>
-                    </a:lnB>
-                    <a:solidFill>
-                      <a:srgbClr val="FFFEF8"/>
-                    </a:solidFill>
-                  </a:tcPr>
-                </a:tc>
-                <a:tc>
-                  <a:txBody>
-                    <a:bodyPr wrap="square">
-                      <a:noAutofit/>
-                    </a:bodyPr>
-                    <a:lstStyle/>
-                    <a:p>
-                      <a:pPr algn="r">
-                        <a:lnSpc>
-                          <a:spcPts val="2070"/>
-                        </a:lnSpc>
-                        <a:buNone/>
-                        <a:defRPr sz="1800" b="0">
-                          <a:solidFill>
-                            <a:srgbClr val="303437"/>
-                          </a:solidFill>
-                          <a:latin typeface="Noto Sans"/>
-                        </a:defRPr>
-                      </a:pPr>
-                      <a:r>
-                        <a:rPr sz="1800" b="0" lang="ja-JP" altLang="en-US">
-                          <a:solidFill>
-                            <a:srgbClr val="303437"/>
-                          </a:solidFill>
-                          <a:latin typeface="Noto Sans"/>
-                          <a:ea typeface="Noto Sans CJK JP"/>
-                          <a:cs typeface="Noto Sans"/>
-                        </a:rPr>
-                        <a:t>12,706</a:t>
-                      </a:r>
-                    </a:p>
-                  </a:txBody>
-                  <a:tcPr marL="63500" marR="63500" marT="38100" marB="38100" anchor="ctr">
-                    <a:lnL w="7620">
-                      <a:noFill/>
-                    </a:lnL>
-                    <a:lnR w="7620">
-                      <a:noFill/>
-                    </a:lnR>
-                    <a:lnT w="7620">
-                      <a:solidFill>
-                        <a:srgbClr val="626669"/>
-                      </a:solidFill>
-                      <a:prstDash val="solid"/>
-                    </a:lnT>
-                    <a:lnB w="7620">
-                      <a:noFill/>
-                    </a:lnB>
-                    <a:solidFill>
-                      <a:srgbClr val="FFFEF8"/>
-                    </a:solidFill>
-                  </a:tcPr>
-                </a:tc>
-              </a:tr>
-              <a:tr h="420624">
-                <a:tc>
-                  <a:txBody>
-                    <a:bodyPr wrap="square">
-                      <a:noAutofit/>
-                    </a:bodyPr>
-                    <a:lstStyle/>
-                    <a:p>
-                      <a:pPr algn="l">
-                        <a:lnSpc>
-                          <a:spcPts val="2070"/>
-                        </a:lnSpc>
-                        <a:buNone/>
-                        <a:defRPr sz="1800" b="0">
-                          <a:solidFill>
-                            <a:srgbClr val="303437"/>
-                          </a:solidFill>
-                          <a:latin typeface="Noto Sans"/>
-                        </a:defRPr>
-                      </a:pPr>
-                      <a:r>
-                        <a:rPr sz="1800" b="0" lang="ja-JP" altLang="en-US">
-                          <a:solidFill>
-                            <a:srgbClr val="303437"/>
-                          </a:solidFill>
-                          <a:latin typeface="Noto Sans"/>
-                          <a:ea typeface="Noto Sans CJK JP"/>
-                          <a:cs typeface="Noto Sans"/>
-                        </a:rPr>
-                        <a:t>七言・一行</a:t>
-                      </a:r>
-                    </a:p>
-                  </a:txBody>
-                  <a:tcPr marL="63500" marR="63500" marT="38100" marB="38100" anchor="ctr">
-                    <a:lnL w="7620">
-                      <a:noFill/>
-                    </a:lnL>
-                    <a:lnR w="7620">
-                      <a:noFill/>
-                    </a:lnR>
-                    <a:lnT w="7620">
-                      <a:noFill/>
-                    </a:lnT>
-                    <a:lnB w="7620">
-                      <a:noFill/>
-                    </a:lnB>
-                    <a:solidFill>
-                      <a:srgbClr val="FFFEF8"/>
-                    </a:solidFill>
-                  </a:tcPr>
-                </a:tc>
-                <a:tc>
-                  <a:txBody>
-                    <a:bodyPr wrap="square">
-                      <a:noAutofit/>
-                    </a:bodyPr>
-                    <a:lstStyle/>
-                    <a:p>
-                      <a:pPr algn="r">
-                        <a:lnSpc>
-                          <a:spcPts val="2070"/>
-                        </a:lnSpc>
-                        <a:buNone/>
-                        <a:defRPr sz="1800" b="0">
-                          <a:solidFill>
-                            <a:srgbClr val="303437"/>
-                          </a:solidFill>
-                          <a:latin typeface="Noto Sans"/>
-                        </a:defRPr>
-                      </a:pPr>
-                      <a:r>
-                        <a:rPr sz="1800" b="0" lang="ja-JP" altLang="en-US">
-                          <a:solidFill>
-                            <a:srgbClr val="303437"/>
-                          </a:solidFill>
-                          <a:latin typeface="Noto Sans"/>
-                          <a:ea typeface="Noto Sans CJK JP"/>
-                          <a:cs typeface="Noto Sans"/>
-                        </a:rPr>
-                        <a:t>9,392</a:t>
-                      </a:r>
-                    </a:p>
-                  </a:txBody>
-                  <a:tcPr marL="63500" marR="63500" marT="38100" marB="38100" anchor="ctr">
-                    <a:lnL w="7620">
-                      <a:noFill/>
-                    </a:lnL>
-                    <a:lnR w="7620">
-                      <a:noFill/>
-                    </a:lnR>
-                    <a:lnT w="7620">
-                      <a:noFill/>
-                    </a:lnT>
-                    <a:lnB w="7620">
-                      <a:noFill/>
-                    </a:lnB>
-                    <a:solidFill>
-                      <a:srgbClr val="FFFEF8"/>
-                    </a:solidFill>
-                  </a:tcPr>
-                </a:tc>
-                <a:tc>
-                  <a:txBody>
-                    <a:bodyPr wrap="square">
-                      <a:noAutofit/>
-                    </a:bodyPr>
-                    <a:lstStyle/>
-                    <a:p>
-                      <a:pPr algn="r">
-                        <a:lnSpc>
-                          <a:spcPts val="2070"/>
-                        </a:lnSpc>
-                        <a:buNone/>
-                        <a:defRPr sz="1800" b="0">
-                          <a:solidFill>
-                            <a:srgbClr val="303437"/>
-                          </a:solidFill>
-                          <a:latin typeface="Noto Sans"/>
-                        </a:defRPr>
-                      </a:pPr>
-                      <a:r>
-                        <a:rPr sz="1800" b="0" lang="ja-JP" altLang="en-US">
-                          <a:solidFill>
-                            <a:srgbClr val="303437"/>
-                          </a:solidFill>
-                          <a:latin typeface="Noto Sans"/>
-                          <a:ea typeface="Noto Sans CJK JP"/>
-                          <a:cs typeface="Noto Sans"/>
-                        </a:rPr>
-                        <a:t>1,173</a:t>
-                      </a:r>
-                    </a:p>
-                  </a:txBody>
-                  <a:tcPr marL="63500" marR="63500" marT="38100" marB="38100" anchor="ctr">
-                    <a:lnL w="7620">
-                      <a:noFill/>
-                    </a:lnL>
-                    <a:lnR w="7620">
-                      <a:noFill/>
-                    </a:lnR>
-                    <a:lnT w="7620">
-                      <a:noFill/>
-                    </a:lnT>
-                    <a:lnB w="7620">
-                      <a:noFill/>
-                    </a:lnB>
-                    <a:solidFill>
-                      <a:srgbClr val="FFFEF8"/>
-                    </a:solidFill>
-                  </a:tcPr>
-                </a:tc>
-                <a:tc>
-                  <a:txBody>
-                    <a:bodyPr wrap="square">
-                      <a:noAutofit/>
-                    </a:bodyPr>
-                    <a:lstStyle/>
-                    <a:p>
-                      <a:pPr algn="r">
-                        <a:lnSpc>
-                          <a:spcPts val="2070"/>
-                        </a:lnSpc>
-                        <a:buNone/>
-                        <a:defRPr sz="1800" b="0">
-                          <a:solidFill>
-                            <a:srgbClr val="303437"/>
-                          </a:solidFill>
-                          <a:latin typeface="Noto Sans"/>
-                        </a:defRPr>
-                      </a:pPr>
-                      <a:r>
-                        <a:rPr sz="1800" b="0" lang="ja-JP" altLang="en-US">
-                          <a:solidFill>
-                            <a:srgbClr val="303437"/>
-                          </a:solidFill>
-                          <a:latin typeface="Noto Sans"/>
-                          <a:ea typeface="Noto Sans CJK JP"/>
-                          <a:cs typeface="Noto Sans"/>
-                        </a:rPr>
-                        <a:t>1,173</a:t>
-                      </a:r>
-                    </a:p>
-                  </a:txBody>
-                  <a:tcPr marL="63500" marR="63500" marT="38100" marB="38100" anchor="ctr">
-                    <a:lnL w="7620">
-                      <a:noFill/>
-                    </a:lnL>
-                    <a:lnR w="7620">
-                      <a:noFill/>
-                    </a:lnR>
-                    <a:lnT w="7620">
-                      <a:noFill/>
-                    </a:lnT>
-                    <a:lnB w="7620">
-                      <a:noFill/>
-                    </a:lnB>
-                    <a:solidFill>
-                      <a:srgbClr val="FFFEF8"/>
-                    </a:solidFill>
-                  </a:tcPr>
-                </a:tc>
-                <a:tc>
-                  <a:txBody>
-                    <a:bodyPr wrap="square">
-                      <a:noAutofit/>
-                    </a:bodyPr>
-                    <a:lstStyle/>
-                    <a:p>
-                      <a:pPr algn="r">
-                        <a:lnSpc>
-                          <a:spcPts val="2070"/>
-                        </a:lnSpc>
-                        <a:buNone/>
-                        <a:defRPr sz="1800" b="0">
-                          <a:solidFill>
-                            <a:srgbClr val="303437"/>
-                          </a:solidFill>
-                          <a:latin typeface="Noto Sans"/>
-                        </a:defRPr>
-                      </a:pPr>
-                      <a:r>
-                        <a:rPr sz="1800" b="0" lang="ja-JP" altLang="en-US">
-                          <a:solidFill>
-                            <a:srgbClr val="303437"/>
-                          </a:solidFill>
-                          <a:latin typeface="Noto Sans"/>
-                          <a:ea typeface="Noto Sans CJK JP"/>
-                          <a:cs typeface="Noto Sans"/>
-                        </a:rPr>
-                        <a:t>11,738</a:t>
-                      </a:r>
-                    </a:p>
-                  </a:txBody>
-                  <a:tcPr marL="63500" marR="63500" marT="38100" marB="38100" anchor="ctr">
-                    <a:lnL w="7620">
-                      <a:noFill/>
-                    </a:lnL>
-                    <a:lnR w="7620">
-                      <a:noFill/>
-                    </a:lnR>
-                    <a:lnT w="7620">
-                      <a:noFill/>
-                    </a:lnT>
-                    <a:lnB w="7620">
-                      <a:noFill/>
-                    </a:lnB>
-                    <a:solidFill>
-                      <a:srgbClr val="FFFEF8"/>
-                    </a:solidFill>
-                  </a:tcPr>
-                </a:tc>
-              </a:tr>
-              <a:tr h="420624">
-                <a:tc>
-                  <a:txBody>
-                    <a:bodyPr wrap="square">
-                      <a:noAutofit/>
-                    </a:bodyPr>
-                    <a:lstStyle/>
-                    <a:p>
-                      <a:pPr algn="l">
-                        <a:lnSpc>
-                          <a:spcPts val="2070"/>
-                        </a:lnSpc>
-                        <a:buNone/>
-                        <a:defRPr sz="1800" b="0">
-                          <a:solidFill>
-                            <a:srgbClr val="303437"/>
-                          </a:solidFill>
-                          <a:latin typeface="Noto Sans"/>
-                        </a:defRPr>
-                      </a:pPr>
-                      <a:r>
-                        <a:rPr sz="1800" b="0" lang="ja-JP" altLang="en-US">
-                          <a:solidFill>
-                            <a:srgbClr val="303437"/>
-                          </a:solidFill>
-                          <a:latin typeface="Noto Sans"/>
-                          <a:ea typeface="Noto Sans CJK JP"/>
-                          <a:cs typeface="Noto Sans"/>
-                        </a:rPr>
-                        <a:t>五言・二行</a:t>
-                      </a:r>
-                    </a:p>
-                  </a:txBody>
-                  <a:tcPr marL="63500" marR="63500" marT="38100" marB="38100" anchor="ctr">
-                    <a:lnL w="7620">
-                      <a:noFill/>
-                    </a:lnL>
-                    <a:lnR w="7620">
-                      <a:noFill/>
-                    </a:lnR>
-                    <a:lnT w="7620">
-                      <a:noFill/>
-                    </a:lnT>
-                    <a:lnB w="7620">
-                      <a:noFill/>
-                    </a:lnB>
-                    <a:solidFill>
-                      <a:srgbClr val="FFFEF8"/>
-                    </a:solidFill>
-                  </a:tcPr>
-                </a:tc>
-                <a:tc>
-                  <a:txBody>
-                    <a:bodyPr wrap="square">
-                      <a:noAutofit/>
-                    </a:bodyPr>
-                    <a:lstStyle/>
-                    <a:p>
-                      <a:pPr algn="r">
-                        <a:lnSpc>
-                          <a:spcPts val="2070"/>
-                        </a:lnSpc>
-                        <a:buNone/>
-                        <a:defRPr sz="1800" b="0">
-                          <a:solidFill>
-                            <a:srgbClr val="303437"/>
-                          </a:solidFill>
-                          <a:latin typeface="Noto Sans"/>
-                        </a:defRPr>
-                      </a:pPr>
-                      <a:r>
-                        <a:rPr sz="1800" b="0" lang="ja-JP" altLang="en-US">
-                          <a:solidFill>
-                            <a:srgbClr val="303437"/>
-                          </a:solidFill>
-                          <a:latin typeface="Noto Sans"/>
-                          <a:ea typeface="Noto Sans CJK JP"/>
-                          <a:cs typeface="Noto Sans"/>
-                        </a:rPr>
-                        <a:t>1,025</a:t>
-                      </a:r>
-                    </a:p>
-                  </a:txBody>
-                  <a:tcPr marL="63500" marR="63500" marT="38100" marB="38100" anchor="ctr">
-                    <a:lnL w="7620">
-                      <a:noFill/>
-                    </a:lnL>
-                    <a:lnR w="7620">
-                      <a:noFill/>
-                    </a:lnR>
-                    <a:lnT w="7620">
-                      <a:noFill/>
-                    </a:lnT>
-                    <a:lnB w="7620">
-                      <a:noFill/>
-                    </a:lnB>
-                    <a:solidFill>
-                      <a:srgbClr val="FFFEF8"/>
-                    </a:solidFill>
-                  </a:tcPr>
-                </a:tc>
-                <a:tc>
-                  <a:txBody>
-                    <a:bodyPr wrap="square">
-                      <a:noAutofit/>
-                    </a:bodyPr>
-                    <a:lstStyle/>
-                    <a:p>
-                      <a:pPr algn="r">
-                        <a:lnSpc>
-                          <a:spcPts val="2070"/>
-                        </a:lnSpc>
-                        <a:buNone/>
-                        <a:defRPr sz="1800" b="0">
-                          <a:solidFill>
-                            <a:srgbClr val="303437"/>
-                          </a:solidFill>
-                          <a:latin typeface="Noto Sans"/>
-                        </a:defRPr>
-                      </a:pPr>
-                      <a:r>
-                        <a:rPr sz="1800" b="0" lang="ja-JP" altLang="en-US">
-                          <a:solidFill>
-                            <a:srgbClr val="303437"/>
-                          </a:solidFill>
-                          <a:latin typeface="Noto Sans"/>
-                          <a:ea typeface="Noto Sans CJK JP"/>
-                          <a:cs typeface="Noto Sans"/>
-                        </a:rPr>
-                        <a:t>128</a:t>
-                      </a:r>
-                    </a:p>
-                  </a:txBody>
-                  <a:tcPr marL="63500" marR="63500" marT="38100" marB="38100" anchor="ctr">
-                    <a:lnL w="7620">
-                      <a:noFill/>
-                    </a:lnL>
-                    <a:lnR w="7620">
-                      <a:noFill/>
-                    </a:lnR>
-                    <a:lnT w="7620">
-                      <a:noFill/>
-                    </a:lnT>
-                    <a:lnB w="7620">
-                      <a:noFill/>
-                    </a:lnB>
-                    <a:solidFill>
-                      <a:srgbClr val="FFFEF8"/>
-                    </a:solidFill>
-                  </a:tcPr>
-                </a:tc>
-                <a:tc>
-                  <a:txBody>
-                    <a:bodyPr wrap="square">
-                      <a:noAutofit/>
-                    </a:bodyPr>
-                    <a:lstStyle/>
-                    <a:p>
-                      <a:pPr algn="r">
-                        <a:lnSpc>
-                          <a:spcPts val="2070"/>
-                        </a:lnSpc>
-                        <a:buNone/>
-                        <a:defRPr sz="1800" b="0">
-                          <a:solidFill>
-                            <a:srgbClr val="303437"/>
-                          </a:solidFill>
-                          <a:latin typeface="Noto Sans"/>
-                        </a:defRPr>
-                      </a:pPr>
-                      <a:r>
-                        <a:rPr sz="1800" b="0" lang="ja-JP" altLang="en-US">
-                          <a:solidFill>
-                            <a:srgbClr val="303437"/>
-                          </a:solidFill>
-                          <a:latin typeface="Noto Sans"/>
-                          <a:ea typeface="Noto Sans CJK JP"/>
-                          <a:cs typeface="Noto Sans"/>
-                        </a:rPr>
-                        <a:t>128</a:t>
-                      </a:r>
-                    </a:p>
-                  </a:txBody>
-                  <a:tcPr marL="63500" marR="63500" marT="38100" marB="38100" anchor="ctr">
-                    <a:lnL w="7620">
-                      <a:noFill/>
-                    </a:lnL>
-                    <a:lnR w="7620">
-                      <a:noFill/>
-                    </a:lnR>
-                    <a:lnT w="7620">
-                      <a:noFill/>
-                    </a:lnT>
-                    <a:lnB w="7620">
-                      <a:noFill/>
-                    </a:lnB>
-                    <a:solidFill>
-                      <a:srgbClr val="FFFEF8"/>
-                    </a:solidFill>
-                  </a:tcPr>
-                </a:tc>
-                <a:tc>
-                  <a:txBody>
-                    <a:bodyPr wrap="square">
-                      <a:noAutofit/>
-                    </a:bodyPr>
-                    <a:lstStyle/>
-                    <a:p>
-                      <a:pPr algn="r">
-                        <a:lnSpc>
-                          <a:spcPts val="2070"/>
-                        </a:lnSpc>
-                        <a:buNone/>
-                        <a:defRPr sz="1800" b="0">
-                          <a:solidFill>
-                            <a:srgbClr val="303437"/>
-                          </a:solidFill>
-                          <a:latin typeface="Noto Sans"/>
-                        </a:defRPr>
-                      </a:pPr>
-                      <a:r>
-                        <a:rPr sz="1800" b="0" lang="ja-JP" altLang="en-US">
-                          <a:solidFill>
-                            <a:srgbClr val="303437"/>
-                          </a:solidFill>
-                          <a:latin typeface="Noto Sans"/>
-                          <a:ea typeface="Noto Sans CJK JP"/>
-                          <a:cs typeface="Noto Sans"/>
-                        </a:rPr>
-                        <a:t>1,281</a:t>
-                      </a:r>
-                    </a:p>
-                  </a:txBody>
-                  <a:tcPr marL="63500" marR="63500" marT="38100" marB="38100" anchor="ctr">
-                    <a:lnL w="7620">
-                      <a:noFill/>
-                    </a:lnL>
-                    <a:lnR w="7620">
-                      <a:noFill/>
-                    </a:lnR>
-                    <a:lnT w="7620">
-                      <a:noFill/>
-                    </a:lnT>
-                    <a:lnB w="7620">
-                      <a:noFill/>
-                    </a:lnB>
-                    <a:solidFill>
-                      <a:srgbClr val="FFFEF8"/>
-                    </a:solidFill>
-                  </a:tcPr>
-                </a:tc>
-              </a:tr>
-              <a:tr h="420624">
-                <a:tc>
-                  <a:txBody>
-                    <a:bodyPr wrap="square">
-                      <a:noAutofit/>
-                    </a:bodyPr>
-                    <a:lstStyle/>
-                    <a:p>
-                      <a:pPr algn="l">
-                        <a:lnSpc>
-                          <a:spcPts val="2070"/>
-                        </a:lnSpc>
-                        <a:buNone/>
-                        <a:defRPr sz="1800" b="0">
-                          <a:solidFill>
-                            <a:srgbClr val="303437"/>
-                          </a:solidFill>
-                          <a:latin typeface="Noto Sans"/>
-                        </a:defRPr>
-                      </a:pPr>
-                      <a:r>
-                        <a:rPr sz="1800" b="0" lang="ja-JP" altLang="en-US">
-                          <a:solidFill>
-                            <a:srgbClr val="303437"/>
-                          </a:solidFill>
-                          <a:latin typeface="Noto Sans"/>
-                          <a:ea typeface="Noto Sans CJK JP"/>
-                          <a:cs typeface="Noto Sans"/>
-                        </a:rPr>
-                        <a:t>七言・二行</a:t>
-                      </a:r>
-                    </a:p>
-                  </a:txBody>
-                  <a:tcPr marL="63500" marR="63500" marT="38100" marB="38100" anchor="ctr">
-                    <a:lnL w="7620">
-                      <a:noFill/>
-                    </a:lnL>
-                    <a:lnR w="7620">
-                      <a:noFill/>
-                    </a:lnR>
-                    <a:lnT w="7620">
-                      <a:noFill/>
-                    </a:lnT>
-                    <a:lnB w="7620">
-                      <a:noFill/>
-                    </a:lnB>
-                    <a:solidFill>
-                      <a:srgbClr val="FFFEF8"/>
-                    </a:solidFill>
-                  </a:tcPr>
-                </a:tc>
-                <a:tc>
-                  <a:txBody>
-                    <a:bodyPr wrap="square">
-                      <a:noAutofit/>
-                    </a:bodyPr>
-                    <a:lstStyle/>
-                    <a:p>
-                      <a:pPr algn="r">
-                        <a:lnSpc>
-                          <a:spcPts val="2070"/>
-                        </a:lnSpc>
-                        <a:buNone/>
-                        <a:defRPr sz="1800" b="0">
-                          <a:solidFill>
-                            <a:srgbClr val="303437"/>
-                          </a:solidFill>
-                          <a:latin typeface="Noto Sans"/>
-                        </a:defRPr>
-                      </a:pPr>
-                      <a:r>
-                        <a:rPr sz="1800" b="0" lang="ja-JP" altLang="en-US">
-                          <a:solidFill>
-                            <a:srgbClr val="303437"/>
-                          </a:solidFill>
-                          <a:latin typeface="Noto Sans"/>
-                          <a:ea typeface="Noto Sans CJK JP"/>
-                          <a:cs typeface="Noto Sans"/>
-                        </a:rPr>
-                        <a:t>1,195</a:t>
-                      </a:r>
-                    </a:p>
-                  </a:txBody>
-                  <a:tcPr marL="63500" marR="63500" marT="38100" marB="38100" anchor="ctr">
-                    <a:lnL w="7620">
-                      <a:noFill/>
-                    </a:lnL>
-                    <a:lnR w="7620">
-                      <a:noFill/>
-                    </a:lnR>
-                    <a:lnT w="7620">
-                      <a:noFill/>
-                    </a:lnT>
-                    <a:lnB w="7620">
-                      <a:noFill/>
-                    </a:lnB>
-                    <a:solidFill>
-                      <a:srgbClr val="FFFEF8"/>
-                    </a:solidFill>
-                  </a:tcPr>
-                </a:tc>
-                <a:tc>
-                  <a:txBody>
-                    <a:bodyPr wrap="square">
-                      <a:noAutofit/>
-                    </a:bodyPr>
-                    <a:lstStyle/>
-                    <a:p>
-                      <a:pPr algn="r">
-                        <a:lnSpc>
-                          <a:spcPts val="2070"/>
-                        </a:lnSpc>
-                        <a:buNone/>
-                        <a:defRPr sz="1800" b="0">
-                          <a:solidFill>
-                            <a:srgbClr val="303437"/>
-                          </a:solidFill>
-                          <a:latin typeface="Noto Sans"/>
-                        </a:defRPr>
-                      </a:pPr>
-                      <a:r>
-                        <a:rPr sz="1800" b="0" lang="ja-JP" altLang="en-US">
-                          <a:solidFill>
-                            <a:srgbClr val="303437"/>
-                          </a:solidFill>
-                          <a:latin typeface="Noto Sans"/>
-                          <a:ea typeface="Noto Sans CJK JP"/>
-                          <a:cs typeface="Noto Sans"/>
-                        </a:rPr>
-                        <a:t>149</a:t>
-                      </a:r>
-                    </a:p>
-                  </a:txBody>
-                  <a:tcPr marL="63500" marR="63500" marT="38100" marB="38100" anchor="ctr">
-                    <a:lnL w="7620">
-                      <a:noFill/>
-                    </a:lnL>
-                    <a:lnR w="7620">
-                      <a:noFill/>
-                    </a:lnR>
-                    <a:lnT w="7620">
-                      <a:noFill/>
-                    </a:lnT>
-                    <a:lnB w="7620">
-                      <a:noFill/>
-                    </a:lnB>
-                    <a:solidFill>
-                      <a:srgbClr val="FFFEF8"/>
-                    </a:solidFill>
-                  </a:tcPr>
-                </a:tc>
-                <a:tc>
-                  <a:txBody>
-                    <a:bodyPr wrap="square">
-                      <a:noAutofit/>
-                    </a:bodyPr>
-                    <a:lstStyle/>
-                    <a:p>
-                      <a:pPr algn="r">
-                        <a:lnSpc>
-                          <a:spcPts val="2070"/>
-                        </a:lnSpc>
-                        <a:buNone/>
-                        <a:defRPr sz="1800" b="0">
-                          <a:solidFill>
-                            <a:srgbClr val="303437"/>
-                          </a:solidFill>
-                          <a:latin typeface="Noto Sans"/>
-                        </a:defRPr>
-                      </a:pPr>
-                      <a:r>
-                        <a:rPr sz="1800" b="0" lang="ja-JP" altLang="en-US">
-                          <a:solidFill>
-                            <a:srgbClr val="303437"/>
-                          </a:solidFill>
-                          <a:latin typeface="Noto Sans"/>
-                          <a:ea typeface="Noto Sans CJK JP"/>
-                          <a:cs typeface="Noto Sans"/>
-                        </a:rPr>
-                        <a:t>149</a:t>
-                      </a:r>
-                    </a:p>
-                  </a:txBody>
-                  <a:tcPr marL="63500" marR="63500" marT="38100" marB="38100" anchor="ctr">
-                    <a:lnL w="7620">
-                      <a:noFill/>
-                    </a:lnL>
-                    <a:lnR w="7620">
-                      <a:noFill/>
-                    </a:lnR>
-                    <a:lnT w="7620">
-                      <a:noFill/>
-                    </a:lnT>
-                    <a:lnB w="7620">
-                      <a:noFill/>
-                    </a:lnB>
-                    <a:solidFill>
-                      <a:srgbClr val="FFFEF8"/>
-                    </a:solidFill>
-                  </a:tcPr>
-                </a:tc>
-                <a:tc>
-                  <a:txBody>
-                    <a:bodyPr wrap="square">
-                      <a:noAutofit/>
-                    </a:bodyPr>
-                    <a:lstStyle/>
-                    <a:p>
-                      <a:pPr algn="r">
-                        <a:lnSpc>
-                          <a:spcPts val="2070"/>
-                        </a:lnSpc>
-                        <a:buNone/>
-                        <a:defRPr sz="1800" b="0">
-                          <a:solidFill>
-                            <a:srgbClr val="303437"/>
-                          </a:solidFill>
-                          <a:latin typeface="Noto Sans"/>
-                        </a:defRPr>
-                      </a:pPr>
-                      <a:r>
-                        <a:rPr sz="1800" b="0" lang="ja-JP" altLang="en-US">
-                          <a:solidFill>
-                            <a:srgbClr val="303437"/>
-                          </a:solidFill>
-                          <a:latin typeface="Noto Sans"/>
-                          <a:ea typeface="Noto Sans CJK JP"/>
-                          <a:cs typeface="Noto Sans"/>
-                        </a:rPr>
-                        <a:t>1,493</a:t>
-                      </a:r>
-                    </a:p>
-                  </a:txBody>
-                  <a:tcPr marL="63500" marR="63500" marT="38100" marB="38100" anchor="ctr">
-                    <a:lnL w="7620">
-                      <a:noFill/>
-                    </a:lnL>
-                    <a:lnR w="7620">
-                      <a:noFill/>
-                    </a:lnR>
-                    <a:lnT w="7620">
-                      <a:noFill/>
-                    </a:lnT>
-                    <a:lnB w="7620">
-                      <a:noFill/>
-                    </a:lnB>
-                    <a:solidFill>
-                      <a:srgbClr val="FFFEF8"/>
-                    </a:solidFill>
-                  </a:tcPr>
-                </a:tc>
-              </a:tr>
-              <a:tr h="420624">
-                <a:tc>
-                  <a:txBody>
-                    <a:bodyPr wrap="square">
-                      <a:noAutofit/>
-                    </a:bodyPr>
-                    <a:lstStyle/>
-                    <a:p>
-                      <a:pPr algn="l">
-                        <a:lnSpc>
-                          <a:spcPts val="2070"/>
-                        </a:lnSpc>
-                        <a:buNone/>
-                        <a:defRPr sz="1800" b="0">
-                          <a:solidFill>
-                            <a:srgbClr val="303437"/>
-                          </a:solidFill>
-                          <a:latin typeface="Noto Sans"/>
-                        </a:defRPr>
-                      </a:pPr>
-                      <a:r>
-                        <a:rPr sz="1800" b="0" lang="ja-JP" altLang="en-US">
-                          <a:solidFill>
-                            <a:srgbClr val="303437"/>
-                          </a:solidFill>
-                          <a:latin typeface="Noto Sans"/>
-                          <a:ea typeface="Noto Sans CJK JP"/>
-                          <a:cs typeface="Noto Sans"/>
-                        </a:rPr>
-                        <a:t>合計</a:t>
-                      </a:r>
-                    </a:p>
-                  </a:txBody>
-                  <a:tcPr marL="63500" marR="63500" marT="38100" marB="38100" anchor="ctr">
-                    <a:lnL w="7620">
-                      <a:noFill/>
-                    </a:lnL>
-                    <a:lnR w="7620">
-                      <a:noFill/>
-                    </a:lnR>
-                    <a:lnT w="7620">
-                      <a:noFill/>
-                    </a:lnT>
-                    <a:lnB w="15240">
-                      <a:solidFill>
-                        <a:srgbClr val="626669"/>
-                      </a:solidFill>
-                      <a:prstDash val="solid"/>
-                    </a:lnB>
-                    <a:solidFill>
-                      <a:srgbClr val="FFFEF8"/>
-                    </a:solidFill>
-                  </a:tcPr>
-                </a:tc>
-                <a:tc>
-                  <a:txBody>
-                    <a:bodyPr wrap="square">
-                      <a:noAutofit/>
-                    </a:bodyPr>
-                    <a:lstStyle/>
-                    <a:p>
-                      <a:pPr algn="r">
-                        <a:lnSpc>
-                          <a:spcPts val="2070"/>
-                        </a:lnSpc>
-                        <a:buNone/>
-                        <a:defRPr sz="1800" b="0">
-                          <a:solidFill>
-                            <a:srgbClr val="303437"/>
-                          </a:solidFill>
-                          <a:latin typeface="Noto Sans"/>
-                        </a:defRPr>
-                      </a:pPr>
-                      <a:r>
-                        <a:rPr sz="1800" b="0" lang="ja-JP" altLang="en-US">
-                          <a:solidFill>
-                            <a:srgbClr val="303437"/>
-                          </a:solidFill>
-                          <a:latin typeface="Noto Sans"/>
-                          <a:ea typeface="Noto Sans CJK JP"/>
-                          <a:cs typeface="Noto Sans"/>
-                        </a:rPr>
-                        <a:t>21,778</a:t>
-                      </a:r>
-                    </a:p>
-                  </a:txBody>
-                  <a:tcPr marL="63500" marR="63500" marT="38100" marB="38100" anchor="ctr">
-                    <a:lnL w="7620">
-                      <a:noFill/>
-                    </a:lnL>
-                    <a:lnR w="7620">
-                      <a:noFill/>
-                    </a:lnR>
-                    <a:lnT w="7620">
-                      <a:noFill/>
-                    </a:lnT>
-                    <a:lnB w="15240">
-                      <a:solidFill>
-                        <a:srgbClr val="626669"/>
-                      </a:solidFill>
-                      <a:prstDash val="solid"/>
-                    </a:lnB>
-                    <a:solidFill>
-                      <a:srgbClr val="FFFEF8"/>
-                    </a:solidFill>
-                  </a:tcPr>
-                </a:tc>
-                <a:tc>
-                  <a:txBody>
-                    <a:bodyPr wrap="square">
-                      <a:noAutofit/>
-                    </a:bodyPr>
-                    <a:lstStyle/>
-                    <a:p>
-                      <a:pPr algn="r">
-                        <a:lnSpc>
-                          <a:spcPts val="2070"/>
-                        </a:lnSpc>
-                        <a:buNone/>
-                        <a:defRPr sz="1800" b="0">
-                          <a:solidFill>
-                            <a:srgbClr val="303437"/>
-                          </a:solidFill>
-                          <a:latin typeface="Noto Sans"/>
-                        </a:defRPr>
-                      </a:pPr>
-                      <a:r>
-                        <a:rPr sz="1800" b="0" lang="ja-JP" altLang="en-US">
-                          <a:solidFill>
-                            <a:srgbClr val="303437"/>
-                          </a:solidFill>
-                          <a:latin typeface="Noto Sans"/>
-                          <a:ea typeface="Noto Sans CJK JP"/>
-                          <a:cs typeface="Noto Sans"/>
-                        </a:rPr>
-                        <a:t>2,720</a:t>
-                      </a:r>
-                    </a:p>
-                  </a:txBody>
-                  <a:tcPr marL="63500" marR="63500" marT="38100" marB="38100" anchor="ctr">
-                    <a:lnL w="7620">
-                      <a:noFill/>
-                    </a:lnL>
-                    <a:lnR w="7620">
-                      <a:noFill/>
-                    </a:lnR>
-                    <a:lnT w="7620">
-                      <a:noFill/>
-                    </a:lnT>
-                    <a:lnB w="15240">
-                      <a:solidFill>
-                        <a:srgbClr val="626669"/>
-                      </a:solidFill>
-                      <a:prstDash val="solid"/>
-                    </a:lnB>
-                    <a:solidFill>
-                      <a:srgbClr val="FFFEF8"/>
-                    </a:solidFill>
-                  </a:tcPr>
-                </a:tc>
-                <a:tc>
-                  <a:txBody>
-                    <a:bodyPr wrap="square">
-                      <a:noAutofit/>
-                    </a:bodyPr>
-                    <a:lstStyle/>
-                    <a:p>
-                      <a:pPr algn="r">
-                        <a:lnSpc>
-                          <a:spcPts val="2070"/>
-                        </a:lnSpc>
-                        <a:buNone/>
-                        <a:defRPr sz="1800" b="0">
-                          <a:solidFill>
-                            <a:srgbClr val="303437"/>
-                          </a:solidFill>
-                          <a:latin typeface="Noto Sans"/>
-                        </a:defRPr>
-                      </a:pPr>
-                      <a:r>
-                        <a:rPr sz="1800" b="0" lang="ja-JP" altLang="en-US">
-                          <a:solidFill>
-                            <a:srgbClr val="303437"/>
-                          </a:solidFill>
-                          <a:latin typeface="Noto Sans"/>
-                          <a:ea typeface="Noto Sans CJK JP"/>
-                          <a:cs typeface="Noto Sans"/>
-                        </a:rPr>
-                        <a:t>2,720</a:t>
-                      </a:r>
-                    </a:p>
-                  </a:txBody>
-                  <a:tcPr marL="63500" marR="63500" marT="38100" marB="38100" anchor="ctr">
-                    <a:lnL w="7620">
-                      <a:noFill/>
-                    </a:lnL>
-                    <a:lnR w="7620">
-                      <a:noFill/>
-                    </a:lnR>
-                    <a:lnT w="7620">
-                      <a:noFill/>
-                    </a:lnT>
-                    <a:lnB w="15240">
-                      <a:solidFill>
-                        <a:srgbClr val="626669"/>
-                      </a:solidFill>
-                      <a:prstDash val="solid"/>
-                    </a:lnB>
-                    <a:solidFill>
-                      <a:srgbClr val="FFFEF8"/>
-                    </a:solidFill>
-                  </a:tcPr>
-                </a:tc>
-                <a:tc>
-                  <a:txBody>
-                    <a:bodyPr wrap="square">
-                      <a:noAutofit/>
-                    </a:bodyPr>
-                    <a:lstStyle/>
-                    <a:p>
-                      <a:pPr algn="r">
-                        <a:lnSpc>
-                          <a:spcPts val="2070"/>
-                        </a:lnSpc>
-                        <a:buNone/>
-                        <a:defRPr sz="1800" b="0">
-                          <a:solidFill>
-                            <a:srgbClr val="303437"/>
-                          </a:solidFill>
-                          <a:latin typeface="Noto Sans"/>
-                        </a:defRPr>
-                      </a:pPr>
-                      <a:r>
-                        <a:rPr sz="1800" b="0" lang="ja-JP" altLang="en-US">
-                          <a:solidFill>
-                            <a:srgbClr val="303437"/>
-                          </a:solidFill>
-                          <a:latin typeface="Noto Sans"/>
-                          <a:ea typeface="Noto Sans CJK JP"/>
-                          <a:cs typeface="Noto Sans"/>
-                        </a:rPr>
-                        <a:t>27,218</a:t>
-                      </a:r>
-                    </a:p>
-                  </a:txBody>
-                  <a:tcPr marL="63500" marR="63500" marT="38100" marB="38100" anchor="ctr">
-                    <a:lnL w="7620">
-                      <a:noFill/>
-                    </a:lnL>
-                    <a:lnR w="7620">
-                      <a:noFill/>
-                    </a:lnR>
-                    <a:lnT w="7620">
-                      <a:noFill/>
-                    </a:lnT>
-                    <a:lnB w="15240">
-                      <a:solidFill>
-                        <a:srgbClr val="626669"/>
-                      </a:solidFill>
-                      <a:prstDash val="solid"/>
-                    </a:lnB>
-                    <a:solidFill>
-                      <a:srgbClr val="FFFEF8"/>
-                    </a:solidFill>
-                  </a:tcPr>
-                </a:tc>
-              </a:tr>
-            </a:tbl>
-          </a:graphicData>
-        </a:graphic>
-      </p:graphicFrame>
-      <p:sp>
-        <p:nvSpPr>
-          <p:cNvPr id="5" name="sources"/>
-          <p:cNvSpPr txBox="1"/>
-          <p:nvPr/>
-        </p:nvSpPr>
-        <p:spPr>
-          <a:xfrm>
-            <a:off x="502920" y="4700016"/>
-            <a:ext cx="8183879" cy="530352"/>
-          </a:xfrm>
-          <a:prstGeom prst="rect">
-            <a:avLst/>
-          </a:prstGeom>
-          <a:noFill/>
-        </p:spPr>
-        <p:txBody>
-          <a:bodyPr wrap="square" lIns="0" rIns="0" tIns="0" bIns="0">
-            <a:noAutofit/>
-          </a:bodyPr>
-          <a:lstStyle/>
-          <a:p>
-            <a:pPr algn="l">
-              <a:lnSpc>
-                <a:spcPts val="940"/>
-              </a:lnSpc>
-              <a:spcBef>
-                <a:spcPts val="0"/>
-              </a:spcBef>
-              <a:spcAft>
-                <a:spcPts val="140"/>
-              </a:spcAft>
-              <a:buNone/>
-              <a:defRPr sz="810" b="0">
-                <a:solidFill>
-                  <a:srgbClr val="303437"/>
-                </a:solidFill>
-                <a:latin typeface="Noto Sans"/>
-              </a:defRPr>
-            </a:pPr>
-            <a:r>
-              <a:rPr sz="810" b="0" lang="ja-JP" altLang="en-US">
-                <a:solidFill>
-                  <a:srgbClr val="626669"/>
-                </a:solidFill>
-                <a:latin typeface="Noto Sans"/>
-                <a:ea typeface="Noto Sans CJK JP"/>
-                <a:cs typeface="Noto Sans"/>
-              </a:rPr>
-              <a:t>[1] Li, Qi, Sun, Yi &amp; Zhang (2021). CCPM: A Chinese Classical Poetry Matching Dataset. arXiv:2106.01979v1.</a:t>
-            </a:r>
-            <a:r>
-              <a:rPr sz="810" b="0" lang="ja-JP" altLang="en-US">
-                <a:solidFill>
-                  <a:srgbClr val="626669"/>
-                </a:solidFill>
-                <a:latin typeface="Noto Sans"/>
-                <a:ea typeface="Noto Sans CJK JP"/>
-                <a:cs typeface="Noto Sans"/>
-              </a:rPr>
-              <a:t>  </a:t>
-            </a:r>
-            <a:r>
-              <a:rPr sz="810" b="0" lang="ja-JP" altLang="en-US">
-                <a:solidFill>
-                  <a:srgbClr val="626669"/>
-                </a:solidFill>
-                <a:latin typeface="Noto Sans"/>
-                <a:ea typeface="Noto Sans CJK JP"/>
-                <a:cs typeface="Noto Sans"/>
-                <a:hlinkClick r:id="rId2"/>
-              </a:rPr>
-              <a:t>https://arxiv.org/abs/2106.01979</a:t>
             </a:r>
           </a:p>
         </p:txBody>
@@ -29299,7 +23682,7 @@
                 <a:ea typeface="Noto Sans CJK JP"/>
                 <a:cs typeface="Noto Sans"/>
               </a:rPr>
-              <a:t>Appendix: 2. 分割・重複・入力形式の補足</a:t>
+              <a:t>Appendix: 2. 入力形式と詩句の読み方</a:t>
             </a:r>
           </a:p>
         </p:txBody>
@@ -29354,7 +23737,7 @@
                           <a:ea typeface="Noto Sans CJK JP"/>
                           <a:cs typeface="Noto Sans"/>
                         </a:rPr>
-                        <a:t>answer / 表示</a:t>
+                        <a:t>正解の候補</a:t>
                       </a:r>
                     </a:p>
                   </a:txBody>
@@ -29524,7 +23907,7 @@
                           <a:ea typeface="Noto Sans CJK JP"/>
                           <a:cs typeface="Noto Sans"/>
                         </a:rPr>
-                        <a:t>0 / A</a:t>
+                        <a:t>A</a:t>
                       </a:r>
                     </a:p>
                   </a:txBody>
@@ -29685,7 +24068,7 @@
                           <a:ea typeface="Noto Sans CJK JP"/>
                           <a:cs typeface="Noto Sans"/>
                         </a:rPr>
-                        <a:t>1 / B</a:t>
+                        <a:t>B</a:t>
                       </a:r>
                     </a:p>
                   </a:txBody>
@@ -29837,7 +24220,7 @@
                           <a:ea typeface="Noto Sans CJK JP"/>
                           <a:cs typeface="Noto Sans"/>
                         </a:rPr>
-                        <a:t>2 / C</a:t>
+                        <a:t>C</a:t>
                       </a:r>
                     </a:p>
                   </a:txBody>
@@ -29989,7 +24372,7 @@
                           <a:ea typeface="Noto Sans CJK JP"/>
                           <a:cs typeface="Noto Sans"/>
                         </a:rPr>
-                        <a:t>3 / D</a:t>
+                        <a:t>D</a:t>
                       </a:r>
                     </a:p>
                   </a:txBody>
@@ -30127,60 +24510,6 @@
       </p:graphicFrame>
       <p:sp>
         <p:nvSpPr>
-          <p:cNvPr id="5" name="TextBox 4"/>
-          <p:cNvSpPr txBox="1"/>
-          <p:nvPr/>
-        </p:nvSpPr>
-        <p:spPr>
-          <a:xfrm>
-            <a:off x="594360" y="3995928"/>
-            <a:ext cx="7955279" cy="658368"/>
-          </a:xfrm>
-          <a:prstGeom prst="rect">
-            <a:avLst/>
-          </a:prstGeom>
-          <a:noFill/>
-        </p:spPr>
-        <p:txBody>
-          <a:bodyPr wrap="square" lIns="0" rIns="0" tIns="0" bIns="0">
-            <a:noAutofit/>
-          </a:bodyPr>
-          <a:lstStyle/>
-          <a:p>
-            <a:pPr algn="l">
-              <a:lnSpc>
-                <a:spcPts val="2047"/>
-              </a:lnSpc>
-              <a:spcBef>
-                <a:spcPts val="0"/>
-              </a:spcBef>
-              <a:spcAft>
-                <a:spcPts val="0"/>
-              </a:spcAft>
-              <a:buNone/>
-              <a:defRPr sz="1750" b="0">
-                <a:solidFill>
-                  <a:srgbClr val="303437"/>
-                </a:solidFill>
-                <a:latin typeface="Noto Sans"/>
-              </a:defRPr>
-            </a:pPr>
-            <a:r>
-              <a:rPr sz="1750" b="0" lang="ja-JP" altLang="en-US">
-                <a:solidFill>
-                  <a:srgbClr val="303437"/>
-                </a:solidFill>
-                <a:latin typeface="Noto Sans"/>
-                <a:ea typeface="Noto Sans CJK JP"/>
-                <a:cs typeface="Noto Sans"/>
-              </a:rPr>
-              <a:t>公開テストにはanswerがない。候補順を維持し、0始まりの番号をA〜Dへ対応させた。</a:t>
-            </a:r>
-          </a:p>
-        </p:txBody>
-      </p:sp>
-      <p:sp>
-        <p:nvSpPr>
           <p:cNvPr id="6" name="sources"/>
           <p:cNvSpPr txBox="1"/>
           <p:nvPr/>
@@ -30228,932 +24557,7 @@
                 <a:ea typeface="Noto Sans CJK JP"/>
                 <a:cs typeface="Noto Sans"/>
               </a:rPr>
-              <a:t>[1] THUNLP-AIPoet. CCPM. 公式配布、commit e7db1a0dc1ac1ffdd0ec91f74793c29ae9c8efa5、2026-10-18参照。</a:t>
-            </a:r>
-            <a:r>
-              <a:rPr sz="810" b="0" lang="ja-JP" altLang="en-US">
-                <a:solidFill>
-                  <a:srgbClr val="626669"/>
-                </a:solidFill>
-                <a:latin typeface="Noto Sans"/>
-                <a:ea typeface="Noto Sans CJK JP"/>
-                <a:cs typeface="Noto Sans"/>
-              </a:rPr>
-              <a:t>  </a:t>
-            </a:r>
-            <a:r>
-              <a:rPr sz="810" b="0" lang="ja-JP" altLang="en-US">
-                <a:solidFill>
-                  <a:srgbClr val="626669"/>
-                </a:solidFill>
-                <a:latin typeface="Noto Sans"/>
-                <a:ea typeface="Noto Sans CJK JP"/>
-                <a:cs typeface="Noto Sans"/>
-                <a:hlinkClick r:id="rId2"/>
-              </a:rPr>
-              <a:t>https://github.com/THUNLP-AIPoet/CCPM</a:t>
-            </a:r>
-          </a:p>
-        </p:txBody>
-      </p:sp>
-    </p:spTree>
-  </p:cSld>
-  <p:clrMapOvr>
-    <a:masterClrMapping/>
-  </p:clrMapOvr>
-</p:sld>
-</file>
-
-<file path=ppt/slides/slide46.xml><?xml version="1.0" encoding="utf-8"?>
-<p:sld xmlns:a="http://schemas.openxmlformats.org/drawingml/2006/main" xmlns:p="http://schemas.openxmlformats.org/presentationml/2006/main" xmlns:r="http://schemas.openxmlformats.org/officeDocument/2006/relationships">
-  <p:cSld>
-    <p:spTree>
-      <p:nvGrpSpPr>
-        <p:cNvPr id="1" name=""/>
-        <p:cNvGrpSpPr/>
-        <p:nvPr/>
-      </p:nvGrpSpPr>
-      <p:grpSpPr/>
-      <p:sp>
-        <p:nvSpPr>
-          <p:cNvPr id="2" name="Title 1"/>
-          <p:cNvSpPr>
-            <a:spLocks noGrp="1"/>
-          </p:cNvSpPr>
-          <p:nvPr>
-            <p:ph type="title"/>
-          </p:nvPr>
-        </p:nvSpPr>
-        <p:spPr>
-          <a:xfrm>
-            <a:off x="468172" y="650138"/>
-            <a:ext cx="8206740" cy="616305"/>
-          </a:xfrm>
-        </p:spPr>
-        <p:txBody>
-          <a:bodyPr wrap="square" lIns="0" rIns="0" tIns="0" bIns="0">
-            <a:noAutofit/>
-          </a:bodyPr>
-          <a:lstStyle/>
-          <a:p>
-            <a:pPr algn="l">
-              <a:lnSpc>
-                <a:spcPct val="110000"/>
-              </a:lnSpc>
-              <a:buNone/>
-              <a:defRPr sz="2800" b="0">
-                <a:solidFill>
-                  <a:srgbClr val="303437"/>
-                </a:solidFill>
-                <a:latin typeface="Noto Sans"/>
-              </a:defRPr>
-            </a:pPr>
-            <a:r>
-              <a:rPr sz="2800" b="1" lang="ja-JP" altLang="en-US">
-                <a:solidFill>
-                  <a:srgbClr val="303437"/>
-                </a:solidFill>
-                <a:latin typeface="Noto Sans"/>
-                <a:ea typeface="Noto Sans CJK JP"/>
-                <a:cs typeface="Noto Sans"/>
-              </a:rPr>
-              <a:t>分割間の一致は、比較する単位で異なる</a:t>
-            </a:r>
-          </a:p>
-        </p:txBody>
-      </p:sp>
-      <p:sp>
-        <p:nvSpPr>
-          <p:cNvPr id="3" name="Title 2"/>
-          <p:cNvSpPr>
-            <a:spLocks noGrp="1"/>
-          </p:cNvSpPr>
-          <p:nvPr>
-            <p:ph type="title" idx="2"/>
-          </p:nvPr>
-        </p:nvSpPr>
-        <p:spPr>
-          <a:xfrm>
-            <a:off x="75895" y="0"/>
-            <a:ext cx="8115300" cy="480060"/>
-          </a:xfrm>
-        </p:spPr>
-        <p:txBody>
-          <a:bodyPr wrap="square" lIns="0" rIns="0" tIns="0" bIns="0" anchor="ctr">
-            <a:noAutofit/>
-          </a:bodyPr>
-          <a:lstStyle/>
-          <a:p>
-            <a:pPr algn="l">
-              <a:lnSpc>
-                <a:spcPct val="110000"/>
-              </a:lnSpc>
-              <a:buNone/>
-              <a:defRPr sz="1400" b="0">
-                <a:solidFill>
-                  <a:srgbClr val="303437"/>
-                </a:solidFill>
-                <a:latin typeface="Noto Sans"/>
-              </a:defRPr>
-            </a:pPr>
-            <a:r>
-              <a:rPr sz="1400" b="1" lang="ja-JP" altLang="en-US">
-                <a:solidFill>
-                  <a:srgbClr val="FFFEF8"/>
-                </a:solidFill>
-                <a:latin typeface="Noto Sans"/>
-                <a:ea typeface="Noto Sans CJK JP"/>
-                <a:cs typeface="Noto Sans"/>
-              </a:rPr>
-              <a:t>Appendix: 2. 分割・重複・入力形式の補足</a:t>
-            </a:r>
-          </a:p>
-        </p:txBody>
-      </p:sp>
-      <p:graphicFrame>
-        <p:nvGraphicFramePr>
-          <p:cNvPr id="4" name="Table 3"/>
-          <p:cNvGraphicFramePr>
-            <a:graphicFrameLocks noGrp="1"/>
-          </p:cNvGraphicFramePr>
-          <p:nvPr/>
-        </p:nvGraphicFramePr>
-        <p:xfrm>
-          <a:off x="548640" y="1508760"/>
-          <a:ext cx="8046720" cy="1682496"/>
-        </p:xfrm>
-        <a:graphic>
-          <a:graphicData uri="http://schemas.openxmlformats.org/drawingml/2006/table">
-            <a:tbl>
-              <a:tblPr firstRow="0" bandRow="0"/>
-              <a:tblGrid>
-                <a:gridCol w="3200400"/>
-                <a:gridCol w="2011680"/>
-                <a:gridCol w="2834640"/>
-              </a:tblGrid>
-              <a:tr h="420624">
-                <a:tc>
-                  <a:txBody>
-                    <a:bodyPr wrap="square">
-                      <a:noAutofit/>
-                    </a:bodyPr>
-                    <a:lstStyle/>
-                    <a:p>
-                      <a:pPr algn="l">
-                        <a:lnSpc>
-                          <a:spcPts val="2070"/>
-                        </a:lnSpc>
-                        <a:buNone/>
-                        <a:defRPr sz="1800" b="0">
-                          <a:solidFill>
-                            <a:srgbClr val="303437"/>
-                          </a:solidFill>
-                          <a:latin typeface="Noto Sans"/>
-                        </a:defRPr>
-                      </a:pPr>
-                      <a:r>
-                        <a:rPr sz="1800" b="0" lang="ja-JP" altLang="en-US">
-                          <a:solidFill>
-                            <a:srgbClr val="303437"/>
-                          </a:solidFill>
-                          <a:latin typeface="Noto Sans"/>
-                          <a:ea typeface="Noto Sans CJK JP"/>
-                          <a:cs typeface="Noto Sans"/>
-                        </a:rPr>
-                        <a:t>組み合わせ</a:t>
-                      </a:r>
-                    </a:p>
-                  </a:txBody>
-                  <a:tcPr marL="63500" marR="63500" marT="38100" marB="38100" anchor="ctr">
-                    <a:lnL w="7620">
-                      <a:noFill/>
-                    </a:lnL>
-                    <a:lnR w="7620">
-                      <a:noFill/>
-                    </a:lnR>
-                    <a:lnT w="15240">
-                      <a:solidFill>
-                        <a:srgbClr val="626669"/>
-                      </a:solidFill>
-                      <a:prstDash val="solid"/>
-                    </a:lnT>
-                    <a:lnB w="7620">
-                      <a:solidFill>
-                        <a:srgbClr val="626669"/>
-                      </a:solidFill>
-                      <a:prstDash val="solid"/>
-                    </a:lnB>
-                    <a:solidFill>
-                      <a:srgbClr val="FFFEF8"/>
-                    </a:solidFill>
-                  </a:tcPr>
-                </a:tc>
-                <a:tc>
-                  <a:txBody>
-                    <a:bodyPr wrap="square">
-                      <a:noAutofit/>
-                    </a:bodyPr>
-                    <a:lstStyle/>
-                    <a:p>
-                      <a:pPr algn="r">
-                        <a:lnSpc>
-                          <a:spcPts val="2070"/>
-                        </a:lnSpc>
-                        <a:buNone/>
-                        <a:defRPr sz="1800" b="0">
-                          <a:solidFill>
-                            <a:srgbClr val="303437"/>
-                          </a:solidFill>
-                          <a:latin typeface="Noto Sans"/>
-                        </a:defRPr>
-                      </a:pPr>
-                      <a:r>
-                        <a:rPr sz="1800" b="0" lang="ja-JP" altLang="en-US">
-                          <a:solidFill>
-                            <a:srgbClr val="303437"/>
-                          </a:solidFill>
-                          <a:latin typeface="Noto Sans"/>
-                          <a:ea typeface="Noto Sans CJK JP"/>
-                          <a:cs typeface="Noto Sans"/>
-                        </a:rPr>
-                        <a:t>共通の説明文</a:t>
-                      </a:r>
-                    </a:p>
-                  </a:txBody>
-                  <a:tcPr marL="63500" marR="63500" marT="38100" marB="38100" anchor="ctr">
-                    <a:lnL w="7620">
-                      <a:noFill/>
-                    </a:lnL>
-                    <a:lnR w="7620">
-                      <a:noFill/>
-                    </a:lnR>
-                    <a:lnT w="15240">
-                      <a:solidFill>
-                        <a:srgbClr val="626669"/>
-                      </a:solidFill>
-                      <a:prstDash val="solid"/>
-                    </a:lnT>
-                    <a:lnB w="7620">
-                      <a:solidFill>
-                        <a:srgbClr val="626669"/>
-                      </a:solidFill>
-                      <a:prstDash val="solid"/>
-                    </a:lnB>
-                    <a:solidFill>
-                      <a:srgbClr val="FFFEF8"/>
-                    </a:solidFill>
-                  </a:tcPr>
-                </a:tc>
-                <a:tc>
-                  <a:txBody>
-                    <a:bodyPr wrap="square">
-                      <a:noAutofit/>
-                    </a:bodyPr>
-                    <a:lstStyle/>
-                    <a:p>
-                      <a:pPr algn="r">
-                        <a:lnSpc>
-                          <a:spcPts val="2070"/>
-                        </a:lnSpc>
-                        <a:buNone/>
-                        <a:defRPr sz="1800" b="0">
-                          <a:solidFill>
-                            <a:srgbClr val="303437"/>
-                          </a:solidFill>
-                          <a:latin typeface="Noto Sans"/>
-                        </a:defRPr>
-                      </a:pPr>
-                      <a:r>
-                        <a:rPr sz="1800" b="0" lang="ja-JP" altLang="en-US">
-                          <a:solidFill>
-                            <a:srgbClr val="303437"/>
-                          </a:solidFill>
-                          <a:latin typeface="Noto Sans"/>
-                          <a:ea typeface="Noto Sans CJK JP"/>
-                          <a:cs typeface="Noto Sans"/>
-                        </a:rPr>
-                        <a:t>共通の説明＋四候補</a:t>
-                      </a:r>
-                    </a:p>
-                  </a:txBody>
-                  <a:tcPr marL="63500" marR="63500" marT="38100" marB="38100" anchor="ctr">
-                    <a:lnL w="7620">
-                      <a:noFill/>
-                    </a:lnL>
-                    <a:lnR w="7620">
-                      <a:noFill/>
-                    </a:lnR>
-                    <a:lnT w="15240">
-                      <a:solidFill>
-                        <a:srgbClr val="626669"/>
-                      </a:solidFill>
-                      <a:prstDash val="solid"/>
-                    </a:lnT>
-                    <a:lnB w="7620">
-                      <a:solidFill>
-                        <a:srgbClr val="626669"/>
-                      </a:solidFill>
-                      <a:prstDash val="solid"/>
-                    </a:lnB>
-                    <a:solidFill>
-                      <a:srgbClr val="FFFEF8"/>
-                    </a:solidFill>
-                  </a:tcPr>
-                </a:tc>
-              </a:tr>
-              <a:tr h="420624">
-                <a:tc>
-                  <a:txBody>
-                    <a:bodyPr wrap="square">
-                      <a:noAutofit/>
-                    </a:bodyPr>
-                    <a:lstStyle/>
-                    <a:p>
-                      <a:pPr algn="l">
-                        <a:lnSpc>
-                          <a:spcPts val="2070"/>
-                        </a:lnSpc>
-                        <a:buNone/>
-                        <a:defRPr sz="1800" b="0">
-                          <a:solidFill>
-                            <a:srgbClr val="303437"/>
-                          </a:solidFill>
-                          <a:latin typeface="Noto Sans"/>
-                        </a:defRPr>
-                      </a:pPr>
-                      <a:r>
-                        <a:rPr sz="1800" b="0" lang="ja-JP" altLang="en-US">
-                          <a:solidFill>
-                            <a:srgbClr val="303437"/>
-                          </a:solidFill>
-                          <a:latin typeface="Noto Sans"/>
-                          <a:ea typeface="Noto Sans CJK JP"/>
-                          <a:cs typeface="Noto Sans"/>
-                        </a:rPr>
-                        <a:t>学習 × 検証</a:t>
-                      </a:r>
-                    </a:p>
-                  </a:txBody>
-                  <a:tcPr marL="63500" marR="63500" marT="38100" marB="38100" anchor="ctr">
-                    <a:lnL w="7620">
-                      <a:noFill/>
-                    </a:lnL>
-                    <a:lnR w="7620">
-                      <a:noFill/>
-                    </a:lnR>
-                    <a:lnT w="7620">
-                      <a:solidFill>
-                        <a:srgbClr val="626669"/>
-                      </a:solidFill>
-                      <a:prstDash val="solid"/>
-                    </a:lnT>
-                    <a:lnB w="7620">
-                      <a:noFill/>
-                    </a:lnB>
-                    <a:solidFill>
-                      <a:srgbClr val="FFFEF8"/>
-                    </a:solidFill>
-                  </a:tcPr>
-                </a:tc>
-                <a:tc>
-                  <a:txBody>
-                    <a:bodyPr wrap="square">
-                      <a:noAutofit/>
-                    </a:bodyPr>
-                    <a:lstStyle/>
-                    <a:p>
-                      <a:pPr algn="r">
-                        <a:lnSpc>
-                          <a:spcPts val="2070"/>
-                        </a:lnSpc>
-                        <a:buNone/>
-                        <a:defRPr sz="1800" b="0">
-                          <a:solidFill>
-                            <a:srgbClr val="303437"/>
-                          </a:solidFill>
-                          <a:latin typeface="Noto Sans"/>
-                        </a:defRPr>
-                      </a:pPr>
-                      <a:r>
-                        <a:rPr sz="1800" b="0" lang="ja-JP" altLang="en-US">
-                          <a:solidFill>
-                            <a:srgbClr val="303437"/>
-                          </a:solidFill>
-                          <a:latin typeface="Noto Sans"/>
-                          <a:ea typeface="Noto Sans CJK JP"/>
-                          <a:cs typeface="Noto Sans"/>
-                        </a:rPr>
-                        <a:t>65</a:t>
-                      </a:r>
-                    </a:p>
-                  </a:txBody>
-                  <a:tcPr marL="63500" marR="63500" marT="38100" marB="38100" anchor="ctr">
-                    <a:lnL w="7620">
-                      <a:noFill/>
-                    </a:lnL>
-                    <a:lnR w="7620">
-                      <a:noFill/>
-                    </a:lnR>
-                    <a:lnT w="7620">
-                      <a:solidFill>
-                        <a:srgbClr val="626669"/>
-                      </a:solidFill>
-                      <a:prstDash val="solid"/>
-                    </a:lnT>
-                    <a:lnB w="7620">
-                      <a:noFill/>
-                    </a:lnB>
-                    <a:solidFill>
-                      <a:srgbClr val="FFFEF8"/>
-                    </a:solidFill>
-                  </a:tcPr>
-                </a:tc>
-                <a:tc>
-                  <a:txBody>
-                    <a:bodyPr wrap="square">
-                      <a:noAutofit/>
-                    </a:bodyPr>
-                    <a:lstStyle/>
-                    <a:p>
-                      <a:pPr algn="r">
-                        <a:lnSpc>
-                          <a:spcPts val="2070"/>
-                        </a:lnSpc>
-                        <a:buNone/>
-                        <a:defRPr sz="1800" b="0">
-                          <a:solidFill>
-                            <a:srgbClr val="303437"/>
-                          </a:solidFill>
-                          <a:latin typeface="Noto Sans"/>
-                        </a:defRPr>
-                      </a:pPr>
-                      <a:r>
-                        <a:rPr sz="1800" b="0" lang="ja-JP" altLang="en-US">
-                          <a:solidFill>
-                            <a:srgbClr val="303437"/>
-                          </a:solidFill>
-                          <a:latin typeface="Noto Sans"/>
-                          <a:ea typeface="Noto Sans CJK JP"/>
-                          <a:cs typeface="Noto Sans"/>
-                        </a:rPr>
-                        <a:t>0</a:t>
-                      </a:r>
-                    </a:p>
-                  </a:txBody>
-                  <a:tcPr marL="63500" marR="63500" marT="38100" marB="38100" anchor="ctr">
-                    <a:lnL w="7620">
-                      <a:noFill/>
-                    </a:lnL>
-                    <a:lnR w="7620">
-                      <a:noFill/>
-                    </a:lnR>
-                    <a:lnT w="7620">
-                      <a:solidFill>
-                        <a:srgbClr val="626669"/>
-                      </a:solidFill>
-                      <a:prstDash val="solid"/>
-                    </a:lnT>
-                    <a:lnB w="7620">
-                      <a:noFill/>
-                    </a:lnB>
-                    <a:solidFill>
-                      <a:srgbClr val="FFFEF8"/>
-                    </a:solidFill>
-                  </a:tcPr>
-                </a:tc>
-              </a:tr>
-              <a:tr h="420624">
-                <a:tc>
-                  <a:txBody>
-                    <a:bodyPr wrap="square">
-                      <a:noAutofit/>
-                    </a:bodyPr>
-                    <a:lstStyle/>
-                    <a:p>
-                      <a:pPr algn="l">
-                        <a:lnSpc>
-                          <a:spcPts val="2070"/>
-                        </a:lnSpc>
-                        <a:buNone/>
-                        <a:defRPr sz="1800" b="0">
-                          <a:solidFill>
-                            <a:srgbClr val="303437"/>
-                          </a:solidFill>
-                          <a:latin typeface="Noto Sans"/>
-                        </a:defRPr>
-                      </a:pPr>
-                      <a:r>
-                        <a:rPr sz="1800" b="0" lang="ja-JP" altLang="en-US">
-                          <a:solidFill>
-                            <a:srgbClr val="303437"/>
-                          </a:solidFill>
-                          <a:latin typeface="Noto Sans"/>
-                          <a:ea typeface="Noto Sans CJK JP"/>
-                          <a:cs typeface="Noto Sans"/>
-                        </a:rPr>
-                        <a:t>学習 × 公開テスト</a:t>
-                      </a:r>
-                    </a:p>
-                  </a:txBody>
-                  <a:tcPr marL="63500" marR="63500" marT="38100" marB="38100" anchor="ctr">
-                    <a:lnL w="7620">
-                      <a:noFill/>
-                    </a:lnL>
-                    <a:lnR w="7620">
-                      <a:noFill/>
-                    </a:lnR>
-                    <a:lnT w="7620">
-                      <a:noFill/>
-                    </a:lnT>
-                    <a:lnB w="7620">
-                      <a:noFill/>
-                    </a:lnB>
-                    <a:solidFill>
-                      <a:srgbClr val="FFFEF8"/>
-                    </a:solidFill>
-                  </a:tcPr>
-                </a:tc>
-                <a:tc>
-                  <a:txBody>
-                    <a:bodyPr wrap="square">
-                      <a:noAutofit/>
-                    </a:bodyPr>
-                    <a:lstStyle/>
-                    <a:p>
-                      <a:pPr algn="r">
-                        <a:lnSpc>
-                          <a:spcPts val="2070"/>
-                        </a:lnSpc>
-                        <a:buNone/>
-                        <a:defRPr sz="1800" b="0">
-                          <a:solidFill>
-                            <a:srgbClr val="303437"/>
-                          </a:solidFill>
-                          <a:latin typeface="Noto Sans"/>
-                        </a:defRPr>
-                      </a:pPr>
-                      <a:r>
-                        <a:rPr sz="1800" b="0" lang="ja-JP" altLang="en-US">
-                          <a:solidFill>
-                            <a:srgbClr val="303437"/>
-                          </a:solidFill>
-                          <a:latin typeface="Noto Sans"/>
-                          <a:ea typeface="Noto Sans CJK JP"/>
-                          <a:cs typeface="Noto Sans"/>
-                        </a:rPr>
-                        <a:t>82</a:t>
-                      </a:r>
-                    </a:p>
-                  </a:txBody>
-                  <a:tcPr marL="63500" marR="63500" marT="38100" marB="38100" anchor="ctr">
-                    <a:lnL w="7620">
-                      <a:noFill/>
-                    </a:lnL>
-                    <a:lnR w="7620">
-                      <a:noFill/>
-                    </a:lnR>
-                    <a:lnT w="7620">
-                      <a:noFill/>
-                    </a:lnT>
-                    <a:lnB w="7620">
-                      <a:noFill/>
-                    </a:lnB>
-                    <a:solidFill>
-                      <a:srgbClr val="FFFEF8"/>
-                    </a:solidFill>
-                  </a:tcPr>
-                </a:tc>
-                <a:tc>
-                  <a:txBody>
-                    <a:bodyPr wrap="square">
-                      <a:noAutofit/>
-                    </a:bodyPr>
-                    <a:lstStyle/>
-                    <a:p>
-                      <a:pPr algn="r">
-                        <a:lnSpc>
-                          <a:spcPts val="2070"/>
-                        </a:lnSpc>
-                        <a:buNone/>
-                        <a:defRPr sz="1800" b="0">
-                          <a:solidFill>
-                            <a:srgbClr val="303437"/>
-                          </a:solidFill>
-                          <a:latin typeface="Noto Sans"/>
-                        </a:defRPr>
-                      </a:pPr>
-                      <a:r>
-                        <a:rPr sz="1800" b="0" lang="ja-JP" altLang="en-US">
-                          <a:solidFill>
-                            <a:srgbClr val="303437"/>
-                          </a:solidFill>
-                          <a:latin typeface="Noto Sans"/>
-                          <a:ea typeface="Noto Sans CJK JP"/>
-                          <a:cs typeface="Noto Sans"/>
-                        </a:rPr>
-                        <a:t>1</a:t>
-                      </a:r>
-                    </a:p>
-                  </a:txBody>
-                  <a:tcPr marL="63500" marR="63500" marT="38100" marB="38100" anchor="ctr">
-                    <a:lnL w="7620">
-                      <a:noFill/>
-                    </a:lnL>
-                    <a:lnR w="7620">
-                      <a:noFill/>
-                    </a:lnR>
-                    <a:lnT w="7620">
-                      <a:noFill/>
-                    </a:lnT>
-                    <a:lnB w="7620">
-                      <a:noFill/>
-                    </a:lnB>
-                    <a:solidFill>
-                      <a:srgbClr val="FFFEF8"/>
-                    </a:solidFill>
-                  </a:tcPr>
-                </a:tc>
-              </a:tr>
-              <a:tr h="420624">
-                <a:tc>
-                  <a:txBody>
-                    <a:bodyPr wrap="square">
-                      <a:noAutofit/>
-                    </a:bodyPr>
-                    <a:lstStyle/>
-                    <a:p>
-                      <a:pPr algn="l">
-                        <a:lnSpc>
-                          <a:spcPts val="2070"/>
-                        </a:lnSpc>
-                        <a:buNone/>
-                        <a:defRPr sz="1800" b="0">
-                          <a:solidFill>
-                            <a:srgbClr val="303437"/>
-                          </a:solidFill>
-                          <a:latin typeface="Noto Sans"/>
-                        </a:defRPr>
-                      </a:pPr>
-                      <a:r>
-                        <a:rPr sz="1800" b="0" lang="ja-JP" altLang="en-US">
-                          <a:solidFill>
-                            <a:srgbClr val="303437"/>
-                          </a:solidFill>
-                          <a:latin typeface="Noto Sans"/>
-                          <a:ea typeface="Noto Sans CJK JP"/>
-                          <a:cs typeface="Noto Sans"/>
-                        </a:rPr>
-                        <a:t>検証 × 公開テスト</a:t>
-                      </a:r>
-                    </a:p>
-                  </a:txBody>
-                  <a:tcPr marL="63500" marR="63500" marT="38100" marB="38100" anchor="ctr">
-                    <a:lnL w="7620">
-                      <a:noFill/>
-                    </a:lnL>
-                    <a:lnR w="7620">
-                      <a:noFill/>
-                    </a:lnR>
-                    <a:lnT w="7620">
-                      <a:noFill/>
-                    </a:lnT>
-                    <a:lnB w="15240">
-                      <a:solidFill>
-                        <a:srgbClr val="626669"/>
-                      </a:solidFill>
-                      <a:prstDash val="solid"/>
-                    </a:lnB>
-                    <a:solidFill>
-                      <a:srgbClr val="FFFEF8"/>
-                    </a:solidFill>
-                  </a:tcPr>
-                </a:tc>
-                <a:tc>
-                  <a:txBody>
-                    <a:bodyPr wrap="square">
-                      <a:noAutofit/>
-                    </a:bodyPr>
-                    <a:lstStyle/>
-                    <a:p>
-                      <a:pPr algn="r">
-                        <a:lnSpc>
-                          <a:spcPts val="2070"/>
-                        </a:lnSpc>
-                        <a:buNone/>
-                        <a:defRPr sz="1800" b="0">
-                          <a:solidFill>
-                            <a:srgbClr val="303437"/>
-                          </a:solidFill>
-                          <a:latin typeface="Noto Sans"/>
-                        </a:defRPr>
-                      </a:pPr>
-                      <a:r>
-                        <a:rPr sz="1800" b="0" lang="ja-JP" altLang="en-US">
-                          <a:solidFill>
-                            <a:srgbClr val="303437"/>
-                          </a:solidFill>
-                          <a:latin typeface="Noto Sans"/>
-                          <a:ea typeface="Noto Sans CJK JP"/>
-                          <a:cs typeface="Noto Sans"/>
-                        </a:rPr>
-                        <a:t>11</a:t>
-                      </a:r>
-                    </a:p>
-                  </a:txBody>
-                  <a:tcPr marL="63500" marR="63500" marT="38100" marB="38100" anchor="ctr">
-                    <a:lnL w="7620">
-                      <a:noFill/>
-                    </a:lnL>
-                    <a:lnR w="7620">
-                      <a:noFill/>
-                    </a:lnR>
-                    <a:lnT w="7620">
-                      <a:noFill/>
-                    </a:lnT>
-                    <a:lnB w="15240">
-                      <a:solidFill>
-                        <a:srgbClr val="626669"/>
-                      </a:solidFill>
-                      <a:prstDash val="solid"/>
-                    </a:lnB>
-                    <a:solidFill>
-                      <a:srgbClr val="FFFEF8"/>
-                    </a:solidFill>
-                  </a:tcPr>
-                </a:tc>
-                <a:tc>
-                  <a:txBody>
-                    <a:bodyPr wrap="square">
-                      <a:noAutofit/>
-                    </a:bodyPr>
-                    <a:lstStyle/>
-                    <a:p>
-                      <a:pPr algn="r">
-                        <a:lnSpc>
-                          <a:spcPts val="2070"/>
-                        </a:lnSpc>
-                        <a:buNone/>
-                        <a:defRPr sz="1800" b="0">
-                          <a:solidFill>
-                            <a:srgbClr val="303437"/>
-                          </a:solidFill>
-                          <a:latin typeface="Noto Sans"/>
-                        </a:defRPr>
-                      </a:pPr>
-                      <a:r>
-                        <a:rPr sz="1800" b="0" lang="ja-JP" altLang="en-US">
-                          <a:solidFill>
-                            <a:srgbClr val="303437"/>
-                          </a:solidFill>
-                          <a:latin typeface="Noto Sans"/>
-                          <a:ea typeface="Noto Sans CJK JP"/>
-                          <a:cs typeface="Noto Sans"/>
-                        </a:rPr>
-                        <a:t>0</a:t>
-                      </a:r>
-                    </a:p>
-                  </a:txBody>
-                  <a:tcPr marL="63500" marR="63500" marT="38100" marB="38100" anchor="ctr">
-                    <a:lnL w="7620">
-                      <a:noFill/>
-                    </a:lnL>
-                    <a:lnR w="7620">
-                      <a:noFill/>
-                    </a:lnR>
-                    <a:lnT w="7620">
-                      <a:noFill/>
-                    </a:lnT>
-                    <a:lnB w="15240">
-                      <a:solidFill>
-                        <a:srgbClr val="626669"/>
-                      </a:solidFill>
-                      <a:prstDash val="solid"/>
-                    </a:lnB>
-                    <a:solidFill>
-                      <a:srgbClr val="FFFEF8"/>
-                    </a:solidFill>
-                  </a:tcPr>
-                </a:tc>
-              </a:tr>
-            </a:tbl>
-          </a:graphicData>
-        </a:graphic>
-      </p:graphicFrame>
-      <p:sp>
-        <p:nvSpPr>
-          <p:cNvPr id="5" name="TextBox 4"/>
-          <p:cNvSpPr txBox="1"/>
-          <p:nvPr/>
-        </p:nvSpPr>
-        <p:spPr>
-          <a:xfrm>
-            <a:off x="594360" y="3392424"/>
-            <a:ext cx="7955279" cy="658368"/>
-          </a:xfrm>
-          <a:prstGeom prst="rect">
-            <a:avLst/>
-          </a:prstGeom>
-          <a:noFill/>
-        </p:spPr>
-        <p:txBody>
-          <a:bodyPr wrap="square" lIns="0" rIns="0" tIns="0" bIns="0">
-            <a:noAutofit/>
-          </a:bodyPr>
-          <a:lstStyle/>
-          <a:p>
-            <a:pPr algn="l">
-              <a:lnSpc>
-                <a:spcPts val="2047"/>
-              </a:lnSpc>
-              <a:spcBef>
-                <a:spcPts val="0"/>
-              </a:spcBef>
-              <a:spcAft>
-                <a:spcPts val="0"/>
-              </a:spcAft>
-              <a:buNone/>
-              <a:defRPr sz="1750" b="0">
-                <a:solidFill>
-                  <a:srgbClr val="303437"/>
-                </a:solidFill>
-                <a:latin typeface="Noto Sans"/>
-              </a:defRPr>
-            </a:pPr>
-            <a:r>
-              <a:rPr sz="1750" b="0" lang="ja-JP" altLang="en-US">
-                <a:solidFill>
-                  <a:srgbClr val="303437"/>
-                </a:solidFill>
-                <a:latin typeface="Noto Sans"/>
-                <a:ea typeface="Noto Sans CJK JP"/>
-                <a:cs typeface="Noto Sans"/>
-              </a:rPr>
-              <a:t>全行の説明文と四候補を、表記を変えずに比較した共通要素数。説明＋候補の一致1件はtrain14,734行とtest_public1,020行。</a:t>
-            </a:r>
-          </a:p>
-        </p:txBody>
-      </p:sp>
-      <p:sp>
-        <p:nvSpPr>
-          <p:cNvPr id="6" name="sources"/>
-          <p:cNvSpPr txBox="1"/>
-          <p:nvPr/>
-        </p:nvSpPr>
-        <p:spPr>
-          <a:xfrm>
-            <a:off x="502920" y="4700016"/>
-            <a:ext cx="8183879" cy="530352"/>
-          </a:xfrm>
-          <a:prstGeom prst="rect">
-            <a:avLst/>
-          </a:prstGeom>
-          <a:noFill/>
-        </p:spPr>
-        <p:txBody>
-          <a:bodyPr wrap="square" lIns="0" rIns="0" tIns="0" bIns="0">
-            <a:noAutofit/>
-          </a:bodyPr>
-          <a:lstStyle/>
-          <a:p>
-            <a:pPr algn="l">
-              <a:lnSpc>
-                <a:spcPts val="940"/>
-              </a:lnSpc>
-              <a:spcBef>
-                <a:spcPts val="0"/>
-              </a:spcBef>
-              <a:spcAft>
-                <a:spcPts val="140"/>
-              </a:spcAft>
-              <a:buNone/>
-              <a:defRPr sz="810" b="0">
-                <a:solidFill>
-                  <a:srgbClr val="303437"/>
-                </a:solidFill>
-                <a:latin typeface="Noto Sans"/>
-              </a:defRPr>
-            </a:pPr>
-            <a:r>
-              <a:rPr sz="810" b="0" lang="ja-JP" altLang="en-US">
-                <a:solidFill>
-                  <a:srgbClr val="626669"/>
-                </a:solidFill>
-                <a:latin typeface="Noto Sans"/>
-                <a:ea typeface="Noto Sans CJK JP"/>
-                <a:cs typeface="Noto Sans"/>
-              </a:rPr>
-              <a:t>[1] THUNLP-AIPoet. CCPM. 公式配布、commit e7db1a0dc1ac1ffdd0ec91f74793c29ae9c8efa5、2026-10-18参照。</a:t>
-            </a:r>
-            <a:r>
-              <a:rPr sz="810" b="0" lang="ja-JP" altLang="en-US">
-                <a:solidFill>
-                  <a:srgbClr val="626669"/>
-                </a:solidFill>
-                <a:latin typeface="Noto Sans"/>
-                <a:ea typeface="Noto Sans CJK JP"/>
-                <a:cs typeface="Noto Sans"/>
-              </a:rPr>
-              <a:t>  </a:t>
+              <a:t>[1] THUNLP-AIPoet (2021). CCPM.  </a:t>
             </a:r>
             <a:r>
               <a:rPr sz="810" b="0" lang="ja-JP" altLang="en-US">
@@ -31231,7 +24635,7 @@
                 <a:ea typeface="Noto Sans CJK JP"/>
                 <a:cs typeface="Noto Sans"/>
               </a:rPr>
-              <a:t>配布文字列には、空の説明や特殊な表記もある</a:t>
+              <a:t>一部の問題には、説明の欠落や形式の例外がある</a:t>
             </a:r>
           </a:p>
         </p:txBody>
@@ -31284,7 +24688,7 @@
                 <a:ea typeface="Noto Sans CJK JP"/>
                 <a:cs typeface="Noto Sans"/>
               </a:rPr>
-              <a:t>公開テスト2,026行のtranslationは空文字列で、四候補は残っている。正解が非公開のため、意図した説明や答えは補っていない。</a:t>
+              <a:t>公開テストには、説明が空の問題が1問ある。四候補は残っているが、説明との意味対応を評価するための入力が欠けている。</a:t>
             </a:r>
           </a:p>
           <a:p>
@@ -31314,7 +24718,37 @@
                 <a:ea typeface="Noto Sans CJK JP"/>
                 <a:cs typeface="Noto Sans"/>
               </a:rPr>
-              <a:t>学習6,518行には「公曰：勿杀」という五言・七言に収まらない正解文字列がある。別の行には拡張漢字や文字コードを表すような文字列もあり、配布物を一律に標準漢字だけへ直していない。</a:t>
+              <a:t>五言・七言の詩型に当てはまらない文や、特殊な漢字表記を含む問題もある。</a:t>
+            </a:r>
+          </a:p>
+          <a:p>
+            <a:pPr marL="457200" indent="-355600">
+              <a:lnSpc>
+                <a:spcPts val="2320"/>
+              </a:lnSpc>
+              <a:spcAft>
+                <a:spcPts val="0"/>
+              </a:spcAft>
+              <a:buSzPct val="68205"/>
+              <a:buFont typeface="Noto Sans CJK JP"/>
+              <a:buChar char="●"/>
+              <a:defRPr sz="1950" b="0">
+                <a:solidFill>
+                  <a:srgbClr val="303437"/>
+                </a:solidFill>
+                <a:latin typeface="Noto Sans"/>
+              </a:defRPr>
+            </a:pPr>
+            <a:r>
+              <a:rPr sz="1950" b="0" lang="ja-JP" altLang="en-US">
+                <a:solidFill>
+                  <a:srgbClr val="303437"/>
+                </a:solidFill>
+                <a:latin typeface="Noto Sans"/>
+                <a:ea typeface="Noto Sans CJK JP"/>
+                <a:cs typeface="Noto Sans"/>
+              </a:rPr>
+              <a:t>学習と公開テストで、説明と四候補が一致する問題が1問ある。</a:t>
             </a:r>
           </a:p>
         </p:txBody>
@@ -31362,7 +24796,7 @@
                 <a:ea typeface="Noto Sans CJK JP"/>
                 <a:cs typeface="Noto Sans"/>
               </a:rPr>
-              <a:t>Appendix: 2. 分割・重複・入力形式の補足</a:t>
+              <a:t>Appendix: 2. 入力形式と詩句の読み方</a:t>
             </a:r>
           </a:p>
         </p:txBody>
@@ -31416,18 +24850,7 @@
                 <a:ea typeface="Noto Sans CJK JP"/>
                 <a:cs typeface="Noto Sans"/>
               </a:rPr>
-              <a:t>[1] THUNLP-AIPoet. CCPM. 公式配布、commit e7db1a0dc1ac1ffdd0ec91f74793c29ae9c8efa5、2026-10-18参照。</a:t>
-            </a:r>
-            <a:r>
-              <a:rPr sz="810" b="0" lang="ja-JP" altLang="en-US">
-                <a:solidFill>
-                  <a:srgbClr val="626669"/>
-                </a:solidFill>
-                <a:latin typeface="Noto Sans"/>
-                <a:ea typeface="Noto Sans CJK JP"/>
-                <a:cs typeface="Noto Sans"/>
-              </a:rPr>
-              <a:t>  </a:t>
+              <a:t>[1] THUNLP-AIPoet (2021). CCPM.  </a:t>
             </a:r>
             <a:r>
               <a:rPr sz="810" b="0" lang="ja-JP" altLang="en-US">
@@ -31505,7 +24928,7 @@
                 <a:ea typeface="Noto Sans CJK JP"/>
                 <a:cs typeface="Noto Sans"/>
               </a:rPr>
-              <a:t>一つのJSONL行から四候補と参照位置を読む</a:t>
+              <a:t>JSONLから問題文・候補・正解を読み出す</a:t>
             </a:r>
           </a:p>
         </p:txBody>
@@ -31553,7 +24976,7 @@
                 <a:ea typeface="Noto Sans CJK JP"/>
                 <a:cs typeface="Noto Sans"/>
               </a:rPr>
-              <a:t>Appendix: 2. 分割・重複・入力形式の補足</a:t>
+              <a:t>Appendix: 2. 入力形式と詩句の読み方</a:t>
             </a:r>
           </a:p>
         </p:txBody>
@@ -31567,7 +24990,7 @@
         <p:spPr>
           <a:xfrm>
             <a:off x="548640" y="1508760"/>
-            <a:ext cx="8046720" cy="1968500"/>
+            <a:ext cx="8046720" cy="2221992"/>
           </a:xfrm>
           <a:prstGeom prst="rect">
             <a:avLst/>
@@ -31625,7 +25048,7 @@
                 <a:ea typeface="Noto Sans CJK JP"/>
                 <a:cs typeface="Liberation Mono"/>
               </a:rPr>
-              <a:t>record = json.loads(line)</a:t>
+              <a:t>import json</a:t>
             </a:r>
           </a:p>
           <a:p>
@@ -31656,7 +25079,7 @@
                 <a:ea typeface="Noto Sans CJK JP"/>
                 <a:cs typeface="Liberation Mono"/>
               </a:rPr>
-              <a:t>modern = record["translation"]</a:t>
+              <a:t>with open("train.jsonl", encoding="utf-8") as f:</a:t>
             </a:r>
           </a:p>
           <a:p>
@@ -31687,7 +25110,7 @@
                 <a:ea typeface="Noto Sans CJK JP"/>
                 <a:cs typeface="Liberation Mono"/>
               </a:rPr>
-              <a:t>choices = record["choices"]</a:t>
+              <a:t>    question = json.loads(next(f))</a:t>
             </a:r>
           </a:p>
           <a:p>
@@ -31718,7 +25141,7 @@
                 <a:ea typeface="Noto Sans CJK JP"/>
                 <a:cs typeface="Liberation Mono"/>
               </a:rPr>
-              <a:t># train / valid</a:t>
+              <a:t>print(question["translation"])</a:t>
             </a:r>
           </a:p>
           <a:p>
@@ -31749,7 +25172,7 @@
                 <a:ea typeface="Noto Sans CJK JP"/>
                 <a:cs typeface="Liberation Mono"/>
               </a:rPr>
-              <a:t>answer_index = record["answer"]  # 0, 1, 2, 3</a:t>
+              <a:t>for i, verse in enumerate(question["choices"]):</a:t>
             </a:r>
           </a:p>
           <a:p>
@@ -31780,7 +25203,38 @@
                 <a:ea typeface="Noto Sans CJK JP"/>
                 <a:cs typeface="Liberation Mono"/>
               </a:rPr>
-              <a:t>answer_text = choices[answer_index]</a:t>
+              <a:t>    print(f"{chr(65+i)}. {verse}")</a:t>
+            </a:r>
+          </a:p>
+          <a:p>
+            <a:pPr algn="l">
+              <a:lnSpc>
+                <a:spcPts val="2250"/>
+              </a:lnSpc>
+              <a:spcBef>
+                <a:spcPts val="0"/>
+              </a:spcBef>
+              <a:spcAft>
+                <a:spcPts val="0"/>
+              </a:spcAft>
+              <a:buNone/>
+              <a:defRPr sz="1800" b="0">
+                <a:solidFill>
+                  <a:srgbClr val="303437"/>
+                </a:solidFill>
+                <a:latin typeface="Noto Sans"/>
+              </a:defRPr>
+            </a:pPr>
+            <a:r>
+              <a:rPr sz="1800" b="0" lang="ja-JP" altLang="en-US">
+                <a:solidFill>
+                  <a:srgbClr val="303437"/>
+                </a:solidFill>
+                <a:latin typeface="Liberation Mono"/>
+                <a:ea typeface="Noto Sans CJK JP"/>
+                <a:cs typeface="Liberation Mono"/>
+              </a:rPr>
+              <a:t>print("正解:", chr(65 + question["answer"]))</a:t>
             </a:r>
           </a:p>
         </p:txBody>
@@ -31793,8 +25247,8 @@
         </p:nvSpPr>
         <p:spPr>
           <a:xfrm>
-            <a:off x="594360" y="3678428"/>
-            <a:ext cx="7955279" cy="777240"/>
+            <a:off x="594360" y="3886200"/>
+            <a:ext cx="7955279" cy="640080"/>
           </a:xfrm>
           <a:prstGeom prst="rect">
             <a:avLst/>
@@ -31834,7 +25288,7 @@
                 <a:ea typeface="Noto Sans CJK JP"/>
                 <a:cs typeface="Noto Sans"/>
               </a:rPr>
-              <a:t>CCPM配布の読み方。CLEVAの実際のpromptは、別途配布されるテンプレートで組み立てる。</a:t>
+              <a:t>train.jsonlは1行に1問のJSONを収める。最初の問題の説明、四候補、正解記号を表示する。</a:t>
             </a:r>
           </a:p>
         </p:txBody>
@@ -31888,18 +25342,7 @@
                 <a:ea typeface="Noto Sans CJK JP"/>
                 <a:cs typeface="Noto Sans"/>
               </a:rPr>
-              <a:t>[1] THUNLP-AIPoet. CCPM. 公式配布、commit e7db1a0dc1ac1ffdd0ec91f74793c29ae9c8efa5、2026-10-18参照。</a:t>
-            </a:r>
-            <a:r>
-              <a:rPr sz="810" b="0" lang="ja-JP" altLang="en-US">
-                <a:solidFill>
-                  <a:srgbClr val="626669"/>
-                </a:solidFill>
-                <a:latin typeface="Noto Sans"/>
-                <a:ea typeface="Noto Sans CJK JP"/>
-                <a:cs typeface="Noto Sans"/>
-              </a:rPr>
-              <a:t>  </a:t>
+              <a:t>[1] THUNLP-AIPoet (2021). CCPM.  </a:t>
             </a:r>
             <a:r>
               <a:rPr sz="810" b="0" lang="ja-JP" altLang="en-US">
@@ -32108,7 +25551,7 @@
                 <a:ea typeface="Noto Sans CJK JP"/>
                 <a:cs typeface="Noto Sans"/>
               </a:rPr>
-              <a:t>Appendix: 2. 分割・重複・入力形式の補足</a:t>
+              <a:t>Appendix: 2. 入力形式と詩句の読み方</a:t>
             </a:r>
           </a:p>
         </p:txBody>
@@ -32162,18 +25605,7 @@
                 <a:ea typeface="Noto Sans CJK JP"/>
                 <a:cs typeface="Noto Sans"/>
               </a:rPr>
-              <a:t>[1] THUNLP-AIPoet. CCPM. 公式配布、commit e7db1a0dc1ac1ffdd0ec91f74793c29ae9c8efa5、2026-10-18参照。</a:t>
-            </a:r>
-            <a:r>
-              <a:rPr sz="810" b="0" lang="ja-JP" altLang="en-US">
-                <a:solidFill>
-                  <a:srgbClr val="626669"/>
-                </a:solidFill>
-                <a:latin typeface="Noto Sans"/>
-                <a:ea typeface="Noto Sans CJK JP"/>
-                <a:cs typeface="Noto Sans"/>
-              </a:rPr>
-              <a:t>  </a:t>
+              <a:t>[1] THUNLP-AIPoet (2021). CCPM.  </a:t>
             </a:r>
             <a:r>
               <a:rPr sz="810" b="0" lang="ja-JP" altLang="en-US">
@@ -32304,7 +25736,7 @@
                 <a:ea typeface="Noto Sans CJK JP"/>
                 <a:cs typeface="Noto Sans"/>
               </a:rPr>
-              <a:t>CCPMは、中国古典詩の意味理解を調べる四択データセット。現代中国語で書かれた説明を読み、意味が最も対応する古典詩句を選ぶ。古典詩句と現代語訳の対を、正解の根拠として使う。</a:t>
+              <a:t>CCPMは、中国古典詩の意味理解を調べる四択データセット。現代中国語の説明を読み、意味が最も対応する古典詩句を選ぶ。古典詩句と現代語訳の対が、正解の根拠になる。</a:t>
             </a:r>
           </a:p>
           <a:p>
@@ -32334,7 +25766,7 @@
                 <a:ea typeface="Noto Sans CJK JP"/>
                 <a:cs typeface="Noto Sans"/>
               </a:rPr>
-              <a:t>候補には、正解に似た語や表現を持つ別の詩句を含める。詩を新しく書く課題ではなく、与えられた候補の意味の違いを識別する。</a:t>
+              <a:t>候補には、正解に似た語や表現を持つ別の詩句も含まれる。似た言葉の中から、意味の違いを読み取ることが求められる。</a:t>
             </a:r>
           </a:p>
         </p:txBody>
@@ -32920,7 +26352,7 @@
                 <a:ea typeface="Noto Sans CJK JP"/>
                 <a:cs typeface="Noto Sans"/>
               </a:rPr>
-              <a:t>THUNLP-AIPoet · 2021 · commit e7db1a0dc1ac1ffdd0ec91f74793c29ae9c8efa5</a:t>
+              <a:t>THUNLP-AIPoet · 2021</a:t>
             </a:r>
           </a:p>
           <a:p>
@@ -33804,268 +27236,6 @@
                 <a:hlinkClick r:id="rId3"/>
               </a:rPr>
               <a:t>https://github.com/THUNLP-AIPoet/BERT-CCPoem</a:t>
-            </a:r>
-          </a:p>
-        </p:txBody>
-      </p:sp>
-    </p:spTree>
-  </p:cSld>
-  <p:clrMapOvr>
-    <a:masterClrMapping/>
-  </p:clrMapOvr>
-</p:sld>
-</file>
-
-<file path=ppt/slides/slide54.xml><?xml version="1.0" encoding="utf-8"?>
-<p:sld xmlns:a="http://schemas.openxmlformats.org/drawingml/2006/main" xmlns:p="http://schemas.openxmlformats.org/presentationml/2006/main" xmlns:r="http://schemas.openxmlformats.org/officeDocument/2006/relationships">
-  <p:cSld>
-    <p:spTree>
-      <p:nvGrpSpPr>
-        <p:cNvPr id="1" name=""/>
-        <p:cNvGrpSpPr/>
-        <p:nvPr/>
-      </p:nvGrpSpPr>
-      <p:grpSpPr/>
-      <p:sp>
-        <p:nvSpPr>
-          <p:cNvPr id="2" name="Title 1"/>
-          <p:cNvSpPr>
-            <a:spLocks noGrp="1"/>
-          </p:cNvSpPr>
-          <p:nvPr>
-            <p:ph type="title"/>
-          </p:nvPr>
-        </p:nvSpPr>
-        <p:spPr>
-          <a:xfrm>
-            <a:off x="468172" y="650138"/>
-            <a:ext cx="8206740" cy="616305"/>
-          </a:xfrm>
-        </p:spPr>
-        <p:txBody>
-          <a:bodyPr wrap="square" lIns="0" rIns="0" tIns="0" bIns="0">
-            <a:noAutofit/>
-          </a:bodyPr>
-          <a:lstStyle/>
-          <a:p>
-            <a:pPr algn="l">
-              <a:lnSpc>
-                <a:spcPct val="110000"/>
-              </a:lnSpc>
-              <a:buNone/>
-              <a:defRPr sz="2800" b="0">
-                <a:solidFill>
-                  <a:srgbClr val="303437"/>
-                </a:solidFill>
-                <a:latin typeface="Noto Sans"/>
-              </a:defRPr>
-            </a:pPr>
-            <a:r>
-              <a:rPr sz="2800" b="1" lang="ja-JP" altLang="en-US">
-                <a:solidFill>
-                  <a:srgbClr val="303437"/>
-                </a:solidFill>
-                <a:latin typeface="Noto Sans"/>
-                <a:ea typeface="Noto Sans CJK JP"/>
-                <a:cs typeface="Noto Sans"/>
-              </a:rPr>
-              <a:t>参考文献</a:t>
-            </a:r>
-          </a:p>
-        </p:txBody>
-      </p:sp>
-      <p:sp>
-        <p:nvSpPr>
-          <p:cNvPr id="3" name="Title 2"/>
-          <p:cNvSpPr>
-            <a:spLocks noGrp="1"/>
-          </p:cNvSpPr>
-          <p:nvPr>
-            <p:ph type="title" idx="2"/>
-          </p:nvPr>
-        </p:nvSpPr>
-        <p:spPr>
-          <a:xfrm>
-            <a:off x="75895" y="0"/>
-            <a:ext cx="8115300" cy="480060"/>
-          </a:xfrm>
-        </p:spPr>
-        <p:txBody>
-          <a:bodyPr wrap="square" lIns="0" rIns="0" tIns="0" bIns="0" anchor="ctr">
-            <a:noAutofit/>
-          </a:bodyPr>
-          <a:lstStyle/>
-          <a:p>
-            <a:pPr algn="l">
-              <a:lnSpc>
-                <a:spcPct val="110000"/>
-              </a:lnSpc>
-              <a:buNone/>
-              <a:defRPr sz="1400" b="0">
-                <a:solidFill>
-                  <a:srgbClr val="303437"/>
-                </a:solidFill>
-                <a:latin typeface="Noto Sans"/>
-              </a:defRPr>
-            </a:pPr>
-            <a:r>
-              <a:rPr sz="1400" b="1" lang="ja-JP" altLang="en-US">
-                <a:solidFill>
-                  <a:srgbClr val="FFFEF8"/>
-                </a:solidFill>
-                <a:latin typeface="Noto Sans"/>
-                <a:ea typeface="Noto Sans CJK JP"/>
-                <a:cs typeface="Noto Sans"/>
-              </a:rPr>
-              <a:t>Appendix: 3. 参考文献</a:t>
-            </a:r>
-          </a:p>
-        </p:txBody>
-      </p:sp>
-      <p:sp>
-        <p:nvSpPr>
-          <p:cNvPr id="4" name="文献 1: run_specs_cleva_v1.conf"/>
-          <p:cNvSpPr txBox="1"/>
-          <p:nvPr/>
-        </p:nvSpPr>
-        <p:spPr>
-          <a:xfrm>
-            <a:off x="548640" y="1463040"/>
-            <a:ext cx="8046720" cy="1345819"/>
-          </a:xfrm>
-          <a:prstGeom prst="rect">
-            <a:avLst/>
-          </a:prstGeom>
-          <a:noFill/>
-        </p:spPr>
-        <p:txBody>
-          <a:bodyPr wrap="square" lIns="0" rIns="0" tIns="0" bIns="0">
-            <a:noAutofit/>
-          </a:bodyPr>
-          <a:lstStyle/>
-          <a:p>
-            <a:pPr algn="l">
-              <a:lnSpc>
-                <a:spcPct val="114000"/>
-              </a:lnSpc>
-              <a:spcBef>
-                <a:spcPts val="0"/>
-              </a:spcBef>
-              <a:spcAft>
-                <a:spcPts val="400"/>
-              </a:spcAft>
-              <a:buNone/>
-              <a:defRPr sz="1850" b="0">
-                <a:solidFill>
-                  <a:srgbClr val="303437"/>
-                </a:solidFill>
-                <a:latin typeface="Noto Sans"/>
-              </a:defRPr>
-            </a:pPr>
-            <a:r>
-              <a:rPr sz="1850" b="1" lang="ja-JP" altLang="en-US">
-                <a:solidFill>
-                  <a:srgbClr val="303437"/>
-                </a:solidFill>
-                <a:latin typeface="Noto Sans"/>
-                <a:ea typeface="Noto Sans CJK JP"/>
-                <a:cs typeface="Noto Sans"/>
-              </a:rPr>
-              <a:t>run_specs_cleva_v1.conf</a:t>
-            </a:r>
-          </a:p>
-          <a:p>
-            <a:pPr algn="l">
-              <a:lnSpc>
-                <a:spcPct val="114000"/>
-              </a:lnSpc>
-              <a:spcBef>
-                <a:spcPts val="0"/>
-              </a:spcBef>
-              <a:spcAft>
-                <a:spcPts val="500"/>
-              </a:spcAft>
-              <a:buNone/>
-              <a:defRPr sz="1250" b="0">
-                <a:solidFill>
-                  <a:srgbClr val="303437"/>
-                </a:solidFill>
-                <a:latin typeface="Noto Sans"/>
-              </a:defRPr>
-            </a:pPr>
-            <a:r>
-              <a:rPr sz="1250" b="0" lang="ja-JP" altLang="en-US">
-                <a:solidFill>
-                  <a:srgbClr val="626669"/>
-                </a:solidFill>
-                <a:latin typeface="Noto Sans"/>
-                <a:ea typeface="Noto Sans CJK JP"/>
-                <a:cs typeface="Noto Sans"/>
-              </a:rPr>
-              <a:t>Stanford CRFM · HELM v0.4.0 · CLEVA設定</a:t>
-            </a:r>
-          </a:p>
-          <a:p>
-            <a:pPr algn="l">
-              <a:lnSpc>
-                <a:spcPct val="114000"/>
-              </a:lnSpc>
-              <a:spcBef>
-                <a:spcPts val="0"/>
-              </a:spcBef>
-              <a:spcAft>
-                <a:spcPts val="400"/>
-              </a:spcAft>
-              <a:buNone/>
-              <a:defRPr sz="1750" b="0">
-                <a:solidFill>
-                  <a:srgbClr val="303437"/>
-                </a:solidFill>
-                <a:latin typeface="Noto Sans"/>
-              </a:defRPr>
-            </a:pPr>
-            <a:r>
-              <a:rPr sz="1750" b="0" lang="ja-JP" altLang="en-US">
-                <a:solidFill>
-                  <a:srgbClr val="303437"/>
-                </a:solidFill>
-                <a:latin typeface="Noto Sans"/>
-                <a:ea typeface="Noto Sans CJK JP"/>
-                <a:cs typeface="Noto Sans"/>
-              </a:rPr>
-              <a:t>古典中国語理解を含む課題とprompt IDを設定し、同課題には0〜5の六つのIDを登録する。</a:t>
-            </a:r>
-          </a:p>
-          <a:p>
-            <a:pPr algn="l">
-              <a:lnSpc>
-                <a:spcPct val="114000"/>
-              </a:lnSpc>
-              <a:spcBef>
-                <a:spcPts val="0"/>
-              </a:spcBef>
-              <a:spcAft>
-                <a:spcPts val="0"/>
-              </a:spcAft>
-              <a:buNone/>
-              <a:defRPr sz="1050" b="0">
-                <a:solidFill>
-                  <a:srgbClr val="303437"/>
-                </a:solidFill>
-                <a:latin typeface="Noto Sans"/>
-              </a:defRPr>
-            </a:pPr>
-            <a:r>
-              <a:rPr sz="1050" b="0" lang="ja-JP" altLang="en-US">
-                <a:solidFill>
-                  <a:srgbClr val="626669"/>
-                </a:solidFill>
-                <a:latin typeface="Noto Sans"/>
-                <a:ea typeface="Noto Sans CJK JP"/>
-                <a:cs typeface="Noto Sans"/>
-                <a:hlinkClick r:id="rId2"/>
-              </a:rPr>
-              <a:t>https://github.com/stanford-crfm/helm/blob/v0.4.0/src/helm/benchmark/presentation/run_specs_cleva_v1.conf</a:t>
             </a:r>
           </a:p>
         </p:txBody>
@@ -34791,22 +27961,8 @@
                 <a:ea typeface="Noto Sans CJK JP"/>
                 <a:cs typeface="Noto Sans"/>
               </a:rPr>
-              <a:t>[1] THUNLP-AIPoet. CCPM. 公式配布、commit e7db1a0dc1ac1ffdd0ec91f74793c29ae9c8efa5、2026-10-18参照。 train.jsonl:14行 / answer=0</a:t>
-            </a:r>
-          </a:p>
-          <a:p>
-            <a:pPr>
-              <a:lnSpc>
-                <a:spcPts val="940"/>
-              </a:lnSpc>
-              <a:buNone/>
-              <a:defRPr sz="810" b="0">
-                <a:solidFill>
-                  <a:srgbClr val="303437"/>
-                </a:solidFill>
-                <a:latin typeface="Noto Sans"/>
-              </a:defRPr>
-            </a:pPr>
+              <a:t>[1] THUNLP-AIPoet (2021). CCPM.  </a:t>
+            </a:r>
             <a:r>
               <a:rPr sz="810" b="0" lang="ja-JP" altLang="en-US">
                 <a:solidFill>
@@ -35543,22 +28699,8 @@
                 <a:ea typeface="Noto Sans CJK JP"/>
                 <a:cs typeface="Noto Sans"/>
               </a:rPr>
-              <a:t>[1] THUNLP-AIPoet. CCPM. 公式配布、commit e7db1a0dc1ac1ffdd0ec91f74793c29ae9c8efa5、2026-10-18参照。 train.jsonl:18823行 / answer=3</a:t>
-            </a:r>
-          </a:p>
-          <a:p>
-            <a:pPr>
-              <a:lnSpc>
-                <a:spcPts val="940"/>
-              </a:lnSpc>
-              <a:buNone/>
-              <a:defRPr sz="810" b="0">
-                <a:solidFill>
-                  <a:srgbClr val="303437"/>
-                </a:solidFill>
-                <a:latin typeface="Noto Sans"/>
-              </a:defRPr>
-            </a:pPr>
+              <a:t>[1] THUNLP-AIPoet (2021). CCPM.  </a:t>
+            </a:r>
             <a:r>
               <a:rPr sz="810" b="0" lang="ja-JP" altLang="en-US">
                 <a:solidFill>
@@ -36295,22 +29437,8 @@
                 <a:ea typeface="Noto Sans CJK JP"/>
                 <a:cs typeface="Noto Sans"/>
               </a:rPr>
-              <a:t>[1] THUNLP-AIPoet. CCPM. 公式配布、commit e7db1a0dc1ac1ffdd0ec91f74793c29ae9c8efa5、2026-10-18参照。 train.jsonl:14876行 / answer=1</a:t>
-            </a:r>
-          </a:p>
-          <a:p>
-            <a:pPr>
-              <a:lnSpc>
-                <a:spcPts val="940"/>
-              </a:lnSpc>
-              <a:buNone/>
-              <a:defRPr sz="810" b="0">
-                <a:solidFill>
-                  <a:srgbClr val="303437"/>
-                </a:solidFill>
-                <a:latin typeface="Noto Sans"/>
-              </a:defRPr>
-            </a:pPr>
+              <a:t>[1] THUNLP-AIPoet (2021). CCPM.  </a:t>
+            </a:r>
             <a:r>
               <a:rPr sz="810" b="0" lang="ja-JP" altLang="en-US">
                 <a:solidFill>

--- a/slides/datasets-in-10-minutes-ccpm.pptx
+++ b/slides/datasets-in-10-minutes-ccpm.pptx
@@ -26133,7 +26133,7 @@
         <p:spPr>
           <a:xfrm>
             <a:off x="548640" y="1463040"/>
-            <a:ext cx="8046720" cy="1345819"/>
+            <a:ext cx="8046720" cy="1574419"/>
           </a:xfrm>
           <a:prstGeom prst="rect">
             <a:avLst/>
@@ -26281,7 +26281,7 @@
         <p:spPr>
           <a:xfrm>
             <a:off x="548640" y="3040507"/>
-            <a:ext cx="8046720" cy="1345819"/>
+            <a:ext cx="8046720" cy="1574419"/>
           </a:xfrm>
           <a:prstGeom prst="rect">
             <a:avLst/>
@@ -26543,7 +26543,7 @@
         <p:spPr>
           <a:xfrm>
             <a:off x="548640" y="1463040"/>
-            <a:ext cx="8046720" cy="1345819"/>
+            <a:ext cx="8046720" cy="1574419"/>
           </a:xfrm>
           <a:prstGeom prst="rect">
             <a:avLst/>
@@ -26691,7 +26691,7 @@
         <p:spPr>
           <a:xfrm>
             <a:off x="548640" y="3040507"/>
-            <a:ext cx="8046720" cy="1345819"/>
+            <a:ext cx="8046720" cy="1574419"/>
           </a:xfrm>
           <a:prstGeom prst="rect">
             <a:avLst/>
@@ -27101,7 +27101,7 @@
         <p:spPr>
           <a:xfrm>
             <a:off x="548640" y="3308350"/>
-            <a:ext cx="8046720" cy="1345819"/>
+            <a:ext cx="8046720" cy="1574419"/>
           </a:xfrm>
           <a:prstGeom prst="rect">
             <a:avLst/>

--- a/slides/datasets-in-10-minutes-ccpm.pptx
+++ b/slides/datasets-in-10-minutes-ccpm.pptx
@@ -13184,7 +13184,7 @@
                 <a:ea typeface="Noto Sans CJK JP"/>
                 <a:cs typeface="Noto Sans"/>
               </a:rPr>
-              <a:t>CLEVAでの後利用と公開配布</a:t>
+              <a:t>CLEVAでの利用と公開配布</a:t>
             </a:r>
           </a:p>
         </p:txBody>
@@ -13232,7 +13232,7 @@
                 <a:ea typeface="Noto Sans CJK JP"/>
                 <a:cs typeface="Noto Sans"/>
               </a:rPr>
-              <a:t>4. CLEVAでの後利用と公開配布</a:t>
+              <a:t>4. CLEVAでの利用と公開配布</a:t>
             </a:r>
           </a:p>
         </p:txBody>
@@ -13459,7 +13459,7 @@
                 <a:ea typeface="Noto Sans CJK JP"/>
                 <a:cs typeface="Noto Sans"/>
               </a:rPr>
-              <a:t>4. CLEVAでの後利用と公開配布</a:t>
+              <a:t>4. CLEVAでの利用と公開配布</a:t>
             </a:r>
           </a:p>
         </p:txBody>
@@ -13733,7 +13733,7 @@
                 <a:ea typeface="Noto Sans CJK JP"/>
                 <a:cs typeface="Noto Sans"/>
               </a:rPr>
-              <a:t>4. CLEVAでの後利用と公開配布</a:t>
+              <a:t>4. CLEVAでの利用と公開配布</a:t>
             </a:r>
           </a:p>
         </p:txBody>
@@ -13996,7 +13996,7 @@
                 <a:ea typeface="Noto Sans CJK JP"/>
                 <a:cs typeface="Noto Sans"/>
               </a:rPr>
-              <a:t>4. CLEVAでの後利用と公開配布</a:t>
+              <a:t>4. CLEVAでの利用と公開配布</a:t>
             </a:r>
           </a:p>
         </p:txBody>
@@ -14333,7 +14333,7 @@
                 <a:ea typeface="Noto Sans CJK JP"/>
                 <a:cs typeface="Noto Sans"/>
               </a:rPr>
-              <a:t>CLEVAでの後利用と公開配布</a:t>
+              <a:t>CLEVAでの利用と公開配布</a:t>
             </a:r>
           </a:p>
         </p:txBody>

--- a/slides/datasets-in-10-minutes-ccpm.pptx
+++ b/slides/datasets-in-10-minutes-ccpm.pptx
@@ -27,7 +27,6 @@
     <p:sldId id="276" r:id="rId26"/>
     <p:sldId id="277" r:id="rId27"/>
     <p:sldId id="279" r:id="rId29"/>
-    <p:sldId id="280" r:id="rId30"/>
     <p:sldId id="283" r:id="rId33"/>
     <p:sldId id="284" r:id="rId34"/>
     <p:sldId id="285" r:id="rId35"/>
@@ -50,7 +49,6 @@
     <p:sldId id="304" r:id="rId54"/>
     <p:sldId id="305" r:id="rId55"/>
     <p:sldId id="306" r:id="rId56"/>
-    <p:sldId id="307" r:id="rId57"/>
     <p:sldId id="308" r:id="rId58"/>
   </p:sldIdLst>
   <p:sldSz cx="9144000" cy="5143500" type="screen16x9"/>
@@ -11187,7 +11185,7 @@
 </p:sld>
 </file>
 
-<file path=ppt/slides/slide19.xml><?xml version="1.0" encoding="utf-8"?>
+<file path=ppt/slides/slide18.xml><?xml version="1.0" encoding="utf-8"?>
 <p:sld xmlns:a="http://schemas.openxmlformats.org/drawingml/2006/main" xmlns:p="http://schemas.openxmlformats.org/presentationml/2006/main" xmlns:r="http://schemas.openxmlformats.org/officeDocument/2006/relationships">
   <p:cSld>
     <p:spTree>
@@ -11289,6 +11287,280 @@
                 <a:cs typeface="Noto Sans"/>
               </a:rPr>
               <a:t>3. 正解率で意味の対応を評価する</a:t>
+            </a:r>
+          </a:p>
+        </p:txBody>
+      </p:sp>
+    </p:spTree>
+  </p:cSld>
+  <p:clrMapOvr>
+    <a:masterClrMapping/>
+  </p:clrMapOvr>
+</p:sld>
+</file>
+
+<file path=ppt/slides/slide19.xml><?xml version="1.0" encoding="utf-8"?>
+<p:sld xmlns:a="http://schemas.openxmlformats.org/drawingml/2006/main" xmlns:p="http://schemas.openxmlformats.org/presentationml/2006/main" xmlns:r="http://schemas.openxmlformats.org/officeDocument/2006/relationships">
+  <p:cSld>
+    <p:spTree>
+      <p:nvGrpSpPr>
+        <p:cNvPr id="1" name=""/>
+        <p:cNvGrpSpPr/>
+        <p:nvPr/>
+      </p:nvGrpSpPr>
+      <p:grpSpPr/>
+      <p:sp>
+        <p:nvSpPr>
+          <p:cNvPr id="2" name="Title 1"/>
+          <p:cNvSpPr>
+            <a:spLocks noGrp="1"/>
+          </p:cNvSpPr>
+          <p:nvPr>
+            <p:ph type="title"/>
+          </p:nvPr>
+        </p:nvSpPr>
+        <p:spPr>
+          <a:xfrm>
+            <a:off x="468172" y="650138"/>
+            <a:ext cx="8206740" cy="616305"/>
+          </a:xfrm>
+        </p:spPr>
+        <p:txBody>
+          <a:bodyPr wrap="square" lIns="0" rIns="0" tIns="0" bIns="0">
+            <a:noAutofit/>
+          </a:bodyPr>
+          <a:lstStyle/>
+          <a:p>
+            <a:pPr algn="l">
+              <a:lnSpc>
+                <a:spcPct val="110000"/>
+              </a:lnSpc>
+              <a:buNone/>
+              <a:defRPr sz="2800" b="0">
+                <a:solidFill>
+                  <a:srgbClr val="303437"/>
+                </a:solidFill>
+                <a:latin typeface="Noto Sans"/>
+              </a:defRPr>
+            </a:pPr>
+            <a:r>
+              <a:rPr sz="2800" b="1" lang="ja-JP" altLang="en-US">
+                <a:solidFill>
+                  <a:srgbClr val="303437"/>
+                </a:solidFill>
+                <a:latin typeface="Noto Sans"/>
+                <a:ea typeface="Noto Sans CJK JP"/>
+                <a:cs typeface="Noto Sans"/>
+              </a:rPr>
+              <a:t>評価は、正しい候補を選んだ問題の割合</a:t>
+            </a:r>
+          </a:p>
+        </p:txBody>
+      </p:sp>
+      <p:sp>
+        <p:nvSpPr>
+          <p:cNvPr id="3" name="Text Placeholder 2"/>
+          <p:cNvSpPr>
+            <a:spLocks noGrp="1"/>
+          </p:cNvSpPr>
+          <p:nvPr>
+            <p:ph type="body" idx="1"/>
+          </p:nvPr>
+        </p:nvSpPr>
+        <p:spPr>
+          <a:xfrm>
+            <a:off x="594360" y="1463040"/>
+            <a:ext cx="7955279" cy="3044952"/>
+          </a:xfrm>
+        </p:spPr>
+        <p:txBody>
+          <a:bodyPr wrap="square" tIns="91440" bIns="91440">
+            <a:noAutofit/>
+          </a:bodyPr>
+          <a:lstStyle/>
+          <a:p>
+            <a:pPr marL="457200" indent="-355600">
+              <a:lnSpc>
+                <a:spcPts val="2379"/>
+              </a:lnSpc>
+              <a:spcAft>
+                <a:spcPts val="700"/>
+              </a:spcAft>
+              <a:buSzPct val="66500"/>
+              <a:buFont typeface="Noto Sans CJK JP"/>
+              <a:buChar char="●"/>
+              <a:defRPr sz="2000" b="0">
+                <a:solidFill>
+                  <a:srgbClr val="303437"/>
+                </a:solidFill>
+                <a:latin typeface="Noto Sans"/>
+              </a:defRPr>
+            </a:pPr>
+            <a:r>
+              <a:rPr sz="2000" b="0" lang="ja-JP" altLang="en-US">
+                <a:solidFill>
+                  <a:srgbClr val="303437"/>
+                </a:solidFill>
+                <a:latin typeface="Noto Sans"/>
+                <a:ea typeface="Noto Sans CJK JP"/>
+                <a:cs typeface="Noto Sans"/>
+              </a:rPr>
+              <a:t>選んだ候補が正解と一致した問題の割合を、Accuracy（正解率）で評価する。</a:t>
+            </a:r>
+          </a:p>
+          <a:p>
+            <a:pPr marL="457200" indent="-355600">
+              <a:lnSpc>
+                <a:spcPts val="2379"/>
+              </a:lnSpc>
+              <a:spcAft>
+                <a:spcPts val="0"/>
+              </a:spcAft>
+              <a:buSzPct val="66500"/>
+              <a:buFont typeface="Noto Sans CJK JP"/>
+              <a:buChar char="●"/>
+              <a:defRPr sz="2000" b="0">
+                <a:solidFill>
+                  <a:srgbClr val="303437"/>
+                </a:solidFill>
+                <a:latin typeface="Noto Sans"/>
+              </a:defRPr>
+            </a:pPr>
+            <a:r>
+              <a:rPr sz="2000" b="0" lang="ja-JP" altLang="en-US">
+                <a:solidFill>
+                  <a:srgbClr val="303437"/>
+                </a:solidFill>
+                <a:latin typeface="Noto Sans"/>
+                <a:ea typeface="Noto Sans CJK JP"/>
+                <a:cs typeface="Noto Sans"/>
+              </a:rPr>
+              <a:t>2021年の実験では、学習21,778問でBERTを微調整し、テスト2,720問で評価した。</a:t>
+            </a:r>
+          </a:p>
+        </p:txBody>
+      </p:sp>
+      <p:sp>
+        <p:nvSpPr>
+          <p:cNvPr id="4" name="Title 3"/>
+          <p:cNvSpPr>
+            <a:spLocks noGrp="1"/>
+          </p:cNvSpPr>
+          <p:nvPr>
+            <p:ph type="title" idx="2"/>
+          </p:nvPr>
+        </p:nvSpPr>
+        <p:spPr>
+          <a:xfrm>
+            <a:off x="75895" y="0"/>
+            <a:ext cx="8115300" cy="480060"/>
+          </a:xfrm>
+        </p:spPr>
+        <p:txBody>
+          <a:bodyPr wrap="square" lIns="0" rIns="0" tIns="0" bIns="0" anchor="ctr">
+            <a:noAutofit/>
+          </a:bodyPr>
+          <a:lstStyle/>
+          <a:p>
+            <a:pPr algn="l">
+              <a:lnSpc>
+                <a:spcPct val="110000"/>
+              </a:lnSpc>
+              <a:buNone/>
+              <a:defRPr sz="1400" b="0">
+                <a:solidFill>
+                  <a:srgbClr val="303437"/>
+                </a:solidFill>
+                <a:latin typeface="Noto Sans"/>
+              </a:defRPr>
+            </a:pPr>
+            <a:r>
+              <a:rPr sz="1400" b="1" lang="ja-JP" altLang="en-US">
+                <a:solidFill>
+                  <a:srgbClr val="FFFEF8"/>
+                </a:solidFill>
+                <a:latin typeface="Noto Sans"/>
+                <a:ea typeface="Noto Sans CJK JP"/>
+                <a:cs typeface="Noto Sans"/>
+              </a:rPr>
+              <a:t>3. 正解率で意味の対応を評価する</a:t>
+            </a:r>
+          </a:p>
+        </p:txBody>
+      </p:sp>
+      <p:sp>
+        <p:nvSpPr>
+          <p:cNvPr id="5" name="sources"/>
+          <p:cNvSpPr txBox="1"/>
+          <p:nvPr/>
+        </p:nvSpPr>
+        <p:spPr>
+          <a:xfrm>
+            <a:off x="502920" y="4700016"/>
+            <a:ext cx="8183879" cy="530352"/>
+          </a:xfrm>
+          <a:prstGeom prst="rect">
+            <a:avLst/>
+          </a:prstGeom>
+          <a:noFill/>
+        </p:spPr>
+        <p:txBody>
+          <a:bodyPr wrap="square" lIns="0" rIns="0" tIns="0" bIns="0">
+            <a:noAutofit/>
+          </a:bodyPr>
+          <a:lstStyle/>
+          <a:p>
+            <a:pPr algn="l">
+              <a:lnSpc>
+                <a:spcPts val="940"/>
+              </a:lnSpc>
+              <a:spcBef>
+                <a:spcPts val="0"/>
+              </a:spcBef>
+              <a:spcAft>
+                <a:spcPts val="140"/>
+              </a:spcAft>
+              <a:buNone/>
+              <a:defRPr sz="810" b="0">
+                <a:solidFill>
+                  <a:srgbClr val="303437"/>
+                </a:solidFill>
+                <a:latin typeface="Noto Sans"/>
+              </a:defRPr>
+            </a:pPr>
+            <a:r>
+              <a:rPr sz="810" b="0" lang="ja-JP" altLang="en-US">
+                <a:solidFill>
+                  <a:srgbClr val="626669"/>
+                </a:solidFill>
+                <a:latin typeface="Noto Sans"/>
+                <a:ea typeface="Noto Sans CJK JP"/>
+                <a:cs typeface="Noto Sans"/>
+              </a:rPr>
+              <a:t>[1] Li, Qi, Sun, Yi &amp; Zhang (2021). CCPM: A Chinese Classical Poetry Matching Dataset. arXiv:2106.01979v1.</a:t>
+            </a:r>
+            <a:r>
+              <a:rPr sz="810" b="0" lang="ja-JP" altLang="en-US">
+                <a:solidFill>
+                  <a:srgbClr val="626669"/>
+                </a:solidFill>
+                <a:latin typeface="Noto Sans"/>
+                <a:ea typeface="Noto Sans CJK JP"/>
+                <a:cs typeface="Noto Sans"/>
+              </a:rPr>
+              <a:t>  </a:t>
+            </a:r>
+            <a:r>
+              <a:rPr sz="810" b="0" lang="ja-JP" altLang="en-US">
+                <a:solidFill>
+                  <a:srgbClr val="626669"/>
+                </a:solidFill>
+                <a:latin typeface="Noto Sans"/>
+                <a:ea typeface="Noto Sans CJK JP"/>
+                <a:cs typeface="Noto Sans"/>
+                <a:hlinkClick r:id="rId2"/>
+              </a:rPr>
+              <a:t>https://arxiv.org/abs/2106.01979</a:t>
             </a:r>
           </a:p>
         </p:txBody>
@@ -11506,280 +11778,6 @@
 </file>
 
 <file path=ppt/slides/slide20.xml><?xml version="1.0" encoding="utf-8"?>
-<p:sld xmlns:a="http://schemas.openxmlformats.org/drawingml/2006/main" xmlns:p="http://schemas.openxmlformats.org/presentationml/2006/main" xmlns:r="http://schemas.openxmlformats.org/officeDocument/2006/relationships">
-  <p:cSld>
-    <p:spTree>
-      <p:nvGrpSpPr>
-        <p:cNvPr id="1" name=""/>
-        <p:cNvGrpSpPr/>
-        <p:nvPr/>
-      </p:nvGrpSpPr>
-      <p:grpSpPr/>
-      <p:sp>
-        <p:nvSpPr>
-          <p:cNvPr id="2" name="Title 1"/>
-          <p:cNvSpPr>
-            <a:spLocks noGrp="1"/>
-          </p:cNvSpPr>
-          <p:nvPr>
-            <p:ph type="title"/>
-          </p:nvPr>
-        </p:nvSpPr>
-        <p:spPr>
-          <a:xfrm>
-            <a:off x="468172" y="650138"/>
-            <a:ext cx="8206740" cy="616305"/>
-          </a:xfrm>
-        </p:spPr>
-        <p:txBody>
-          <a:bodyPr wrap="square" lIns="0" rIns="0" tIns="0" bIns="0">
-            <a:noAutofit/>
-          </a:bodyPr>
-          <a:lstStyle/>
-          <a:p>
-            <a:pPr algn="l">
-              <a:lnSpc>
-                <a:spcPct val="110000"/>
-              </a:lnSpc>
-              <a:buNone/>
-              <a:defRPr sz="2800" b="0">
-                <a:solidFill>
-                  <a:srgbClr val="303437"/>
-                </a:solidFill>
-                <a:latin typeface="Noto Sans"/>
-              </a:defRPr>
-            </a:pPr>
-            <a:r>
-              <a:rPr sz="2800" b="1" lang="ja-JP" altLang="en-US">
-                <a:solidFill>
-                  <a:srgbClr val="303437"/>
-                </a:solidFill>
-                <a:latin typeface="Noto Sans"/>
-                <a:ea typeface="Noto Sans CJK JP"/>
-                <a:cs typeface="Noto Sans"/>
-              </a:rPr>
-              <a:t>評価は、正しい候補を選んだ問題の割合</a:t>
-            </a:r>
-          </a:p>
-        </p:txBody>
-      </p:sp>
-      <p:sp>
-        <p:nvSpPr>
-          <p:cNvPr id="3" name="Text Placeholder 2"/>
-          <p:cNvSpPr>
-            <a:spLocks noGrp="1"/>
-          </p:cNvSpPr>
-          <p:nvPr>
-            <p:ph type="body" idx="1"/>
-          </p:nvPr>
-        </p:nvSpPr>
-        <p:spPr>
-          <a:xfrm>
-            <a:off x="594360" y="1463040"/>
-            <a:ext cx="7955279" cy="3044952"/>
-          </a:xfrm>
-        </p:spPr>
-        <p:txBody>
-          <a:bodyPr wrap="square" tIns="91440" bIns="91440">
-            <a:noAutofit/>
-          </a:bodyPr>
-          <a:lstStyle/>
-          <a:p>
-            <a:pPr marL="457200" indent="-355600">
-              <a:lnSpc>
-                <a:spcPts val="2379"/>
-              </a:lnSpc>
-              <a:spcAft>
-                <a:spcPts val="700"/>
-              </a:spcAft>
-              <a:buSzPct val="66500"/>
-              <a:buFont typeface="Noto Sans CJK JP"/>
-              <a:buChar char="●"/>
-              <a:defRPr sz="2000" b="0">
-                <a:solidFill>
-                  <a:srgbClr val="303437"/>
-                </a:solidFill>
-                <a:latin typeface="Noto Sans"/>
-              </a:defRPr>
-            </a:pPr>
-            <a:r>
-              <a:rPr sz="2000" b="0" lang="ja-JP" altLang="en-US">
-                <a:solidFill>
-                  <a:srgbClr val="303437"/>
-                </a:solidFill>
-                <a:latin typeface="Noto Sans"/>
-                <a:ea typeface="Noto Sans CJK JP"/>
-                <a:cs typeface="Noto Sans"/>
-              </a:rPr>
-              <a:t>選んだ候補が正解と一致した問題の割合を、Accuracy（正解率）で評価する。</a:t>
-            </a:r>
-          </a:p>
-          <a:p>
-            <a:pPr marL="457200" indent="-355600">
-              <a:lnSpc>
-                <a:spcPts val="2379"/>
-              </a:lnSpc>
-              <a:spcAft>
-                <a:spcPts val="0"/>
-              </a:spcAft>
-              <a:buSzPct val="66500"/>
-              <a:buFont typeface="Noto Sans CJK JP"/>
-              <a:buChar char="●"/>
-              <a:defRPr sz="2000" b="0">
-                <a:solidFill>
-                  <a:srgbClr val="303437"/>
-                </a:solidFill>
-                <a:latin typeface="Noto Sans"/>
-              </a:defRPr>
-            </a:pPr>
-            <a:r>
-              <a:rPr sz="2000" b="0" lang="ja-JP" altLang="en-US">
-                <a:solidFill>
-                  <a:srgbClr val="303437"/>
-                </a:solidFill>
-                <a:latin typeface="Noto Sans"/>
-                <a:ea typeface="Noto Sans CJK JP"/>
-                <a:cs typeface="Noto Sans"/>
-              </a:rPr>
-              <a:t>2021年の実験では、学習21,778問でBERTを微調整し、テスト2,720問で評価した。</a:t>
-            </a:r>
-          </a:p>
-        </p:txBody>
-      </p:sp>
-      <p:sp>
-        <p:nvSpPr>
-          <p:cNvPr id="4" name="Title 3"/>
-          <p:cNvSpPr>
-            <a:spLocks noGrp="1"/>
-          </p:cNvSpPr>
-          <p:nvPr>
-            <p:ph type="title" idx="2"/>
-          </p:nvPr>
-        </p:nvSpPr>
-        <p:spPr>
-          <a:xfrm>
-            <a:off x="75895" y="0"/>
-            <a:ext cx="8115300" cy="480060"/>
-          </a:xfrm>
-        </p:spPr>
-        <p:txBody>
-          <a:bodyPr wrap="square" lIns="0" rIns="0" tIns="0" bIns="0" anchor="ctr">
-            <a:noAutofit/>
-          </a:bodyPr>
-          <a:lstStyle/>
-          <a:p>
-            <a:pPr algn="l">
-              <a:lnSpc>
-                <a:spcPct val="110000"/>
-              </a:lnSpc>
-              <a:buNone/>
-              <a:defRPr sz="1400" b="0">
-                <a:solidFill>
-                  <a:srgbClr val="303437"/>
-                </a:solidFill>
-                <a:latin typeface="Noto Sans"/>
-              </a:defRPr>
-            </a:pPr>
-            <a:r>
-              <a:rPr sz="1400" b="1" lang="ja-JP" altLang="en-US">
-                <a:solidFill>
-                  <a:srgbClr val="FFFEF8"/>
-                </a:solidFill>
-                <a:latin typeface="Noto Sans"/>
-                <a:ea typeface="Noto Sans CJK JP"/>
-                <a:cs typeface="Noto Sans"/>
-              </a:rPr>
-              <a:t>3. 正解率で意味の対応を評価する</a:t>
-            </a:r>
-          </a:p>
-        </p:txBody>
-      </p:sp>
-      <p:sp>
-        <p:nvSpPr>
-          <p:cNvPr id="5" name="sources"/>
-          <p:cNvSpPr txBox="1"/>
-          <p:nvPr/>
-        </p:nvSpPr>
-        <p:spPr>
-          <a:xfrm>
-            <a:off x="502920" y="4700016"/>
-            <a:ext cx="8183879" cy="530352"/>
-          </a:xfrm>
-          <a:prstGeom prst="rect">
-            <a:avLst/>
-          </a:prstGeom>
-          <a:noFill/>
-        </p:spPr>
-        <p:txBody>
-          <a:bodyPr wrap="square" lIns="0" rIns="0" tIns="0" bIns="0">
-            <a:noAutofit/>
-          </a:bodyPr>
-          <a:lstStyle/>
-          <a:p>
-            <a:pPr algn="l">
-              <a:lnSpc>
-                <a:spcPts val="940"/>
-              </a:lnSpc>
-              <a:spcBef>
-                <a:spcPts val="0"/>
-              </a:spcBef>
-              <a:spcAft>
-                <a:spcPts val="140"/>
-              </a:spcAft>
-              <a:buNone/>
-              <a:defRPr sz="810" b="0">
-                <a:solidFill>
-                  <a:srgbClr val="303437"/>
-                </a:solidFill>
-                <a:latin typeface="Noto Sans"/>
-              </a:defRPr>
-            </a:pPr>
-            <a:r>
-              <a:rPr sz="810" b="0" lang="ja-JP" altLang="en-US">
-                <a:solidFill>
-                  <a:srgbClr val="626669"/>
-                </a:solidFill>
-                <a:latin typeface="Noto Sans"/>
-                <a:ea typeface="Noto Sans CJK JP"/>
-                <a:cs typeface="Noto Sans"/>
-              </a:rPr>
-              <a:t>[1] Li, Qi, Sun, Yi &amp; Zhang (2021). CCPM: A Chinese Classical Poetry Matching Dataset. arXiv:2106.01979v1.</a:t>
-            </a:r>
-            <a:r>
-              <a:rPr sz="810" b="0" lang="ja-JP" altLang="en-US">
-                <a:solidFill>
-                  <a:srgbClr val="626669"/>
-                </a:solidFill>
-                <a:latin typeface="Noto Sans"/>
-                <a:ea typeface="Noto Sans CJK JP"/>
-                <a:cs typeface="Noto Sans"/>
-              </a:rPr>
-              <a:t>  </a:t>
-            </a:r>
-            <a:r>
-              <a:rPr sz="810" b="0" lang="ja-JP" altLang="en-US">
-                <a:solidFill>
-                  <a:srgbClr val="626669"/>
-                </a:solidFill>
-                <a:latin typeface="Noto Sans"/>
-                <a:ea typeface="Noto Sans CJK JP"/>
-                <a:cs typeface="Noto Sans"/>
-                <a:hlinkClick r:id="rId2"/>
-              </a:rPr>
-              <a:t>https://arxiv.org/abs/2106.01979</a:t>
-            </a:r>
-          </a:p>
-        </p:txBody>
-      </p:sp>
-    </p:spTree>
-  </p:cSld>
-  <p:clrMapOvr>
-    <a:masterClrMapping/>
-  </p:clrMapOvr>
-</p:sld>
-</file>
-
-<file path=ppt/slides/slide21.xml><?xml version="1.0" encoding="utf-8"?>
 <p:sld xmlns:a="http://schemas.openxmlformats.org/drawingml/2006/main" xmlns:p="http://schemas.openxmlformats.org/presentationml/2006/main" xmlns:r="http://schemas.openxmlformats.org/officeDocument/2006/relationships">
   <p:cSld>
     <p:spTree>
@@ -12378,7 +12376,7 @@
 </p:sld>
 </file>
 
-<file path=ppt/slides/slide22.xml><?xml version="1.0" encoding="utf-8"?>
+<file path=ppt/slides/slide21.xml><?xml version="1.0" encoding="utf-8"?>
 <p:sld xmlns:a="http://schemas.openxmlformats.org/drawingml/2006/main" xmlns:p="http://schemas.openxmlformats.org/presentationml/2006/main" xmlns:r="http://schemas.openxmlformats.org/officeDocument/2006/relationships">
   <p:cSld>
     <p:spTree>
@@ -13131,7 +13129,7 @@
 </p:sld>
 </file>
 
-<file path=ppt/slides/slide24.xml><?xml version="1.0" encoding="utf-8"?>
+<file path=ppt/slides/slide22.xml><?xml version="1.0" encoding="utf-8"?>
 <p:sld xmlns:a="http://schemas.openxmlformats.org/drawingml/2006/main" xmlns:p="http://schemas.openxmlformats.org/presentationml/2006/main" xmlns:r="http://schemas.openxmlformats.org/officeDocument/2006/relationships">
   <p:cSld>
     <p:spTree>
@@ -13184,7 +13182,7 @@
                 <a:ea typeface="Noto Sans CJK JP"/>
                 <a:cs typeface="Noto Sans"/>
               </a:rPr>
-              <a:t>CLEVAでの利用と公開配布</a:t>
+              <a:t>公開配布と利用条件</a:t>
             </a:r>
           </a:p>
         </p:txBody>
@@ -13232,7 +13230,270 @@
                 <a:ea typeface="Noto Sans CJK JP"/>
                 <a:cs typeface="Noto Sans"/>
               </a:rPr>
-              <a:t>4. CLEVAでの利用と公開配布</a:t>
+              <a:t>4. 公開配布と利用条件</a:t>
+            </a:r>
+          </a:p>
+        </p:txBody>
+      </p:sp>
+    </p:spTree>
+  </p:cSld>
+  <p:clrMapOvr>
+    <a:masterClrMapping/>
+  </p:clrMapOvr>
+</p:sld>
+</file>
+
+<file path=ppt/slides/slide24.xml><?xml version="1.0" encoding="utf-8"?>
+<p:sld xmlns:a="http://schemas.openxmlformats.org/drawingml/2006/main" xmlns:p="http://schemas.openxmlformats.org/presentationml/2006/main" xmlns:r="http://schemas.openxmlformats.org/officeDocument/2006/relationships">
+  <p:cSld>
+    <p:spTree>
+      <p:nvGrpSpPr>
+        <p:cNvPr id="1" name=""/>
+        <p:cNvGrpSpPr/>
+        <p:nvPr/>
+      </p:nvGrpSpPr>
+      <p:grpSpPr/>
+      <p:sp>
+        <p:nvSpPr>
+          <p:cNvPr id="2" name="Title 1"/>
+          <p:cNvSpPr>
+            <a:spLocks noGrp="1"/>
+          </p:cNvSpPr>
+          <p:nvPr>
+            <p:ph type="title"/>
+          </p:nvPr>
+        </p:nvSpPr>
+        <p:spPr>
+          <a:xfrm>
+            <a:off x="468172" y="650138"/>
+            <a:ext cx="8206740" cy="616305"/>
+          </a:xfrm>
+        </p:spPr>
+        <p:txBody>
+          <a:bodyPr wrap="square" lIns="0" rIns="0" tIns="0" bIns="0">
+            <a:noAutofit/>
+          </a:bodyPr>
+          <a:lstStyle/>
+          <a:p>
+            <a:pPr algn="l">
+              <a:lnSpc>
+                <a:spcPct val="110000"/>
+              </a:lnSpc>
+              <a:buNone/>
+              <a:defRPr sz="2800" b="0">
+                <a:solidFill>
+                  <a:srgbClr val="303437"/>
+                </a:solidFill>
+                <a:latin typeface="Noto Sans"/>
+              </a:defRPr>
+            </a:pPr>
+            <a:r>
+              <a:rPr sz="2800" b="1" lang="ja-JP" altLang="en-US">
+                <a:solidFill>
+                  <a:srgbClr val="303437"/>
+                </a:solidFill>
+                <a:latin typeface="Noto Sans"/>
+                <a:ea typeface="Noto Sans CJK JP"/>
+                <a:cs typeface="Noto Sans"/>
+              </a:rPr>
+              <a:t>公式GitHubで問題と技術報告を公開する</a:t>
+            </a:r>
+          </a:p>
+        </p:txBody>
+      </p:sp>
+      <p:sp>
+        <p:nvSpPr>
+          <p:cNvPr id="3" name="Text Placeholder 2"/>
+          <p:cNvSpPr>
+            <a:spLocks noGrp="1"/>
+          </p:cNvSpPr>
+          <p:nvPr>
+            <p:ph type="body" idx="1"/>
+          </p:nvPr>
+        </p:nvSpPr>
+        <p:spPr>
+          <a:xfrm>
+            <a:off x="594360" y="1463040"/>
+            <a:ext cx="7955279" cy="3044952"/>
+          </a:xfrm>
+        </p:spPr>
+        <p:txBody>
+          <a:bodyPr wrap="square" tIns="91440" bIns="91440">
+            <a:noAutofit/>
+          </a:bodyPr>
+          <a:lstStyle/>
+          <a:p>
+            <a:pPr marL="457200" indent="-355600">
+              <a:lnSpc>
+                <a:spcPts val="2320"/>
+              </a:lnSpc>
+              <a:spcAft>
+                <a:spcPts val="700"/>
+              </a:spcAft>
+              <a:buSzPct val="68205"/>
+              <a:buFont typeface="Noto Sans CJK JP"/>
+              <a:buChar char="●"/>
+              <a:defRPr sz="1950" b="0">
+                <a:solidFill>
+                  <a:srgbClr val="303437"/>
+                </a:solidFill>
+                <a:latin typeface="Noto Sans"/>
+              </a:defRPr>
+            </a:pPr>
+            <a:r>
+              <a:rPr sz="1950" b="0" lang="ja-JP" altLang="en-US">
+                <a:solidFill>
+                  <a:srgbClr val="303437"/>
+                </a:solidFill>
+                <a:latin typeface="Noto Sans"/>
+                <a:ea typeface="Noto Sans CJK JP"/>
+                <a:cs typeface="Noto Sans"/>
+              </a:rPr>
+              <a:t>公式GitHubは、学習・検証・公開テストのJSONLと技術報告を公開している。利用時にはCCPMの論文を引用する。</a:t>
+            </a:r>
+          </a:p>
+          <a:p>
+            <a:pPr marL="457200" indent="-355600">
+              <a:lnSpc>
+                <a:spcPts val="2320"/>
+              </a:lnSpc>
+              <a:spcAft>
+                <a:spcPts val="0"/>
+              </a:spcAft>
+              <a:buSzPct val="68205"/>
+              <a:buFont typeface="Noto Sans CJK JP"/>
+              <a:buChar char="●"/>
+              <a:defRPr sz="1950" b="0">
+                <a:solidFill>
+                  <a:srgbClr val="303437"/>
+                </a:solidFill>
+                <a:latin typeface="Noto Sans"/>
+              </a:defRPr>
+            </a:pPr>
+            <a:r>
+              <a:rPr sz="1950" b="0" lang="ja-JP" altLang="en-US">
+                <a:solidFill>
+                  <a:srgbClr val="303437"/>
+                </a:solidFill>
+                <a:latin typeface="Noto Sans"/>
+                <a:ea typeface="Noto Sans CJK JP"/>
+                <a:cs typeface="Noto Sans"/>
+              </a:rPr>
+              <a:t>リポジトリにはライセンスが明示されていない。再利用・再配布の条件は、配布元へ確認する。</a:t>
+            </a:r>
+          </a:p>
+        </p:txBody>
+      </p:sp>
+      <p:sp>
+        <p:nvSpPr>
+          <p:cNvPr id="4" name="Title 3"/>
+          <p:cNvSpPr>
+            <a:spLocks noGrp="1"/>
+          </p:cNvSpPr>
+          <p:nvPr>
+            <p:ph type="title" idx="2"/>
+          </p:nvPr>
+        </p:nvSpPr>
+        <p:spPr>
+          <a:xfrm>
+            <a:off x="75895" y="0"/>
+            <a:ext cx="8115300" cy="480060"/>
+          </a:xfrm>
+        </p:spPr>
+        <p:txBody>
+          <a:bodyPr wrap="square" lIns="0" rIns="0" tIns="0" bIns="0" anchor="ctr">
+            <a:noAutofit/>
+          </a:bodyPr>
+          <a:lstStyle/>
+          <a:p>
+            <a:pPr algn="l">
+              <a:lnSpc>
+                <a:spcPct val="110000"/>
+              </a:lnSpc>
+              <a:buNone/>
+              <a:defRPr sz="1400" b="0">
+                <a:solidFill>
+                  <a:srgbClr val="303437"/>
+                </a:solidFill>
+                <a:latin typeface="Noto Sans"/>
+              </a:defRPr>
+            </a:pPr>
+            <a:r>
+              <a:rPr sz="1400" b="1" lang="ja-JP" altLang="en-US">
+                <a:solidFill>
+                  <a:srgbClr val="FFFEF8"/>
+                </a:solidFill>
+                <a:latin typeface="Noto Sans"/>
+                <a:ea typeface="Noto Sans CJK JP"/>
+                <a:cs typeface="Noto Sans"/>
+              </a:rPr>
+              <a:t>4. 公開配布と利用条件</a:t>
+            </a:r>
+          </a:p>
+        </p:txBody>
+      </p:sp>
+      <p:sp>
+        <p:nvSpPr>
+          <p:cNvPr id="5" name="sources"/>
+          <p:cNvSpPr txBox="1"/>
+          <p:nvPr/>
+        </p:nvSpPr>
+        <p:spPr>
+          <a:xfrm>
+            <a:off x="502920" y="4700016"/>
+            <a:ext cx="8183879" cy="530352"/>
+          </a:xfrm>
+          <a:prstGeom prst="rect">
+            <a:avLst/>
+          </a:prstGeom>
+          <a:noFill/>
+        </p:spPr>
+        <p:txBody>
+          <a:bodyPr wrap="square" lIns="0" rIns="0" tIns="0" bIns="0">
+            <a:noAutofit/>
+          </a:bodyPr>
+          <a:lstStyle/>
+          <a:p>
+            <a:pPr algn="l">
+              <a:lnSpc>
+                <a:spcPts val="940"/>
+              </a:lnSpc>
+              <a:spcBef>
+                <a:spcPts val="0"/>
+              </a:spcBef>
+              <a:spcAft>
+                <a:spcPts val="140"/>
+              </a:spcAft>
+              <a:buNone/>
+              <a:defRPr sz="810" b="0">
+                <a:solidFill>
+                  <a:srgbClr val="303437"/>
+                </a:solidFill>
+                <a:latin typeface="Noto Sans"/>
+              </a:defRPr>
+            </a:pPr>
+            <a:r>
+              <a:rPr sz="810" b="0" lang="ja-JP" altLang="en-US">
+                <a:solidFill>
+                  <a:srgbClr val="626669"/>
+                </a:solidFill>
+                <a:latin typeface="Noto Sans"/>
+                <a:ea typeface="Noto Sans CJK JP"/>
+                <a:cs typeface="Noto Sans"/>
+              </a:rPr>
+              <a:t>[1] THUNLP-AIPoet (2021). CCPM.  </a:t>
+            </a:r>
+            <a:r>
+              <a:rPr sz="810" b="0" lang="ja-JP" altLang="en-US">
+                <a:solidFill>
+                  <a:srgbClr val="626669"/>
+                </a:solidFill>
+                <a:latin typeface="Noto Sans"/>
+                <a:ea typeface="Noto Sans CJK JP"/>
+                <a:cs typeface="Noto Sans"/>
+                <a:hlinkClick r:id="rId2"/>
+              </a:rPr>
+              <a:t>https://github.com/THUNLP-AIPoet/CCPM</a:t>
             </a:r>
           </a:p>
         </p:txBody>
@@ -13298,7 +13559,7 @@
                 <a:ea typeface="Noto Sans CJK JP"/>
                 <a:cs typeface="Noto Sans"/>
               </a:rPr>
-              <a:t>CLEVAは、古典中国語理解の評価へ採用した</a:t>
+              <a:t>まとめ：似た言葉の中から、対応する意味を選ぶ</a:t>
             </a:r>
           </a:p>
         </p:txBody>
@@ -13351,7 +13612,7 @@
                 <a:ea typeface="Noto Sans CJK JP"/>
                 <a:cs typeface="Noto Sans"/>
               </a:rPr>
-              <a:t>2023年のCLEVAは、中国語モデルを多様な課題で評価するプラットフォーム。CCPMの四択問題を、古典中国語理解の評価に用いる。</a:t>
+              <a:t>CCPMは、現代中国語の説明と古典詩句の対応を問う27,218問の四択データ。正解との対訳に、似た詩句を検索した三つの負例を組み合わせる。</a:t>
             </a:r>
           </a:p>
           <a:p>
@@ -13381,37 +13642,7 @@
                 <a:ea typeface="Noto Sans CJK JP"/>
                 <a:cs typeface="Noto Sans"/>
               </a:rPr>
-              <a:t>現代語の説明と四候補を提示し、選んだ候補の正誤を正解率で評価する。実例2の雨の問題は、CLEVA論文にも掲載されている。</a:t>
-            </a:r>
-          </a:p>
-          <a:p>
-            <a:pPr marL="457200" indent="-355600">
-              <a:lnSpc>
-                <a:spcPts val="2379"/>
-              </a:lnSpc>
-              <a:spcAft>
-                <a:spcPts val="0"/>
-              </a:spcAft>
-              <a:buSzPct val="66500"/>
-              <a:buFont typeface="Noto Sans CJK JP"/>
-              <a:buChar char="●"/>
-              <a:defRPr sz="2000" b="0">
-                <a:solidFill>
-                  <a:srgbClr val="303437"/>
-                </a:solidFill>
-                <a:latin typeface="Noto Sans"/>
-              </a:defRPr>
-            </a:pPr>
-            <a:r>
-              <a:rPr sz="2000" b="0" lang="ja-JP" altLang="en-US">
-                <a:solidFill>
-                  <a:srgbClr val="303437"/>
-                </a:solidFill>
-                <a:latin typeface="Noto Sans"/>
-                <a:ea typeface="Noto Sans CJK JP"/>
-                <a:cs typeface="Noto Sans"/>
-              </a:rPr>
-              <a:t>HELMにも同課題の評価実装が公開されている。CLEVAで評価した問題の総数は、公開説明には記されていない。</a:t>
+              <a:t>2021年のBERT二方式は、テストで84.96%と82.60%の正解率を示した。似た語や表現を持つ詩句の間で、意味の違いを読み取る課題である。</a:t>
             </a:r>
           </a:p>
         </p:txBody>
@@ -13459,7 +13690,7 @@
                 <a:ea typeface="Noto Sans CJK JP"/>
                 <a:cs typeface="Noto Sans"/>
               </a:rPr>
-              <a:t>4. CLEVAでの利用と公開配布</a:t>
+              <a:t>4. 公開配布と利用条件</a:t>
             </a:r>
           </a:p>
         </p:txBody>
@@ -13513,7 +13744,7 @@
                 <a:ea typeface="Noto Sans CJK JP"/>
                 <a:cs typeface="Noto Sans"/>
               </a:rPr>
-              <a:t>[1] Li et al. (2023). CLEVA: Chinese Language Models EVAluation Platform. EMNLP 2023: System Demonstrations.</a:t>
+              <a:t>[1] Li, Qi, Sun, Yi &amp; Zhang (2021). CCPM: A Chinese Classical Poetry Matching Dataset. arXiv:2106.01979v1.  </a:t>
             </a:r>
             <a:r>
               <a:rPr sz="810" b="0" lang="ja-JP" altLang="en-US">
@@ -13523,20 +13754,9 @@
                 <a:latin typeface="Noto Sans"/>
                 <a:ea typeface="Noto Sans CJK JP"/>
                 <a:cs typeface="Noto Sans"/>
-              </a:rPr>
-              <a:t>  </a:t>
-            </a:r>
-            <a:r>
-              <a:rPr sz="810" b="0" lang="ja-JP" altLang="en-US">
-                <a:solidFill>
-                  <a:srgbClr val="626669"/>
-                </a:solidFill>
-                <a:latin typeface="Noto Sans"/>
-                <a:ea typeface="Noto Sans CJK JP"/>
-                <a:cs typeface="Noto Sans"/>
                 <a:hlinkClick r:id="rId2"/>
               </a:rPr>
-              <a:t>https://aclanthology.org/2023.emnlp-demo.17/</a:t>
+              <a:t>https://arxiv.org/abs/2106.01979</a:t>
             </a:r>
           </a:p>
         </p:txBody>
@@ -13549,7 +13769,121 @@
 </p:sld>
 </file>
 
-<file path=ppt/slides/slide28.xml><?xml version="1.0" encoding="utf-8"?>
+<file path=ppt/slides/slide26.xml><?xml version="1.0" encoding="utf-8"?>
+<p:sld xmlns:a="http://schemas.openxmlformats.org/drawingml/2006/main" xmlns:p="http://schemas.openxmlformats.org/presentationml/2006/main" xmlns:r="http://schemas.openxmlformats.org/officeDocument/2006/relationships">
+  <p:cSld>
+    <p:spTree>
+      <p:nvGrpSpPr>
+        <p:cNvPr id="1" name=""/>
+        <p:cNvGrpSpPr/>
+        <p:nvPr/>
+      </p:nvGrpSpPr>
+      <p:grpSpPr/>
+      <p:sp>
+        <p:nvSpPr>
+          <p:cNvPr id="2" name="Title 1"/>
+          <p:cNvSpPr>
+            <a:spLocks noGrp="1"/>
+          </p:cNvSpPr>
+          <p:nvPr>
+            <p:ph type="title"/>
+          </p:nvPr>
+        </p:nvSpPr>
+        <p:spPr>
+          <a:xfrm>
+            <a:off x="548640" y="2484835"/>
+            <a:ext cx="8046720" cy="585216"/>
+          </a:xfrm>
+        </p:spPr>
+        <p:txBody>
+          <a:bodyPr wrap="square" lIns="0" rIns="0" tIns="0" bIns="0" anchor="ctr">
+            <a:noAutofit/>
+          </a:bodyPr>
+          <a:lstStyle/>
+          <a:p>
+            <a:pPr algn="ctr">
+              <a:lnSpc>
+                <a:spcPct val="110000"/>
+              </a:lnSpc>
+              <a:buNone/>
+              <a:defRPr sz="3600" b="0">
+                <a:solidFill>
+                  <a:srgbClr val="303437"/>
+                </a:solidFill>
+                <a:latin typeface="Noto Sans"/>
+              </a:defRPr>
+            </a:pPr>
+            <a:r>
+              <a:rPr sz="3600" b="1" lang="ja-JP" altLang="en-US">
+                <a:solidFill>
+                  <a:srgbClr val="303437"/>
+                </a:solidFill>
+                <a:latin typeface="Noto Sans"/>
+                <a:ea typeface="Noto Sans CJK JP"/>
+                <a:cs typeface="Noto Sans"/>
+              </a:rPr>
+              <a:t>Appendix</a:t>
+            </a:r>
+          </a:p>
+        </p:txBody>
+      </p:sp>
+      <p:sp>
+        <p:nvSpPr>
+          <p:cNvPr id="3" name="Title 2"/>
+          <p:cNvSpPr>
+            <a:spLocks noGrp="1"/>
+          </p:cNvSpPr>
+          <p:nvPr>
+            <p:ph type="title" idx="2"/>
+          </p:nvPr>
+        </p:nvSpPr>
+        <p:spPr>
+          <a:xfrm>
+            <a:off x="75895" y="0"/>
+            <a:ext cx="8115300" cy="480060"/>
+          </a:xfrm>
+        </p:spPr>
+        <p:txBody>
+          <a:bodyPr wrap="square" lIns="0" rIns="0" tIns="0" bIns="0" anchor="ctr">
+            <a:noAutofit/>
+          </a:bodyPr>
+          <a:lstStyle/>
+          <a:p>
+            <a:pPr algn="l">
+              <a:lnSpc>
+                <a:spcPct val="110000"/>
+              </a:lnSpc>
+              <a:buNone/>
+              <a:defRPr sz="1400" b="0">
+                <a:solidFill>
+                  <a:srgbClr val="303437"/>
+                </a:solidFill>
+                <a:latin typeface="Noto Sans"/>
+              </a:defRPr>
+            </a:pPr>
+            <a:r>
+              <a:rPr sz="1400" b="1" lang="ja-JP" altLang="en-US">
+                <a:solidFill>
+                  <a:srgbClr val="FFFEF8"/>
+                </a:solidFill>
+                <a:latin typeface="Noto Sans"/>
+                <a:ea typeface="Noto Sans CJK JP"/>
+                <a:cs typeface="Noto Sans"/>
+              </a:rPr>
+              <a:t>Appendix</a:t>
+            </a:r>
+          </a:p>
+        </p:txBody>
+      </p:sp>
+    </p:spTree>
+  </p:cSld>
+  <p:clrMapOvr>
+    <a:masterClrMapping/>
+  </p:clrMapOvr>
+</p:sld>
+</file>
+
+<file path=ppt/slides/slide27.xml><?xml version="1.0" encoding="utf-8"?>
 <p:sld xmlns:a="http://schemas.openxmlformats.org/drawingml/2006/main" xmlns:p="http://schemas.openxmlformats.org/presentationml/2006/main" xmlns:r="http://schemas.openxmlformats.org/officeDocument/2006/relationships">
   <p:cSld>
     <p:spTree>
@@ -13602,7 +13936,7 @@
                 <a:ea typeface="Noto Sans CJK JP"/>
                 <a:cs typeface="Noto Sans"/>
               </a:rPr>
-              <a:t>公式GitHubで問題と技術報告を公開する</a:t>
+              <a:t/>
             </a:r>
           </a:p>
         </p:txBody>
@@ -13619,73 +13953,103 @@
         </p:nvSpPr>
         <p:spPr>
           <a:xfrm>
-            <a:off x="594360" y="1463040"/>
-            <a:ext cx="7955279" cy="3044952"/>
+            <a:off x="640080" y="1972511"/>
+            <a:ext cx="7863840" cy="1744980"/>
           </a:xfrm>
         </p:spPr>
         <p:txBody>
-          <a:bodyPr wrap="square" tIns="91440" bIns="91440">
+          <a:bodyPr lIns="0" rIns="0" tIns="0" bIns="0">
             <a:noAutofit/>
           </a:bodyPr>
           <a:lstStyle/>
           <a:p>
-            <a:pPr marL="457200" indent="-355600">
-              <a:lnSpc>
-                <a:spcPts val="2320"/>
-              </a:lnSpc>
-              <a:spcAft>
-                <a:spcPts val="700"/>
-              </a:spcAft>
-              <a:buSzPct val="68205"/>
+            <a:pPr marL="457200" indent="-457200">
+              <a:lnSpc>
+                <a:spcPts val="3660"/>
+              </a:lnSpc>
+              <a:spcAft>
+                <a:spcPts val="1200"/>
+              </a:spcAft>
+              <a:buSzPct val="100000"/>
               <a:buFont typeface="Noto Sans CJK JP"/>
-              <a:buChar char="●"/>
-              <a:defRPr sz="1950" b="0">
-                <a:solidFill>
-                  <a:srgbClr val="303437"/>
-                </a:solidFill>
-                <a:latin typeface="Noto Sans"/>
-              </a:defRPr>
-            </a:pPr>
-            <a:r>
-              <a:rPr sz="1950" b="0" lang="ja-JP" altLang="en-US">
-                <a:solidFill>
-                  <a:srgbClr val="303437"/>
-                </a:solidFill>
-                <a:latin typeface="Noto Sans"/>
-                <a:ea typeface="Noto Sans CJK JP"/>
-                <a:cs typeface="Noto Sans"/>
-              </a:rPr>
-              <a:t>公式GitHubは、学習・検証・公開テストのJSONLと技術報告を公開している。利用時にはCCPMの論文を引用する。</a:t>
-            </a:r>
-          </a:p>
-          <a:p>
-            <a:pPr marL="457200" indent="-355600">
-              <a:lnSpc>
-                <a:spcPts val="2320"/>
-              </a:lnSpc>
-              <a:spcAft>
-                <a:spcPts val="0"/>
-              </a:spcAft>
-              <a:buSzPct val="68205"/>
+              <a:buAutoNum type="arabicPeriod" startAt="1"/>
+              <a:defRPr sz="3000" b="1">
+                <a:solidFill>
+                  <a:srgbClr val="303437"/>
+                </a:solidFill>
+                <a:latin typeface="Noto Sans"/>
+              </a:defRPr>
+            </a:pPr>
+            <a:r>
+              <a:rPr sz="3000" b="1" lang="ja-JP" altLang="en-US">
+                <a:solidFill>
+                  <a:srgbClr val="303437"/>
+                </a:solidFill>
+                <a:latin typeface="Noto Sans"/>
+                <a:ea typeface="Noto Sans CJK JP"/>
+                <a:cs typeface="Noto Sans"/>
+              </a:rPr>
+              <a:t>追加10問の原文と日本語訳</a:t>
+            </a:r>
+          </a:p>
+          <a:p>
+            <a:pPr marL="457200" indent="-457200">
+              <a:lnSpc>
+                <a:spcPts val="3660"/>
+              </a:lnSpc>
+              <a:spcAft>
+                <a:spcPts val="1200"/>
+              </a:spcAft>
+              <a:buSzPct val="100000"/>
               <a:buFont typeface="Noto Sans CJK JP"/>
-              <a:buChar char="●"/>
-              <a:defRPr sz="1950" b="0">
-                <a:solidFill>
-                  <a:srgbClr val="303437"/>
-                </a:solidFill>
-                <a:latin typeface="Noto Sans"/>
-              </a:defRPr>
-            </a:pPr>
-            <a:r>
-              <a:rPr sz="1950" b="0" lang="ja-JP" altLang="en-US">
-                <a:solidFill>
-                  <a:srgbClr val="303437"/>
-                </a:solidFill>
-                <a:latin typeface="Noto Sans"/>
-                <a:ea typeface="Noto Sans CJK JP"/>
-                <a:cs typeface="Noto Sans"/>
-              </a:rPr>
-              <a:t>リポジトリにはライセンスが明示されていない。再利用・再配布の条件は、配布元へ確認する。</a:t>
+              <a:buAutoNum type="arabicPeriod" startAt="2"/>
+              <a:defRPr sz="3000" b="1">
+                <a:solidFill>
+                  <a:srgbClr val="303437"/>
+                </a:solidFill>
+                <a:latin typeface="Noto Sans"/>
+              </a:defRPr>
+            </a:pPr>
+            <a:r>
+              <a:rPr sz="3000" b="1" lang="ja-JP" altLang="en-US">
+                <a:solidFill>
+                  <a:srgbClr val="303437"/>
+                </a:solidFill>
+                <a:latin typeface="Noto Sans"/>
+                <a:ea typeface="Noto Sans CJK JP"/>
+                <a:cs typeface="Noto Sans"/>
+              </a:rPr>
+              <a:t>入力形式と詩句の読み方</a:t>
+            </a:r>
+          </a:p>
+          <a:p>
+            <a:pPr marL="457200" indent="-457200">
+              <a:lnSpc>
+                <a:spcPts val="3660"/>
+              </a:lnSpc>
+              <a:spcAft>
+                <a:spcPts val="0"/>
+              </a:spcAft>
+              <a:buSzPct val="100000"/>
+              <a:buFont typeface="Noto Sans CJK JP"/>
+              <a:buAutoNum type="arabicPeriod" startAt="3"/>
+              <a:defRPr sz="3000" b="1">
+                <a:solidFill>
+                  <a:srgbClr val="303437"/>
+                </a:solidFill>
+                <a:latin typeface="Noto Sans"/>
+              </a:defRPr>
+            </a:pPr>
+            <a:r>
+              <a:rPr sz="3000" b="1" lang="ja-JP" altLang="en-US">
+                <a:solidFill>
+                  <a:srgbClr val="303437"/>
+                </a:solidFill>
+                <a:latin typeface="Noto Sans"/>
+                <a:ea typeface="Noto Sans CJK JP"/>
+                <a:cs typeface="Noto Sans"/>
+              </a:rPr>
+              <a:t>参考文献</a:t>
             </a:r>
           </a:p>
         </p:txBody>
@@ -13733,73 +14097,7 @@
                 <a:ea typeface="Noto Sans CJK JP"/>
                 <a:cs typeface="Noto Sans"/>
               </a:rPr>
-              <a:t>4. CLEVAでの利用と公開配布</a:t>
-            </a:r>
-          </a:p>
-        </p:txBody>
-      </p:sp>
-      <p:sp>
-        <p:nvSpPr>
-          <p:cNvPr id="5" name="sources"/>
-          <p:cNvSpPr txBox="1"/>
-          <p:nvPr/>
-        </p:nvSpPr>
-        <p:spPr>
-          <a:xfrm>
-            <a:off x="502920" y="4700016"/>
-            <a:ext cx="8183879" cy="530352"/>
-          </a:xfrm>
-          <a:prstGeom prst="rect">
-            <a:avLst/>
-          </a:prstGeom>
-          <a:noFill/>
-        </p:spPr>
-        <p:txBody>
-          <a:bodyPr wrap="square" lIns="0" rIns="0" tIns="0" bIns="0">
-            <a:noAutofit/>
-          </a:bodyPr>
-          <a:lstStyle/>
-          <a:p>
-            <a:pPr algn="l">
-              <a:lnSpc>
-                <a:spcPts val="940"/>
-              </a:lnSpc>
-              <a:spcBef>
-                <a:spcPts val="0"/>
-              </a:spcBef>
-              <a:spcAft>
-                <a:spcPts val="140"/>
-              </a:spcAft>
-              <a:buNone/>
-              <a:defRPr sz="810" b="0">
-                <a:solidFill>
-                  <a:srgbClr val="303437"/>
-                </a:solidFill>
-                <a:latin typeface="Noto Sans"/>
-              </a:defRPr>
-            </a:pPr>
-            <a:r>
-              <a:rPr sz="810" b="0" lang="ja-JP" altLang="en-US">
-                <a:solidFill>
-                  <a:srgbClr val="626669"/>
-                </a:solidFill>
-                <a:latin typeface="Noto Sans"/>
-                <a:ea typeface="Noto Sans CJK JP"/>
-                <a:cs typeface="Noto Sans"/>
-              </a:rPr>
-              <a:t>[1] THUNLP-AIPoet (2021). CCPM.  </a:t>
-            </a:r>
-            <a:r>
-              <a:rPr sz="810" b="0" lang="ja-JP" altLang="en-US">
-                <a:solidFill>
-                  <a:srgbClr val="626669"/>
-                </a:solidFill>
-                <a:latin typeface="Noto Sans"/>
-                <a:ea typeface="Noto Sans CJK JP"/>
-                <a:cs typeface="Noto Sans"/>
-                <a:hlinkClick r:id="rId2"/>
-              </a:rPr>
-              <a:t>https://github.com/THUNLP-AIPoet/CCPM</a:t>
+              <a:t>Appendix: 目次</a:t>
             </a:r>
           </a:p>
         </p:txBody>
@@ -13812,930 +14110,7 @@
 </p:sld>
 </file>
 
-<file path=ppt/slides/slide29.xml><?xml version="1.0" encoding="utf-8"?>
-<p:sld xmlns:a="http://schemas.openxmlformats.org/drawingml/2006/main" xmlns:p="http://schemas.openxmlformats.org/presentationml/2006/main" xmlns:r="http://schemas.openxmlformats.org/officeDocument/2006/relationships">
-  <p:cSld>
-    <p:spTree>
-      <p:nvGrpSpPr>
-        <p:cNvPr id="1" name=""/>
-        <p:cNvGrpSpPr/>
-        <p:nvPr/>
-      </p:nvGrpSpPr>
-      <p:grpSpPr/>
-      <p:sp>
-        <p:nvSpPr>
-          <p:cNvPr id="2" name="Title 1"/>
-          <p:cNvSpPr>
-            <a:spLocks noGrp="1"/>
-          </p:cNvSpPr>
-          <p:nvPr>
-            <p:ph type="title"/>
-          </p:nvPr>
-        </p:nvSpPr>
-        <p:spPr>
-          <a:xfrm>
-            <a:off x="468172" y="650138"/>
-            <a:ext cx="8206740" cy="616305"/>
-          </a:xfrm>
-        </p:spPr>
-        <p:txBody>
-          <a:bodyPr wrap="square" lIns="0" rIns="0" tIns="0" bIns="0">
-            <a:noAutofit/>
-          </a:bodyPr>
-          <a:lstStyle/>
-          <a:p>
-            <a:pPr algn="l">
-              <a:lnSpc>
-                <a:spcPct val="110000"/>
-              </a:lnSpc>
-              <a:buNone/>
-              <a:defRPr sz="2800" b="0">
-                <a:solidFill>
-                  <a:srgbClr val="303437"/>
-                </a:solidFill>
-                <a:latin typeface="Noto Sans"/>
-              </a:defRPr>
-            </a:pPr>
-            <a:r>
-              <a:rPr sz="2800" b="1" lang="ja-JP" altLang="en-US">
-                <a:solidFill>
-                  <a:srgbClr val="303437"/>
-                </a:solidFill>
-                <a:latin typeface="Noto Sans"/>
-                <a:ea typeface="Noto Sans CJK JP"/>
-                <a:cs typeface="Noto Sans"/>
-              </a:rPr>
-              <a:t>まとめ：似た言葉の中から、対応する意味を選ぶ</a:t>
-            </a:r>
-          </a:p>
-        </p:txBody>
-      </p:sp>
-      <p:sp>
-        <p:nvSpPr>
-          <p:cNvPr id="3" name="Text Placeholder 2"/>
-          <p:cNvSpPr>
-            <a:spLocks noGrp="1"/>
-          </p:cNvSpPr>
-          <p:nvPr>
-            <p:ph type="body" idx="1"/>
-          </p:nvPr>
-        </p:nvSpPr>
-        <p:spPr>
-          <a:xfrm>
-            <a:off x="594360" y="1463040"/>
-            <a:ext cx="7955279" cy="3044952"/>
-          </a:xfrm>
-        </p:spPr>
-        <p:txBody>
-          <a:bodyPr wrap="square" tIns="91440" bIns="91440">
-            <a:noAutofit/>
-          </a:bodyPr>
-          <a:lstStyle/>
-          <a:p>
-            <a:pPr marL="457200" indent="-355600">
-              <a:lnSpc>
-                <a:spcPts val="2379"/>
-              </a:lnSpc>
-              <a:spcAft>
-                <a:spcPts val="700"/>
-              </a:spcAft>
-              <a:buSzPct val="66500"/>
-              <a:buFont typeface="Noto Sans CJK JP"/>
-              <a:buChar char="●"/>
-              <a:defRPr sz="2000" b="0">
-                <a:solidFill>
-                  <a:srgbClr val="303437"/>
-                </a:solidFill>
-                <a:latin typeface="Noto Sans"/>
-              </a:defRPr>
-            </a:pPr>
-            <a:r>
-              <a:rPr sz="2000" b="0" lang="ja-JP" altLang="en-US">
-                <a:solidFill>
-                  <a:srgbClr val="303437"/>
-                </a:solidFill>
-                <a:latin typeface="Noto Sans"/>
-                <a:ea typeface="Noto Sans CJK JP"/>
-                <a:cs typeface="Noto Sans"/>
-              </a:rPr>
-              <a:t>CCPMは、現代中国語の説明と古典詩句の対応を問う27,218問の四択データ。正解との対訳に、似た詩句を検索した三つの負例を組み合わせる。</a:t>
-            </a:r>
-          </a:p>
-          <a:p>
-            <a:pPr marL="457200" indent="-355600">
-              <a:lnSpc>
-                <a:spcPts val="2379"/>
-              </a:lnSpc>
-              <a:spcAft>
-                <a:spcPts val="0"/>
-              </a:spcAft>
-              <a:buSzPct val="66500"/>
-              <a:buFont typeface="Noto Sans CJK JP"/>
-              <a:buChar char="●"/>
-              <a:defRPr sz="2000" b="0">
-                <a:solidFill>
-                  <a:srgbClr val="303437"/>
-                </a:solidFill>
-                <a:latin typeface="Noto Sans"/>
-              </a:defRPr>
-            </a:pPr>
-            <a:r>
-              <a:rPr sz="2000" b="0" lang="ja-JP" altLang="en-US">
-                <a:solidFill>
-                  <a:srgbClr val="303437"/>
-                </a:solidFill>
-                <a:latin typeface="Noto Sans"/>
-                <a:ea typeface="Noto Sans CJK JP"/>
-                <a:cs typeface="Noto Sans"/>
-              </a:rPr>
-              <a:t>2021年のBERT二方式は、テストで84.96%と82.60%の正解率を示した。後にCLEVAの古典中国語理解にも採用され、中国語モデルの意味理解を調べる課題となった。</a:t>
-            </a:r>
-          </a:p>
-        </p:txBody>
-      </p:sp>
-      <p:sp>
-        <p:nvSpPr>
-          <p:cNvPr id="4" name="Title 3"/>
-          <p:cNvSpPr>
-            <a:spLocks noGrp="1"/>
-          </p:cNvSpPr>
-          <p:nvPr>
-            <p:ph type="title" idx="2"/>
-          </p:nvPr>
-        </p:nvSpPr>
-        <p:spPr>
-          <a:xfrm>
-            <a:off x="75895" y="0"/>
-            <a:ext cx="8115300" cy="480060"/>
-          </a:xfrm>
-        </p:spPr>
-        <p:txBody>
-          <a:bodyPr wrap="square" lIns="0" rIns="0" tIns="0" bIns="0" anchor="ctr">
-            <a:noAutofit/>
-          </a:bodyPr>
-          <a:lstStyle/>
-          <a:p>
-            <a:pPr algn="l">
-              <a:lnSpc>
-                <a:spcPct val="110000"/>
-              </a:lnSpc>
-              <a:buNone/>
-              <a:defRPr sz="1400" b="0">
-                <a:solidFill>
-                  <a:srgbClr val="303437"/>
-                </a:solidFill>
-                <a:latin typeface="Noto Sans"/>
-              </a:defRPr>
-            </a:pPr>
-            <a:r>
-              <a:rPr sz="1400" b="1" lang="ja-JP" altLang="en-US">
-                <a:solidFill>
-                  <a:srgbClr val="FFFEF8"/>
-                </a:solidFill>
-                <a:latin typeface="Noto Sans"/>
-                <a:ea typeface="Noto Sans CJK JP"/>
-                <a:cs typeface="Noto Sans"/>
-              </a:rPr>
-              <a:t>4. CLEVAでの利用と公開配布</a:t>
-            </a:r>
-          </a:p>
-        </p:txBody>
-      </p:sp>
-      <p:sp>
-        <p:nvSpPr>
-          <p:cNvPr id="5" name="sources"/>
-          <p:cNvSpPr txBox="1"/>
-          <p:nvPr/>
-        </p:nvSpPr>
-        <p:spPr>
-          <a:xfrm>
-            <a:off x="502920" y="4700016"/>
-            <a:ext cx="8183879" cy="530352"/>
-          </a:xfrm>
-          <a:prstGeom prst="rect">
-            <a:avLst/>
-          </a:prstGeom>
-          <a:noFill/>
-        </p:spPr>
-        <p:txBody>
-          <a:bodyPr wrap="square" lIns="0" rIns="0" tIns="0" bIns="0">
-            <a:noAutofit/>
-          </a:bodyPr>
-          <a:lstStyle/>
-          <a:p>
-            <a:pPr algn="l">
-              <a:lnSpc>
-                <a:spcPts val="940"/>
-              </a:lnSpc>
-              <a:spcBef>
-                <a:spcPts val="0"/>
-              </a:spcBef>
-              <a:spcAft>
-                <a:spcPts val="140"/>
-              </a:spcAft>
-              <a:buNone/>
-              <a:defRPr sz="810" b="0">
-                <a:solidFill>
-                  <a:srgbClr val="303437"/>
-                </a:solidFill>
-                <a:latin typeface="Noto Sans"/>
-              </a:defRPr>
-            </a:pPr>
-            <a:r>
-              <a:rPr sz="810" b="0" lang="ja-JP" altLang="en-US">
-                <a:solidFill>
-                  <a:srgbClr val="626669"/>
-                </a:solidFill>
-                <a:latin typeface="Noto Sans"/>
-                <a:ea typeface="Noto Sans CJK JP"/>
-                <a:cs typeface="Noto Sans"/>
-              </a:rPr>
-              <a:t>[1] Li, Qi, Sun, Yi &amp; Zhang (2021). CCPM: A Chinese Classical Poetry Matching Dataset. arXiv:2106.01979v1.</a:t>
-            </a:r>
-            <a:r>
-              <a:rPr sz="810" b="0" lang="ja-JP" altLang="en-US">
-                <a:solidFill>
-                  <a:srgbClr val="626669"/>
-                </a:solidFill>
-                <a:latin typeface="Noto Sans"/>
-                <a:ea typeface="Noto Sans CJK JP"/>
-                <a:cs typeface="Noto Sans"/>
-              </a:rPr>
-              <a:t>  </a:t>
-            </a:r>
-            <a:r>
-              <a:rPr sz="810" b="0" lang="ja-JP" altLang="en-US">
-                <a:solidFill>
-                  <a:srgbClr val="626669"/>
-                </a:solidFill>
-                <a:latin typeface="Noto Sans"/>
-                <a:ea typeface="Noto Sans CJK JP"/>
-                <a:cs typeface="Noto Sans"/>
-                <a:hlinkClick r:id="rId2"/>
-              </a:rPr>
-              <a:t>https://arxiv.org/abs/2106.01979</a:t>
-            </a:r>
-          </a:p>
-          <a:p>
-            <a:pPr>
-              <a:lnSpc>
-                <a:spcPts val="940"/>
-              </a:lnSpc>
-              <a:spcAft>
-                <a:spcPts val="140"/>
-              </a:spcAft>
-              <a:buNone/>
-              <a:defRPr sz="810" b="0">
-                <a:solidFill>
-                  <a:srgbClr val="303437"/>
-                </a:solidFill>
-                <a:latin typeface="Noto Sans"/>
-              </a:defRPr>
-            </a:pPr>
-            <a:r>
-              <a:rPr sz="810" b="0" lang="ja-JP" altLang="en-US">
-                <a:solidFill>
-                  <a:srgbClr val="626669"/>
-                </a:solidFill>
-                <a:latin typeface="Noto Sans"/>
-                <a:ea typeface="Noto Sans CJK JP"/>
-                <a:cs typeface="Noto Sans"/>
-              </a:rPr>
-              <a:t>[2] Li et al. (2023). CLEVA: Chinese Language Models EVAluation Platform. EMNLP 2023: System Demonstrations.</a:t>
-            </a:r>
-            <a:r>
-              <a:rPr sz="810" b="0" lang="ja-JP" altLang="en-US">
-                <a:solidFill>
-                  <a:srgbClr val="626669"/>
-                </a:solidFill>
-                <a:latin typeface="Noto Sans"/>
-                <a:ea typeface="Noto Sans CJK JP"/>
-                <a:cs typeface="Noto Sans"/>
-              </a:rPr>
-              <a:t>  </a:t>
-            </a:r>
-            <a:r>
-              <a:rPr sz="810" b="0" lang="ja-JP" altLang="en-US">
-                <a:solidFill>
-                  <a:srgbClr val="626669"/>
-                </a:solidFill>
-                <a:latin typeface="Noto Sans"/>
-                <a:ea typeface="Noto Sans CJK JP"/>
-                <a:cs typeface="Noto Sans"/>
-                <a:hlinkClick r:id="rId3"/>
-              </a:rPr>
-              <a:t>https://aclanthology.org/2023.emnlp-demo.17/</a:t>
-            </a:r>
-          </a:p>
-        </p:txBody>
-      </p:sp>
-    </p:spTree>
-  </p:cSld>
-  <p:clrMapOvr>
-    <a:masterClrMapping/>
-  </p:clrMapOvr>
-</p:sld>
-</file>
-
-<file path=ppt/slides/slide3.xml><?xml version="1.0" encoding="utf-8"?>
-<p:sld xmlns:a="http://schemas.openxmlformats.org/drawingml/2006/main" xmlns:p="http://schemas.openxmlformats.org/presentationml/2006/main" xmlns:r="http://schemas.openxmlformats.org/officeDocument/2006/relationships">
-  <p:cSld>
-    <p:spTree>
-      <p:nvGrpSpPr>
-        <p:cNvPr id="1" name=""/>
-        <p:cNvGrpSpPr/>
-        <p:nvPr/>
-      </p:nvGrpSpPr>
-      <p:grpSpPr/>
-      <p:sp>
-        <p:nvSpPr>
-          <p:cNvPr id="2" name="Title 1"/>
-          <p:cNvSpPr>
-            <a:spLocks noGrp="1"/>
-          </p:cNvSpPr>
-          <p:nvPr>
-            <p:ph type="title"/>
-          </p:nvPr>
-        </p:nvSpPr>
-        <p:spPr>
-          <a:xfrm>
-            <a:off x="468172" y="650138"/>
-            <a:ext cx="8206740" cy="616305"/>
-          </a:xfrm>
-        </p:spPr>
-        <p:txBody>
-          <a:bodyPr wrap="square" lIns="0" rIns="0" tIns="0" bIns="0">
-            <a:noAutofit/>
-          </a:bodyPr>
-          <a:lstStyle/>
-          <a:p>
-            <a:pPr algn="l">
-              <a:lnSpc>
-                <a:spcPct val="110000"/>
-              </a:lnSpc>
-              <a:buNone/>
-              <a:defRPr sz="2800" b="0">
-                <a:solidFill>
-                  <a:srgbClr val="303437"/>
-                </a:solidFill>
-                <a:latin typeface="Noto Sans"/>
-              </a:defRPr>
-            </a:pPr>
-            <a:r>
-              <a:rPr sz="2800" b="1" lang="ja-JP" altLang="en-US">
-                <a:solidFill>
-                  <a:srgbClr val="303437"/>
-                </a:solidFill>
-                <a:latin typeface="Noto Sans"/>
-                <a:ea typeface="Noto Sans CJK JP"/>
-                <a:cs typeface="Noto Sans"/>
-              </a:rPr>
-              <a:t/>
-            </a:r>
-          </a:p>
-        </p:txBody>
-      </p:sp>
-      <p:sp>
-        <p:nvSpPr>
-          <p:cNvPr id="3" name="Text Placeholder 2"/>
-          <p:cNvSpPr>
-            <a:spLocks noGrp="1"/>
-          </p:cNvSpPr>
-          <p:nvPr>
-            <p:ph type="body" idx="1"/>
-          </p:nvPr>
-        </p:nvSpPr>
-        <p:spPr>
-          <a:xfrm>
-            <a:off x="640080" y="1663901"/>
-            <a:ext cx="7863840" cy="2362199"/>
-          </a:xfrm>
-        </p:spPr>
-        <p:txBody>
-          <a:bodyPr lIns="0" rIns="0" tIns="0" bIns="0">
-            <a:noAutofit/>
-          </a:bodyPr>
-          <a:lstStyle/>
-          <a:p>
-            <a:pPr marL="457200" indent="-457200">
-              <a:lnSpc>
-                <a:spcPts val="3660"/>
-              </a:lnSpc>
-              <a:spcAft>
-                <a:spcPts val="1200"/>
-              </a:spcAft>
-              <a:buSzPct val="100000"/>
-              <a:buFont typeface="Noto Sans CJK JP"/>
-              <a:buAutoNum type="arabicPeriod" startAt="1"/>
-              <a:defRPr sz="3000" b="1">
-                <a:solidFill>
-                  <a:srgbClr val="303437"/>
-                </a:solidFill>
-                <a:latin typeface="Noto Sans"/>
-              </a:defRPr>
-            </a:pPr>
-            <a:r>
-              <a:rPr sz="3000" b="1" lang="ja-JP" altLang="en-US">
-                <a:solidFill>
-                  <a:srgbClr val="303437"/>
-                </a:solidFill>
-                <a:latin typeface="Noto Sans"/>
-                <a:ea typeface="Noto Sans CJK JP"/>
-                <a:cs typeface="Noto Sans"/>
-              </a:rPr>
-              <a:t>現代語の説明から古典詩句を選ぶ</a:t>
-            </a:r>
-          </a:p>
-          <a:p>
-            <a:pPr marL="457200" indent="-457200">
-              <a:lnSpc>
-                <a:spcPts val="3660"/>
-              </a:lnSpc>
-              <a:spcAft>
-                <a:spcPts val="1200"/>
-              </a:spcAft>
-              <a:buSzPct val="100000"/>
-              <a:buFont typeface="Noto Sans CJK JP"/>
-              <a:buAutoNum type="arabicPeriod" startAt="2"/>
-              <a:defRPr sz="3000" b="1">
-                <a:solidFill>
-                  <a:srgbClr val="303437"/>
-                </a:solidFill>
-                <a:latin typeface="Noto Sans"/>
-              </a:defRPr>
-            </a:pPr>
-            <a:r>
-              <a:rPr sz="3000" b="1" lang="ja-JP" altLang="en-US">
-                <a:solidFill>
-                  <a:srgbClr val="303437"/>
-                </a:solidFill>
-                <a:latin typeface="Noto Sans"/>
-                <a:ea typeface="Noto Sans CJK JP"/>
-                <a:cs typeface="Noto Sans"/>
-              </a:rPr>
-              <a:t>対訳と似た詩句から問題を作る</a:t>
-            </a:r>
-          </a:p>
-          <a:p>
-            <a:pPr marL="457200" indent="-457200">
-              <a:lnSpc>
-                <a:spcPts val="3660"/>
-              </a:lnSpc>
-              <a:spcAft>
-                <a:spcPts val="1200"/>
-              </a:spcAft>
-              <a:buSzPct val="100000"/>
-              <a:buFont typeface="Noto Sans CJK JP"/>
-              <a:buAutoNum type="arabicPeriod" startAt="3"/>
-              <a:defRPr sz="3000" b="1">
-                <a:solidFill>
-                  <a:srgbClr val="303437"/>
-                </a:solidFill>
-                <a:latin typeface="Noto Sans"/>
-              </a:defRPr>
-            </a:pPr>
-            <a:r>
-              <a:rPr sz="3000" b="1" lang="ja-JP" altLang="en-US">
-                <a:solidFill>
-                  <a:srgbClr val="303437"/>
-                </a:solidFill>
-                <a:latin typeface="Noto Sans"/>
-                <a:ea typeface="Noto Sans CJK JP"/>
-                <a:cs typeface="Noto Sans"/>
-              </a:rPr>
-              <a:t>正解率で意味の対応を評価する</a:t>
-            </a:r>
-          </a:p>
-          <a:p>
-            <a:pPr marL="457200" indent="-457200">
-              <a:lnSpc>
-                <a:spcPts val="3660"/>
-              </a:lnSpc>
-              <a:spcAft>
-                <a:spcPts val="0"/>
-              </a:spcAft>
-              <a:buSzPct val="100000"/>
-              <a:buFont typeface="Noto Sans CJK JP"/>
-              <a:buAutoNum type="arabicPeriod" startAt="4"/>
-              <a:defRPr sz="3000" b="1">
-                <a:solidFill>
-                  <a:srgbClr val="303437"/>
-                </a:solidFill>
-                <a:latin typeface="Noto Sans"/>
-              </a:defRPr>
-            </a:pPr>
-            <a:r>
-              <a:rPr sz="3000" b="1" lang="ja-JP" altLang="en-US">
-                <a:solidFill>
-                  <a:srgbClr val="303437"/>
-                </a:solidFill>
-                <a:latin typeface="Noto Sans"/>
-                <a:ea typeface="Noto Sans CJK JP"/>
-                <a:cs typeface="Noto Sans"/>
-              </a:rPr>
-              <a:t>CLEVAでの利用と公開配布</a:t>
-            </a:r>
-          </a:p>
-        </p:txBody>
-      </p:sp>
-      <p:sp>
-        <p:nvSpPr>
-          <p:cNvPr id="4" name="Title 3"/>
-          <p:cNvSpPr>
-            <a:spLocks noGrp="1"/>
-          </p:cNvSpPr>
-          <p:nvPr>
-            <p:ph type="title" idx="2"/>
-          </p:nvPr>
-        </p:nvSpPr>
-        <p:spPr>
-          <a:xfrm>
-            <a:off x="75895" y="0"/>
-            <a:ext cx="8115300" cy="480060"/>
-          </a:xfrm>
-        </p:spPr>
-        <p:txBody>
-          <a:bodyPr wrap="square" lIns="0" rIns="0" tIns="0" bIns="0" anchor="ctr">
-            <a:noAutofit/>
-          </a:bodyPr>
-          <a:lstStyle/>
-          <a:p>
-            <a:pPr algn="l">
-              <a:lnSpc>
-                <a:spcPct val="110000"/>
-              </a:lnSpc>
-              <a:buNone/>
-              <a:defRPr sz="1400" b="0">
-                <a:solidFill>
-                  <a:srgbClr val="303437"/>
-                </a:solidFill>
-                <a:latin typeface="Noto Sans"/>
-              </a:defRPr>
-            </a:pPr>
-            <a:r>
-              <a:rPr sz="1400" b="1" lang="ja-JP" altLang="en-US">
-                <a:solidFill>
-                  <a:srgbClr val="FFFEF8"/>
-                </a:solidFill>
-                <a:latin typeface="Noto Sans"/>
-                <a:ea typeface="Noto Sans CJK JP"/>
-                <a:cs typeface="Noto Sans"/>
-              </a:rPr>
-              <a:t>目次</a:t>
-            </a:r>
-          </a:p>
-        </p:txBody>
-      </p:sp>
-    </p:spTree>
-  </p:cSld>
-  <p:clrMapOvr>
-    <a:masterClrMapping/>
-  </p:clrMapOvr>
-</p:sld>
-</file>
-
-<file path=ppt/slides/slide30.xml><?xml version="1.0" encoding="utf-8"?>
-<p:sld xmlns:a="http://schemas.openxmlformats.org/drawingml/2006/main" xmlns:p="http://schemas.openxmlformats.org/presentationml/2006/main" xmlns:r="http://schemas.openxmlformats.org/officeDocument/2006/relationships">
-  <p:cSld>
-    <p:spTree>
-      <p:nvGrpSpPr>
-        <p:cNvPr id="1" name=""/>
-        <p:cNvGrpSpPr/>
-        <p:nvPr/>
-      </p:nvGrpSpPr>
-      <p:grpSpPr/>
-      <p:sp>
-        <p:nvSpPr>
-          <p:cNvPr id="2" name="Title 1"/>
-          <p:cNvSpPr>
-            <a:spLocks noGrp="1"/>
-          </p:cNvSpPr>
-          <p:nvPr>
-            <p:ph type="title"/>
-          </p:nvPr>
-        </p:nvSpPr>
-        <p:spPr>
-          <a:xfrm>
-            <a:off x="548640" y="2484835"/>
-            <a:ext cx="8046720" cy="585216"/>
-          </a:xfrm>
-        </p:spPr>
-        <p:txBody>
-          <a:bodyPr wrap="square" lIns="0" rIns="0" tIns="0" bIns="0" anchor="ctr">
-            <a:noAutofit/>
-          </a:bodyPr>
-          <a:lstStyle/>
-          <a:p>
-            <a:pPr algn="ctr">
-              <a:lnSpc>
-                <a:spcPct val="110000"/>
-              </a:lnSpc>
-              <a:buNone/>
-              <a:defRPr sz="3600" b="0">
-                <a:solidFill>
-                  <a:srgbClr val="303437"/>
-                </a:solidFill>
-                <a:latin typeface="Noto Sans"/>
-              </a:defRPr>
-            </a:pPr>
-            <a:r>
-              <a:rPr sz="3600" b="1" lang="ja-JP" altLang="en-US">
-                <a:solidFill>
-                  <a:srgbClr val="303437"/>
-                </a:solidFill>
-                <a:latin typeface="Noto Sans"/>
-                <a:ea typeface="Noto Sans CJK JP"/>
-                <a:cs typeface="Noto Sans"/>
-              </a:rPr>
-              <a:t>Appendix</a:t>
-            </a:r>
-          </a:p>
-        </p:txBody>
-      </p:sp>
-      <p:sp>
-        <p:nvSpPr>
-          <p:cNvPr id="3" name="Title 2"/>
-          <p:cNvSpPr>
-            <a:spLocks noGrp="1"/>
-          </p:cNvSpPr>
-          <p:nvPr>
-            <p:ph type="title" idx="2"/>
-          </p:nvPr>
-        </p:nvSpPr>
-        <p:spPr>
-          <a:xfrm>
-            <a:off x="75895" y="0"/>
-            <a:ext cx="8115300" cy="480060"/>
-          </a:xfrm>
-        </p:spPr>
-        <p:txBody>
-          <a:bodyPr wrap="square" lIns="0" rIns="0" tIns="0" bIns="0" anchor="ctr">
-            <a:noAutofit/>
-          </a:bodyPr>
-          <a:lstStyle/>
-          <a:p>
-            <a:pPr algn="l">
-              <a:lnSpc>
-                <a:spcPct val="110000"/>
-              </a:lnSpc>
-              <a:buNone/>
-              <a:defRPr sz="1400" b="0">
-                <a:solidFill>
-                  <a:srgbClr val="303437"/>
-                </a:solidFill>
-                <a:latin typeface="Noto Sans"/>
-              </a:defRPr>
-            </a:pPr>
-            <a:r>
-              <a:rPr sz="1400" b="1" lang="ja-JP" altLang="en-US">
-                <a:solidFill>
-                  <a:srgbClr val="FFFEF8"/>
-                </a:solidFill>
-                <a:latin typeface="Noto Sans"/>
-                <a:ea typeface="Noto Sans CJK JP"/>
-                <a:cs typeface="Noto Sans"/>
-              </a:rPr>
-              <a:t>Appendix</a:t>
-            </a:r>
-          </a:p>
-        </p:txBody>
-      </p:sp>
-    </p:spTree>
-  </p:cSld>
-  <p:clrMapOvr>
-    <a:masterClrMapping/>
-  </p:clrMapOvr>
-</p:sld>
-</file>
-
-<file path=ppt/slides/slide31.xml><?xml version="1.0" encoding="utf-8"?>
-<p:sld xmlns:a="http://schemas.openxmlformats.org/drawingml/2006/main" xmlns:p="http://schemas.openxmlformats.org/presentationml/2006/main" xmlns:r="http://schemas.openxmlformats.org/officeDocument/2006/relationships">
-  <p:cSld>
-    <p:spTree>
-      <p:nvGrpSpPr>
-        <p:cNvPr id="1" name=""/>
-        <p:cNvGrpSpPr/>
-        <p:nvPr/>
-      </p:nvGrpSpPr>
-      <p:grpSpPr/>
-      <p:sp>
-        <p:nvSpPr>
-          <p:cNvPr id="2" name="Title 1"/>
-          <p:cNvSpPr>
-            <a:spLocks noGrp="1"/>
-          </p:cNvSpPr>
-          <p:nvPr>
-            <p:ph type="title"/>
-          </p:nvPr>
-        </p:nvSpPr>
-        <p:spPr>
-          <a:xfrm>
-            <a:off x="468172" y="650138"/>
-            <a:ext cx="8206740" cy="616305"/>
-          </a:xfrm>
-        </p:spPr>
-        <p:txBody>
-          <a:bodyPr wrap="square" lIns="0" rIns="0" tIns="0" bIns="0">
-            <a:noAutofit/>
-          </a:bodyPr>
-          <a:lstStyle/>
-          <a:p>
-            <a:pPr algn="l">
-              <a:lnSpc>
-                <a:spcPct val="110000"/>
-              </a:lnSpc>
-              <a:buNone/>
-              <a:defRPr sz="2800" b="0">
-                <a:solidFill>
-                  <a:srgbClr val="303437"/>
-                </a:solidFill>
-                <a:latin typeface="Noto Sans"/>
-              </a:defRPr>
-            </a:pPr>
-            <a:r>
-              <a:rPr sz="2800" b="1" lang="ja-JP" altLang="en-US">
-                <a:solidFill>
-                  <a:srgbClr val="303437"/>
-                </a:solidFill>
-                <a:latin typeface="Noto Sans"/>
-                <a:ea typeface="Noto Sans CJK JP"/>
-                <a:cs typeface="Noto Sans"/>
-              </a:rPr>
-              <a:t/>
-            </a:r>
-          </a:p>
-        </p:txBody>
-      </p:sp>
-      <p:sp>
-        <p:nvSpPr>
-          <p:cNvPr id="3" name="Text Placeholder 2"/>
-          <p:cNvSpPr>
-            <a:spLocks noGrp="1"/>
-          </p:cNvSpPr>
-          <p:nvPr>
-            <p:ph type="body" idx="1"/>
-          </p:nvPr>
-        </p:nvSpPr>
-        <p:spPr>
-          <a:xfrm>
-            <a:off x="640080" y="1972511"/>
-            <a:ext cx="7863840" cy="1744980"/>
-          </a:xfrm>
-        </p:spPr>
-        <p:txBody>
-          <a:bodyPr lIns="0" rIns="0" tIns="0" bIns="0">
-            <a:noAutofit/>
-          </a:bodyPr>
-          <a:lstStyle/>
-          <a:p>
-            <a:pPr marL="457200" indent="-457200">
-              <a:lnSpc>
-                <a:spcPts val="3660"/>
-              </a:lnSpc>
-              <a:spcAft>
-                <a:spcPts val="1200"/>
-              </a:spcAft>
-              <a:buSzPct val="100000"/>
-              <a:buFont typeface="Noto Sans CJK JP"/>
-              <a:buAutoNum type="arabicPeriod" startAt="1"/>
-              <a:defRPr sz="3000" b="1">
-                <a:solidFill>
-                  <a:srgbClr val="303437"/>
-                </a:solidFill>
-                <a:latin typeface="Noto Sans"/>
-              </a:defRPr>
-            </a:pPr>
-            <a:r>
-              <a:rPr sz="3000" b="1" lang="ja-JP" altLang="en-US">
-                <a:solidFill>
-                  <a:srgbClr val="303437"/>
-                </a:solidFill>
-                <a:latin typeface="Noto Sans"/>
-                <a:ea typeface="Noto Sans CJK JP"/>
-                <a:cs typeface="Noto Sans"/>
-              </a:rPr>
-              <a:t>追加10問の原文と日本語訳</a:t>
-            </a:r>
-          </a:p>
-          <a:p>
-            <a:pPr marL="457200" indent="-457200">
-              <a:lnSpc>
-                <a:spcPts val="3660"/>
-              </a:lnSpc>
-              <a:spcAft>
-                <a:spcPts val="1200"/>
-              </a:spcAft>
-              <a:buSzPct val="100000"/>
-              <a:buFont typeface="Noto Sans CJK JP"/>
-              <a:buAutoNum type="arabicPeriod" startAt="2"/>
-              <a:defRPr sz="3000" b="1">
-                <a:solidFill>
-                  <a:srgbClr val="303437"/>
-                </a:solidFill>
-                <a:latin typeface="Noto Sans"/>
-              </a:defRPr>
-            </a:pPr>
-            <a:r>
-              <a:rPr sz="3000" b="1" lang="ja-JP" altLang="en-US">
-                <a:solidFill>
-                  <a:srgbClr val="303437"/>
-                </a:solidFill>
-                <a:latin typeface="Noto Sans"/>
-                <a:ea typeface="Noto Sans CJK JP"/>
-                <a:cs typeface="Noto Sans"/>
-              </a:rPr>
-              <a:t>入力形式と詩句の読み方</a:t>
-            </a:r>
-          </a:p>
-          <a:p>
-            <a:pPr marL="457200" indent="-457200">
-              <a:lnSpc>
-                <a:spcPts val="3660"/>
-              </a:lnSpc>
-              <a:spcAft>
-                <a:spcPts val="0"/>
-              </a:spcAft>
-              <a:buSzPct val="100000"/>
-              <a:buFont typeface="Noto Sans CJK JP"/>
-              <a:buAutoNum type="arabicPeriod" startAt="3"/>
-              <a:defRPr sz="3000" b="1">
-                <a:solidFill>
-                  <a:srgbClr val="303437"/>
-                </a:solidFill>
-                <a:latin typeface="Noto Sans"/>
-              </a:defRPr>
-            </a:pPr>
-            <a:r>
-              <a:rPr sz="3000" b="1" lang="ja-JP" altLang="en-US">
-                <a:solidFill>
-                  <a:srgbClr val="303437"/>
-                </a:solidFill>
-                <a:latin typeface="Noto Sans"/>
-                <a:ea typeface="Noto Sans CJK JP"/>
-                <a:cs typeface="Noto Sans"/>
-              </a:rPr>
-              <a:t>参考文献</a:t>
-            </a:r>
-          </a:p>
-        </p:txBody>
-      </p:sp>
-      <p:sp>
-        <p:nvSpPr>
-          <p:cNvPr id="4" name="Title 3"/>
-          <p:cNvSpPr>
-            <a:spLocks noGrp="1"/>
-          </p:cNvSpPr>
-          <p:nvPr>
-            <p:ph type="title" idx="2"/>
-          </p:nvPr>
-        </p:nvSpPr>
-        <p:spPr>
-          <a:xfrm>
-            <a:off x="75895" y="0"/>
-            <a:ext cx="8115300" cy="480060"/>
-          </a:xfrm>
-        </p:spPr>
-        <p:txBody>
-          <a:bodyPr wrap="square" lIns="0" rIns="0" tIns="0" bIns="0" anchor="ctr">
-            <a:noAutofit/>
-          </a:bodyPr>
-          <a:lstStyle/>
-          <a:p>
-            <a:pPr algn="l">
-              <a:lnSpc>
-                <a:spcPct val="110000"/>
-              </a:lnSpc>
-              <a:buNone/>
-              <a:defRPr sz="1400" b="0">
-                <a:solidFill>
-                  <a:srgbClr val="303437"/>
-                </a:solidFill>
-                <a:latin typeface="Noto Sans"/>
-              </a:defRPr>
-            </a:pPr>
-            <a:r>
-              <a:rPr sz="1400" b="1" lang="ja-JP" altLang="en-US">
-                <a:solidFill>
-                  <a:srgbClr val="FFFEF8"/>
-                </a:solidFill>
-                <a:latin typeface="Noto Sans"/>
-                <a:ea typeface="Noto Sans CJK JP"/>
-                <a:cs typeface="Noto Sans"/>
-              </a:rPr>
-              <a:t>Appendix: 目次</a:t>
-            </a:r>
-          </a:p>
-        </p:txBody>
-      </p:sp>
-    </p:spTree>
-  </p:cSld>
-  <p:clrMapOvr>
-    <a:masterClrMapping/>
-  </p:clrMapOvr>
-</p:sld>
-</file>
-
-<file path=ppt/slides/slide32.xml><?xml version="1.0" encoding="utf-8"?>
+<file path=ppt/slides/slide28.xml><?xml version="1.0" encoding="utf-8"?>
 <p:sld xmlns:a="http://schemas.openxmlformats.org/drawingml/2006/main" xmlns:p="http://schemas.openxmlformats.org/presentationml/2006/main" xmlns:r="http://schemas.openxmlformats.org/officeDocument/2006/relationships">
   <p:cSld>
     <p:spTree>
@@ -15473,7 +14848,7 @@
 </p:sld>
 </file>
 
-<file path=ppt/slides/slide33.xml><?xml version="1.0" encoding="utf-8"?>
+<file path=ppt/slides/slide29.xml><?xml version="1.0" encoding="utf-8"?>
 <p:sld xmlns:a="http://schemas.openxmlformats.org/drawingml/2006/main" xmlns:p="http://schemas.openxmlformats.org/presentationml/2006/main" xmlns:r="http://schemas.openxmlformats.org/officeDocument/2006/relationships">
   <p:cSld>
     <p:spTree>
@@ -16211,7 +15586,264 @@
 </p:sld>
 </file>
 
-<file path=ppt/slides/slide34.xml><?xml version="1.0" encoding="utf-8"?>
+<file path=ppt/slides/slide3.xml><?xml version="1.0" encoding="utf-8"?>
+<p:sld xmlns:a="http://schemas.openxmlformats.org/drawingml/2006/main" xmlns:p="http://schemas.openxmlformats.org/presentationml/2006/main" xmlns:r="http://schemas.openxmlformats.org/officeDocument/2006/relationships">
+  <p:cSld>
+    <p:spTree>
+      <p:nvGrpSpPr>
+        <p:cNvPr id="1" name=""/>
+        <p:cNvGrpSpPr/>
+        <p:nvPr/>
+      </p:nvGrpSpPr>
+      <p:grpSpPr/>
+      <p:sp>
+        <p:nvSpPr>
+          <p:cNvPr id="2" name="Title 1"/>
+          <p:cNvSpPr>
+            <a:spLocks noGrp="1"/>
+          </p:cNvSpPr>
+          <p:nvPr>
+            <p:ph type="title"/>
+          </p:nvPr>
+        </p:nvSpPr>
+        <p:spPr>
+          <a:xfrm>
+            <a:off x="468172" y="650138"/>
+            <a:ext cx="8206740" cy="616305"/>
+          </a:xfrm>
+        </p:spPr>
+        <p:txBody>
+          <a:bodyPr wrap="square" lIns="0" rIns="0" tIns="0" bIns="0">
+            <a:noAutofit/>
+          </a:bodyPr>
+          <a:lstStyle/>
+          <a:p>
+            <a:pPr algn="l">
+              <a:lnSpc>
+                <a:spcPct val="110000"/>
+              </a:lnSpc>
+              <a:buNone/>
+              <a:defRPr sz="2800" b="0">
+                <a:solidFill>
+                  <a:srgbClr val="303437"/>
+                </a:solidFill>
+                <a:latin typeface="Noto Sans"/>
+              </a:defRPr>
+            </a:pPr>
+            <a:r>
+              <a:rPr sz="2800" b="1" lang="ja-JP" altLang="en-US">
+                <a:solidFill>
+                  <a:srgbClr val="303437"/>
+                </a:solidFill>
+                <a:latin typeface="Noto Sans"/>
+                <a:ea typeface="Noto Sans CJK JP"/>
+                <a:cs typeface="Noto Sans"/>
+              </a:rPr>
+              <a:t/>
+            </a:r>
+          </a:p>
+        </p:txBody>
+      </p:sp>
+      <p:sp>
+        <p:nvSpPr>
+          <p:cNvPr id="3" name="Text Placeholder 2"/>
+          <p:cNvSpPr>
+            <a:spLocks noGrp="1"/>
+          </p:cNvSpPr>
+          <p:nvPr>
+            <p:ph type="body" idx="1"/>
+          </p:nvPr>
+        </p:nvSpPr>
+        <p:spPr>
+          <a:xfrm>
+            <a:off x="640080" y="1663901"/>
+            <a:ext cx="7863840" cy="2362199"/>
+          </a:xfrm>
+        </p:spPr>
+        <p:txBody>
+          <a:bodyPr lIns="0" rIns="0" tIns="0" bIns="0">
+            <a:noAutofit/>
+          </a:bodyPr>
+          <a:lstStyle/>
+          <a:p>
+            <a:pPr marL="457200" indent="-457200">
+              <a:lnSpc>
+                <a:spcPts val="3660"/>
+              </a:lnSpc>
+              <a:spcAft>
+                <a:spcPts val="1200"/>
+              </a:spcAft>
+              <a:buSzPct val="100000"/>
+              <a:buFont typeface="Noto Sans CJK JP"/>
+              <a:buAutoNum type="arabicPeriod" startAt="1"/>
+              <a:defRPr sz="3000" b="1">
+                <a:solidFill>
+                  <a:srgbClr val="303437"/>
+                </a:solidFill>
+                <a:latin typeface="Noto Sans"/>
+              </a:defRPr>
+            </a:pPr>
+            <a:r>
+              <a:rPr sz="3000" b="1" lang="ja-JP" altLang="en-US">
+                <a:solidFill>
+                  <a:srgbClr val="303437"/>
+                </a:solidFill>
+                <a:latin typeface="Noto Sans"/>
+                <a:ea typeface="Noto Sans CJK JP"/>
+                <a:cs typeface="Noto Sans"/>
+              </a:rPr>
+              <a:t>現代語の説明から古典詩句を選ぶ</a:t>
+            </a:r>
+          </a:p>
+          <a:p>
+            <a:pPr marL="457200" indent="-457200">
+              <a:lnSpc>
+                <a:spcPts val="3660"/>
+              </a:lnSpc>
+              <a:spcAft>
+                <a:spcPts val="1200"/>
+              </a:spcAft>
+              <a:buSzPct val="100000"/>
+              <a:buFont typeface="Noto Sans CJK JP"/>
+              <a:buAutoNum type="arabicPeriod" startAt="2"/>
+              <a:defRPr sz="3000" b="1">
+                <a:solidFill>
+                  <a:srgbClr val="303437"/>
+                </a:solidFill>
+                <a:latin typeface="Noto Sans"/>
+              </a:defRPr>
+            </a:pPr>
+            <a:r>
+              <a:rPr sz="3000" b="1" lang="ja-JP" altLang="en-US">
+                <a:solidFill>
+                  <a:srgbClr val="303437"/>
+                </a:solidFill>
+                <a:latin typeface="Noto Sans"/>
+                <a:ea typeface="Noto Sans CJK JP"/>
+                <a:cs typeface="Noto Sans"/>
+              </a:rPr>
+              <a:t>対訳と似た詩句から問題を作る</a:t>
+            </a:r>
+          </a:p>
+          <a:p>
+            <a:pPr marL="457200" indent="-457200">
+              <a:lnSpc>
+                <a:spcPts val="3660"/>
+              </a:lnSpc>
+              <a:spcAft>
+                <a:spcPts val="1200"/>
+              </a:spcAft>
+              <a:buSzPct val="100000"/>
+              <a:buFont typeface="Noto Sans CJK JP"/>
+              <a:buAutoNum type="arabicPeriod" startAt="3"/>
+              <a:defRPr sz="3000" b="1">
+                <a:solidFill>
+                  <a:srgbClr val="303437"/>
+                </a:solidFill>
+                <a:latin typeface="Noto Sans"/>
+              </a:defRPr>
+            </a:pPr>
+            <a:r>
+              <a:rPr sz="3000" b="1" lang="ja-JP" altLang="en-US">
+                <a:solidFill>
+                  <a:srgbClr val="303437"/>
+                </a:solidFill>
+                <a:latin typeface="Noto Sans"/>
+                <a:ea typeface="Noto Sans CJK JP"/>
+                <a:cs typeface="Noto Sans"/>
+              </a:rPr>
+              <a:t>正解率で意味の対応を評価する</a:t>
+            </a:r>
+          </a:p>
+          <a:p>
+            <a:pPr marL="457200" indent="-457200">
+              <a:lnSpc>
+                <a:spcPts val="3660"/>
+              </a:lnSpc>
+              <a:spcAft>
+                <a:spcPts val="0"/>
+              </a:spcAft>
+              <a:buSzPct val="100000"/>
+              <a:buFont typeface="Noto Sans CJK JP"/>
+              <a:buAutoNum type="arabicPeriod" startAt="4"/>
+              <a:defRPr sz="3000" b="1">
+                <a:solidFill>
+                  <a:srgbClr val="303437"/>
+                </a:solidFill>
+                <a:latin typeface="Noto Sans"/>
+              </a:defRPr>
+            </a:pPr>
+            <a:r>
+              <a:rPr sz="3000" b="1" lang="ja-JP" altLang="en-US">
+                <a:solidFill>
+                  <a:srgbClr val="303437"/>
+                </a:solidFill>
+                <a:latin typeface="Noto Sans"/>
+                <a:ea typeface="Noto Sans CJK JP"/>
+                <a:cs typeface="Noto Sans"/>
+              </a:rPr>
+              <a:t>公開配布と利用条件</a:t>
+            </a:r>
+          </a:p>
+        </p:txBody>
+      </p:sp>
+      <p:sp>
+        <p:nvSpPr>
+          <p:cNvPr id="4" name="Title 3"/>
+          <p:cNvSpPr>
+            <a:spLocks noGrp="1"/>
+          </p:cNvSpPr>
+          <p:nvPr>
+            <p:ph type="title" idx="2"/>
+          </p:nvPr>
+        </p:nvSpPr>
+        <p:spPr>
+          <a:xfrm>
+            <a:off x="75895" y="0"/>
+            <a:ext cx="8115300" cy="480060"/>
+          </a:xfrm>
+        </p:spPr>
+        <p:txBody>
+          <a:bodyPr wrap="square" lIns="0" rIns="0" tIns="0" bIns="0" anchor="ctr">
+            <a:noAutofit/>
+          </a:bodyPr>
+          <a:lstStyle/>
+          <a:p>
+            <a:pPr algn="l">
+              <a:lnSpc>
+                <a:spcPct val="110000"/>
+              </a:lnSpc>
+              <a:buNone/>
+              <a:defRPr sz="1400" b="0">
+                <a:solidFill>
+                  <a:srgbClr val="303437"/>
+                </a:solidFill>
+                <a:latin typeface="Noto Sans"/>
+              </a:defRPr>
+            </a:pPr>
+            <a:r>
+              <a:rPr sz="1400" b="1" lang="ja-JP" altLang="en-US">
+                <a:solidFill>
+                  <a:srgbClr val="FFFEF8"/>
+                </a:solidFill>
+                <a:latin typeface="Noto Sans"/>
+                <a:ea typeface="Noto Sans CJK JP"/>
+                <a:cs typeface="Noto Sans"/>
+              </a:rPr>
+              <a:t>目次</a:t>
+            </a:r>
+          </a:p>
+        </p:txBody>
+      </p:sp>
+    </p:spTree>
+  </p:cSld>
+  <p:clrMapOvr>
+    <a:masterClrMapping/>
+  </p:clrMapOvr>
+</p:sld>
+</file>
+
+<file path=ppt/slides/slide30.xml><?xml version="1.0" encoding="utf-8"?>
 <p:sld xmlns:a="http://schemas.openxmlformats.org/drawingml/2006/main" xmlns:p="http://schemas.openxmlformats.org/presentationml/2006/main" xmlns:r="http://schemas.openxmlformats.org/officeDocument/2006/relationships">
   <p:cSld>
     <p:spTree>
@@ -16949,7 +16581,7 @@
 </p:sld>
 </file>
 
-<file path=ppt/slides/slide35.xml><?xml version="1.0" encoding="utf-8"?>
+<file path=ppt/slides/slide31.xml><?xml version="1.0" encoding="utf-8"?>
 <p:sld xmlns:a="http://schemas.openxmlformats.org/drawingml/2006/main" xmlns:p="http://schemas.openxmlformats.org/presentationml/2006/main" xmlns:r="http://schemas.openxmlformats.org/officeDocument/2006/relationships">
   <p:cSld>
     <p:spTree>
@@ -17687,7 +17319,7 @@
 </p:sld>
 </file>
 
-<file path=ppt/slides/slide36.xml><?xml version="1.0" encoding="utf-8"?>
+<file path=ppt/slides/slide32.xml><?xml version="1.0" encoding="utf-8"?>
 <p:sld xmlns:a="http://schemas.openxmlformats.org/drawingml/2006/main" xmlns:p="http://schemas.openxmlformats.org/presentationml/2006/main" xmlns:r="http://schemas.openxmlformats.org/officeDocument/2006/relationships">
   <p:cSld>
     <p:spTree>
@@ -18425,7 +18057,7 @@
 </p:sld>
 </file>
 
-<file path=ppt/slides/slide37.xml><?xml version="1.0" encoding="utf-8"?>
+<file path=ppt/slides/slide33.xml><?xml version="1.0" encoding="utf-8"?>
 <p:sld xmlns:a="http://schemas.openxmlformats.org/drawingml/2006/main" xmlns:p="http://schemas.openxmlformats.org/presentationml/2006/main" xmlns:r="http://schemas.openxmlformats.org/officeDocument/2006/relationships">
   <p:cSld>
     <p:spTree>
@@ -19163,7 +18795,7 @@
 </p:sld>
 </file>
 
-<file path=ppt/slides/slide38.xml><?xml version="1.0" encoding="utf-8"?>
+<file path=ppt/slides/slide34.xml><?xml version="1.0" encoding="utf-8"?>
 <p:sld xmlns:a="http://schemas.openxmlformats.org/drawingml/2006/main" xmlns:p="http://schemas.openxmlformats.org/presentationml/2006/main" xmlns:r="http://schemas.openxmlformats.org/officeDocument/2006/relationships">
   <p:cSld>
     <p:spTree>
@@ -19901,7 +19533,7 @@
 </p:sld>
 </file>
 
-<file path=ppt/slides/slide39.xml><?xml version="1.0" encoding="utf-8"?>
+<file path=ppt/slides/slide35.xml><?xml version="1.0" encoding="utf-8"?>
 <p:sld xmlns:a="http://schemas.openxmlformats.org/drawingml/2006/main" xmlns:p="http://schemas.openxmlformats.org/presentationml/2006/main" xmlns:r="http://schemas.openxmlformats.org/officeDocument/2006/relationships">
   <p:cSld>
     <p:spTree>
@@ -20639,121 +20271,7 @@
 </p:sld>
 </file>
 
-<file path=ppt/slides/slide4.xml><?xml version="1.0" encoding="utf-8"?>
-<p:sld xmlns:a="http://schemas.openxmlformats.org/drawingml/2006/main" xmlns:p="http://schemas.openxmlformats.org/presentationml/2006/main" xmlns:r="http://schemas.openxmlformats.org/officeDocument/2006/relationships">
-  <p:cSld>
-    <p:spTree>
-      <p:nvGrpSpPr>
-        <p:cNvPr id="1" name=""/>
-        <p:cNvGrpSpPr/>
-        <p:nvPr/>
-      </p:nvGrpSpPr>
-      <p:grpSpPr/>
-      <p:sp>
-        <p:nvSpPr>
-          <p:cNvPr id="2" name="Title 1"/>
-          <p:cNvSpPr>
-            <a:spLocks noGrp="1"/>
-          </p:cNvSpPr>
-          <p:nvPr>
-            <p:ph type="title"/>
-          </p:nvPr>
-        </p:nvSpPr>
-        <p:spPr>
-          <a:xfrm>
-            <a:off x="548640" y="2506875"/>
-            <a:ext cx="8046720" cy="585216"/>
-          </a:xfrm>
-        </p:spPr>
-        <p:txBody>
-          <a:bodyPr wrap="square" lIns="0" rIns="0" tIns="0" bIns="0" anchor="ctr">
-            <a:noAutofit/>
-          </a:bodyPr>
-          <a:lstStyle/>
-          <a:p>
-            <a:pPr algn="ctr">
-              <a:lnSpc>
-                <a:spcPct val="110000"/>
-              </a:lnSpc>
-              <a:buNone/>
-              <a:defRPr sz="3600" b="0">
-                <a:solidFill>
-                  <a:srgbClr val="303437"/>
-                </a:solidFill>
-                <a:latin typeface="Noto Sans"/>
-              </a:defRPr>
-            </a:pPr>
-            <a:r>
-              <a:rPr sz="3600" b="1" lang="ja-JP" altLang="en-US">
-                <a:solidFill>
-                  <a:srgbClr val="303437"/>
-                </a:solidFill>
-                <a:latin typeface="Noto Sans"/>
-                <a:ea typeface="Noto Sans CJK JP"/>
-                <a:cs typeface="Noto Sans"/>
-              </a:rPr>
-              <a:t>現代語の説明から古典詩句を選ぶ</a:t>
-            </a:r>
-          </a:p>
-        </p:txBody>
-      </p:sp>
-      <p:sp>
-        <p:nvSpPr>
-          <p:cNvPr id="3" name="Title 2"/>
-          <p:cNvSpPr>
-            <a:spLocks noGrp="1"/>
-          </p:cNvSpPr>
-          <p:nvPr>
-            <p:ph type="title" idx="2"/>
-          </p:nvPr>
-        </p:nvSpPr>
-        <p:spPr>
-          <a:xfrm>
-            <a:off x="75895" y="0"/>
-            <a:ext cx="8115300" cy="480060"/>
-          </a:xfrm>
-        </p:spPr>
-        <p:txBody>
-          <a:bodyPr wrap="square" lIns="0" rIns="0" tIns="0" bIns="0" anchor="ctr">
-            <a:noAutofit/>
-          </a:bodyPr>
-          <a:lstStyle/>
-          <a:p>
-            <a:pPr algn="l">
-              <a:lnSpc>
-                <a:spcPct val="110000"/>
-              </a:lnSpc>
-              <a:buNone/>
-              <a:defRPr sz="1400" b="0">
-                <a:solidFill>
-                  <a:srgbClr val="303437"/>
-                </a:solidFill>
-                <a:latin typeface="Noto Sans"/>
-              </a:defRPr>
-            </a:pPr>
-            <a:r>
-              <a:rPr sz="1400" b="1" lang="ja-JP" altLang="en-US">
-                <a:solidFill>
-                  <a:srgbClr val="FFFEF8"/>
-                </a:solidFill>
-                <a:latin typeface="Noto Sans"/>
-                <a:ea typeface="Noto Sans CJK JP"/>
-                <a:cs typeface="Noto Sans"/>
-              </a:rPr>
-              <a:t>1. 現代語の説明から古典詩句を選ぶ</a:t>
-            </a:r>
-          </a:p>
-        </p:txBody>
-      </p:sp>
-    </p:spTree>
-  </p:cSld>
-  <p:clrMapOvr>
-    <a:masterClrMapping/>
-  </p:clrMapOvr>
-</p:sld>
-</file>
-
-<file path=ppt/slides/slide40.xml><?xml version="1.0" encoding="utf-8"?>
+<file path=ppt/slides/slide36.xml><?xml version="1.0" encoding="utf-8"?>
 <p:sld xmlns:a="http://schemas.openxmlformats.org/drawingml/2006/main" xmlns:p="http://schemas.openxmlformats.org/presentationml/2006/main" xmlns:r="http://schemas.openxmlformats.org/officeDocument/2006/relationships">
   <p:cSld>
     <p:spTree>
@@ -21491,7 +21009,7 @@
 </p:sld>
 </file>
 
-<file path=ppt/slides/slide41.xml><?xml version="1.0" encoding="utf-8"?>
+<file path=ppt/slides/slide37.xml><?xml version="1.0" encoding="utf-8"?>
 <p:sld xmlns:a="http://schemas.openxmlformats.org/drawingml/2006/main" xmlns:p="http://schemas.openxmlformats.org/presentationml/2006/main" xmlns:r="http://schemas.openxmlformats.org/officeDocument/2006/relationships">
   <p:cSld>
     <p:spTree>
@@ -22229,7 +21747,7 @@
 </p:sld>
 </file>
 
-<file path=ppt/slides/slide42.xml><?xml version="1.0" encoding="utf-8"?>
+<file path=ppt/slides/slide38.xml><?xml version="1.0" encoding="utf-8"?>
 <p:sld xmlns:a="http://schemas.openxmlformats.org/drawingml/2006/main" xmlns:p="http://schemas.openxmlformats.org/presentationml/2006/main" xmlns:r="http://schemas.openxmlformats.org/officeDocument/2006/relationships">
   <p:cSld>
     <p:spTree>
@@ -22343,7 +21861,7 @@
 </p:sld>
 </file>
 
-<file path=ppt/slides/slide43.xml><?xml version="1.0" encoding="utf-8"?>
+<file path=ppt/slides/slide39.xml><?xml version="1.0" encoding="utf-8"?>
 <p:sld xmlns:a="http://schemas.openxmlformats.org/drawingml/2006/main" xmlns:p="http://schemas.openxmlformats.org/presentationml/2006/main" xmlns:r="http://schemas.openxmlformats.org/officeDocument/2006/relationships">
   <p:cSld>
     <p:spTree>
@@ -23502,7 +23020,7 @@
                 <a:ea typeface="Noto Sans CJK JP"/>
                 <a:cs typeface="Noto Sans"/>
               </a:rPr>
-              <a:t>候補の組1が、実例2とCLEVA論文に掲載された問題。</a:t>
+              <a:t>候補の組1が実例2の問題。</a:t>
             </a:r>
           </a:p>
         </p:txBody>
@@ -23581,7 +23099,121 @@
 </p:sld>
 </file>
 
-<file path=ppt/slides/slide45.xml><?xml version="1.0" encoding="utf-8"?>
+<file path=ppt/slides/slide4.xml><?xml version="1.0" encoding="utf-8"?>
+<p:sld xmlns:a="http://schemas.openxmlformats.org/drawingml/2006/main" xmlns:p="http://schemas.openxmlformats.org/presentationml/2006/main" xmlns:r="http://schemas.openxmlformats.org/officeDocument/2006/relationships">
+  <p:cSld>
+    <p:spTree>
+      <p:nvGrpSpPr>
+        <p:cNvPr id="1" name=""/>
+        <p:cNvGrpSpPr/>
+        <p:nvPr/>
+      </p:nvGrpSpPr>
+      <p:grpSpPr/>
+      <p:sp>
+        <p:nvSpPr>
+          <p:cNvPr id="2" name="Title 1"/>
+          <p:cNvSpPr>
+            <a:spLocks noGrp="1"/>
+          </p:cNvSpPr>
+          <p:nvPr>
+            <p:ph type="title"/>
+          </p:nvPr>
+        </p:nvSpPr>
+        <p:spPr>
+          <a:xfrm>
+            <a:off x="548640" y="2506875"/>
+            <a:ext cx="8046720" cy="585216"/>
+          </a:xfrm>
+        </p:spPr>
+        <p:txBody>
+          <a:bodyPr wrap="square" lIns="0" rIns="0" tIns="0" bIns="0" anchor="ctr">
+            <a:noAutofit/>
+          </a:bodyPr>
+          <a:lstStyle/>
+          <a:p>
+            <a:pPr algn="ctr">
+              <a:lnSpc>
+                <a:spcPct val="110000"/>
+              </a:lnSpc>
+              <a:buNone/>
+              <a:defRPr sz="3600" b="0">
+                <a:solidFill>
+                  <a:srgbClr val="303437"/>
+                </a:solidFill>
+                <a:latin typeface="Noto Sans"/>
+              </a:defRPr>
+            </a:pPr>
+            <a:r>
+              <a:rPr sz="3600" b="1" lang="ja-JP" altLang="en-US">
+                <a:solidFill>
+                  <a:srgbClr val="303437"/>
+                </a:solidFill>
+                <a:latin typeface="Noto Sans"/>
+                <a:ea typeface="Noto Sans CJK JP"/>
+                <a:cs typeface="Noto Sans"/>
+              </a:rPr>
+              <a:t>現代語の説明から古典詩句を選ぶ</a:t>
+            </a:r>
+          </a:p>
+        </p:txBody>
+      </p:sp>
+      <p:sp>
+        <p:nvSpPr>
+          <p:cNvPr id="3" name="Title 2"/>
+          <p:cNvSpPr>
+            <a:spLocks noGrp="1"/>
+          </p:cNvSpPr>
+          <p:nvPr>
+            <p:ph type="title" idx="2"/>
+          </p:nvPr>
+        </p:nvSpPr>
+        <p:spPr>
+          <a:xfrm>
+            <a:off x="75895" y="0"/>
+            <a:ext cx="8115300" cy="480060"/>
+          </a:xfrm>
+        </p:spPr>
+        <p:txBody>
+          <a:bodyPr wrap="square" lIns="0" rIns="0" tIns="0" bIns="0" anchor="ctr">
+            <a:noAutofit/>
+          </a:bodyPr>
+          <a:lstStyle/>
+          <a:p>
+            <a:pPr algn="l">
+              <a:lnSpc>
+                <a:spcPct val="110000"/>
+              </a:lnSpc>
+              <a:buNone/>
+              <a:defRPr sz="1400" b="0">
+                <a:solidFill>
+                  <a:srgbClr val="303437"/>
+                </a:solidFill>
+                <a:latin typeface="Noto Sans"/>
+              </a:defRPr>
+            </a:pPr>
+            <a:r>
+              <a:rPr sz="1400" b="1" lang="ja-JP" altLang="en-US">
+                <a:solidFill>
+                  <a:srgbClr val="FFFEF8"/>
+                </a:solidFill>
+                <a:latin typeface="Noto Sans"/>
+                <a:ea typeface="Noto Sans CJK JP"/>
+                <a:cs typeface="Noto Sans"/>
+              </a:rPr>
+              <a:t>1. 現代語の説明から古典詩句を選ぶ</a:t>
+            </a:r>
+          </a:p>
+        </p:txBody>
+      </p:sp>
+    </p:spTree>
+  </p:cSld>
+  <p:clrMapOvr>
+    <a:masterClrMapping/>
+  </p:clrMapOvr>
+</p:sld>
+</file>
+
+<file path=ppt/slides/slide40.xml><?xml version="1.0" encoding="utf-8"?>
 <p:sld xmlns:a="http://schemas.openxmlformats.org/drawingml/2006/main" xmlns:p="http://schemas.openxmlformats.org/presentationml/2006/main" xmlns:r="http://schemas.openxmlformats.org/officeDocument/2006/relationships">
   <p:cSld>
     <p:spTree>
@@ -24582,6 +24214,1578 @@
 </p:sld>
 </file>
 
+<file path=ppt/slides/slide41.xml><?xml version="1.0" encoding="utf-8"?>
+<p:sld xmlns:a="http://schemas.openxmlformats.org/drawingml/2006/main" xmlns:p="http://schemas.openxmlformats.org/presentationml/2006/main" xmlns:r="http://schemas.openxmlformats.org/officeDocument/2006/relationships">
+  <p:cSld>
+    <p:spTree>
+      <p:nvGrpSpPr>
+        <p:cNvPr id="1" name=""/>
+        <p:cNvGrpSpPr/>
+        <p:nvPr/>
+      </p:nvGrpSpPr>
+      <p:grpSpPr/>
+      <p:sp>
+        <p:nvSpPr>
+          <p:cNvPr id="2" name="Title 1"/>
+          <p:cNvSpPr>
+            <a:spLocks noGrp="1"/>
+          </p:cNvSpPr>
+          <p:nvPr>
+            <p:ph type="title"/>
+          </p:nvPr>
+        </p:nvSpPr>
+        <p:spPr>
+          <a:xfrm>
+            <a:off x="468172" y="650138"/>
+            <a:ext cx="8206740" cy="616305"/>
+          </a:xfrm>
+        </p:spPr>
+        <p:txBody>
+          <a:bodyPr wrap="square" lIns="0" rIns="0" tIns="0" bIns="0">
+            <a:noAutofit/>
+          </a:bodyPr>
+          <a:lstStyle/>
+          <a:p>
+            <a:pPr algn="l">
+              <a:lnSpc>
+                <a:spcPct val="110000"/>
+              </a:lnSpc>
+              <a:buNone/>
+              <a:defRPr sz="2800" b="0">
+                <a:solidFill>
+                  <a:srgbClr val="303437"/>
+                </a:solidFill>
+                <a:latin typeface="Noto Sans"/>
+              </a:defRPr>
+            </a:pPr>
+            <a:r>
+              <a:rPr sz="2800" b="1" lang="ja-JP" altLang="en-US">
+                <a:solidFill>
+                  <a:srgbClr val="303437"/>
+                </a:solidFill>
+                <a:latin typeface="Noto Sans"/>
+                <a:ea typeface="Noto Sans CJK JP"/>
+                <a:cs typeface="Noto Sans"/>
+              </a:rPr>
+              <a:t>一部の問題には、説明の欠落や形式の例外がある</a:t>
+            </a:r>
+          </a:p>
+        </p:txBody>
+      </p:sp>
+      <p:sp>
+        <p:nvSpPr>
+          <p:cNvPr id="3" name="Text Placeholder 2"/>
+          <p:cNvSpPr>
+            <a:spLocks noGrp="1"/>
+          </p:cNvSpPr>
+          <p:nvPr>
+            <p:ph type="body" idx="1"/>
+          </p:nvPr>
+        </p:nvSpPr>
+        <p:spPr>
+          <a:xfrm>
+            <a:off x="594360" y="1463040"/>
+            <a:ext cx="7955279" cy="3044952"/>
+          </a:xfrm>
+        </p:spPr>
+        <p:txBody>
+          <a:bodyPr wrap="square" tIns="91440" bIns="91440">
+            <a:noAutofit/>
+          </a:bodyPr>
+          <a:lstStyle/>
+          <a:p>
+            <a:pPr marL="457200" indent="-355600">
+              <a:lnSpc>
+                <a:spcPts val="2320"/>
+              </a:lnSpc>
+              <a:spcAft>
+                <a:spcPts val="700"/>
+              </a:spcAft>
+              <a:buSzPct val="68205"/>
+              <a:buFont typeface="Noto Sans CJK JP"/>
+              <a:buChar char="●"/>
+              <a:defRPr sz="1950" b="0">
+                <a:solidFill>
+                  <a:srgbClr val="303437"/>
+                </a:solidFill>
+                <a:latin typeface="Noto Sans"/>
+              </a:defRPr>
+            </a:pPr>
+            <a:r>
+              <a:rPr sz="1950" b="0" lang="ja-JP" altLang="en-US">
+                <a:solidFill>
+                  <a:srgbClr val="303437"/>
+                </a:solidFill>
+                <a:latin typeface="Noto Sans"/>
+                <a:ea typeface="Noto Sans CJK JP"/>
+                <a:cs typeface="Noto Sans"/>
+              </a:rPr>
+              <a:t>公開テストには、説明が空の問題が1問ある。四候補は残っているが、説明との意味対応を評価するための入力が欠けている。</a:t>
+            </a:r>
+          </a:p>
+          <a:p>
+            <a:pPr marL="457200" indent="-355600">
+              <a:lnSpc>
+                <a:spcPts val="2320"/>
+              </a:lnSpc>
+              <a:spcAft>
+                <a:spcPts val="0"/>
+              </a:spcAft>
+              <a:buSzPct val="68205"/>
+              <a:buFont typeface="Noto Sans CJK JP"/>
+              <a:buChar char="●"/>
+              <a:defRPr sz="1950" b="0">
+                <a:solidFill>
+                  <a:srgbClr val="303437"/>
+                </a:solidFill>
+                <a:latin typeface="Noto Sans"/>
+              </a:defRPr>
+            </a:pPr>
+            <a:r>
+              <a:rPr sz="1950" b="0" lang="ja-JP" altLang="en-US">
+                <a:solidFill>
+                  <a:srgbClr val="303437"/>
+                </a:solidFill>
+                <a:latin typeface="Noto Sans"/>
+                <a:ea typeface="Noto Sans CJK JP"/>
+                <a:cs typeface="Noto Sans"/>
+              </a:rPr>
+              <a:t>五言・七言の詩型に当てはまらない文や、特殊な漢字表記を含む問題もある。</a:t>
+            </a:r>
+          </a:p>
+          <a:p>
+            <a:pPr marL="457200" indent="-355600">
+              <a:lnSpc>
+                <a:spcPts val="2320"/>
+              </a:lnSpc>
+              <a:spcAft>
+                <a:spcPts val="0"/>
+              </a:spcAft>
+              <a:buSzPct val="68205"/>
+              <a:buFont typeface="Noto Sans CJK JP"/>
+              <a:buChar char="●"/>
+              <a:defRPr sz="1950" b="0">
+                <a:solidFill>
+                  <a:srgbClr val="303437"/>
+                </a:solidFill>
+                <a:latin typeface="Noto Sans"/>
+              </a:defRPr>
+            </a:pPr>
+            <a:r>
+              <a:rPr sz="1950" b="0" lang="ja-JP" altLang="en-US">
+                <a:solidFill>
+                  <a:srgbClr val="303437"/>
+                </a:solidFill>
+                <a:latin typeface="Noto Sans"/>
+                <a:ea typeface="Noto Sans CJK JP"/>
+                <a:cs typeface="Noto Sans"/>
+              </a:rPr>
+              <a:t>学習と公開テストで、説明と四候補が一致する問題が1問ある。</a:t>
+            </a:r>
+          </a:p>
+        </p:txBody>
+      </p:sp>
+      <p:sp>
+        <p:nvSpPr>
+          <p:cNvPr id="4" name="Title 3"/>
+          <p:cNvSpPr>
+            <a:spLocks noGrp="1"/>
+          </p:cNvSpPr>
+          <p:nvPr>
+            <p:ph type="title" idx="2"/>
+          </p:nvPr>
+        </p:nvSpPr>
+        <p:spPr>
+          <a:xfrm>
+            <a:off x="75895" y="0"/>
+            <a:ext cx="8115300" cy="480060"/>
+          </a:xfrm>
+        </p:spPr>
+        <p:txBody>
+          <a:bodyPr wrap="square" lIns="0" rIns="0" tIns="0" bIns="0" anchor="ctr">
+            <a:noAutofit/>
+          </a:bodyPr>
+          <a:lstStyle/>
+          <a:p>
+            <a:pPr algn="l">
+              <a:lnSpc>
+                <a:spcPct val="110000"/>
+              </a:lnSpc>
+              <a:buNone/>
+              <a:defRPr sz="1400" b="0">
+                <a:solidFill>
+                  <a:srgbClr val="303437"/>
+                </a:solidFill>
+                <a:latin typeface="Noto Sans"/>
+              </a:defRPr>
+            </a:pPr>
+            <a:r>
+              <a:rPr sz="1400" b="1" lang="ja-JP" altLang="en-US">
+                <a:solidFill>
+                  <a:srgbClr val="FFFEF8"/>
+                </a:solidFill>
+                <a:latin typeface="Noto Sans"/>
+                <a:ea typeface="Noto Sans CJK JP"/>
+                <a:cs typeface="Noto Sans"/>
+              </a:rPr>
+              <a:t>Appendix: 2. 入力形式と詩句の読み方</a:t>
+            </a:r>
+          </a:p>
+        </p:txBody>
+      </p:sp>
+      <p:sp>
+        <p:nvSpPr>
+          <p:cNvPr id="5" name="sources"/>
+          <p:cNvSpPr txBox="1"/>
+          <p:nvPr/>
+        </p:nvSpPr>
+        <p:spPr>
+          <a:xfrm>
+            <a:off x="502920" y="4700016"/>
+            <a:ext cx="8183879" cy="530352"/>
+          </a:xfrm>
+          <a:prstGeom prst="rect">
+            <a:avLst/>
+          </a:prstGeom>
+          <a:noFill/>
+        </p:spPr>
+        <p:txBody>
+          <a:bodyPr wrap="square" lIns="0" rIns="0" tIns="0" bIns="0">
+            <a:noAutofit/>
+          </a:bodyPr>
+          <a:lstStyle/>
+          <a:p>
+            <a:pPr algn="l">
+              <a:lnSpc>
+                <a:spcPts val="940"/>
+              </a:lnSpc>
+              <a:spcBef>
+                <a:spcPts val="0"/>
+              </a:spcBef>
+              <a:spcAft>
+                <a:spcPts val="140"/>
+              </a:spcAft>
+              <a:buNone/>
+              <a:defRPr sz="810" b="0">
+                <a:solidFill>
+                  <a:srgbClr val="303437"/>
+                </a:solidFill>
+                <a:latin typeface="Noto Sans"/>
+              </a:defRPr>
+            </a:pPr>
+            <a:r>
+              <a:rPr sz="810" b="0" lang="ja-JP" altLang="en-US">
+                <a:solidFill>
+                  <a:srgbClr val="626669"/>
+                </a:solidFill>
+                <a:latin typeface="Noto Sans"/>
+                <a:ea typeface="Noto Sans CJK JP"/>
+                <a:cs typeface="Noto Sans"/>
+              </a:rPr>
+              <a:t>[1] THUNLP-AIPoet (2021). CCPM.  </a:t>
+            </a:r>
+            <a:r>
+              <a:rPr sz="810" b="0" lang="ja-JP" altLang="en-US">
+                <a:solidFill>
+                  <a:srgbClr val="626669"/>
+                </a:solidFill>
+                <a:latin typeface="Noto Sans"/>
+                <a:ea typeface="Noto Sans CJK JP"/>
+                <a:cs typeface="Noto Sans"/>
+                <a:hlinkClick r:id="rId2"/>
+              </a:rPr>
+              <a:t>https://github.com/THUNLP-AIPoet/CCPM</a:t>
+            </a:r>
+          </a:p>
+        </p:txBody>
+      </p:sp>
+    </p:spTree>
+  </p:cSld>
+  <p:clrMapOvr>
+    <a:masterClrMapping/>
+  </p:clrMapOvr>
+</p:sld>
+</file>
+
+<file path=ppt/slides/slide42.xml><?xml version="1.0" encoding="utf-8"?>
+<p:sld xmlns:a="http://schemas.openxmlformats.org/drawingml/2006/main" xmlns:p="http://schemas.openxmlformats.org/presentationml/2006/main" xmlns:r="http://schemas.openxmlformats.org/officeDocument/2006/relationships">
+  <p:cSld>
+    <p:spTree>
+      <p:nvGrpSpPr>
+        <p:cNvPr id="1" name=""/>
+        <p:cNvGrpSpPr/>
+        <p:nvPr/>
+      </p:nvGrpSpPr>
+      <p:grpSpPr/>
+      <p:sp>
+        <p:nvSpPr>
+          <p:cNvPr id="2" name="Title 1"/>
+          <p:cNvSpPr>
+            <a:spLocks noGrp="1"/>
+          </p:cNvSpPr>
+          <p:nvPr>
+            <p:ph type="title"/>
+          </p:nvPr>
+        </p:nvSpPr>
+        <p:spPr>
+          <a:xfrm>
+            <a:off x="468172" y="650138"/>
+            <a:ext cx="8206740" cy="616305"/>
+          </a:xfrm>
+        </p:spPr>
+        <p:txBody>
+          <a:bodyPr wrap="square" lIns="0" rIns="0" tIns="0" bIns="0">
+            <a:noAutofit/>
+          </a:bodyPr>
+          <a:lstStyle/>
+          <a:p>
+            <a:pPr algn="l">
+              <a:lnSpc>
+                <a:spcPct val="110000"/>
+              </a:lnSpc>
+              <a:buNone/>
+              <a:defRPr sz="2800" b="0">
+                <a:solidFill>
+                  <a:srgbClr val="303437"/>
+                </a:solidFill>
+                <a:latin typeface="Noto Sans"/>
+              </a:defRPr>
+            </a:pPr>
+            <a:r>
+              <a:rPr sz="2800" b="1" lang="ja-JP" altLang="en-US">
+                <a:solidFill>
+                  <a:srgbClr val="303437"/>
+                </a:solidFill>
+                <a:latin typeface="Noto Sans"/>
+                <a:ea typeface="Noto Sans CJK JP"/>
+                <a:cs typeface="Noto Sans"/>
+              </a:rPr>
+              <a:t>JSONLから問題文・候補・正解を読み出す</a:t>
+            </a:r>
+          </a:p>
+        </p:txBody>
+      </p:sp>
+      <p:sp>
+        <p:nvSpPr>
+          <p:cNvPr id="3" name="Title 2"/>
+          <p:cNvSpPr>
+            <a:spLocks noGrp="1"/>
+          </p:cNvSpPr>
+          <p:nvPr>
+            <p:ph type="title" idx="2"/>
+          </p:nvPr>
+        </p:nvSpPr>
+        <p:spPr>
+          <a:xfrm>
+            <a:off x="75895" y="0"/>
+            <a:ext cx="8115300" cy="480060"/>
+          </a:xfrm>
+        </p:spPr>
+        <p:txBody>
+          <a:bodyPr wrap="square" lIns="0" rIns="0" tIns="0" bIns="0" anchor="ctr">
+            <a:noAutofit/>
+          </a:bodyPr>
+          <a:lstStyle/>
+          <a:p>
+            <a:pPr algn="l">
+              <a:lnSpc>
+                <a:spcPct val="110000"/>
+              </a:lnSpc>
+              <a:buNone/>
+              <a:defRPr sz="1400" b="0">
+                <a:solidFill>
+                  <a:srgbClr val="303437"/>
+                </a:solidFill>
+                <a:latin typeface="Noto Sans"/>
+              </a:defRPr>
+            </a:pPr>
+            <a:r>
+              <a:rPr sz="1400" b="1" lang="ja-JP" altLang="en-US">
+                <a:solidFill>
+                  <a:srgbClr val="FFFEF8"/>
+                </a:solidFill>
+                <a:latin typeface="Noto Sans"/>
+                <a:ea typeface="Noto Sans CJK JP"/>
+                <a:cs typeface="Noto Sans"/>
+              </a:rPr>
+              <a:t>Appendix: 2. 入力形式と詩句の読み方</a:t>
+            </a:r>
+          </a:p>
+        </p:txBody>
+      </p:sp>
+      <p:sp>
+        <p:nvSpPr>
+          <p:cNvPr id="4" name="code-frame"/>
+          <p:cNvSpPr/>
+          <p:nvPr/>
+        </p:nvSpPr>
+        <p:spPr>
+          <a:xfrm>
+            <a:off x="548640" y="1544066"/>
+            <a:ext cx="8046720" cy="2186686"/>
+          </a:xfrm>
+          <a:prstGeom prst="rect">
+            <a:avLst/>
+          </a:prstGeom>
+          <a:solidFill>
+            <a:srgbClr val="EBEDEB"/>
+          </a:solidFill>
+          <a:ln>
+            <a:noFill/>
+          </a:ln>
+          <a:effectLst/>
+        </p:spPr>
+        <p:style>
+          <a:lnRef idx="1">
+            <a:schemeClr val="accent1"/>
+          </a:lnRef>
+          <a:fillRef idx="3">
+            <a:schemeClr val="accent1"/>
+          </a:fillRef>
+          <a:effectRef idx="0">
+            <a:schemeClr val="accent1"/>
+          </a:effectRef>
+          <a:fontRef idx="minor">
+            <a:schemeClr val="lt1"/>
+          </a:fontRef>
+        </p:style>
+        <p:txBody>
+          <a:bodyPr rtlCol="0" anchor="t" wrap="none" lIns="152400" rIns="152400" tIns="57404" bIns="127000"/>
+          <a:lstStyle/>
+          <a:p>
+            <a:pPr algn="l">
+              <a:lnSpc>
+                <a:spcPts val="2250"/>
+              </a:lnSpc>
+              <a:spcBef>
+                <a:spcPts val="0"/>
+              </a:spcBef>
+              <a:spcAft>
+                <a:spcPts val="0"/>
+              </a:spcAft>
+              <a:buNone/>
+              <a:defRPr sz="1800" b="0">
+                <a:solidFill>
+                  <a:srgbClr val="303437"/>
+                </a:solidFill>
+                <a:latin typeface="Noto Sans"/>
+              </a:defRPr>
+            </a:pPr>
+            <a:r>
+              <a:rPr sz="1800" b="0" lang="ja-JP" altLang="en-US">
+                <a:solidFill>
+                  <a:srgbClr val="303437"/>
+                </a:solidFill>
+                <a:latin typeface="Liberation Mono"/>
+                <a:ea typeface="Noto Sans CJK JP"/>
+                <a:cs typeface="Liberation Mono"/>
+              </a:rPr>
+              <a:t>import json</a:t>
+            </a:r>
+          </a:p>
+          <a:p>
+            <a:pPr algn="l">
+              <a:lnSpc>
+                <a:spcPts val="2250"/>
+              </a:lnSpc>
+              <a:spcBef>
+                <a:spcPts val="0"/>
+              </a:spcBef>
+              <a:spcAft>
+                <a:spcPts val="0"/>
+              </a:spcAft>
+              <a:buNone/>
+              <a:defRPr sz="1800" b="0">
+                <a:solidFill>
+                  <a:srgbClr val="303437"/>
+                </a:solidFill>
+                <a:latin typeface="Noto Sans"/>
+              </a:defRPr>
+            </a:pPr>
+            <a:r>
+              <a:rPr sz="1800" b="0" lang="ja-JP" altLang="en-US">
+                <a:solidFill>
+                  <a:srgbClr val="303437"/>
+                </a:solidFill>
+                <a:latin typeface="Liberation Mono"/>
+                <a:ea typeface="Noto Sans CJK JP"/>
+                <a:cs typeface="Liberation Mono"/>
+              </a:rPr>
+              <a:t>with open("train.jsonl", encoding="utf-8") as f:</a:t>
+            </a:r>
+          </a:p>
+          <a:p>
+            <a:pPr algn="l">
+              <a:lnSpc>
+                <a:spcPts val="2250"/>
+              </a:lnSpc>
+              <a:spcBef>
+                <a:spcPts val="0"/>
+              </a:spcBef>
+              <a:spcAft>
+                <a:spcPts val="0"/>
+              </a:spcAft>
+              <a:buNone/>
+              <a:defRPr sz="1800" b="0">
+                <a:solidFill>
+                  <a:srgbClr val="303437"/>
+                </a:solidFill>
+                <a:latin typeface="Noto Sans"/>
+              </a:defRPr>
+            </a:pPr>
+            <a:r>
+              <a:rPr sz="1800" b="0" lang="ja-JP" altLang="en-US">
+                <a:solidFill>
+                  <a:srgbClr val="303437"/>
+                </a:solidFill>
+                <a:latin typeface="Liberation Mono"/>
+                <a:ea typeface="Noto Sans CJK JP"/>
+                <a:cs typeface="Liberation Mono"/>
+              </a:rPr>
+              <a:t>    question = json.loads(next(f))</a:t>
+            </a:r>
+          </a:p>
+          <a:p>
+            <a:pPr algn="l">
+              <a:lnSpc>
+                <a:spcPts val="2250"/>
+              </a:lnSpc>
+              <a:spcBef>
+                <a:spcPts val="0"/>
+              </a:spcBef>
+              <a:spcAft>
+                <a:spcPts val="0"/>
+              </a:spcAft>
+              <a:buNone/>
+              <a:defRPr sz="1800" b="0">
+                <a:solidFill>
+                  <a:srgbClr val="303437"/>
+                </a:solidFill>
+                <a:latin typeface="Noto Sans"/>
+              </a:defRPr>
+            </a:pPr>
+            <a:r>
+              <a:rPr sz="1800" b="0" lang="ja-JP" altLang="en-US">
+                <a:solidFill>
+                  <a:srgbClr val="303437"/>
+                </a:solidFill>
+                <a:latin typeface="Liberation Mono"/>
+                <a:ea typeface="Noto Sans CJK JP"/>
+                <a:cs typeface="Liberation Mono"/>
+              </a:rPr>
+              <a:t>print(question["translation"])</a:t>
+            </a:r>
+          </a:p>
+          <a:p>
+            <a:pPr algn="l">
+              <a:lnSpc>
+                <a:spcPts val="2250"/>
+              </a:lnSpc>
+              <a:spcBef>
+                <a:spcPts val="0"/>
+              </a:spcBef>
+              <a:spcAft>
+                <a:spcPts val="0"/>
+              </a:spcAft>
+              <a:buNone/>
+              <a:defRPr sz="1800" b="0">
+                <a:solidFill>
+                  <a:srgbClr val="303437"/>
+                </a:solidFill>
+                <a:latin typeface="Noto Sans"/>
+              </a:defRPr>
+            </a:pPr>
+            <a:r>
+              <a:rPr sz="1800" b="0" lang="ja-JP" altLang="en-US">
+                <a:solidFill>
+                  <a:srgbClr val="303437"/>
+                </a:solidFill>
+                <a:latin typeface="Liberation Mono"/>
+                <a:ea typeface="Noto Sans CJK JP"/>
+                <a:cs typeface="Liberation Mono"/>
+              </a:rPr>
+              <a:t>for i, verse in enumerate(question["choices"]):</a:t>
+            </a:r>
+          </a:p>
+          <a:p>
+            <a:pPr algn="l">
+              <a:lnSpc>
+                <a:spcPts val="2250"/>
+              </a:lnSpc>
+              <a:spcBef>
+                <a:spcPts val="0"/>
+              </a:spcBef>
+              <a:spcAft>
+                <a:spcPts val="0"/>
+              </a:spcAft>
+              <a:buNone/>
+              <a:defRPr sz="1800" b="0">
+                <a:solidFill>
+                  <a:srgbClr val="303437"/>
+                </a:solidFill>
+                <a:latin typeface="Noto Sans"/>
+              </a:defRPr>
+            </a:pPr>
+            <a:r>
+              <a:rPr sz="1800" b="0" lang="ja-JP" altLang="en-US">
+                <a:solidFill>
+                  <a:srgbClr val="303437"/>
+                </a:solidFill>
+                <a:latin typeface="Liberation Mono"/>
+                <a:ea typeface="Noto Sans CJK JP"/>
+                <a:cs typeface="Liberation Mono"/>
+              </a:rPr>
+              <a:t>    print(f"{chr(65+i)}. {verse}")</a:t>
+            </a:r>
+          </a:p>
+          <a:p>
+            <a:pPr algn="l">
+              <a:lnSpc>
+                <a:spcPts val="2250"/>
+              </a:lnSpc>
+              <a:spcBef>
+                <a:spcPts val="0"/>
+              </a:spcBef>
+              <a:spcAft>
+                <a:spcPts val="0"/>
+              </a:spcAft>
+              <a:buNone/>
+              <a:defRPr sz="1800" b="0">
+                <a:solidFill>
+                  <a:srgbClr val="303437"/>
+                </a:solidFill>
+                <a:latin typeface="Noto Sans"/>
+              </a:defRPr>
+            </a:pPr>
+            <a:r>
+              <a:rPr sz="1800" b="0" lang="ja-JP" altLang="en-US">
+                <a:solidFill>
+                  <a:srgbClr val="303437"/>
+                </a:solidFill>
+                <a:latin typeface="Liberation Mono"/>
+                <a:ea typeface="Noto Sans CJK JP"/>
+                <a:cs typeface="Liberation Mono"/>
+              </a:rPr>
+              <a:t>print("正解:", chr(65 + question["answer"]))</a:t>
+            </a:r>
+          </a:p>
+        </p:txBody>
+      </p:sp>
+      <p:sp>
+        <p:nvSpPr>
+          <p:cNvPr id="5" name="TextBox 4"/>
+          <p:cNvSpPr txBox="1"/>
+          <p:nvPr/>
+        </p:nvSpPr>
+        <p:spPr>
+          <a:xfrm>
+            <a:off x="594360" y="3886200"/>
+            <a:ext cx="7955279" cy="640080"/>
+          </a:xfrm>
+          <a:prstGeom prst="rect">
+            <a:avLst/>
+          </a:prstGeom>
+          <a:noFill/>
+        </p:spPr>
+        <p:txBody>
+          <a:bodyPr wrap="square" lIns="0" rIns="0" tIns="0" bIns="0">
+            <a:noAutofit/>
+          </a:bodyPr>
+          <a:lstStyle/>
+          <a:p>
+            <a:pPr algn="l">
+              <a:lnSpc>
+                <a:spcPts val="2222"/>
+              </a:lnSpc>
+              <a:spcBef>
+                <a:spcPts val="0"/>
+              </a:spcBef>
+              <a:spcAft>
+                <a:spcPts val="0"/>
+              </a:spcAft>
+              <a:buNone/>
+              <a:defRPr sz="1900" b="0">
+                <a:solidFill>
+                  <a:srgbClr val="303437"/>
+                </a:solidFill>
+                <a:latin typeface="Noto Sans"/>
+              </a:defRPr>
+            </a:pPr>
+            <a:r>
+              <a:rPr sz="1900" b="0" lang="ja-JP" altLang="en-US">
+                <a:solidFill>
+                  <a:srgbClr val="303437"/>
+                </a:solidFill>
+                <a:latin typeface="Noto Sans"/>
+                <a:ea typeface="Noto Sans CJK JP"/>
+                <a:cs typeface="Noto Sans"/>
+              </a:rPr>
+              <a:t>train.jsonlは1行に1問のJSONを収める。最初の問題の説明、四候補、正解記号を表示する。</a:t>
+            </a:r>
+          </a:p>
+        </p:txBody>
+      </p:sp>
+      <p:sp>
+        <p:nvSpPr>
+          <p:cNvPr id="6" name="sources"/>
+          <p:cNvSpPr txBox="1"/>
+          <p:nvPr/>
+        </p:nvSpPr>
+        <p:spPr>
+          <a:xfrm>
+            <a:off x="502920" y="4700016"/>
+            <a:ext cx="8183879" cy="530352"/>
+          </a:xfrm>
+          <a:prstGeom prst="rect">
+            <a:avLst/>
+          </a:prstGeom>
+          <a:noFill/>
+        </p:spPr>
+        <p:txBody>
+          <a:bodyPr wrap="square" lIns="0" rIns="0" tIns="0" bIns="0">
+            <a:noAutofit/>
+          </a:bodyPr>
+          <a:lstStyle/>
+          <a:p>
+            <a:pPr algn="l">
+              <a:lnSpc>
+                <a:spcPts val="940"/>
+              </a:lnSpc>
+              <a:spcBef>
+                <a:spcPts val="0"/>
+              </a:spcBef>
+              <a:spcAft>
+                <a:spcPts val="140"/>
+              </a:spcAft>
+              <a:buNone/>
+              <a:defRPr sz="810" b="0">
+                <a:solidFill>
+                  <a:srgbClr val="303437"/>
+                </a:solidFill>
+                <a:latin typeface="Noto Sans"/>
+              </a:defRPr>
+            </a:pPr>
+            <a:r>
+              <a:rPr sz="810" b="0" lang="ja-JP" altLang="en-US">
+                <a:solidFill>
+                  <a:srgbClr val="626669"/>
+                </a:solidFill>
+                <a:latin typeface="Noto Sans"/>
+                <a:ea typeface="Noto Sans CJK JP"/>
+                <a:cs typeface="Noto Sans"/>
+              </a:rPr>
+              <a:t>[1] THUNLP-AIPoet (2021). CCPM.  </a:t>
+            </a:r>
+            <a:r>
+              <a:rPr sz="810" b="0" lang="ja-JP" altLang="en-US">
+                <a:solidFill>
+                  <a:srgbClr val="626669"/>
+                </a:solidFill>
+                <a:latin typeface="Noto Sans"/>
+                <a:ea typeface="Noto Sans CJK JP"/>
+                <a:cs typeface="Noto Sans"/>
+                <a:hlinkClick r:id="rId2"/>
+              </a:rPr>
+              <a:t>https://github.com/THUNLP-AIPoet/CCPM</a:t>
+            </a:r>
+          </a:p>
+        </p:txBody>
+      </p:sp>
+    </p:spTree>
+  </p:cSld>
+  <p:clrMapOvr>
+    <a:masterClrMapping/>
+  </p:clrMapOvr>
+</p:sld>
+</file>
+
+<file path=ppt/slides/slide43.xml><?xml version="1.0" encoding="utf-8"?>
+<p:sld xmlns:a="http://schemas.openxmlformats.org/drawingml/2006/main" xmlns:p="http://schemas.openxmlformats.org/presentationml/2006/main" xmlns:r="http://schemas.openxmlformats.org/officeDocument/2006/relationships">
+  <p:cSld>
+    <p:spTree>
+      <p:nvGrpSpPr>
+        <p:cNvPr id="1" name=""/>
+        <p:cNvGrpSpPr/>
+        <p:nvPr/>
+      </p:nvGrpSpPr>
+      <p:grpSpPr/>
+      <p:sp>
+        <p:nvSpPr>
+          <p:cNvPr id="2" name="Title 1"/>
+          <p:cNvSpPr>
+            <a:spLocks noGrp="1"/>
+          </p:cNvSpPr>
+          <p:nvPr>
+            <p:ph type="title"/>
+          </p:nvPr>
+        </p:nvSpPr>
+        <p:spPr>
+          <a:xfrm>
+            <a:off x="468172" y="650138"/>
+            <a:ext cx="8206740" cy="616305"/>
+          </a:xfrm>
+        </p:spPr>
+        <p:txBody>
+          <a:bodyPr wrap="square" lIns="0" rIns="0" tIns="0" bIns="0">
+            <a:noAutofit/>
+          </a:bodyPr>
+          <a:lstStyle/>
+          <a:p>
+            <a:pPr algn="l">
+              <a:lnSpc>
+                <a:spcPct val="110000"/>
+              </a:lnSpc>
+              <a:buNone/>
+              <a:defRPr sz="2800" b="0">
+                <a:solidFill>
+                  <a:srgbClr val="303437"/>
+                </a:solidFill>
+                <a:latin typeface="Noto Sans"/>
+              </a:defRPr>
+            </a:pPr>
+            <a:r>
+              <a:rPr sz="2800" b="1" lang="ja-JP" altLang="en-US">
+                <a:solidFill>
+                  <a:srgbClr val="303437"/>
+                </a:solidFill>
+                <a:latin typeface="Noto Sans"/>
+                <a:ea typeface="Noto Sans CJK JP"/>
+                <a:cs typeface="Noto Sans"/>
+              </a:rPr>
+              <a:t>候補の細かな語と、説明の意味を対応させる</a:t>
+            </a:r>
+          </a:p>
+        </p:txBody>
+      </p:sp>
+      <p:sp>
+        <p:nvSpPr>
+          <p:cNvPr id="3" name="Text Placeholder 2"/>
+          <p:cNvSpPr>
+            <a:spLocks noGrp="1"/>
+          </p:cNvSpPr>
+          <p:nvPr>
+            <p:ph type="body" idx="1"/>
+          </p:nvPr>
+        </p:nvSpPr>
+        <p:spPr>
+          <a:xfrm>
+            <a:off x="594360" y="1463040"/>
+            <a:ext cx="7955279" cy="3044952"/>
+          </a:xfrm>
+        </p:spPr>
+        <p:txBody>
+          <a:bodyPr wrap="square" tIns="91440" bIns="91440">
+            <a:noAutofit/>
+          </a:bodyPr>
+          <a:lstStyle/>
+          <a:p>
+            <a:pPr marL="457200" indent="-355600">
+              <a:lnSpc>
+                <a:spcPts val="2320"/>
+              </a:lnSpc>
+              <a:spcAft>
+                <a:spcPts val="700"/>
+              </a:spcAft>
+              <a:buSzPct val="68205"/>
+              <a:buFont typeface="Noto Sans CJK JP"/>
+              <a:buChar char="●"/>
+              <a:defRPr sz="1950" b="0">
+                <a:solidFill>
+                  <a:srgbClr val="303437"/>
+                </a:solidFill>
+                <a:latin typeface="Noto Sans"/>
+              </a:defRPr>
+            </a:pPr>
+            <a:r>
+              <a:rPr sz="1950" b="0" lang="ja-JP" altLang="en-US">
+                <a:solidFill>
+                  <a:srgbClr val="303437"/>
+                </a:solidFill>
+                <a:latin typeface="Noto Sans"/>
+                <a:ea typeface="Noto Sans CJK JP"/>
+                <a:cs typeface="Noto Sans"/>
+              </a:rPr>
+              <a:t>実例11の候補A「云深不可知」とD「云深不知处」は、共通する語が多い。Aは「雲が深く、知りようがない」、Dは「雲が深く、居場所が分からない」と読める。</a:t>
+            </a:r>
+          </a:p>
+          <a:p>
+            <a:pPr marL="457200" indent="-355600">
+              <a:lnSpc>
+                <a:spcPts val="2320"/>
+              </a:lnSpc>
+              <a:spcAft>
+                <a:spcPts val="0"/>
+              </a:spcAft>
+              <a:buSzPct val="68205"/>
+              <a:buFont typeface="Noto Sans CJK JP"/>
+              <a:buChar char="●"/>
+              <a:defRPr sz="1950" b="0">
+                <a:solidFill>
+                  <a:srgbClr val="303437"/>
+                </a:solidFill>
+                <a:latin typeface="Noto Sans"/>
+              </a:defRPr>
+            </a:pPr>
+            <a:r>
+              <a:rPr sz="1950" b="0" lang="ja-JP" altLang="en-US">
+                <a:solidFill>
+                  <a:srgbClr val="303437"/>
+                </a:solidFill>
+                <a:latin typeface="Noto Sans"/>
+                <a:ea typeface="Noto Sans CJK JP"/>
+                <a:cs typeface="Noto Sans"/>
+              </a:rPr>
+              <a:t>現代語の説明には「不知道他到底在哪」（あの人がどこにいるのか分からない）とあり、場所を表す「处」との対応が判断の手掛かりになる。</a:t>
+            </a:r>
+          </a:p>
+        </p:txBody>
+      </p:sp>
+      <p:sp>
+        <p:nvSpPr>
+          <p:cNvPr id="4" name="Title 3"/>
+          <p:cNvSpPr>
+            <a:spLocks noGrp="1"/>
+          </p:cNvSpPr>
+          <p:nvPr>
+            <p:ph type="title" idx="2"/>
+          </p:nvPr>
+        </p:nvSpPr>
+        <p:spPr>
+          <a:xfrm>
+            <a:off x="75895" y="0"/>
+            <a:ext cx="8115300" cy="480060"/>
+          </a:xfrm>
+        </p:spPr>
+        <p:txBody>
+          <a:bodyPr wrap="square" lIns="0" rIns="0" tIns="0" bIns="0" anchor="ctr">
+            <a:noAutofit/>
+          </a:bodyPr>
+          <a:lstStyle/>
+          <a:p>
+            <a:pPr algn="l">
+              <a:lnSpc>
+                <a:spcPct val="110000"/>
+              </a:lnSpc>
+              <a:buNone/>
+              <a:defRPr sz="1400" b="0">
+                <a:solidFill>
+                  <a:srgbClr val="303437"/>
+                </a:solidFill>
+                <a:latin typeface="Noto Sans"/>
+              </a:defRPr>
+            </a:pPr>
+            <a:r>
+              <a:rPr sz="1400" b="1" lang="ja-JP" altLang="en-US">
+                <a:solidFill>
+                  <a:srgbClr val="FFFEF8"/>
+                </a:solidFill>
+                <a:latin typeface="Noto Sans"/>
+                <a:ea typeface="Noto Sans CJK JP"/>
+                <a:cs typeface="Noto Sans"/>
+              </a:rPr>
+              <a:t>Appendix: 2. 入力形式と詩句の読み方</a:t>
+            </a:r>
+          </a:p>
+        </p:txBody>
+      </p:sp>
+      <p:sp>
+        <p:nvSpPr>
+          <p:cNvPr id="5" name="sources"/>
+          <p:cNvSpPr txBox="1"/>
+          <p:nvPr/>
+        </p:nvSpPr>
+        <p:spPr>
+          <a:xfrm>
+            <a:off x="502920" y="4700016"/>
+            <a:ext cx="8183879" cy="530352"/>
+          </a:xfrm>
+          <a:prstGeom prst="rect">
+            <a:avLst/>
+          </a:prstGeom>
+          <a:noFill/>
+        </p:spPr>
+        <p:txBody>
+          <a:bodyPr wrap="square" lIns="0" rIns="0" tIns="0" bIns="0">
+            <a:noAutofit/>
+          </a:bodyPr>
+          <a:lstStyle/>
+          <a:p>
+            <a:pPr algn="l">
+              <a:lnSpc>
+                <a:spcPts val="940"/>
+              </a:lnSpc>
+              <a:spcBef>
+                <a:spcPts val="0"/>
+              </a:spcBef>
+              <a:spcAft>
+                <a:spcPts val="140"/>
+              </a:spcAft>
+              <a:buNone/>
+              <a:defRPr sz="810" b="0">
+                <a:solidFill>
+                  <a:srgbClr val="303437"/>
+                </a:solidFill>
+                <a:latin typeface="Noto Sans"/>
+              </a:defRPr>
+            </a:pPr>
+            <a:r>
+              <a:rPr sz="810" b="0" lang="ja-JP" altLang="en-US">
+                <a:solidFill>
+                  <a:srgbClr val="626669"/>
+                </a:solidFill>
+                <a:latin typeface="Noto Sans"/>
+                <a:ea typeface="Noto Sans CJK JP"/>
+                <a:cs typeface="Noto Sans"/>
+              </a:rPr>
+              <a:t>[1] THUNLP-AIPoet (2021). CCPM.  </a:t>
+            </a:r>
+            <a:r>
+              <a:rPr sz="810" b="0" lang="ja-JP" altLang="en-US">
+                <a:solidFill>
+                  <a:srgbClr val="626669"/>
+                </a:solidFill>
+                <a:latin typeface="Noto Sans"/>
+                <a:ea typeface="Noto Sans CJK JP"/>
+                <a:cs typeface="Noto Sans"/>
+                <a:hlinkClick r:id="rId2"/>
+              </a:rPr>
+              <a:t>https://github.com/THUNLP-AIPoet/CCPM</a:t>
+            </a:r>
+          </a:p>
+        </p:txBody>
+      </p:sp>
+    </p:spTree>
+  </p:cSld>
+  <p:clrMapOvr>
+    <a:masterClrMapping/>
+  </p:clrMapOvr>
+</p:sld>
+</file>
+
+<file path=ppt/slides/slide44.xml><?xml version="1.0" encoding="utf-8"?>
+<p:sld xmlns:a="http://schemas.openxmlformats.org/drawingml/2006/main" xmlns:p="http://schemas.openxmlformats.org/presentationml/2006/main" xmlns:r="http://schemas.openxmlformats.org/officeDocument/2006/relationships">
+  <p:cSld>
+    <p:spTree>
+      <p:nvGrpSpPr>
+        <p:cNvPr id="1" name=""/>
+        <p:cNvGrpSpPr/>
+        <p:nvPr/>
+      </p:nvGrpSpPr>
+      <p:grpSpPr/>
+      <p:sp>
+        <p:nvSpPr>
+          <p:cNvPr id="2" name="Title 1"/>
+          <p:cNvSpPr>
+            <a:spLocks noGrp="1"/>
+          </p:cNvSpPr>
+          <p:nvPr>
+            <p:ph type="title"/>
+          </p:nvPr>
+        </p:nvSpPr>
+        <p:spPr>
+          <a:xfrm>
+            <a:off x="548640" y="2506875"/>
+            <a:ext cx="8046720" cy="585216"/>
+          </a:xfrm>
+        </p:spPr>
+        <p:txBody>
+          <a:bodyPr wrap="square" lIns="0" rIns="0" tIns="0" bIns="0" anchor="ctr">
+            <a:noAutofit/>
+          </a:bodyPr>
+          <a:lstStyle/>
+          <a:p>
+            <a:pPr algn="ctr">
+              <a:lnSpc>
+                <a:spcPct val="110000"/>
+              </a:lnSpc>
+              <a:buNone/>
+              <a:defRPr sz="3600" b="0">
+                <a:solidFill>
+                  <a:srgbClr val="303437"/>
+                </a:solidFill>
+                <a:latin typeface="Noto Sans"/>
+              </a:defRPr>
+            </a:pPr>
+            <a:r>
+              <a:rPr sz="3600" b="1" lang="ja-JP" altLang="en-US">
+                <a:solidFill>
+                  <a:srgbClr val="303437"/>
+                </a:solidFill>
+                <a:latin typeface="Noto Sans"/>
+                <a:ea typeface="Noto Sans CJK JP"/>
+                <a:cs typeface="Noto Sans"/>
+              </a:rPr>
+              <a:t>参考文献</a:t>
+            </a:r>
+          </a:p>
+        </p:txBody>
+      </p:sp>
+      <p:sp>
+        <p:nvSpPr>
+          <p:cNvPr id="3" name="Title 2"/>
+          <p:cNvSpPr>
+            <a:spLocks noGrp="1"/>
+          </p:cNvSpPr>
+          <p:nvPr>
+            <p:ph type="title" idx="2"/>
+          </p:nvPr>
+        </p:nvSpPr>
+        <p:spPr>
+          <a:xfrm>
+            <a:off x="75895" y="0"/>
+            <a:ext cx="8115300" cy="480060"/>
+          </a:xfrm>
+        </p:spPr>
+        <p:txBody>
+          <a:bodyPr wrap="square" lIns="0" rIns="0" tIns="0" bIns="0" anchor="ctr">
+            <a:noAutofit/>
+          </a:bodyPr>
+          <a:lstStyle/>
+          <a:p>
+            <a:pPr algn="l">
+              <a:lnSpc>
+                <a:spcPct val="110000"/>
+              </a:lnSpc>
+              <a:buNone/>
+              <a:defRPr sz="1400" b="0">
+                <a:solidFill>
+                  <a:srgbClr val="303437"/>
+                </a:solidFill>
+                <a:latin typeface="Noto Sans"/>
+              </a:defRPr>
+            </a:pPr>
+            <a:r>
+              <a:rPr sz="1400" b="1" lang="ja-JP" altLang="en-US">
+                <a:solidFill>
+                  <a:srgbClr val="FFFEF8"/>
+                </a:solidFill>
+                <a:latin typeface="Noto Sans"/>
+                <a:ea typeface="Noto Sans CJK JP"/>
+                <a:cs typeface="Noto Sans"/>
+              </a:rPr>
+              <a:t>Appendix: 3. 参考文献</a:t>
+            </a:r>
+          </a:p>
+        </p:txBody>
+      </p:sp>
+    </p:spTree>
+  </p:cSld>
+  <p:clrMapOvr>
+    <a:masterClrMapping/>
+  </p:clrMapOvr>
+</p:sld>
+</file>
+
+<file path=ppt/slides/slide45.xml><?xml version="1.0" encoding="utf-8"?>
+<p:sld xmlns:a="http://schemas.openxmlformats.org/drawingml/2006/main" xmlns:p="http://schemas.openxmlformats.org/presentationml/2006/main" xmlns:r="http://schemas.openxmlformats.org/officeDocument/2006/relationships">
+  <p:cSld>
+    <p:spTree>
+      <p:nvGrpSpPr>
+        <p:cNvPr id="1" name=""/>
+        <p:cNvGrpSpPr/>
+        <p:nvPr/>
+      </p:nvGrpSpPr>
+      <p:grpSpPr/>
+      <p:sp>
+        <p:nvSpPr>
+          <p:cNvPr id="2" name="Title 1"/>
+          <p:cNvSpPr>
+            <a:spLocks noGrp="1"/>
+          </p:cNvSpPr>
+          <p:nvPr>
+            <p:ph type="title"/>
+          </p:nvPr>
+        </p:nvSpPr>
+        <p:spPr>
+          <a:xfrm>
+            <a:off x="468172" y="650138"/>
+            <a:ext cx="8206740" cy="616305"/>
+          </a:xfrm>
+        </p:spPr>
+        <p:txBody>
+          <a:bodyPr wrap="square" lIns="0" rIns="0" tIns="0" bIns="0">
+            <a:noAutofit/>
+          </a:bodyPr>
+          <a:lstStyle/>
+          <a:p>
+            <a:pPr algn="l">
+              <a:lnSpc>
+                <a:spcPct val="110000"/>
+              </a:lnSpc>
+              <a:buNone/>
+              <a:defRPr sz="2800" b="0">
+                <a:solidFill>
+                  <a:srgbClr val="303437"/>
+                </a:solidFill>
+                <a:latin typeface="Noto Sans"/>
+              </a:defRPr>
+            </a:pPr>
+            <a:r>
+              <a:rPr sz="2800" b="1" lang="ja-JP" altLang="en-US">
+                <a:solidFill>
+                  <a:srgbClr val="303437"/>
+                </a:solidFill>
+                <a:latin typeface="Noto Sans"/>
+                <a:ea typeface="Noto Sans CJK JP"/>
+                <a:cs typeface="Noto Sans"/>
+              </a:rPr>
+              <a:t>参考文献</a:t>
+            </a:r>
+          </a:p>
+        </p:txBody>
+      </p:sp>
+      <p:sp>
+        <p:nvSpPr>
+          <p:cNvPr id="3" name="Title 2"/>
+          <p:cNvSpPr>
+            <a:spLocks noGrp="1"/>
+          </p:cNvSpPr>
+          <p:nvPr>
+            <p:ph type="title" idx="2"/>
+          </p:nvPr>
+        </p:nvSpPr>
+        <p:spPr>
+          <a:xfrm>
+            <a:off x="75895" y="0"/>
+            <a:ext cx="8115300" cy="480060"/>
+          </a:xfrm>
+        </p:spPr>
+        <p:txBody>
+          <a:bodyPr wrap="square" lIns="0" rIns="0" tIns="0" bIns="0" anchor="ctr">
+            <a:noAutofit/>
+          </a:bodyPr>
+          <a:lstStyle/>
+          <a:p>
+            <a:pPr algn="l">
+              <a:lnSpc>
+                <a:spcPct val="110000"/>
+              </a:lnSpc>
+              <a:buNone/>
+              <a:defRPr sz="1400" b="0">
+                <a:solidFill>
+                  <a:srgbClr val="303437"/>
+                </a:solidFill>
+                <a:latin typeface="Noto Sans"/>
+              </a:defRPr>
+            </a:pPr>
+            <a:r>
+              <a:rPr sz="1400" b="1" lang="ja-JP" altLang="en-US">
+                <a:solidFill>
+                  <a:srgbClr val="FFFEF8"/>
+                </a:solidFill>
+                <a:latin typeface="Noto Sans"/>
+                <a:ea typeface="Noto Sans CJK JP"/>
+                <a:cs typeface="Noto Sans"/>
+              </a:rPr>
+              <a:t>Appendix: 3. 参考文献</a:t>
+            </a:r>
+          </a:p>
+        </p:txBody>
+      </p:sp>
+      <p:sp>
+        <p:nvSpPr>
+          <p:cNvPr id="4" name="文献 1: CCPM: A Chinese Classical Poetry Matching Dataset"/>
+          <p:cNvSpPr txBox="1"/>
+          <p:nvPr/>
+        </p:nvSpPr>
+        <p:spPr>
+          <a:xfrm>
+            <a:off x="548640" y="1463040"/>
+            <a:ext cx="8046720" cy="1574419"/>
+          </a:xfrm>
+          <a:prstGeom prst="rect">
+            <a:avLst/>
+          </a:prstGeom>
+          <a:noFill/>
+        </p:spPr>
+        <p:txBody>
+          <a:bodyPr wrap="square" lIns="0" rIns="0" tIns="0" bIns="0">
+            <a:noAutofit/>
+          </a:bodyPr>
+          <a:lstStyle/>
+          <a:p>
+            <a:pPr algn="l">
+              <a:lnSpc>
+                <a:spcPct val="114000"/>
+              </a:lnSpc>
+              <a:spcBef>
+                <a:spcPts val="0"/>
+              </a:spcBef>
+              <a:spcAft>
+                <a:spcPts val="400"/>
+              </a:spcAft>
+              <a:buNone/>
+              <a:defRPr sz="1850" b="0">
+                <a:solidFill>
+                  <a:srgbClr val="303437"/>
+                </a:solidFill>
+                <a:latin typeface="Noto Sans"/>
+              </a:defRPr>
+            </a:pPr>
+            <a:r>
+              <a:rPr sz="1850" b="1" lang="ja-JP" altLang="en-US">
+                <a:solidFill>
+                  <a:srgbClr val="303437"/>
+                </a:solidFill>
+                <a:latin typeface="Noto Sans"/>
+                <a:ea typeface="Noto Sans CJK JP"/>
+                <a:cs typeface="Noto Sans"/>
+              </a:rPr>
+              <a:t>CCPM: A Chinese Classical Poetry Matching Dataset</a:t>
+            </a:r>
+          </a:p>
+          <a:p>
+            <a:pPr algn="l">
+              <a:lnSpc>
+                <a:spcPct val="114000"/>
+              </a:lnSpc>
+              <a:spcBef>
+                <a:spcPts val="0"/>
+              </a:spcBef>
+              <a:spcAft>
+                <a:spcPts val="500"/>
+              </a:spcAft>
+              <a:buNone/>
+              <a:defRPr sz="1250" b="0">
+                <a:solidFill>
+                  <a:srgbClr val="303437"/>
+                </a:solidFill>
+                <a:latin typeface="Noto Sans"/>
+              </a:defRPr>
+            </a:pPr>
+            <a:r>
+              <a:rPr sz="1250" b="0" lang="ja-JP" altLang="en-US">
+                <a:solidFill>
+                  <a:srgbClr val="626669"/>
+                </a:solidFill>
+                <a:latin typeface="Noto Sans"/>
+                <a:ea typeface="Noto Sans CJK JP"/>
+                <a:cs typeface="Noto Sans"/>
+              </a:rPr>
+              <a:t>Wenhao Li, Fanchao Qi, Maosong Sun, Xiaoyuan Yi, Jiarui Zhang · 2021 · arXiv:2106.01979v1</a:t>
+            </a:r>
+          </a:p>
+          <a:p>
+            <a:pPr algn="l">
+              <a:lnSpc>
+                <a:spcPct val="114000"/>
+              </a:lnSpc>
+              <a:spcBef>
+                <a:spcPts val="0"/>
+              </a:spcBef>
+              <a:spcAft>
+                <a:spcPts val="400"/>
+              </a:spcAft>
+              <a:buNone/>
+              <a:defRPr sz="1750" b="0">
+                <a:solidFill>
+                  <a:srgbClr val="303437"/>
+                </a:solidFill>
+                <a:latin typeface="Noto Sans"/>
+              </a:defRPr>
+            </a:pPr>
+            <a:r>
+              <a:rPr sz="1750" b="0" lang="ja-JP" altLang="en-US">
+                <a:solidFill>
+                  <a:srgbClr val="303437"/>
+                </a:solidFill>
+                <a:latin typeface="Noto Sans"/>
+                <a:ea typeface="Noto Sans CJK JP"/>
+                <a:cs typeface="Noto Sans"/>
+              </a:rPr>
+              <a:t>古典詩と現代語訳から四択問題を構成し、似た詩句を負例として検索する。BERT二方式の評価を報告する。</a:t>
+            </a:r>
+          </a:p>
+          <a:p>
+            <a:pPr algn="l">
+              <a:lnSpc>
+                <a:spcPct val="114000"/>
+              </a:lnSpc>
+              <a:spcBef>
+                <a:spcPts val="0"/>
+              </a:spcBef>
+              <a:spcAft>
+                <a:spcPts val="0"/>
+              </a:spcAft>
+              <a:buNone/>
+              <a:defRPr sz="1050" b="0">
+                <a:solidFill>
+                  <a:srgbClr val="303437"/>
+                </a:solidFill>
+                <a:latin typeface="Noto Sans"/>
+              </a:defRPr>
+            </a:pPr>
+            <a:r>
+              <a:rPr sz="1050" b="0" lang="ja-JP" altLang="en-US">
+                <a:solidFill>
+                  <a:srgbClr val="626669"/>
+                </a:solidFill>
+                <a:latin typeface="Noto Sans"/>
+                <a:ea typeface="Noto Sans CJK JP"/>
+                <a:cs typeface="Noto Sans"/>
+                <a:hlinkClick r:id="rId2"/>
+              </a:rPr>
+              <a:t>https://arxiv.org/abs/2106.01979</a:t>
+            </a:r>
+          </a:p>
+        </p:txBody>
+      </p:sp>
+      <p:sp>
+        <p:nvSpPr>
+          <p:cNvPr id="5" name="文献 2: CCPM — Official Dataset Repository"/>
+          <p:cNvSpPr txBox="1"/>
+          <p:nvPr/>
+        </p:nvSpPr>
+        <p:spPr>
+          <a:xfrm>
+            <a:off x="548640" y="3040507"/>
+            <a:ext cx="8046720" cy="1574419"/>
+          </a:xfrm>
+          <a:prstGeom prst="rect">
+            <a:avLst/>
+          </a:prstGeom>
+          <a:noFill/>
+        </p:spPr>
+        <p:txBody>
+          <a:bodyPr wrap="square" lIns="0" rIns="0" tIns="0" bIns="0">
+            <a:noAutofit/>
+          </a:bodyPr>
+          <a:lstStyle/>
+          <a:p>
+            <a:pPr algn="l">
+              <a:lnSpc>
+                <a:spcPct val="114000"/>
+              </a:lnSpc>
+              <a:spcBef>
+                <a:spcPts val="0"/>
+              </a:spcBef>
+              <a:spcAft>
+                <a:spcPts val="400"/>
+              </a:spcAft>
+              <a:buNone/>
+              <a:defRPr sz="1850" b="0">
+                <a:solidFill>
+                  <a:srgbClr val="303437"/>
+                </a:solidFill>
+                <a:latin typeface="Noto Sans"/>
+              </a:defRPr>
+            </a:pPr>
+            <a:r>
+              <a:rPr sz="1850" b="1" lang="ja-JP" altLang="en-US">
+                <a:solidFill>
+                  <a:srgbClr val="303437"/>
+                </a:solidFill>
+                <a:latin typeface="Noto Sans"/>
+                <a:ea typeface="Noto Sans CJK JP"/>
+                <a:cs typeface="Noto Sans"/>
+              </a:rPr>
+              <a:t>CCPM — Official Dataset Repository</a:t>
+            </a:r>
+          </a:p>
+          <a:p>
+            <a:pPr algn="l">
+              <a:lnSpc>
+                <a:spcPct val="114000"/>
+              </a:lnSpc>
+              <a:spcBef>
+                <a:spcPts val="0"/>
+              </a:spcBef>
+              <a:spcAft>
+                <a:spcPts val="500"/>
+              </a:spcAft>
+              <a:buNone/>
+              <a:defRPr sz="1250" b="0">
+                <a:solidFill>
+                  <a:srgbClr val="303437"/>
+                </a:solidFill>
+                <a:latin typeface="Noto Sans"/>
+              </a:defRPr>
+            </a:pPr>
+            <a:r>
+              <a:rPr sz="1250" b="0" lang="ja-JP" altLang="en-US">
+                <a:solidFill>
+                  <a:srgbClr val="626669"/>
+                </a:solidFill>
+                <a:latin typeface="Noto Sans"/>
+                <a:ea typeface="Noto Sans CJK JP"/>
+                <a:cs typeface="Noto Sans"/>
+              </a:rPr>
+              <a:t>THUNLP-AIPoet · 2021</a:t>
+            </a:r>
+          </a:p>
+          <a:p>
+            <a:pPr algn="l">
+              <a:lnSpc>
+                <a:spcPct val="114000"/>
+              </a:lnSpc>
+              <a:spcBef>
+                <a:spcPts val="0"/>
+              </a:spcBef>
+              <a:spcAft>
+                <a:spcPts val="400"/>
+              </a:spcAft>
+              <a:buNone/>
+              <a:defRPr sz="1750" b="0">
+                <a:solidFill>
+                  <a:srgbClr val="303437"/>
+                </a:solidFill>
+                <a:latin typeface="Noto Sans"/>
+              </a:defRPr>
+            </a:pPr>
+            <a:r>
+              <a:rPr sz="1750" b="0" lang="ja-JP" altLang="en-US">
+                <a:solidFill>
+                  <a:srgbClr val="303437"/>
+                </a:solidFill>
+                <a:latin typeface="Noto Sans"/>
+                <a:ea typeface="Noto Sans CJK JP"/>
+                <a:cs typeface="Noto Sans"/>
+              </a:rPr>
+              <a:t>学習・検証・正解非公開テストのJSONLと技術報告、データ形式、正解率による評価方法を公開する。</a:t>
+            </a:r>
+          </a:p>
+          <a:p>
+            <a:pPr algn="l">
+              <a:lnSpc>
+                <a:spcPct val="114000"/>
+              </a:lnSpc>
+              <a:spcBef>
+                <a:spcPts val="0"/>
+              </a:spcBef>
+              <a:spcAft>
+                <a:spcPts val="0"/>
+              </a:spcAft>
+              <a:buNone/>
+              <a:defRPr sz="1050" b="0">
+                <a:solidFill>
+                  <a:srgbClr val="303437"/>
+                </a:solidFill>
+                <a:latin typeface="Noto Sans"/>
+              </a:defRPr>
+            </a:pPr>
+            <a:r>
+              <a:rPr sz="1050" b="0" lang="ja-JP" altLang="en-US">
+                <a:solidFill>
+                  <a:srgbClr val="626669"/>
+                </a:solidFill>
+                <a:latin typeface="Noto Sans"/>
+                <a:ea typeface="Noto Sans CJK JP"/>
+                <a:cs typeface="Noto Sans"/>
+                <a:hlinkClick r:id="rId3"/>
+              </a:rPr>
+              <a:t>https://github.com/THUNLP-AIPoet/CCPM</a:t>
+            </a:r>
+          </a:p>
+        </p:txBody>
+      </p:sp>
+    </p:spTree>
+  </p:cSld>
+  <p:clrMapOvr>
+    <a:masterClrMapping/>
+  </p:clrMapOvr>
+</p:sld>
+</file>
+
 <file path=ppt/slides/slide47.xml><?xml version="1.0" encoding="utf-8"?>
 <p:sld xmlns:a="http://schemas.openxmlformats.org/drawingml/2006/main" xmlns:p="http://schemas.openxmlformats.org/presentationml/2006/main" xmlns:r="http://schemas.openxmlformats.org/officeDocument/2006/relationships">
   <p:cSld>
@@ -24635,300 +25839,7 @@
                 <a:ea typeface="Noto Sans CJK JP"/>
                 <a:cs typeface="Noto Sans"/>
               </a:rPr>
-              <a:t>一部の問題には、説明の欠落や形式の例外がある</a:t>
-            </a:r>
-          </a:p>
-        </p:txBody>
-      </p:sp>
-      <p:sp>
-        <p:nvSpPr>
-          <p:cNvPr id="3" name="Text Placeholder 2"/>
-          <p:cNvSpPr>
-            <a:spLocks noGrp="1"/>
-          </p:cNvSpPr>
-          <p:nvPr>
-            <p:ph type="body" idx="1"/>
-          </p:nvPr>
-        </p:nvSpPr>
-        <p:spPr>
-          <a:xfrm>
-            <a:off x="594360" y="1463040"/>
-            <a:ext cx="7955279" cy="3044952"/>
-          </a:xfrm>
-        </p:spPr>
-        <p:txBody>
-          <a:bodyPr wrap="square" tIns="91440" bIns="91440">
-            <a:noAutofit/>
-          </a:bodyPr>
-          <a:lstStyle/>
-          <a:p>
-            <a:pPr marL="457200" indent="-355600">
-              <a:lnSpc>
-                <a:spcPts val="2320"/>
-              </a:lnSpc>
-              <a:spcAft>
-                <a:spcPts val="700"/>
-              </a:spcAft>
-              <a:buSzPct val="68205"/>
-              <a:buFont typeface="Noto Sans CJK JP"/>
-              <a:buChar char="●"/>
-              <a:defRPr sz="1950" b="0">
-                <a:solidFill>
-                  <a:srgbClr val="303437"/>
-                </a:solidFill>
-                <a:latin typeface="Noto Sans"/>
-              </a:defRPr>
-            </a:pPr>
-            <a:r>
-              <a:rPr sz="1950" b="0" lang="ja-JP" altLang="en-US">
-                <a:solidFill>
-                  <a:srgbClr val="303437"/>
-                </a:solidFill>
-                <a:latin typeface="Noto Sans"/>
-                <a:ea typeface="Noto Sans CJK JP"/>
-                <a:cs typeface="Noto Sans"/>
-              </a:rPr>
-              <a:t>公開テストには、説明が空の問題が1問ある。四候補は残っているが、説明との意味対応を評価するための入力が欠けている。</a:t>
-            </a:r>
-          </a:p>
-          <a:p>
-            <a:pPr marL="457200" indent="-355600">
-              <a:lnSpc>
-                <a:spcPts val="2320"/>
-              </a:lnSpc>
-              <a:spcAft>
-                <a:spcPts val="0"/>
-              </a:spcAft>
-              <a:buSzPct val="68205"/>
-              <a:buFont typeface="Noto Sans CJK JP"/>
-              <a:buChar char="●"/>
-              <a:defRPr sz="1950" b="0">
-                <a:solidFill>
-                  <a:srgbClr val="303437"/>
-                </a:solidFill>
-                <a:latin typeface="Noto Sans"/>
-              </a:defRPr>
-            </a:pPr>
-            <a:r>
-              <a:rPr sz="1950" b="0" lang="ja-JP" altLang="en-US">
-                <a:solidFill>
-                  <a:srgbClr val="303437"/>
-                </a:solidFill>
-                <a:latin typeface="Noto Sans"/>
-                <a:ea typeface="Noto Sans CJK JP"/>
-                <a:cs typeface="Noto Sans"/>
-              </a:rPr>
-              <a:t>五言・七言の詩型に当てはまらない文や、特殊な漢字表記を含む問題もある。</a:t>
-            </a:r>
-          </a:p>
-          <a:p>
-            <a:pPr marL="457200" indent="-355600">
-              <a:lnSpc>
-                <a:spcPts val="2320"/>
-              </a:lnSpc>
-              <a:spcAft>
-                <a:spcPts val="0"/>
-              </a:spcAft>
-              <a:buSzPct val="68205"/>
-              <a:buFont typeface="Noto Sans CJK JP"/>
-              <a:buChar char="●"/>
-              <a:defRPr sz="1950" b="0">
-                <a:solidFill>
-                  <a:srgbClr val="303437"/>
-                </a:solidFill>
-                <a:latin typeface="Noto Sans"/>
-              </a:defRPr>
-            </a:pPr>
-            <a:r>
-              <a:rPr sz="1950" b="0" lang="ja-JP" altLang="en-US">
-                <a:solidFill>
-                  <a:srgbClr val="303437"/>
-                </a:solidFill>
-                <a:latin typeface="Noto Sans"/>
-                <a:ea typeface="Noto Sans CJK JP"/>
-                <a:cs typeface="Noto Sans"/>
-              </a:rPr>
-              <a:t>学習と公開テストで、説明と四候補が一致する問題が1問ある。</a:t>
-            </a:r>
-          </a:p>
-        </p:txBody>
-      </p:sp>
-      <p:sp>
-        <p:nvSpPr>
-          <p:cNvPr id="4" name="Title 3"/>
-          <p:cNvSpPr>
-            <a:spLocks noGrp="1"/>
-          </p:cNvSpPr>
-          <p:nvPr>
-            <p:ph type="title" idx="2"/>
-          </p:nvPr>
-        </p:nvSpPr>
-        <p:spPr>
-          <a:xfrm>
-            <a:off x="75895" y="0"/>
-            <a:ext cx="8115300" cy="480060"/>
-          </a:xfrm>
-        </p:spPr>
-        <p:txBody>
-          <a:bodyPr wrap="square" lIns="0" rIns="0" tIns="0" bIns="0" anchor="ctr">
-            <a:noAutofit/>
-          </a:bodyPr>
-          <a:lstStyle/>
-          <a:p>
-            <a:pPr algn="l">
-              <a:lnSpc>
-                <a:spcPct val="110000"/>
-              </a:lnSpc>
-              <a:buNone/>
-              <a:defRPr sz="1400" b="0">
-                <a:solidFill>
-                  <a:srgbClr val="303437"/>
-                </a:solidFill>
-                <a:latin typeface="Noto Sans"/>
-              </a:defRPr>
-            </a:pPr>
-            <a:r>
-              <a:rPr sz="1400" b="1" lang="ja-JP" altLang="en-US">
-                <a:solidFill>
-                  <a:srgbClr val="FFFEF8"/>
-                </a:solidFill>
-                <a:latin typeface="Noto Sans"/>
-                <a:ea typeface="Noto Sans CJK JP"/>
-                <a:cs typeface="Noto Sans"/>
-              </a:rPr>
-              <a:t>Appendix: 2. 入力形式と詩句の読み方</a:t>
-            </a:r>
-          </a:p>
-        </p:txBody>
-      </p:sp>
-      <p:sp>
-        <p:nvSpPr>
-          <p:cNvPr id="5" name="sources"/>
-          <p:cNvSpPr txBox="1"/>
-          <p:nvPr/>
-        </p:nvSpPr>
-        <p:spPr>
-          <a:xfrm>
-            <a:off x="502920" y="4700016"/>
-            <a:ext cx="8183879" cy="530352"/>
-          </a:xfrm>
-          <a:prstGeom prst="rect">
-            <a:avLst/>
-          </a:prstGeom>
-          <a:noFill/>
-        </p:spPr>
-        <p:txBody>
-          <a:bodyPr wrap="square" lIns="0" rIns="0" tIns="0" bIns="0">
-            <a:noAutofit/>
-          </a:bodyPr>
-          <a:lstStyle/>
-          <a:p>
-            <a:pPr algn="l">
-              <a:lnSpc>
-                <a:spcPts val="940"/>
-              </a:lnSpc>
-              <a:spcBef>
-                <a:spcPts val="0"/>
-              </a:spcBef>
-              <a:spcAft>
-                <a:spcPts val="140"/>
-              </a:spcAft>
-              <a:buNone/>
-              <a:defRPr sz="810" b="0">
-                <a:solidFill>
-                  <a:srgbClr val="303437"/>
-                </a:solidFill>
-                <a:latin typeface="Noto Sans"/>
-              </a:defRPr>
-            </a:pPr>
-            <a:r>
-              <a:rPr sz="810" b="0" lang="ja-JP" altLang="en-US">
-                <a:solidFill>
-                  <a:srgbClr val="626669"/>
-                </a:solidFill>
-                <a:latin typeface="Noto Sans"/>
-                <a:ea typeface="Noto Sans CJK JP"/>
-                <a:cs typeface="Noto Sans"/>
-              </a:rPr>
-              <a:t>[1] THUNLP-AIPoet (2021). CCPM.  </a:t>
-            </a:r>
-            <a:r>
-              <a:rPr sz="810" b="0" lang="ja-JP" altLang="en-US">
-                <a:solidFill>
-                  <a:srgbClr val="626669"/>
-                </a:solidFill>
-                <a:latin typeface="Noto Sans"/>
-                <a:ea typeface="Noto Sans CJK JP"/>
-                <a:cs typeface="Noto Sans"/>
-                <a:hlinkClick r:id="rId2"/>
-              </a:rPr>
-              <a:t>https://github.com/THUNLP-AIPoet/CCPM</a:t>
-            </a:r>
-          </a:p>
-        </p:txBody>
-      </p:sp>
-    </p:spTree>
-  </p:cSld>
-  <p:clrMapOvr>
-    <a:masterClrMapping/>
-  </p:clrMapOvr>
-</p:sld>
-</file>
-
-<file path=ppt/slides/slide48.xml><?xml version="1.0" encoding="utf-8"?>
-<p:sld xmlns:a="http://schemas.openxmlformats.org/drawingml/2006/main" xmlns:p="http://schemas.openxmlformats.org/presentationml/2006/main" xmlns:r="http://schemas.openxmlformats.org/officeDocument/2006/relationships">
-  <p:cSld>
-    <p:spTree>
-      <p:nvGrpSpPr>
-        <p:cNvPr id="1" name=""/>
-        <p:cNvGrpSpPr/>
-        <p:nvPr/>
-      </p:nvGrpSpPr>
-      <p:grpSpPr/>
-      <p:sp>
-        <p:nvSpPr>
-          <p:cNvPr id="2" name="Title 1"/>
-          <p:cNvSpPr>
-            <a:spLocks noGrp="1"/>
-          </p:cNvSpPr>
-          <p:nvPr>
-            <p:ph type="title"/>
-          </p:nvPr>
-        </p:nvSpPr>
-        <p:spPr>
-          <a:xfrm>
-            <a:off x="468172" y="650138"/>
-            <a:ext cx="8206740" cy="616305"/>
-          </a:xfrm>
-        </p:spPr>
-        <p:txBody>
-          <a:bodyPr wrap="square" lIns="0" rIns="0" tIns="0" bIns="0">
-            <a:noAutofit/>
-          </a:bodyPr>
-          <a:lstStyle/>
-          <a:p>
-            <a:pPr algn="l">
-              <a:lnSpc>
-                <a:spcPct val="110000"/>
-              </a:lnSpc>
-              <a:buNone/>
-              <a:defRPr sz="2800" b="0">
-                <a:solidFill>
-                  <a:srgbClr val="303437"/>
-                </a:solidFill>
-                <a:latin typeface="Noto Sans"/>
-              </a:defRPr>
-            </a:pPr>
-            <a:r>
-              <a:rPr sz="2800" b="1" lang="ja-JP" altLang="en-US">
-                <a:solidFill>
-                  <a:srgbClr val="303437"/>
-                </a:solidFill>
-                <a:latin typeface="Noto Sans"/>
-                <a:ea typeface="Noto Sans CJK JP"/>
-                <a:cs typeface="Noto Sans"/>
-              </a:rPr>
-              <a:t>JSONLから問題文・候補・正解を読み出す</a:t>
+              <a:t>参考文献</a:t>
             </a:r>
           </a:p>
         </p:txBody>
@@ -24976,279 +25887,21 @@
                 <a:ea typeface="Noto Sans CJK JP"/>
                 <a:cs typeface="Noto Sans"/>
               </a:rPr>
-              <a:t>Appendix: 2. 入力形式と詩句の読み方</a:t>
+              <a:t>Appendix: 3. 参考文献</a:t>
             </a:r>
           </a:p>
         </p:txBody>
       </p:sp>
       <p:sp>
         <p:nvSpPr>
-          <p:cNvPr id="4" name="code-frame"/>
-          <p:cNvSpPr/>
-          <p:nvPr/>
-        </p:nvSpPr>
-        <p:spPr>
-          <a:xfrm>
-            <a:off x="548640" y="1508760"/>
-            <a:ext cx="8046720" cy="2221992"/>
-          </a:xfrm>
-          <a:prstGeom prst="rect">
-            <a:avLst/>
-          </a:prstGeom>
-          <a:solidFill>
-            <a:srgbClr val="EBEDEB"/>
-          </a:solidFill>
-          <a:ln>
-            <a:noFill/>
-          </a:ln>
-          <a:effectLst/>
-        </p:spPr>
-        <p:style>
-          <a:lnRef idx="1">
-            <a:schemeClr val="accent1"/>
-          </a:lnRef>
-          <a:fillRef idx="3">
-            <a:schemeClr val="accent1"/>
-          </a:fillRef>
-          <a:effectRef idx="0">
-            <a:schemeClr val="accent1"/>
-          </a:effectRef>
-          <a:fontRef idx="minor">
-            <a:schemeClr val="lt1"/>
-          </a:fontRef>
-        </p:style>
-        <p:txBody>
-          <a:bodyPr rtlCol="0" anchor="t" wrap="none" lIns="152400" rIns="152400" tIns="92710" bIns="127000"/>
-          <a:lstStyle/>
-          <a:p>
-            <a:pPr algn="l">
-              <a:lnSpc>
-                <a:spcPts val="2250"/>
-              </a:lnSpc>
-              <a:spcBef>
-                <a:spcPts val="0"/>
-              </a:spcBef>
-              <a:spcAft>
-                <a:spcPts val="0"/>
-              </a:spcAft>
-              <a:buNone/>
-              <a:defRPr sz="1800" b="0">
-                <a:solidFill>
-                  <a:srgbClr val="303437"/>
-                </a:solidFill>
-                <a:latin typeface="Noto Sans"/>
-              </a:defRPr>
-            </a:pPr>
-            <a:r>
-              <a:rPr sz="1800" b="0" lang="ja-JP" altLang="en-US">
-                <a:solidFill>
-                  <a:srgbClr val="303437"/>
-                </a:solidFill>
-                <a:latin typeface="Liberation Mono"/>
-                <a:ea typeface="Noto Sans CJK JP"/>
-                <a:cs typeface="Liberation Mono"/>
-              </a:rPr>
-              <a:t>import json</a:t>
-            </a:r>
-          </a:p>
-          <a:p>
-            <a:pPr algn="l">
-              <a:lnSpc>
-                <a:spcPts val="2250"/>
-              </a:lnSpc>
-              <a:spcBef>
-                <a:spcPts val="0"/>
-              </a:spcBef>
-              <a:spcAft>
-                <a:spcPts val="0"/>
-              </a:spcAft>
-              <a:buNone/>
-              <a:defRPr sz="1800" b="0">
-                <a:solidFill>
-                  <a:srgbClr val="303437"/>
-                </a:solidFill>
-                <a:latin typeface="Noto Sans"/>
-              </a:defRPr>
-            </a:pPr>
-            <a:r>
-              <a:rPr sz="1800" b="0" lang="ja-JP" altLang="en-US">
-                <a:solidFill>
-                  <a:srgbClr val="303437"/>
-                </a:solidFill>
-                <a:latin typeface="Liberation Mono"/>
-                <a:ea typeface="Noto Sans CJK JP"/>
-                <a:cs typeface="Liberation Mono"/>
-              </a:rPr>
-              <a:t>with open("train.jsonl", encoding="utf-8") as f:</a:t>
-            </a:r>
-          </a:p>
-          <a:p>
-            <a:pPr algn="l">
-              <a:lnSpc>
-                <a:spcPts val="2250"/>
-              </a:lnSpc>
-              <a:spcBef>
-                <a:spcPts val="0"/>
-              </a:spcBef>
-              <a:spcAft>
-                <a:spcPts val="0"/>
-              </a:spcAft>
-              <a:buNone/>
-              <a:defRPr sz="1800" b="0">
-                <a:solidFill>
-                  <a:srgbClr val="303437"/>
-                </a:solidFill>
-                <a:latin typeface="Noto Sans"/>
-              </a:defRPr>
-            </a:pPr>
-            <a:r>
-              <a:rPr sz="1800" b="0" lang="ja-JP" altLang="en-US">
-                <a:solidFill>
-                  <a:srgbClr val="303437"/>
-                </a:solidFill>
-                <a:latin typeface="Liberation Mono"/>
-                <a:ea typeface="Noto Sans CJK JP"/>
-                <a:cs typeface="Liberation Mono"/>
-              </a:rPr>
-              <a:t>    question = json.loads(next(f))</a:t>
-            </a:r>
-          </a:p>
-          <a:p>
-            <a:pPr algn="l">
-              <a:lnSpc>
-                <a:spcPts val="2250"/>
-              </a:lnSpc>
-              <a:spcBef>
-                <a:spcPts val="0"/>
-              </a:spcBef>
-              <a:spcAft>
-                <a:spcPts val="0"/>
-              </a:spcAft>
-              <a:buNone/>
-              <a:defRPr sz="1800" b="0">
-                <a:solidFill>
-                  <a:srgbClr val="303437"/>
-                </a:solidFill>
-                <a:latin typeface="Noto Sans"/>
-              </a:defRPr>
-            </a:pPr>
-            <a:r>
-              <a:rPr sz="1800" b="0" lang="ja-JP" altLang="en-US">
-                <a:solidFill>
-                  <a:srgbClr val="303437"/>
-                </a:solidFill>
-                <a:latin typeface="Liberation Mono"/>
-                <a:ea typeface="Noto Sans CJK JP"/>
-                <a:cs typeface="Liberation Mono"/>
-              </a:rPr>
-              <a:t>print(question["translation"])</a:t>
-            </a:r>
-          </a:p>
-          <a:p>
-            <a:pPr algn="l">
-              <a:lnSpc>
-                <a:spcPts val="2250"/>
-              </a:lnSpc>
-              <a:spcBef>
-                <a:spcPts val="0"/>
-              </a:spcBef>
-              <a:spcAft>
-                <a:spcPts val="0"/>
-              </a:spcAft>
-              <a:buNone/>
-              <a:defRPr sz="1800" b="0">
-                <a:solidFill>
-                  <a:srgbClr val="303437"/>
-                </a:solidFill>
-                <a:latin typeface="Noto Sans"/>
-              </a:defRPr>
-            </a:pPr>
-            <a:r>
-              <a:rPr sz="1800" b="0" lang="ja-JP" altLang="en-US">
-                <a:solidFill>
-                  <a:srgbClr val="303437"/>
-                </a:solidFill>
-                <a:latin typeface="Liberation Mono"/>
-                <a:ea typeface="Noto Sans CJK JP"/>
-                <a:cs typeface="Liberation Mono"/>
-              </a:rPr>
-              <a:t>for i, verse in enumerate(question["choices"]):</a:t>
-            </a:r>
-          </a:p>
-          <a:p>
-            <a:pPr algn="l">
-              <a:lnSpc>
-                <a:spcPts val="2250"/>
-              </a:lnSpc>
-              <a:spcBef>
-                <a:spcPts val="0"/>
-              </a:spcBef>
-              <a:spcAft>
-                <a:spcPts val="0"/>
-              </a:spcAft>
-              <a:buNone/>
-              <a:defRPr sz="1800" b="0">
-                <a:solidFill>
-                  <a:srgbClr val="303437"/>
-                </a:solidFill>
-                <a:latin typeface="Noto Sans"/>
-              </a:defRPr>
-            </a:pPr>
-            <a:r>
-              <a:rPr sz="1800" b="0" lang="ja-JP" altLang="en-US">
-                <a:solidFill>
-                  <a:srgbClr val="303437"/>
-                </a:solidFill>
-                <a:latin typeface="Liberation Mono"/>
-                <a:ea typeface="Noto Sans CJK JP"/>
-                <a:cs typeface="Liberation Mono"/>
-              </a:rPr>
-              <a:t>    print(f"{chr(65+i)}. {verse}")</a:t>
-            </a:r>
-          </a:p>
-          <a:p>
-            <a:pPr algn="l">
-              <a:lnSpc>
-                <a:spcPts val="2250"/>
-              </a:lnSpc>
-              <a:spcBef>
-                <a:spcPts val="0"/>
-              </a:spcBef>
-              <a:spcAft>
-                <a:spcPts val="0"/>
-              </a:spcAft>
-              <a:buNone/>
-              <a:defRPr sz="1800" b="0">
-                <a:solidFill>
-                  <a:srgbClr val="303437"/>
-                </a:solidFill>
-                <a:latin typeface="Noto Sans"/>
-              </a:defRPr>
-            </a:pPr>
-            <a:r>
-              <a:rPr sz="1800" b="0" lang="ja-JP" altLang="en-US">
-                <a:solidFill>
-                  <a:srgbClr val="303437"/>
-                </a:solidFill>
-                <a:latin typeface="Liberation Mono"/>
-                <a:ea typeface="Noto Sans CJK JP"/>
-                <a:cs typeface="Liberation Mono"/>
-              </a:rPr>
-              <a:t>print("正解:", chr(65 + question["answer"]))</a:t>
-            </a:r>
-          </a:p>
-        </p:txBody>
-      </p:sp>
-      <p:sp>
-        <p:nvSpPr>
-          <p:cNvPr id="5" name="TextBox 4"/>
+          <p:cNvPr id="4" name="文献 1: BERT: Pre-training of Deep Bidirectional Transformers for Language Understanding"/>
           <p:cNvSpPr txBox="1"/>
           <p:nvPr/>
         </p:nvSpPr>
         <p:spPr>
           <a:xfrm>
-            <a:off x="594360" y="3886200"/>
-            <a:ext cx="7955279" cy="640080"/>
+            <a:off x="548640" y="1463040"/>
+            <a:ext cx="8046720" cy="1613662"/>
           </a:xfrm>
           <a:prstGeom prst="rect">
             <a:avLst/>
@@ -25263,46 +25916,140 @@
           <a:p>
             <a:pPr algn="l">
               <a:lnSpc>
-                <a:spcPts val="2222"/>
-              </a:lnSpc>
-              <a:spcBef>
-                <a:spcPts val="0"/>
-              </a:spcBef>
-              <a:spcAft>
-                <a:spcPts val="0"/>
-              </a:spcAft>
-              <a:buNone/>
-              <a:defRPr sz="1900" b="0">
-                <a:solidFill>
-                  <a:srgbClr val="303437"/>
-                </a:solidFill>
-                <a:latin typeface="Noto Sans"/>
-              </a:defRPr>
-            </a:pPr>
-            <a:r>
-              <a:rPr sz="1900" b="0" lang="ja-JP" altLang="en-US">
-                <a:solidFill>
-                  <a:srgbClr val="303437"/>
-                </a:solidFill>
-                <a:latin typeface="Noto Sans"/>
-                <a:ea typeface="Noto Sans CJK JP"/>
-                <a:cs typeface="Noto Sans"/>
-              </a:rPr>
-              <a:t>train.jsonlは1行に1問のJSONを収める。最初の問題の説明、四候補、正解記号を表示する。</a:t>
+                <a:spcPct val="114000"/>
+              </a:lnSpc>
+              <a:spcBef>
+                <a:spcPts val="0"/>
+              </a:spcBef>
+              <a:spcAft>
+                <a:spcPts val="400"/>
+              </a:spcAft>
+              <a:buNone/>
+              <a:defRPr sz="1850" b="0">
+                <a:solidFill>
+                  <a:srgbClr val="303437"/>
+                </a:solidFill>
+                <a:latin typeface="Noto Sans"/>
+              </a:defRPr>
+            </a:pPr>
+            <a:r>
+              <a:rPr sz="1850" b="1" lang="ja-JP" altLang="en-US">
+                <a:solidFill>
+                  <a:srgbClr val="303437"/>
+                </a:solidFill>
+                <a:latin typeface="Noto Sans"/>
+                <a:ea typeface="Noto Sans CJK JP"/>
+                <a:cs typeface="Noto Sans"/>
+              </a:rPr>
+              <a:t>BERT: Pre-training of Deep Bidirectional Transformers for Language Understanding</a:t>
+            </a:r>
+          </a:p>
+          <a:p>
+            <a:pPr algn="l">
+              <a:lnSpc>
+                <a:spcPct val="114000"/>
+              </a:lnSpc>
+              <a:spcBef>
+                <a:spcPts val="0"/>
+              </a:spcBef>
+              <a:spcAft>
+                <a:spcPts val="500"/>
+              </a:spcAft>
+              <a:buNone/>
+              <a:defRPr sz="1250" b="0">
+                <a:solidFill>
+                  <a:srgbClr val="303437"/>
+                </a:solidFill>
+                <a:latin typeface="Noto Sans"/>
+              </a:defRPr>
+            </a:pPr>
+            <a:r>
+              <a:rPr sz="1250" b="0" lang="ja-JP" altLang="en-US">
+                <a:solidFill>
+                  <a:srgbClr val="626669"/>
+                </a:solidFill>
+                <a:latin typeface="Noto Sans"/>
+                <a:ea typeface="Noto Sans CJK JP"/>
+                <a:cs typeface="Noto Sans"/>
+              </a:rPr>
+              <a:t>Jacob Devlin, Ming-Wei Chang, Kenton Lee, Kristina Toutanova · 2019 · NAACL-HLT</a:t>
+            </a:r>
+          </a:p>
+          <a:p>
+            <a:pPr algn="l">
+              <a:lnSpc>
+                <a:spcPct val="114000"/>
+              </a:lnSpc>
+              <a:spcBef>
+                <a:spcPts val="0"/>
+              </a:spcBef>
+              <a:spcAft>
+                <a:spcPts val="400"/>
+              </a:spcAft>
+              <a:buNone/>
+              <a:defRPr sz="1750" b="0">
+                <a:solidFill>
+                  <a:srgbClr val="303437"/>
+                </a:solidFill>
+                <a:latin typeface="Noto Sans"/>
+              </a:defRPr>
+            </a:pPr>
+            <a:r>
+              <a:rPr sz="1750" b="0" lang="ja-JP" altLang="en-US">
+                <a:solidFill>
+                  <a:srgbClr val="303437"/>
+                </a:solidFill>
+                <a:latin typeface="Noto Sans"/>
+                <a:ea typeface="Noto Sans CJK JP"/>
+                <a:cs typeface="Noto Sans"/>
+              </a:rPr>
+              <a:t>双方向Transformerの事前学習と、文分類などへの微調整を提案する。</a:t>
+            </a:r>
+          </a:p>
+          <a:p>
+            <a:pPr algn="l">
+              <a:lnSpc>
+                <a:spcPct val="114000"/>
+              </a:lnSpc>
+              <a:spcBef>
+                <a:spcPts val="0"/>
+              </a:spcBef>
+              <a:spcAft>
+                <a:spcPts val="0"/>
+              </a:spcAft>
+              <a:buNone/>
+              <a:defRPr sz="1050" b="0">
+                <a:solidFill>
+                  <a:srgbClr val="303437"/>
+                </a:solidFill>
+                <a:latin typeface="Noto Sans"/>
+              </a:defRPr>
+            </a:pPr>
+            <a:r>
+              <a:rPr sz="1050" b="0" lang="ja-JP" altLang="en-US">
+                <a:solidFill>
+                  <a:srgbClr val="626669"/>
+                </a:solidFill>
+                <a:latin typeface="Noto Sans"/>
+                <a:ea typeface="Noto Sans CJK JP"/>
+                <a:cs typeface="Noto Sans"/>
+                <a:hlinkClick r:id="rId2"/>
+              </a:rPr>
+              <a:t>https://aclanthology.org/N19-1423/</a:t>
             </a:r>
           </a:p>
         </p:txBody>
       </p:sp>
       <p:sp>
         <p:nvSpPr>
-          <p:cNvPr id="6" name="sources"/>
+          <p:cNvPr id="5" name="文献 2: BERT-CCPoem"/>
           <p:cNvSpPr txBox="1"/>
           <p:nvPr/>
         </p:nvSpPr>
         <p:spPr>
           <a:xfrm>
-            <a:off x="502920" y="4700016"/>
-            <a:ext cx="8183879" cy="530352"/>
+            <a:off x="548640" y="3308350"/>
+            <a:ext cx="8046720" cy="1574419"/>
           </a:xfrm>
           <a:prstGeom prst="rect">
             <a:avLst/>
@@ -25317,24 +26064,55 @@
           <a:p>
             <a:pPr algn="l">
               <a:lnSpc>
-                <a:spcPts val="940"/>
-              </a:lnSpc>
-              <a:spcBef>
-                <a:spcPts val="0"/>
-              </a:spcBef>
-              <a:spcAft>
-                <a:spcPts val="140"/>
-              </a:spcAft>
-              <a:buNone/>
-              <a:defRPr sz="810" b="0">
-                <a:solidFill>
-                  <a:srgbClr val="303437"/>
-                </a:solidFill>
-                <a:latin typeface="Noto Sans"/>
-              </a:defRPr>
-            </a:pPr>
-            <a:r>
-              <a:rPr sz="810" b="0" lang="ja-JP" altLang="en-US">
+                <a:spcPct val="114000"/>
+              </a:lnSpc>
+              <a:spcBef>
+                <a:spcPts val="0"/>
+              </a:spcBef>
+              <a:spcAft>
+                <a:spcPts val="400"/>
+              </a:spcAft>
+              <a:buNone/>
+              <a:defRPr sz="1850" b="0">
+                <a:solidFill>
+                  <a:srgbClr val="303437"/>
+                </a:solidFill>
+                <a:latin typeface="Noto Sans"/>
+              </a:defRPr>
+            </a:pPr>
+            <a:r>
+              <a:rPr sz="1850" b="1" lang="ja-JP" altLang="en-US">
+                <a:solidFill>
+                  <a:srgbClr val="303437"/>
+                </a:solidFill>
+                <a:latin typeface="Noto Sans"/>
+                <a:ea typeface="Noto Sans CJK JP"/>
+                <a:cs typeface="Noto Sans"/>
+              </a:rPr>
+              <a:t>BERT-CCPoem</a:t>
+            </a:r>
+          </a:p>
+          <a:p>
+            <a:pPr algn="l">
+              <a:lnSpc>
+                <a:spcPct val="114000"/>
+              </a:lnSpc>
+              <a:spcBef>
+                <a:spcPts val="0"/>
+              </a:spcBef>
+              <a:spcAft>
+                <a:spcPts val="500"/>
+              </a:spcAft>
+              <a:buNone/>
+              <a:defRPr sz="1250" b="0">
+                <a:solidFill>
+                  <a:srgbClr val="303437"/>
+                </a:solidFill>
+                <a:latin typeface="Noto Sans"/>
+              </a:defRPr>
+            </a:pPr>
+            <a:r>
+              <a:rPr sz="1250" b="0" lang="ja-JP" altLang="en-US">
                 <a:solidFill>
                   <a:srgbClr val="626669"/>
                 </a:solidFill>
@@ -25342,282 +26120,70 @@
                 <a:ea typeface="Noto Sans CJK JP"/>
                 <a:cs typeface="Noto Sans"/>
               </a:rPr>
-              <a:t>[1] THUNLP-AIPoet (2021). CCPM.  </a:t>
-            </a:r>
-            <a:r>
-              <a:rPr sz="810" b="0" lang="ja-JP" altLang="en-US">
+              <a:t>Zhipeng Guo, Jinyi Hu, Maosong Sun · 2020 · 公式実装</a:t>
+            </a:r>
+          </a:p>
+          <a:p>
+            <a:pPr algn="l">
+              <a:lnSpc>
+                <a:spcPct val="114000"/>
+              </a:lnSpc>
+              <a:spcBef>
+                <a:spcPts val="0"/>
+              </a:spcBef>
+              <a:spcAft>
+                <a:spcPts val="400"/>
+              </a:spcAft>
+              <a:buNone/>
+              <a:defRPr sz="1750" b="0">
+                <a:solidFill>
+                  <a:srgbClr val="303437"/>
+                </a:solidFill>
+                <a:latin typeface="Noto Sans"/>
+              </a:defRPr>
+            </a:pPr>
+            <a:r>
+              <a:rPr sz="1750" b="0" lang="ja-JP" altLang="en-US">
+                <a:solidFill>
+                  <a:srgbClr val="303437"/>
+                </a:solidFill>
+                <a:latin typeface="Noto Sans"/>
+                <a:ea typeface="Noto Sans CJK JP"/>
+                <a:cs typeface="Noto Sans"/>
+              </a:rPr>
+              <a:t>古典詩コーパスで学習したモデルと表現を公開し、CCPMでは似た詩句の検索に利用される。</a:t>
+            </a:r>
+          </a:p>
+          <a:p>
+            <a:pPr algn="l">
+              <a:lnSpc>
+                <a:spcPct val="114000"/>
+              </a:lnSpc>
+              <a:spcBef>
+                <a:spcPts val="0"/>
+              </a:spcBef>
+              <a:spcAft>
+                <a:spcPts val="0"/>
+              </a:spcAft>
+              <a:buNone/>
+              <a:defRPr sz="1050" b="0">
+                <a:solidFill>
+                  <a:srgbClr val="303437"/>
+                </a:solidFill>
+                <a:latin typeface="Noto Sans"/>
+              </a:defRPr>
+            </a:pPr>
+            <a:r>
+              <a:rPr sz="1050" b="0" lang="ja-JP" altLang="en-US">
                 <a:solidFill>
                   <a:srgbClr val="626669"/>
                 </a:solidFill>
                 <a:latin typeface="Noto Sans"/>
                 <a:ea typeface="Noto Sans CJK JP"/>
                 <a:cs typeface="Noto Sans"/>
-                <a:hlinkClick r:id="rId2"/>
-              </a:rPr>
-              <a:t>https://github.com/THUNLP-AIPoet/CCPM</a:t>
-            </a:r>
-          </a:p>
-        </p:txBody>
-      </p:sp>
-    </p:spTree>
-  </p:cSld>
-  <p:clrMapOvr>
-    <a:masterClrMapping/>
-  </p:clrMapOvr>
-</p:sld>
-</file>
-
-<file path=ppt/slides/slide49.xml><?xml version="1.0" encoding="utf-8"?>
-<p:sld xmlns:a="http://schemas.openxmlformats.org/drawingml/2006/main" xmlns:p="http://schemas.openxmlformats.org/presentationml/2006/main" xmlns:r="http://schemas.openxmlformats.org/officeDocument/2006/relationships">
-  <p:cSld>
-    <p:spTree>
-      <p:nvGrpSpPr>
-        <p:cNvPr id="1" name=""/>
-        <p:cNvGrpSpPr/>
-        <p:nvPr/>
-      </p:nvGrpSpPr>
-      <p:grpSpPr/>
-      <p:sp>
-        <p:nvSpPr>
-          <p:cNvPr id="2" name="Title 1"/>
-          <p:cNvSpPr>
-            <a:spLocks noGrp="1"/>
-          </p:cNvSpPr>
-          <p:nvPr>
-            <p:ph type="title"/>
-          </p:nvPr>
-        </p:nvSpPr>
-        <p:spPr>
-          <a:xfrm>
-            <a:off x="468172" y="650138"/>
-            <a:ext cx="8206740" cy="616305"/>
-          </a:xfrm>
-        </p:spPr>
-        <p:txBody>
-          <a:bodyPr wrap="square" lIns="0" rIns="0" tIns="0" bIns="0">
-            <a:noAutofit/>
-          </a:bodyPr>
-          <a:lstStyle/>
-          <a:p>
-            <a:pPr algn="l">
-              <a:lnSpc>
-                <a:spcPct val="110000"/>
-              </a:lnSpc>
-              <a:buNone/>
-              <a:defRPr sz="2800" b="0">
-                <a:solidFill>
-                  <a:srgbClr val="303437"/>
-                </a:solidFill>
-                <a:latin typeface="Noto Sans"/>
-              </a:defRPr>
-            </a:pPr>
-            <a:r>
-              <a:rPr sz="2800" b="1" lang="ja-JP" altLang="en-US">
-                <a:solidFill>
-                  <a:srgbClr val="303437"/>
-                </a:solidFill>
-                <a:latin typeface="Noto Sans"/>
-                <a:ea typeface="Noto Sans CJK JP"/>
-                <a:cs typeface="Noto Sans"/>
-              </a:rPr>
-              <a:t>候補の細かな語と、説明の意味を対応させる</a:t>
-            </a:r>
-          </a:p>
-        </p:txBody>
-      </p:sp>
-      <p:sp>
-        <p:nvSpPr>
-          <p:cNvPr id="3" name="Text Placeholder 2"/>
-          <p:cNvSpPr>
-            <a:spLocks noGrp="1"/>
-          </p:cNvSpPr>
-          <p:nvPr>
-            <p:ph type="body" idx="1"/>
-          </p:nvPr>
-        </p:nvSpPr>
-        <p:spPr>
-          <a:xfrm>
-            <a:off x="594360" y="1463040"/>
-            <a:ext cx="7955279" cy="3044952"/>
-          </a:xfrm>
-        </p:spPr>
-        <p:txBody>
-          <a:bodyPr wrap="square" tIns="91440" bIns="91440">
-            <a:noAutofit/>
-          </a:bodyPr>
-          <a:lstStyle/>
-          <a:p>
-            <a:pPr marL="457200" indent="-355600">
-              <a:lnSpc>
-                <a:spcPts val="2320"/>
-              </a:lnSpc>
-              <a:spcAft>
-                <a:spcPts val="700"/>
-              </a:spcAft>
-              <a:buSzPct val="68205"/>
-              <a:buFont typeface="Noto Sans CJK JP"/>
-              <a:buChar char="●"/>
-              <a:defRPr sz="1950" b="0">
-                <a:solidFill>
-                  <a:srgbClr val="303437"/>
-                </a:solidFill>
-                <a:latin typeface="Noto Sans"/>
-              </a:defRPr>
-            </a:pPr>
-            <a:r>
-              <a:rPr sz="1950" b="0" lang="ja-JP" altLang="en-US">
-                <a:solidFill>
-                  <a:srgbClr val="303437"/>
-                </a:solidFill>
-                <a:latin typeface="Noto Sans"/>
-                <a:ea typeface="Noto Sans CJK JP"/>
-                <a:cs typeface="Noto Sans"/>
-              </a:rPr>
-              <a:t>実例11の候補A「云深不可知」とD「云深不知处」は、共通する語が多い。Aは「雲が深く、知りようがない」、Dは「雲が深く、居場所が分からない」と読める。</a:t>
-            </a:r>
-          </a:p>
-          <a:p>
-            <a:pPr marL="457200" indent="-355600">
-              <a:lnSpc>
-                <a:spcPts val="2320"/>
-              </a:lnSpc>
-              <a:spcAft>
-                <a:spcPts val="0"/>
-              </a:spcAft>
-              <a:buSzPct val="68205"/>
-              <a:buFont typeface="Noto Sans CJK JP"/>
-              <a:buChar char="●"/>
-              <a:defRPr sz="1950" b="0">
-                <a:solidFill>
-                  <a:srgbClr val="303437"/>
-                </a:solidFill>
-                <a:latin typeface="Noto Sans"/>
-              </a:defRPr>
-            </a:pPr>
-            <a:r>
-              <a:rPr sz="1950" b="0" lang="ja-JP" altLang="en-US">
-                <a:solidFill>
-                  <a:srgbClr val="303437"/>
-                </a:solidFill>
-                <a:latin typeface="Noto Sans"/>
-                <a:ea typeface="Noto Sans CJK JP"/>
-                <a:cs typeface="Noto Sans"/>
-              </a:rPr>
-              <a:t>現代語の説明には「不知道他到底在哪」（あの人がどこにいるのか分からない）とあり、場所を表す「处」との対応が判断の手掛かりになる。</a:t>
-            </a:r>
-          </a:p>
-        </p:txBody>
-      </p:sp>
-      <p:sp>
-        <p:nvSpPr>
-          <p:cNvPr id="4" name="Title 3"/>
-          <p:cNvSpPr>
-            <a:spLocks noGrp="1"/>
-          </p:cNvSpPr>
-          <p:nvPr>
-            <p:ph type="title" idx="2"/>
-          </p:nvPr>
-        </p:nvSpPr>
-        <p:spPr>
-          <a:xfrm>
-            <a:off x="75895" y="0"/>
-            <a:ext cx="8115300" cy="480060"/>
-          </a:xfrm>
-        </p:spPr>
-        <p:txBody>
-          <a:bodyPr wrap="square" lIns="0" rIns="0" tIns="0" bIns="0" anchor="ctr">
-            <a:noAutofit/>
-          </a:bodyPr>
-          <a:lstStyle/>
-          <a:p>
-            <a:pPr algn="l">
-              <a:lnSpc>
-                <a:spcPct val="110000"/>
-              </a:lnSpc>
-              <a:buNone/>
-              <a:defRPr sz="1400" b="0">
-                <a:solidFill>
-                  <a:srgbClr val="303437"/>
-                </a:solidFill>
-                <a:latin typeface="Noto Sans"/>
-              </a:defRPr>
-            </a:pPr>
-            <a:r>
-              <a:rPr sz="1400" b="1" lang="ja-JP" altLang="en-US">
-                <a:solidFill>
-                  <a:srgbClr val="FFFEF8"/>
-                </a:solidFill>
-                <a:latin typeface="Noto Sans"/>
-                <a:ea typeface="Noto Sans CJK JP"/>
-                <a:cs typeface="Noto Sans"/>
-              </a:rPr>
-              <a:t>Appendix: 2. 入力形式と詩句の読み方</a:t>
-            </a:r>
-          </a:p>
-        </p:txBody>
-      </p:sp>
-      <p:sp>
-        <p:nvSpPr>
-          <p:cNvPr id="5" name="sources"/>
-          <p:cNvSpPr txBox="1"/>
-          <p:nvPr/>
-        </p:nvSpPr>
-        <p:spPr>
-          <a:xfrm>
-            <a:off x="502920" y="4700016"/>
-            <a:ext cx="8183879" cy="530352"/>
-          </a:xfrm>
-          <a:prstGeom prst="rect">
-            <a:avLst/>
-          </a:prstGeom>
-          <a:noFill/>
-        </p:spPr>
-        <p:txBody>
-          <a:bodyPr wrap="square" lIns="0" rIns="0" tIns="0" bIns="0">
-            <a:noAutofit/>
-          </a:bodyPr>
-          <a:lstStyle/>
-          <a:p>
-            <a:pPr algn="l">
-              <a:lnSpc>
-                <a:spcPts val="940"/>
-              </a:lnSpc>
-              <a:spcBef>
-                <a:spcPts val="0"/>
-              </a:spcBef>
-              <a:spcAft>
-                <a:spcPts val="140"/>
-              </a:spcAft>
-              <a:buNone/>
-              <a:defRPr sz="810" b="0">
-                <a:solidFill>
-                  <a:srgbClr val="303437"/>
-                </a:solidFill>
-                <a:latin typeface="Noto Sans"/>
-              </a:defRPr>
-            </a:pPr>
-            <a:r>
-              <a:rPr sz="810" b="0" lang="ja-JP" altLang="en-US">
-                <a:solidFill>
-                  <a:srgbClr val="626669"/>
-                </a:solidFill>
-                <a:latin typeface="Noto Sans"/>
-                <a:ea typeface="Noto Sans CJK JP"/>
-                <a:cs typeface="Noto Sans"/>
-              </a:rPr>
-              <a:t>[1] THUNLP-AIPoet (2021). CCPM.  </a:t>
-            </a:r>
-            <a:r>
-              <a:rPr sz="810" b="0" lang="ja-JP" altLang="en-US">
-                <a:solidFill>
-                  <a:srgbClr val="626669"/>
-                </a:solidFill>
-                <a:latin typeface="Noto Sans"/>
-                <a:ea typeface="Noto Sans CJK JP"/>
-                <a:cs typeface="Noto Sans"/>
-                <a:hlinkClick r:id="rId2"/>
-              </a:rPr>
-              <a:t>https://github.com/THUNLP-AIPoet/CCPM</a:t>
+                <a:hlinkClick r:id="rId3"/>
+              </a:rPr>
+              <a:t>https://github.com/THUNLP-AIPoet/BERT-CCPoem</a:t>
             </a:r>
           </a:p>
         </p:txBody>
@@ -25892,1350 +26458,6 @@
                 <a:hlinkClick r:id="rId2"/>
               </a:rPr>
               <a:t>https://arxiv.org/abs/2106.01979</a:t>
-            </a:r>
-          </a:p>
-        </p:txBody>
-      </p:sp>
-    </p:spTree>
-  </p:cSld>
-  <p:clrMapOvr>
-    <a:masterClrMapping/>
-  </p:clrMapOvr>
-</p:sld>
-</file>
-
-<file path=ppt/slides/slide50.xml><?xml version="1.0" encoding="utf-8"?>
-<p:sld xmlns:a="http://schemas.openxmlformats.org/drawingml/2006/main" xmlns:p="http://schemas.openxmlformats.org/presentationml/2006/main" xmlns:r="http://schemas.openxmlformats.org/officeDocument/2006/relationships">
-  <p:cSld>
-    <p:spTree>
-      <p:nvGrpSpPr>
-        <p:cNvPr id="1" name=""/>
-        <p:cNvGrpSpPr/>
-        <p:nvPr/>
-      </p:nvGrpSpPr>
-      <p:grpSpPr/>
-      <p:sp>
-        <p:nvSpPr>
-          <p:cNvPr id="2" name="Title 1"/>
-          <p:cNvSpPr>
-            <a:spLocks noGrp="1"/>
-          </p:cNvSpPr>
-          <p:nvPr>
-            <p:ph type="title"/>
-          </p:nvPr>
-        </p:nvSpPr>
-        <p:spPr>
-          <a:xfrm>
-            <a:off x="548640" y="2506875"/>
-            <a:ext cx="8046720" cy="585216"/>
-          </a:xfrm>
-        </p:spPr>
-        <p:txBody>
-          <a:bodyPr wrap="square" lIns="0" rIns="0" tIns="0" bIns="0" anchor="ctr">
-            <a:noAutofit/>
-          </a:bodyPr>
-          <a:lstStyle/>
-          <a:p>
-            <a:pPr algn="ctr">
-              <a:lnSpc>
-                <a:spcPct val="110000"/>
-              </a:lnSpc>
-              <a:buNone/>
-              <a:defRPr sz="3600" b="0">
-                <a:solidFill>
-                  <a:srgbClr val="303437"/>
-                </a:solidFill>
-                <a:latin typeface="Noto Sans"/>
-              </a:defRPr>
-            </a:pPr>
-            <a:r>
-              <a:rPr sz="3600" b="1" lang="ja-JP" altLang="en-US">
-                <a:solidFill>
-                  <a:srgbClr val="303437"/>
-                </a:solidFill>
-                <a:latin typeface="Noto Sans"/>
-                <a:ea typeface="Noto Sans CJK JP"/>
-                <a:cs typeface="Noto Sans"/>
-              </a:rPr>
-              <a:t>参考文献</a:t>
-            </a:r>
-          </a:p>
-        </p:txBody>
-      </p:sp>
-      <p:sp>
-        <p:nvSpPr>
-          <p:cNvPr id="3" name="Title 2"/>
-          <p:cNvSpPr>
-            <a:spLocks noGrp="1"/>
-          </p:cNvSpPr>
-          <p:nvPr>
-            <p:ph type="title" idx="2"/>
-          </p:nvPr>
-        </p:nvSpPr>
-        <p:spPr>
-          <a:xfrm>
-            <a:off x="75895" y="0"/>
-            <a:ext cx="8115300" cy="480060"/>
-          </a:xfrm>
-        </p:spPr>
-        <p:txBody>
-          <a:bodyPr wrap="square" lIns="0" rIns="0" tIns="0" bIns="0" anchor="ctr">
-            <a:noAutofit/>
-          </a:bodyPr>
-          <a:lstStyle/>
-          <a:p>
-            <a:pPr algn="l">
-              <a:lnSpc>
-                <a:spcPct val="110000"/>
-              </a:lnSpc>
-              <a:buNone/>
-              <a:defRPr sz="1400" b="0">
-                <a:solidFill>
-                  <a:srgbClr val="303437"/>
-                </a:solidFill>
-                <a:latin typeface="Noto Sans"/>
-              </a:defRPr>
-            </a:pPr>
-            <a:r>
-              <a:rPr sz="1400" b="1" lang="ja-JP" altLang="en-US">
-                <a:solidFill>
-                  <a:srgbClr val="FFFEF8"/>
-                </a:solidFill>
-                <a:latin typeface="Noto Sans"/>
-                <a:ea typeface="Noto Sans CJK JP"/>
-                <a:cs typeface="Noto Sans"/>
-              </a:rPr>
-              <a:t>Appendix: 3. 参考文献</a:t>
-            </a:r>
-          </a:p>
-        </p:txBody>
-      </p:sp>
-    </p:spTree>
-  </p:cSld>
-  <p:clrMapOvr>
-    <a:masterClrMapping/>
-  </p:clrMapOvr>
-</p:sld>
-</file>
-
-<file path=ppt/slides/slide51.xml><?xml version="1.0" encoding="utf-8"?>
-<p:sld xmlns:a="http://schemas.openxmlformats.org/drawingml/2006/main" xmlns:p="http://schemas.openxmlformats.org/presentationml/2006/main" xmlns:r="http://schemas.openxmlformats.org/officeDocument/2006/relationships">
-  <p:cSld>
-    <p:spTree>
-      <p:nvGrpSpPr>
-        <p:cNvPr id="1" name=""/>
-        <p:cNvGrpSpPr/>
-        <p:nvPr/>
-      </p:nvGrpSpPr>
-      <p:grpSpPr/>
-      <p:sp>
-        <p:nvSpPr>
-          <p:cNvPr id="2" name="Title 1"/>
-          <p:cNvSpPr>
-            <a:spLocks noGrp="1"/>
-          </p:cNvSpPr>
-          <p:nvPr>
-            <p:ph type="title"/>
-          </p:nvPr>
-        </p:nvSpPr>
-        <p:spPr>
-          <a:xfrm>
-            <a:off x="468172" y="650138"/>
-            <a:ext cx="8206740" cy="616305"/>
-          </a:xfrm>
-        </p:spPr>
-        <p:txBody>
-          <a:bodyPr wrap="square" lIns="0" rIns="0" tIns="0" bIns="0">
-            <a:noAutofit/>
-          </a:bodyPr>
-          <a:lstStyle/>
-          <a:p>
-            <a:pPr algn="l">
-              <a:lnSpc>
-                <a:spcPct val="110000"/>
-              </a:lnSpc>
-              <a:buNone/>
-              <a:defRPr sz="2800" b="0">
-                <a:solidFill>
-                  <a:srgbClr val="303437"/>
-                </a:solidFill>
-                <a:latin typeface="Noto Sans"/>
-              </a:defRPr>
-            </a:pPr>
-            <a:r>
-              <a:rPr sz="2800" b="1" lang="ja-JP" altLang="en-US">
-                <a:solidFill>
-                  <a:srgbClr val="303437"/>
-                </a:solidFill>
-                <a:latin typeface="Noto Sans"/>
-                <a:ea typeface="Noto Sans CJK JP"/>
-                <a:cs typeface="Noto Sans"/>
-              </a:rPr>
-              <a:t>参考文献</a:t>
-            </a:r>
-          </a:p>
-        </p:txBody>
-      </p:sp>
-      <p:sp>
-        <p:nvSpPr>
-          <p:cNvPr id="3" name="Title 2"/>
-          <p:cNvSpPr>
-            <a:spLocks noGrp="1"/>
-          </p:cNvSpPr>
-          <p:nvPr>
-            <p:ph type="title" idx="2"/>
-          </p:nvPr>
-        </p:nvSpPr>
-        <p:spPr>
-          <a:xfrm>
-            <a:off x="75895" y="0"/>
-            <a:ext cx="8115300" cy="480060"/>
-          </a:xfrm>
-        </p:spPr>
-        <p:txBody>
-          <a:bodyPr wrap="square" lIns="0" rIns="0" tIns="0" bIns="0" anchor="ctr">
-            <a:noAutofit/>
-          </a:bodyPr>
-          <a:lstStyle/>
-          <a:p>
-            <a:pPr algn="l">
-              <a:lnSpc>
-                <a:spcPct val="110000"/>
-              </a:lnSpc>
-              <a:buNone/>
-              <a:defRPr sz="1400" b="0">
-                <a:solidFill>
-                  <a:srgbClr val="303437"/>
-                </a:solidFill>
-                <a:latin typeface="Noto Sans"/>
-              </a:defRPr>
-            </a:pPr>
-            <a:r>
-              <a:rPr sz="1400" b="1" lang="ja-JP" altLang="en-US">
-                <a:solidFill>
-                  <a:srgbClr val="FFFEF8"/>
-                </a:solidFill>
-                <a:latin typeface="Noto Sans"/>
-                <a:ea typeface="Noto Sans CJK JP"/>
-                <a:cs typeface="Noto Sans"/>
-              </a:rPr>
-              <a:t>Appendix: 3. 参考文献</a:t>
-            </a:r>
-          </a:p>
-        </p:txBody>
-      </p:sp>
-      <p:sp>
-        <p:nvSpPr>
-          <p:cNvPr id="4" name="文献 1: CCPM: A Chinese Classical Poetry Matching Dataset"/>
-          <p:cNvSpPr txBox="1"/>
-          <p:nvPr/>
-        </p:nvSpPr>
-        <p:spPr>
-          <a:xfrm>
-            <a:off x="548640" y="1463040"/>
-            <a:ext cx="8046720" cy="1574419"/>
-          </a:xfrm>
-          <a:prstGeom prst="rect">
-            <a:avLst/>
-          </a:prstGeom>
-          <a:noFill/>
-        </p:spPr>
-        <p:txBody>
-          <a:bodyPr wrap="square" lIns="0" rIns="0" tIns="0" bIns="0">
-            <a:noAutofit/>
-          </a:bodyPr>
-          <a:lstStyle/>
-          <a:p>
-            <a:pPr algn="l">
-              <a:lnSpc>
-                <a:spcPct val="114000"/>
-              </a:lnSpc>
-              <a:spcBef>
-                <a:spcPts val="0"/>
-              </a:spcBef>
-              <a:spcAft>
-                <a:spcPts val="400"/>
-              </a:spcAft>
-              <a:buNone/>
-              <a:defRPr sz="1850" b="0">
-                <a:solidFill>
-                  <a:srgbClr val="303437"/>
-                </a:solidFill>
-                <a:latin typeface="Noto Sans"/>
-              </a:defRPr>
-            </a:pPr>
-            <a:r>
-              <a:rPr sz="1850" b="1" lang="ja-JP" altLang="en-US">
-                <a:solidFill>
-                  <a:srgbClr val="303437"/>
-                </a:solidFill>
-                <a:latin typeface="Noto Sans"/>
-                <a:ea typeface="Noto Sans CJK JP"/>
-                <a:cs typeface="Noto Sans"/>
-              </a:rPr>
-              <a:t>CCPM: A Chinese Classical Poetry Matching Dataset</a:t>
-            </a:r>
-          </a:p>
-          <a:p>
-            <a:pPr algn="l">
-              <a:lnSpc>
-                <a:spcPct val="114000"/>
-              </a:lnSpc>
-              <a:spcBef>
-                <a:spcPts val="0"/>
-              </a:spcBef>
-              <a:spcAft>
-                <a:spcPts val="500"/>
-              </a:spcAft>
-              <a:buNone/>
-              <a:defRPr sz="1250" b="0">
-                <a:solidFill>
-                  <a:srgbClr val="303437"/>
-                </a:solidFill>
-                <a:latin typeface="Noto Sans"/>
-              </a:defRPr>
-            </a:pPr>
-            <a:r>
-              <a:rPr sz="1250" b="0" lang="ja-JP" altLang="en-US">
-                <a:solidFill>
-                  <a:srgbClr val="626669"/>
-                </a:solidFill>
-                <a:latin typeface="Noto Sans"/>
-                <a:ea typeface="Noto Sans CJK JP"/>
-                <a:cs typeface="Noto Sans"/>
-              </a:rPr>
-              <a:t>Wenhao Li, Fanchao Qi, Maosong Sun, Xiaoyuan Yi, Jiarui Zhang · 2021 · arXiv:2106.01979v1</a:t>
-            </a:r>
-          </a:p>
-          <a:p>
-            <a:pPr algn="l">
-              <a:lnSpc>
-                <a:spcPct val="114000"/>
-              </a:lnSpc>
-              <a:spcBef>
-                <a:spcPts val="0"/>
-              </a:spcBef>
-              <a:spcAft>
-                <a:spcPts val="400"/>
-              </a:spcAft>
-              <a:buNone/>
-              <a:defRPr sz="1750" b="0">
-                <a:solidFill>
-                  <a:srgbClr val="303437"/>
-                </a:solidFill>
-                <a:latin typeface="Noto Sans"/>
-              </a:defRPr>
-            </a:pPr>
-            <a:r>
-              <a:rPr sz="1750" b="0" lang="ja-JP" altLang="en-US">
-                <a:solidFill>
-                  <a:srgbClr val="303437"/>
-                </a:solidFill>
-                <a:latin typeface="Noto Sans"/>
-                <a:ea typeface="Noto Sans CJK JP"/>
-                <a:cs typeface="Noto Sans"/>
-              </a:rPr>
-              <a:t>古典詩と現代語訳から四択問題を構成し、似た詩句を負例として検索する。BERT二方式の評価を報告する。</a:t>
-            </a:r>
-          </a:p>
-          <a:p>
-            <a:pPr algn="l">
-              <a:lnSpc>
-                <a:spcPct val="114000"/>
-              </a:lnSpc>
-              <a:spcBef>
-                <a:spcPts val="0"/>
-              </a:spcBef>
-              <a:spcAft>
-                <a:spcPts val="0"/>
-              </a:spcAft>
-              <a:buNone/>
-              <a:defRPr sz="1050" b="0">
-                <a:solidFill>
-                  <a:srgbClr val="303437"/>
-                </a:solidFill>
-                <a:latin typeface="Noto Sans"/>
-              </a:defRPr>
-            </a:pPr>
-            <a:r>
-              <a:rPr sz="1050" b="0" lang="ja-JP" altLang="en-US">
-                <a:solidFill>
-                  <a:srgbClr val="626669"/>
-                </a:solidFill>
-                <a:latin typeface="Noto Sans"/>
-                <a:ea typeface="Noto Sans CJK JP"/>
-                <a:cs typeface="Noto Sans"/>
-                <a:hlinkClick r:id="rId2"/>
-              </a:rPr>
-              <a:t>https://arxiv.org/abs/2106.01979</a:t>
-            </a:r>
-          </a:p>
-        </p:txBody>
-      </p:sp>
-      <p:sp>
-        <p:nvSpPr>
-          <p:cNvPr id="5" name="文献 2: CCPM — Official Dataset Repository"/>
-          <p:cNvSpPr txBox="1"/>
-          <p:nvPr/>
-        </p:nvSpPr>
-        <p:spPr>
-          <a:xfrm>
-            <a:off x="548640" y="3040507"/>
-            <a:ext cx="8046720" cy="1574419"/>
-          </a:xfrm>
-          <a:prstGeom prst="rect">
-            <a:avLst/>
-          </a:prstGeom>
-          <a:noFill/>
-        </p:spPr>
-        <p:txBody>
-          <a:bodyPr wrap="square" lIns="0" rIns="0" tIns="0" bIns="0">
-            <a:noAutofit/>
-          </a:bodyPr>
-          <a:lstStyle/>
-          <a:p>
-            <a:pPr algn="l">
-              <a:lnSpc>
-                <a:spcPct val="114000"/>
-              </a:lnSpc>
-              <a:spcBef>
-                <a:spcPts val="0"/>
-              </a:spcBef>
-              <a:spcAft>
-                <a:spcPts val="400"/>
-              </a:spcAft>
-              <a:buNone/>
-              <a:defRPr sz="1850" b="0">
-                <a:solidFill>
-                  <a:srgbClr val="303437"/>
-                </a:solidFill>
-                <a:latin typeface="Noto Sans"/>
-              </a:defRPr>
-            </a:pPr>
-            <a:r>
-              <a:rPr sz="1850" b="1" lang="ja-JP" altLang="en-US">
-                <a:solidFill>
-                  <a:srgbClr val="303437"/>
-                </a:solidFill>
-                <a:latin typeface="Noto Sans"/>
-                <a:ea typeface="Noto Sans CJK JP"/>
-                <a:cs typeface="Noto Sans"/>
-              </a:rPr>
-              <a:t>CCPM — Official Dataset Repository</a:t>
-            </a:r>
-          </a:p>
-          <a:p>
-            <a:pPr algn="l">
-              <a:lnSpc>
-                <a:spcPct val="114000"/>
-              </a:lnSpc>
-              <a:spcBef>
-                <a:spcPts val="0"/>
-              </a:spcBef>
-              <a:spcAft>
-                <a:spcPts val="500"/>
-              </a:spcAft>
-              <a:buNone/>
-              <a:defRPr sz="1250" b="0">
-                <a:solidFill>
-                  <a:srgbClr val="303437"/>
-                </a:solidFill>
-                <a:latin typeface="Noto Sans"/>
-              </a:defRPr>
-            </a:pPr>
-            <a:r>
-              <a:rPr sz="1250" b="0" lang="ja-JP" altLang="en-US">
-                <a:solidFill>
-                  <a:srgbClr val="626669"/>
-                </a:solidFill>
-                <a:latin typeface="Noto Sans"/>
-                <a:ea typeface="Noto Sans CJK JP"/>
-                <a:cs typeface="Noto Sans"/>
-              </a:rPr>
-              <a:t>THUNLP-AIPoet · 2021</a:t>
-            </a:r>
-          </a:p>
-          <a:p>
-            <a:pPr algn="l">
-              <a:lnSpc>
-                <a:spcPct val="114000"/>
-              </a:lnSpc>
-              <a:spcBef>
-                <a:spcPts val="0"/>
-              </a:spcBef>
-              <a:spcAft>
-                <a:spcPts val="400"/>
-              </a:spcAft>
-              <a:buNone/>
-              <a:defRPr sz="1750" b="0">
-                <a:solidFill>
-                  <a:srgbClr val="303437"/>
-                </a:solidFill>
-                <a:latin typeface="Noto Sans"/>
-              </a:defRPr>
-            </a:pPr>
-            <a:r>
-              <a:rPr sz="1750" b="0" lang="ja-JP" altLang="en-US">
-                <a:solidFill>
-                  <a:srgbClr val="303437"/>
-                </a:solidFill>
-                <a:latin typeface="Noto Sans"/>
-                <a:ea typeface="Noto Sans CJK JP"/>
-                <a:cs typeface="Noto Sans"/>
-              </a:rPr>
-              <a:t>学習・検証・正解非公開テストのJSONLと技術報告、データ形式、正解率による評価方法を公開する。</a:t>
-            </a:r>
-          </a:p>
-          <a:p>
-            <a:pPr algn="l">
-              <a:lnSpc>
-                <a:spcPct val="114000"/>
-              </a:lnSpc>
-              <a:spcBef>
-                <a:spcPts val="0"/>
-              </a:spcBef>
-              <a:spcAft>
-                <a:spcPts val="0"/>
-              </a:spcAft>
-              <a:buNone/>
-              <a:defRPr sz="1050" b="0">
-                <a:solidFill>
-                  <a:srgbClr val="303437"/>
-                </a:solidFill>
-                <a:latin typeface="Noto Sans"/>
-              </a:defRPr>
-            </a:pPr>
-            <a:r>
-              <a:rPr sz="1050" b="0" lang="ja-JP" altLang="en-US">
-                <a:solidFill>
-                  <a:srgbClr val="626669"/>
-                </a:solidFill>
-                <a:latin typeface="Noto Sans"/>
-                <a:ea typeface="Noto Sans CJK JP"/>
-                <a:cs typeface="Noto Sans"/>
-                <a:hlinkClick r:id="rId3"/>
-              </a:rPr>
-              <a:t>https://github.com/THUNLP-AIPoet/CCPM</a:t>
-            </a:r>
-          </a:p>
-        </p:txBody>
-      </p:sp>
-    </p:spTree>
-  </p:cSld>
-  <p:clrMapOvr>
-    <a:masterClrMapping/>
-  </p:clrMapOvr>
-</p:sld>
-</file>
-
-<file path=ppt/slides/slide52.xml><?xml version="1.0" encoding="utf-8"?>
-<p:sld xmlns:a="http://schemas.openxmlformats.org/drawingml/2006/main" xmlns:p="http://schemas.openxmlformats.org/presentationml/2006/main" xmlns:r="http://schemas.openxmlformats.org/officeDocument/2006/relationships">
-  <p:cSld>
-    <p:spTree>
-      <p:nvGrpSpPr>
-        <p:cNvPr id="1" name=""/>
-        <p:cNvGrpSpPr/>
-        <p:nvPr/>
-      </p:nvGrpSpPr>
-      <p:grpSpPr/>
-      <p:sp>
-        <p:nvSpPr>
-          <p:cNvPr id="2" name="Title 1"/>
-          <p:cNvSpPr>
-            <a:spLocks noGrp="1"/>
-          </p:cNvSpPr>
-          <p:nvPr>
-            <p:ph type="title"/>
-          </p:nvPr>
-        </p:nvSpPr>
-        <p:spPr>
-          <a:xfrm>
-            <a:off x="468172" y="650138"/>
-            <a:ext cx="8206740" cy="616305"/>
-          </a:xfrm>
-        </p:spPr>
-        <p:txBody>
-          <a:bodyPr wrap="square" lIns="0" rIns="0" tIns="0" bIns="0">
-            <a:noAutofit/>
-          </a:bodyPr>
-          <a:lstStyle/>
-          <a:p>
-            <a:pPr algn="l">
-              <a:lnSpc>
-                <a:spcPct val="110000"/>
-              </a:lnSpc>
-              <a:buNone/>
-              <a:defRPr sz="2800" b="0">
-                <a:solidFill>
-                  <a:srgbClr val="303437"/>
-                </a:solidFill>
-                <a:latin typeface="Noto Sans"/>
-              </a:defRPr>
-            </a:pPr>
-            <a:r>
-              <a:rPr sz="2800" b="1" lang="ja-JP" altLang="en-US">
-                <a:solidFill>
-                  <a:srgbClr val="303437"/>
-                </a:solidFill>
-                <a:latin typeface="Noto Sans"/>
-                <a:ea typeface="Noto Sans CJK JP"/>
-                <a:cs typeface="Noto Sans"/>
-              </a:rPr>
-              <a:t>参考文献</a:t>
-            </a:r>
-          </a:p>
-        </p:txBody>
-      </p:sp>
-      <p:sp>
-        <p:nvSpPr>
-          <p:cNvPr id="3" name="Title 2"/>
-          <p:cNvSpPr>
-            <a:spLocks noGrp="1"/>
-          </p:cNvSpPr>
-          <p:nvPr>
-            <p:ph type="title" idx="2"/>
-          </p:nvPr>
-        </p:nvSpPr>
-        <p:spPr>
-          <a:xfrm>
-            <a:off x="75895" y="0"/>
-            <a:ext cx="8115300" cy="480060"/>
-          </a:xfrm>
-        </p:spPr>
-        <p:txBody>
-          <a:bodyPr wrap="square" lIns="0" rIns="0" tIns="0" bIns="0" anchor="ctr">
-            <a:noAutofit/>
-          </a:bodyPr>
-          <a:lstStyle/>
-          <a:p>
-            <a:pPr algn="l">
-              <a:lnSpc>
-                <a:spcPct val="110000"/>
-              </a:lnSpc>
-              <a:buNone/>
-              <a:defRPr sz="1400" b="0">
-                <a:solidFill>
-                  <a:srgbClr val="303437"/>
-                </a:solidFill>
-                <a:latin typeface="Noto Sans"/>
-              </a:defRPr>
-            </a:pPr>
-            <a:r>
-              <a:rPr sz="1400" b="1" lang="ja-JP" altLang="en-US">
-                <a:solidFill>
-                  <a:srgbClr val="FFFEF8"/>
-                </a:solidFill>
-                <a:latin typeface="Noto Sans"/>
-                <a:ea typeface="Noto Sans CJK JP"/>
-                <a:cs typeface="Noto Sans"/>
-              </a:rPr>
-              <a:t>Appendix: 3. 参考文献</a:t>
-            </a:r>
-          </a:p>
-        </p:txBody>
-      </p:sp>
-      <p:sp>
-        <p:nvSpPr>
-          <p:cNvPr id="4" name="文献 1: CLEVA: Chinese Language Models EVAluation Platform"/>
-          <p:cNvSpPr txBox="1"/>
-          <p:nvPr/>
-        </p:nvSpPr>
-        <p:spPr>
-          <a:xfrm>
-            <a:off x="548640" y="1463040"/>
-            <a:ext cx="8046720" cy="1574419"/>
-          </a:xfrm>
-          <a:prstGeom prst="rect">
-            <a:avLst/>
-          </a:prstGeom>
-          <a:noFill/>
-        </p:spPr>
-        <p:txBody>
-          <a:bodyPr wrap="square" lIns="0" rIns="0" tIns="0" bIns="0">
-            <a:noAutofit/>
-          </a:bodyPr>
-          <a:lstStyle/>
-          <a:p>
-            <a:pPr algn="l">
-              <a:lnSpc>
-                <a:spcPct val="114000"/>
-              </a:lnSpc>
-              <a:spcBef>
-                <a:spcPts val="0"/>
-              </a:spcBef>
-              <a:spcAft>
-                <a:spcPts val="400"/>
-              </a:spcAft>
-              <a:buNone/>
-              <a:defRPr sz="1850" b="0">
-                <a:solidFill>
-                  <a:srgbClr val="303437"/>
-                </a:solidFill>
-                <a:latin typeface="Noto Sans"/>
-              </a:defRPr>
-            </a:pPr>
-            <a:r>
-              <a:rPr sz="1850" b="1" lang="ja-JP" altLang="en-US">
-                <a:solidFill>
-                  <a:srgbClr val="303437"/>
-                </a:solidFill>
-                <a:latin typeface="Noto Sans"/>
-                <a:ea typeface="Noto Sans CJK JP"/>
-                <a:cs typeface="Noto Sans"/>
-              </a:rPr>
-              <a:t>CLEVA: Chinese Language Models EVAluation Platform</a:t>
-            </a:r>
-          </a:p>
-          <a:p>
-            <a:pPr algn="l">
-              <a:lnSpc>
-                <a:spcPct val="114000"/>
-              </a:lnSpc>
-              <a:spcBef>
-                <a:spcPts val="0"/>
-              </a:spcBef>
-              <a:spcAft>
-                <a:spcPts val="500"/>
-              </a:spcAft>
-              <a:buNone/>
-              <a:defRPr sz="1250" b="0">
-                <a:solidFill>
-                  <a:srgbClr val="303437"/>
-                </a:solidFill>
-                <a:latin typeface="Noto Sans"/>
-              </a:defRPr>
-            </a:pPr>
-            <a:r>
-              <a:rPr sz="1250" b="0" lang="ja-JP" altLang="en-US">
-                <a:solidFill>
-                  <a:srgbClr val="626669"/>
-                </a:solidFill>
-                <a:latin typeface="Noto Sans"/>
-                <a:ea typeface="Noto Sans CJK JP"/>
-                <a:cs typeface="Noto Sans"/>
-              </a:rPr>
-              <a:t>Yanyang Li et al. · 2023 · EMNLP: System Demonstrations</a:t>
-            </a:r>
-          </a:p>
-          <a:p>
-            <a:pPr algn="l">
-              <a:lnSpc>
-                <a:spcPct val="114000"/>
-              </a:lnSpc>
-              <a:spcBef>
-                <a:spcPts val="0"/>
-              </a:spcBef>
-              <a:spcAft>
-                <a:spcPts val="400"/>
-              </a:spcAft>
-              <a:buNone/>
-              <a:defRPr sz="1750" b="0">
-                <a:solidFill>
-                  <a:srgbClr val="303437"/>
-                </a:solidFill>
-                <a:latin typeface="Noto Sans"/>
-              </a:defRPr>
-            </a:pPr>
-            <a:r>
-              <a:rPr sz="1750" b="0" lang="ja-JP" altLang="en-US">
-                <a:solidFill>
-                  <a:srgbClr val="303437"/>
-                </a:solidFill>
-                <a:latin typeface="Noto Sans"/>
-                <a:ea typeface="Noto Sans CJK JP"/>
-                <a:cs typeface="Noto Sans"/>
-              </a:rPr>
-              <a:t>中国語モデルの多様な能力を評価するプラットフォーム。CCPMを古典中国語理解の課題へ採用する。</a:t>
-            </a:r>
-          </a:p>
-          <a:p>
-            <a:pPr algn="l">
-              <a:lnSpc>
-                <a:spcPct val="114000"/>
-              </a:lnSpc>
-              <a:spcBef>
-                <a:spcPts val="0"/>
-              </a:spcBef>
-              <a:spcAft>
-                <a:spcPts val="0"/>
-              </a:spcAft>
-              <a:buNone/>
-              <a:defRPr sz="1050" b="0">
-                <a:solidFill>
-                  <a:srgbClr val="303437"/>
-                </a:solidFill>
-                <a:latin typeface="Noto Sans"/>
-              </a:defRPr>
-            </a:pPr>
-            <a:r>
-              <a:rPr sz="1050" b="0" lang="ja-JP" altLang="en-US">
-                <a:solidFill>
-                  <a:srgbClr val="626669"/>
-                </a:solidFill>
-                <a:latin typeface="Noto Sans"/>
-                <a:ea typeface="Noto Sans CJK JP"/>
-                <a:cs typeface="Noto Sans"/>
-                <a:hlinkClick r:id="rId2"/>
-              </a:rPr>
-              <a:t>https://aclanthology.org/2023.emnlp-demo.17/</a:t>
-            </a:r>
-          </a:p>
-        </p:txBody>
-      </p:sp>
-      <p:sp>
-        <p:nvSpPr>
-          <p:cNvPr id="5" name="文献 2: CLEVAClassicalChineseUnderstandingScenario / Converter"/>
-          <p:cNvSpPr txBox="1"/>
-          <p:nvPr/>
-        </p:nvSpPr>
-        <p:spPr>
-          <a:xfrm>
-            <a:off x="548640" y="3040507"/>
-            <a:ext cx="8046720" cy="1574419"/>
-          </a:xfrm>
-          <a:prstGeom prst="rect">
-            <a:avLst/>
-          </a:prstGeom>
-          <a:noFill/>
-        </p:spPr>
-        <p:txBody>
-          <a:bodyPr wrap="square" lIns="0" rIns="0" tIns="0" bIns="0">
-            <a:noAutofit/>
-          </a:bodyPr>
-          <a:lstStyle/>
-          <a:p>
-            <a:pPr algn="l">
-              <a:lnSpc>
-                <a:spcPct val="114000"/>
-              </a:lnSpc>
-              <a:spcBef>
-                <a:spcPts val="0"/>
-              </a:spcBef>
-              <a:spcAft>
-                <a:spcPts val="400"/>
-              </a:spcAft>
-              <a:buNone/>
-              <a:defRPr sz="1850" b="0">
-                <a:solidFill>
-                  <a:srgbClr val="303437"/>
-                </a:solidFill>
-                <a:latin typeface="Noto Sans"/>
-              </a:defRPr>
-            </a:pPr>
-            <a:r>
-              <a:rPr sz="1850" b="1" lang="ja-JP" altLang="en-US">
-                <a:solidFill>
-                  <a:srgbClr val="303437"/>
-                </a:solidFill>
-                <a:latin typeface="Noto Sans"/>
-                <a:ea typeface="Noto Sans CJK JP"/>
-                <a:cs typeface="Noto Sans"/>
-              </a:rPr>
-              <a:t>CLEVAClassicalChineseUnderstandingScenario / Converter</a:t>
-            </a:r>
-          </a:p>
-          <a:p>
-            <a:pPr algn="l">
-              <a:lnSpc>
-                <a:spcPct val="114000"/>
-              </a:lnSpc>
-              <a:spcBef>
-                <a:spcPts val="0"/>
-              </a:spcBef>
-              <a:spcAft>
-                <a:spcPts val="500"/>
-              </a:spcAft>
-              <a:buNone/>
-              <a:defRPr sz="1250" b="0">
-                <a:solidFill>
-                  <a:srgbClr val="303437"/>
-                </a:solidFill>
-                <a:latin typeface="Noto Sans"/>
-              </a:defRPr>
-            </a:pPr>
-            <a:r>
-              <a:rPr sz="1250" b="0" lang="ja-JP" altLang="en-US">
-                <a:solidFill>
-                  <a:srgbClr val="626669"/>
-                </a:solidFill>
-                <a:latin typeface="Noto Sans"/>
-                <a:ea typeface="Noto Sans CJK JP"/>
-                <a:cs typeface="Noto Sans"/>
-              </a:rPr>
-              <a:t>Stanford CRFM · HELM v0.4.0 · Python実装</a:t>
-            </a:r>
-          </a:p>
-          <a:p>
-            <a:pPr algn="l">
-              <a:lnSpc>
-                <a:spcPct val="114000"/>
-              </a:lnSpc>
-              <a:spcBef>
-                <a:spcPts val="0"/>
-              </a:spcBef>
-              <a:spcAft>
-                <a:spcPts val="400"/>
-              </a:spcAft>
-              <a:buNone/>
-              <a:defRPr sz="1750" b="0">
-                <a:solidFill>
-                  <a:srgbClr val="303437"/>
-                </a:solidFill>
-                <a:latin typeface="Noto Sans"/>
-              </a:defRPr>
-            </a:pPr>
-            <a:r>
-              <a:rPr sz="1750" b="0" lang="ja-JP" altLang="en-US">
-                <a:solidFill>
-                  <a:srgbClr val="303437"/>
-                </a:solidFill>
-                <a:latin typeface="Noto Sans"/>
-                <a:ea typeface="Noto Sans CJK JP"/>
-                <a:cs typeface="Noto Sans"/>
-              </a:rPr>
-              <a:t>外部配布データとテンプレートを読み込み、現代語説明・候補・ラベルをHELMの入力と参照へ変換する。</a:t>
-            </a:r>
-          </a:p>
-          <a:p>
-            <a:pPr algn="l">
-              <a:lnSpc>
-                <a:spcPct val="114000"/>
-              </a:lnSpc>
-              <a:spcBef>
-                <a:spcPts val="0"/>
-              </a:spcBef>
-              <a:spcAft>
-                <a:spcPts val="0"/>
-              </a:spcAft>
-              <a:buNone/>
-              <a:defRPr sz="1050" b="0">
-                <a:solidFill>
-                  <a:srgbClr val="303437"/>
-                </a:solidFill>
-                <a:latin typeface="Noto Sans"/>
-              </a:defRPr>
-            </a:pPr>
-            <a:r>
-              <a:rPr sz="1050" b="0" lang="ja-JP" altLang="en-US">
-                <a:solidFill>
-                  <a:srgbClr val="626669"/>
-                </a:solidFill>
-                <a:latin typeface="Noto Sans"/>
-                <a:ea typeface="Noto Sans CJK JP"/>
-                <a:cs typeface="Noto Sans"/>
-                <a:hlinkClick r:id="rId3"/>
-              </a:rPr>
-              <a:t>https://github.com/stanford-crfm/helm/blob/v0.4.0/src/helm/benchmark/scenarios/cleva_scenario.py</a:t>
-            </a:r>
-          </a:p>
-        </p:txBody>
-      </p:sp>
-    </p:spTree>
-  </p:cSld>
-  <p:clrMapOvr>
-    <a:masterClrMapping/>
-  </p:clrMapOvr>
-</p:sld>
-</file>
-
-<file path=ppt/slides/slide53.xml><?xml version="1.0" encoding="utf-8"?>
-<p:sld xmlns:a="http://schemas.openxmlformats.org/drawingml/2006/main" xmlns:p="http://schemas.openxmlformats.org/presentationml/2006/main" xmlns:r="http://schemas.openxmlformats.org/officeDocument/2006/relationships">
-  <p:cSld>
-    <p:spTree>
-      <p:nvGrpSpPr>
-        <p:cNvPr id="1" name=""/>
-        <p:cNvGrpSpPr/>
-        <p:nvPr/>
-      </p:nvGrpSpPr>
-      <p:grpSpPr/>
-      <p:sp>
-        <p:nvSpPr>
-          <p:cNvPr id="2" name="Title 1"/>
-          <p:cNvSpPr>
-            <a:spLocks noGrp="1"/>
-          </p:cNvSpPr>
-          <p:nvPr>
-            <p:ph type="title"/>
-          </p:nvPr>
-        </p:nvSpPr>
-        <p:spPr>
-          <a:xfrm>
-            <a:off x="468172" y="650138"/>
-            <a:ext cx="8206740" cy="616305"/>
-          </a:xfrm>
-        </p:spPr>
-        <p:txBody>
-          <a:bodyPr wrap="square" lIns="0" rIns="0" tIns="0" bIns="0">
-            <a:noAutofit/>
-          </a:bodyPr>
-          <a:lstStyle/>
-          <a:p>
-            <a:pPr algn="l">
-              <a:lnSpc>
-                <a:spcPct val="110000"/>
-              </a:lnSpc>
-              <a:buNone/>
-              <a:defRPr sz="2800" b="0">
-                <a:solidFill>
-                  <a:srgbClr val="303437"/>
-                </a:solidFill>
-                <a:latin typeface="Noto Sans"/>
-              </a:defRPr>
-            </a:pPr>
-            <a:r>
-              <a:rPr sz="2800" b="1" lang="ja-JP" altLang="en-US">
-                <a:solidFill>
-                  <a:srgbClr val="303437"/>
-                </a:solidFill>
-                <a:latin typeface="Noto Sans"/>
-                <a:ea typeface="Noto Sans CJK JP"/>
-                <a:cs typeface="Noto Sans"/>
-              </a:rPr>
-              <a:t>参考文献</a:t>
-            </a:r>
-          </a:p>
-        </p:txBody>
-      </p:sp>
-      <p:sp>
-        <p:nvSpPr>
-          <p:cNvPr id="3" name="Title 2"/>
-          <p:cNvSpPr>
-            <a:spLocks noGrp="1"/>
-          </p:cNvSpPr>
-          <p:nvPr>
-            <p:ph type="title" idx="2"/>
-          </p:nvPr>
-        </p:nvSpPr>
-        <p:spPr>
-          <a:xfrm>
-            <a:off x="75895" y="0"/>
-            <a:ext cx="8115300" cy="480060"/>
-          </a:xfrm>
-        </p:spPr>
-        <p:txBody>
-          <a:bodyPr wrap="square" lIns="0" rIns="0" tIns="0" bIns="0" anchor="ctr">
-            <a:noAutofit/>
-          </a:bodyPr>
-          <a:lstStyle/>
-          <a:p>
-            <a:pPr algn="l">
-              <a:lnSpc>
-                <a:spcPct val="110000"/>
-              </a:lnSpc>
-              <a:buNone/>
-              <a:defRPr sz="1400" b="0">
-                <a:solidFill>
-                  <a:srgbClr val="303437"/>
-                </a:solidFill>
-                <a:latin typeface="Noto Sans"/>
-              </a:defRPr>
-            </a:pPr>
-            <a:r>
-              <a:rPr sz="1400" b="1" lang="ja-JP" altLang="en-US">
-                <a:solidFill>
-                  <a:srgbClr val="FFFEF8"/>
-                </a:solidFill>
-                <a:latin typeface="Noto Sans"/>
-                <a:ea typeface="Noto Sans CJK JP"/>
-                <a:cs typeface="Noto Sans"/>
-              </a:rPr>
-              <a:t>Appendix: 3. 参考文献</a:t>
-            </a:r>
-          </a:p>
-        </p:txBody>
-      </p:sp>
-      <p:sp>
-        <p:nvSpPr>
-          <p:cNvPr id="4" name="文献 1: BERT: Pre-training of Deep Bidirectional Transformers for Language Understanding"/>
-          <p:cNvSpPr txBox="1"/>
-          <p:nvPr/>
-        </p:nvSpPr>
-        <p:spPr>
-          <a:xfrm>
-            <a:off x="548640" y="1463040"/>
-            <a:ext cx="8046720" cy="1613662"/>
-          </a:xfrm>
-          <a:prstGeom prst="rect">
-            <a:avLst/>
-          </a:prstGeom>
-          <a:noFill/>
-        </p:spPr>
-        <p:txBody>
-          <a:bodyPr wrap="square" lIns="0" rIns="0" tIns="0" bIns="0">
-            <a:noAutofit/>
-          </a:bodyPr>
-          <a:lstStyle/>
-          <a:p>
-            <a:pPr algn="l">
-              <a:lnSpc>
-                <a:spcPct val="114000"/>
-              </a:lnSpc>
-              <a:spcBef>
-                <a:spcPts val="0"/>
-              </a:spcBef>
-              <a:spcAft>
-                <a:spcPts val="400"/>
-              </a:spcAft>
-              <a:buNone/>
-              <a:defRPr sz="1850" b="0">
-                <a:solidFill>
-                  <a:srgbClr val="303437"/>
-                </a:solidFill>
-                <a:latin typeface="Noto Sans"/>
-              </a:defRPr>
-            </a:pPr>
-            <a:r>
-              <a:rPr sz="1850" b="1" lang="ja-JP" altLang="en-US">
-                <a:solidFill>
-                  <a:srgbClr val="303437"/>
-                </a:solidFill>
-                <a:latin typeface="Noto Sans"/>
-                <a:ea typeface="Noto Sans CJK JP"/>
-                <a:cs typeface="Noto Sans"/>
-              </a:rPr>
-              <a:t>BERT: Pre-training of Deep Bidirectional Transformers for Language Understanding</a:t>
-            </a:r>
-          </a:p>
-          <a:p>
-            <a:pPr algn="l">
-              <a:lnSpc>
-                <a:spcPct val="114000"/>
-              </a:lnSpc>
-              <a:spcBef>
-                <a:spcPts val="0"/>
-              </a:spcBef>
-              <a:spcAft>
-                <a:spcPts val="500"/>
-              </a:spcAft>
-              <a:buNone/>
-              <a:defRPr sz="1250" b="0">
-                <a:solidFill>
-                  <a:srgbClr val="303437"/>
-                </a:solidFill>
-                <a:latin typeface="Noto Sans"/>
-              </a:defRPr>
-            </a:pPr>
-            <a:r>
-              <a:rPr sz="1250" b="0" lang="ja-JP" altLang="en-US">
-                <a:solidFill>
-                  <a:srgbClr val="626669"/>
-                </a:solidFill>
-                <a:latin typeface="Noto Sans"/>
-                <a:ea typeface="Noto Sans CJK JP"/>
-                <a:cs typeface="Noto Sans"/>
-              </a:rPr>
-              <a:t>Jacob Devlin, Ming-Wei Chang, Kenton Lee, Kristina Toutanova · 2019 · NAACL-HLT</a:t>
-            </a:r>
-          </a:p>
-          <a:p>
-            <a:pPr algn="l">
-              <a:lnSpc>
-                <a:spcPct val="114000"/>
-              </a:lnSpc>
-              <a:spcBef>
-                <a:spcPts val="0"/>
-              </a:spcBef>
-              <a:spcAft>
-                <a:spcPts val="400"/>
-              </a:spcAft>
-              <a:buNone/>
-              <a:defRPr sz="1750" b="0">
-                <a:solidFill>
-                  <a:srgbClr val="303437"/>
-                </a:solidFill>
-                <a:latin typeface="Noto Sans"/>
-              </a:defRPr>
-            </a:pPr>
-            <a:r>
-              <a:rPr sz="1750" b="0" lang="ja-JP" altLang="en-US">
-                <a:solidFill>
-                  <a:srgbClr val="303437"/>
-                </a:solidFill>
-                <a:latin typeface="Noto Sans"/>
-                <a:ea typeface="Noto Sans CJK JP"/>
-                <a:cs typeface="Noto Sans"/>
-              </a:rPr>
-              <a:t>双方向Transformerの事前学習と、文分類などへの微調整を提案する。</a:t>
-            </a:r>
-          </a:p>
-          <a:p>
-            <a:pPr algn="l">
-              <a:lnSpc>
-                <a:spcPct val="114000"/>
-              </a:lnSpc>
-              <a:spcBef>
-                <a:spcPts val="0"/>
-              </a:spcBef>
-              <a:spcAft>
-                <a:spcPts val="0"/>
-              </a:spcAft>
-              <a:buNone/>
-              <a:defRPr sz="1050" b="0">
-                <a:solidFill>
-                  <a:srgbClr val="303437"/>
-                </a:solidFill>
-                <a:latin typeface="Noto Sans"/>
-              </a:defRPr>
-            </a:pPr>
-            <a:r>
-              <a:rPr sz="1050" b="0" lang="ja-JP" altLang="en-US">
-                <a:solidFill>
-                  <a:srgbClr val="626669"/>
-                </a:solidFill>
-                <a:latin typeface="Noto Sans"/>
-                <a:ea typeface="Noto Sans CJK JP"/>
-                <a:cs typeface="Noto Sans"/>
-                <a:hlinkClick r:id="rId2"/>
-              </a:rPr>
-              <a:t>https://aclanthology.org/N19-1423/</a:t>
-            </a:r>
-          </a:p>
-        </p:txBody>
-      </p:sp>
-      <p:sp>
-        <p:nvSpPr>
-          <p:cNvPr id="5" name="文献 2: BERT-CCPoem"/>
-          <p:cNvSpPr txBox="1"/>
-          <p:nvPr/>
-        </p:nvSpPr>
-        <p:spPr>
-          <a:xfrm>
-            <a:off x="548640" y="3308350"/>
-            <a:ext cx="8046720" cy="1574419"/>
-          </a:xfrm>
-          <a:prstGeom prst="rect">
-            <a:avLst/>
-          </a:prstGeom>
-          <a:noFill/>
-        </p:spPr>
-        <p:txBody>
-          <a:bodyPr wrap="square" lIns="0" rIns="0" tIns="0" bIns="0">
-            <a:noAutofit/>
-          </a:bodyPr>
-          <a:lstStyle/>
-          <a:p>
-            <a:pPr algn="l">
-              <a:lnSpc>
-                <a:spcPct val="114000"/>
-              </a:lnSpc>
-              <a:spcBef>
-                <a:spcPts val="0"/>
-              </a:spcBef>
-              <a:spcAft>
-                <a:spcPts val="400"/>
-              </a:spcAft>
-              <a:buNone/>
-              <a:defRPr sz="1850" b="0">
-                <a:solidFill>
-                  <a:srgbClr val="303437"/>
-                </a:solidFill>
-                <a:latin typeface="Noto Sans"/>
-              </a:defRPr>
-            </a:pPr>
-            <a:r>
-              <a:rPr sz="1850" b="1" lang="ja-JP" altLang="en-US">
-                <a:solidFill>
-                  <a:srgbClr val="303437"/>
-                </a:solidFill>
-                <a:latin typeface="Noto Sans"/>
-                <a:ea typeface="Noto Sans CJK JP"/>
-                <a:cs typeface="Noto Sans"/>
-              </a:rPr>
-              <a:t>BERT-CCPoem</a:t>
-            </a:r>
-          </a:p>
-          <a:p>
-            <a:pPr algn="l">
-              <a:lnSpc>
-                <a:spcPct val="114000"/>
-              </a:lnSpc>
-              <a:spcBef>
-                <a:spcPts val="0"/>
-              </a:spcBef>
-              <a:spcAft>
-                <a:spcPts val="500"/>
-              </a:spcAft>
-              <a:buNone/>
-              <a:defRPr sz="1250" b="0">
-                <a:solidFill>
-                  <a:srgbClr val="303437"/>
-                </a:solidFill>
-                <a:latin typeface="Noto Sans"/>
-              </a:defRPr>
-            </a:pPr>
-            <a:r>
-              <a:rPr sz="1250" b="0" lang="ja-JP" altLang="en-US">
-                <a:solidFill>
-                  <a:srgbClr val="626669"/>
-                </a:solidFill>
-                <a:latin typeface="Noto Sans"/>
-                <a:ea typeface="Noto Sans CJK JP"/>
-                <a:cs typeface="Noto Sans"/>
-              </a:rPr>
-              <a:t>Zhipeng Guo, Jinyi Hu, Maosong Sun · 2020 · 公式実装</a:t>
-            </a:r>
-          </a:p>
-          <a:p>
-            <a:pPr algn="l">
-              <a:lnSpc>
-                <a:spcPct val="114000"/>
-              </a:lnSpc>
-              <a:spcBef>
-                <a:spcPts val="0"/>
-              </a:spcBef>
-              <a:spcAft>
-                <a:spcPts val="400"/>
-              </a:spcAft>
-              <a:buNone/>
-              <a:defRPr sz="1750" b="0">
-                <a:solidFill>
-                  <a:srgbClr val="303437"/>
-                </a:solidFill>
-                <a:latin typeface="Noto Sans"/>
-              </a:defRPr>
-            </a:pPr>
-            <a:r>
-              <a:rPr sz="1750" b="0" lang="ja-JP" altLang="en-US">
-                <a:solidFill>
-                  <a:srgbClr val="303437"/>
-                </a:solidFill>
-                <a:latin typeface="Noto Sans"/>
-                <a:ea typeface="Noto Sans CJK JP"/>
-                <a:cs typeface="Noto Sans"/>
-              </a:rPr>
-              <a:t>古典詩コーパスで学習したモデルと表現を公開し、CCPMでは似た詩句の検索に利用される。</a:t>
-            </a:r>
-          </a:p>
-          <a:p>
-            <a:pPr algn="l">
-              <a:lnSpc>
-                <a:spcPct val="114000"/>
-              </a:lnSpc>
-              <a:spcBef>
-                <a:spcPts val="0"/>
-              </a:spcBef>
-              <a:spcAft>
-                <a:spcPts val="0"/>
-              </a:spcAft>
-              <a:buNone/>
-              <a:defRPr sz="1050" b="0">
-                <a:solidFill>
-                  <a:srgbClr val="303437"/>
-                </a:solidFill>
-                <a:latin typeface="Noto Sans"/>
-              </a:defRPr>
-            </a:pPr>
-            <a:r>
-              <a:rPr sz="1050" b="0" lang="ja-JP" altLang="en-US">
-                <a:solidFill>
-                  <a:srgbClr val="626669"/>
-                </a:solidFill>
-                <a:latin typeface="Noto Sans"/>
-                <a:ea typeface="Noto Sans CJK JP"/>
-                <a:cs typeface="Noto Sans"/>
-                <a:hlinkClick r:id="rId3"/>
-              </a:rPr>
-              <a:t>https://github.com/THUNLP-AIPoet/BERT-CCPoem</a:t>
             </a:r>
           </a:p>
         </p:txBody>
